--- a/DataQuality_OpenBeautyFacts.pptx
+++ b/DataQuality_OpenBeautyFacts.pptx
@@ -16,7 +16,6 @@
     <p:sldId id="261" r:id="rId9"/>
     <p:sldId id="262" r:id="rId10"/>
     <p:sldId id="263" r:id="rId11"/>
-    <p:sldId id="264" r:id="rId12"/>
   </p:sldIdLst>
   <p:sldSz cx="9144000" cy="5143500"/>
   <p:notesSz cx="5143500" cy="9144000"/>
@@ -68,24 +67,69 @@
             <a:noAutofit/>
           </a:bodyPr>
           <a:p>
-            <a:r>
-              <a:rPr lang="es-CO" sz="1800" b="0" u="none" strike="noStrike">
-                <a:solidFill>
-                  <a:schemeClr val="dk1"/>
-                </a:solidFill>
-                <a:effectLst/>
-                <a:uFillTx/>
-                <a:latin typeface="Calibri"/>
-              </a:rPr>
-              <a:t>Click to move the slide</a:t>
-            </a:r>
-            <a:endParaRPr lang="es-CO" sz="1800" b="0" u="none" strike="noStrike">
-              <a:solidFill>
-                <a:schemeClr val="dk1"/>
-              </a:solidFill>
-              <a:effectLst/>
-              <a:uFillTx/>
-              <a:latin typeface="Calibri"/>
+            <a:pPr algn="ctr"/>
+            <a:r>
+              <a:rPr lang="es-CO" sz="4400" b="0" u="none" strike="noStrike">
+                <a:solidFill>
+                  <a:srgbClr val="000000"/>
+                </a:solidFill>
+                <a:effectLst/>
+                <a:uFillTx/>
+                <a:latin typeface="Arial"/>
+              </a:rPr>
+              <a:t>Click </a:t>
+            </a:r>
+            <a:r>
+              <a:rPr lang="es-CO" sz="4400" b="0" u="none" strike="noStrike">
+                <a:solidFill>
+                  <a:srgbClr val="000000"/>
+                </a:solidFill>
+                <a:effectLst/>
+                <a:uFillTx/>
+                <a:latin typeface="Arial"/>
+              </a:rPr>
+              <a:t>to </a:t>
+            </a:r>
+            <a:r>
+              <a:rPr lang="es-CO" sz="4400" b="0" u="none" strike="noStrike">
+                <a:solidFill>
+                  <a:srgbClr val="000000"/>
+                </a:solidFill>
+                <a:effectLst/>
+                <a:uFillTx/>
+                <a:latin typeface="Arial"/>
+              </a:rPr>
+              <a:t>mov</a:t>
+            </a:r>
+            <a:r>
+              <a:rPr lang="es-CO" sz="4400" b="0" u="none" strike="noStrike">
+                <a:solidFill>
+                  <a:srgbClr val="000000"/>
+                </a:solidFill>
+                <a:effectLst/>
+                <a:uFillTx/>
+                <a:latin typeface="Arial"/>
+              </a:rPr>
+              <a:t>e the </a:t>
+            </a:r>
+            <a:r>
+              <a:rPr lang="es-CO" sz="4400" b="0" u="none" strike="noStrike">
+                <a:solidFill>
+                  <a:srgbClr val="000000"/>
+                </a:solidFill>
+                <a:effectLst/>
+                <a:uFillTx/>
+                <a:latin typeface="Arial"/>
+              </a:rPr>
+              <a:t>slide</a:t>
+            </a:r>
+            <a:endParaRPr lang="es-CO" sz="4400" b="0" u="none" strike="noStrike">
+              <a:solidFill>
+                <a:srgbClr val="000000"/>
+              </a:solidFill>
+              <a:effectLst/>
+              <a:uFillTx/>
+              <a:latin typeface="Arial"/>
             </a:endParaRPr>
           </a:p>
         </p:txBody>
@@ -372,7 +416,7 @@
             <a:pPr indent="0" algn="r">
               <a:buNone/>
             </a:pPr>
-            <a:fld id="{9B2EC1EE-20CE-4422-BCCF-92E5B80024D8}" type="slidenum">
+            <a:fld id="{280C7770-D7B9-4D3E-A073-4157342BC579}" type="slidenum">
               <a:rPr lang="es-CO" sz="1400" b="0" u="none" strike="noStrike">
                 <a:solidFill>
                   <a:srgbClr val="000000"/>
@@ -430,7 +474,7 @@
         <p:spPr>
           <a:xfrm>
             <a:off x="685800" y="1143000"/>
-            <a:ext cx="5486040" cy="3085920"/>
+            <a:ext cx="5485680" cy="3085560"/>
           </a:xfrm>
           <a:prstGeom prst="rect">
             <a:avLst/>
@@ -453,7 +497,7 @@
         <p:spPr>
           <a:xfrm>
             <a:off x="685800" y="4400640"/>
-            <a:ext cx="5486040" cy="3600000"/>
+            <a:ext cx="5485680" cy="3599640"/>
           </a:xfrm>
           <a:prstGeom prst="rect">
             <a:avLst/>
@@ -495,7 +539,7 @@
         <p:spPr>
           <a:xfrm>
             <a:off x="3884760" y="8685360"/>
-            <a:ext cx="2971440" cy="458280"/>
+            <a:ext cx="2971080" cy="457920"/>
           </a:xfrm>
           <a:prstGeom prst="rect">
             <a:avLst/>
@@ -515,6 +559,9 @@
                 <a:spcPct val="100000"/>
               </a:lnSpc>
               <a:buNone/>
+              <a:tabLst>
+                <a:tab algn="l" pos="0"/>
+              </a:tabLst>
               <a:defRPr lang="en-US" sz="1200" b="0" u="none" strike="noStrike">
                 <a:solidFill>
                   <a:schemeClr val="dk1"/>
@@ -532,8 +579,11 @@
                 <a:spcPct val="100000"/>
               </a:lnSpc>
               <a:buNone/>
-            </a:pPr>
-            <a:fld id="{EABB5714-03E2-480E-B9A9-4B9F9DCE9132}" type="slidenum">
+              <a:tabLst>
+                <a:tab algn="l" pos="0"/>
+              </a:tabLst>
+            </a:pPr>
+            <a:fld id="{E261839E-9F76-426D-994A-248B9797199D}" type="slidenum">
               <a:rPr lang="en-US" sz="1200" b="0" u="none" strike="noStrike">
                 <a:solidFill>
                   <a:schemeClr val="dk1"/>
@@ -591,7 +641,7 @@
         <p:spPr>
           <a:xfrm>
             <a:off x="685800" y="1143000"/>
-            <a:ext cx="5486040" cy="3085920"/>
+            <a:ext cx="5485680" cy="3085560"/>
           </a:xfrm>
           <a:prstGeom prst="rect">
             <a:avLst/>
@@ -614,7 +664,7 @@
         <p:spPr>
           <a:xfrm>
             <a:off x="685800" y="4400640"/>
-            <a:ext cx="5486040" cy="3600000"/>
+            <a:ext cx="5485680" cy="3599640"/>
           </a:xfrm>
           <a:prstGeom prst="rect">
             <a:avLst/>
@@ -656,7 +706,7 @@
         <p:spPr>
           <a:xfrm>
             <a:off x="3884760" y="8685360"/>
-            <a:ext cx="2971440" cy="458280"/>
+            <a:ext cx="2971080" cy="457920"/>
           </a:xfrm>
           <a:prstGeom prst="rect">
             <a:avLst/>
@@ -676,6 +726,9 @@
                 <a:spcPct val="100000"/>
               </a:lnSpc>
               <a:buNone/>
+              <a:tabLst>
+                <a:tab algn="l" pos="0"/>
+              </a:tabLst>
               <a:defRPr lang="en-US" sz="1200" b="0" u="none" strike="noStrike">
                 <a:solidFill>
                   <a:schemeClr val="dk1"/>
@@ -693,8 +746,11 @@
                 <a:spcPct val="100000"/>
               </a:lnSpc>
               <a:buNone/>
-            </a:pPr>
-            <a:fld id="{5B02BE72-705A-4459-AFDA-3778C5A9532F}" type="slidenum">
+              <a:tabLst>
+                <a:tab algn="l" pos="0"/>
+              </a:tabLst>
+            </a:pPr>
+            <a:fld id="{4F2F164E-24D7-4191-934A-B916155BD38D}" type="slidenum">
               <a:rPr lang="en-US" sz="1200" b="0" u="none" strike="noStrike">
                 <a:solidFill>
                   <a:schemeClr val="dk1"/>
@@ -752,7 +808,7 @@
         <p:spPr>
           <a:xfrm>
             <a:off x="685800" y="1143000"/>
-            <a:ext cx="5486040" cy="3085920"/>
+            <a:ext cx="5485680" cy="3085560"/>
           </a:xfrm>
           <a:prstGeom prst="rect">
             <a:avLst/>
@@ -775,7 +831,7 @@
         <p:spPr>
           <a:xfrm>
             <a:off x="685800" y="4400640"/>
-            <a:ext cx="5486040" cy="3600000"/>
+            <a:ext cx="5485680" cy="3599640"/>
           </a:xfrm>
           <a:prstGeom prst="rect">
             <a:avLst/>
@@ -817,7 +873,7 @@
         <p:spPr>
           <a:xfrm>
             <a:off x="3884760" y="8685360"/>
-            <a:ext cx="2971440" cy="458280"/>
+            <a:ext cx="2971080" cy="457920"/>
           </a:xfrm>
           <a:prstGeom prst="rect">
             <a:avLst/>
@@ -837,6 +893,9 @@
                 <a:spcPct val="100000"/>
               </a:lnSpc>
               <a:buNone/>
+              <a:tabLst>
+                <a:tab algn="l" pos="0"/>
+              </a:tabLst>
               <a:defRPr lang="en-US" sz="1200" b="0" u="none" strike="noStrike">
                 <a:solidFill>
                   <a:schemeClr val="dk1"/>
@@ -854,8 +913,11 @@
                 <a:spcPct val="100000"/>
               </a:lnSpc>
               <a:buNone/>
-            </a:pPr>
-            <a:fld id="{1320CEE0-2166-416A-906E-779D57F76E54}" type="slidenum">
+              <a:tabLst>
+                <a:tab algn="l" pos="0"/>
+              </a:tabLst>
+            </a:pPr>
+            <a:fld id="{EB2CE9D7-F6AD-4183-9B45-009406CE5468}" type="slidenum">
               <a:rPr lang="en-US" sz="1200" b="0" u="none" strike="noStrike">
                 <a:solidFill>
                   <a:schemeClr val="dk1"/>
@@ -913,7 +975,7 @@
         <p:spPr>
           <a:xfrm>
             <a:off x="685800" y="1143000"/>
-            <a:ext cx="5486040" cy="3085920"/>
+            <a:ext cx="5485680" cy="3085560"/>
           </a:xfrm>
           <a:prstGeom prst="rect">
             <a:avLst/>
@@ -936,7 +998,7 @@
         <p:spPr>
           <a:xfrm>
             <a:off x="685800" y="4400640"/>
-            <a:ext cx="5486040" cy="3600000"/>
+            <a:ext cx="5485680" cy="3599640"/>
           </a:xfrm>
           <a:prstGeom prst="rect">
             <a:avLst/>
@@ -978,7 +1040,7 @@
         <p:spPr>
           <a:xfrm>
             <a:off x="3884760" y="8685360"/>
-            <a:ext cx="2971440" cy="458280"/>
+            <a:ext cx="2971080" cy="457920"/>
           </a:xfrm>
           <a:prstGeom prst="rect">
             <a:avLst/>
@@ -998,6 +1060,9 @@
                 <a:spcPct val="100000"/>
               </a:lnSpc>
               <a:buNone/>
+              <a:tabLst>
+                <a:tab algn="l" pos="0"/>
+              </a:tabLst>
               <a:defRPr lang="en-US" sz="1200" b="0" u="none" strike="noStrike">
                 <a:solidFill>
                   <a:schemeClr val="dk1"/>
@@ -1015,8 +1080,11 @@
                 <a:spcPct val="100000"/>
               </a:lnSpc>
               <a:buNone/>
-            </a:pPr>
-            <a:fld id="{6D9B32BD-DDA1-4ECF-8617-E558F4449381}" type="slidenum">
+              <a:tabLst>
+                <a:tab algn="l" pos="0"/>
+              </a:tabLst>
+            </a:pPr>
+            <a:fld id="{185CDE13-BD21-4DF4-B16F-ACA6EB8E7981}" type="slidenum">
               <a:rPr lang="en-US" sz="1200" b="0" u="none" strike="noStrike">
                 <a:solidFill>
                   <a:schemeClr val="dk1"/>
@@ -1074,7 +1142,7 @@
         <p:spPr>
           <a:xfrm>
             <a:off x="685800" y="1143000"/>
-            <a:ext cx="5486040" cy="3085920"/>
+            <a:ext cx="5485680" cy="3085560"/>
           </a:xfrm>
           <a:prstGeom prst="rect">
             <a:avLst/>
@@ -1097,7 +1165,7 @@
         <p:spPr>
           <a:xfrm>
             <a:off x="685800" y="4400640"/>
-            <a:ext cx="5486040" cy="3600000"/>
+            <a:ext cx="5485680" cy="3599640"/>
           </a:xfrm>
           <a:prstGeom prst="rect">
             <a:avLst/>
@@ -1139,7 +1207,7 @@
         <p:spPr>
           <a:xfrm>
             <a:off x="3884760" y="8685360"/>
-            <a:ext cx="2971440" cy="458280"/>
+            <a:ext cx="2971080" cy="457920"/>
           </a:xfrm>
           <a:prstGeom prst="rect">
             <a:avLst/>
@@ -1159,6 +1227,9 @@
                 <a:spcPct val="100000"/>
               </a:lnSpc>
               <a:buNone/>
+              <a:tabLst>
+                <a:tab algn="l" pos="0"/>
+              </a:tabLst>
               <a:defRPr lang="en-US" sz="1200" b="0" u="none" strike="noStrike">
                 <a:solidFill>
                   <a:schemeClr val="dk1"/>
@@ -1176,8 +1247,11 @@
                 <a:spcPct val="100000"/>
               </a:lnSpc>
               <a:buNone/>
-            </a:pPr>
-            <a:fld id="{F836D048-3995-4DFD-B051-3CA602D7829C}" type="slidenum">
+              <a:tabLst>
+                <a:tab algn="l" pos="0"/>
+              </a:tabLst>
+            </a:pPr>
+            <a:fld id="{1E5ADDF2-125C-4358-A2FD-FAEDDE331729}" type="slidenum">
               <a:rPr lang="en-US" sz="1200" b="0" u="none" strike="noStrike">
                 <a:solidFill>
                   <a:schemeClr val="dk1"/>
@@ -1235,7 +1309,7 @@
         <p:spPr>
           <a:xfrm>
             <a:off x="685800" y="1143000"/>
-            <a:ext cx="5486040" cy="3085920"/>
+            <a:ext cx="5485680" cy="3085560"/>
           </a:xfrm>
           <a:prstGeom prst="rect">
             <a:avLst/>
@@ -1258,7 +1332,7 @@
         <p:spPr>
           <a:xfrm>
             <a:off x="685800" y="4400640"/>
-            <a:ext cx="5486040" cy="3600000"/>
+            <a:ext cx="5485680" cy="3599640"/>
           </a:xfrm>
           <a:prstGeom prst="rect">
             <a:avLst/>
@@ -1300,7 +1374,7 @@
         <p:spPr>
           <a:xfrm>
             <a:off x="3884760" y="8685360"/>
-            <a:ext cx="2971440" cy="458280"/>
+            <a:ext cx="2971080" cy="457920"/>
           </a:xfrm>
           <a:prstGeom prst="rect">
             <a:avLst/>
@@ -1320,6 +1394,9 @@
                 <a:spcPct val="100000"/>
               </a:lnSpc>
               <a:buNone/>
+              <a:tabLst>
+                <a:tab algn="l" pos="0"/>
+              </a:tabLst>
               <a:defRPr lang="en-US" sz="1200" b="0" u="none" strike="noStrike">
                 <a:solidFill>
                   <a:schemeClr val="dk1"/>
@@ -1337,8 +1414,11 @@
                 <a:spcPct val="100000"/>
               </a:lnSpc>
               <a:buNone/>
-            </a:pPr>
-            <a:fld id="{1DDF02D8-4F0A-46FA-8C91-FAC8EE51C4E6}" type="slidenum">
+              <a:tabLst>
+                <a:tab algn="l" pos="0"/>
+              </a:tabLst>
+            </a:pPr>
+            <a:fld id="{1B57E025-960D-4CF2-AC8B-17622B36AD75}" type="slidenum">
               <a:rPr lang="en-US" sz="1200" b="0" u="none" strike="noStrike">
                 <a:solidFill>
                   <a:schemeClr val="dk1"/>
@@ -1396,7 +1476,7 @@
         <p:spPr>
           <a:xfrm>
             <a:off x="685800" y="1143000"/>
-            <a:ext cx="5486040" cy="3085920"/>
+            <a:ext cx="5485680" cy="3085560"/>
           </a:xfrm>
           <a:prstGeom prst="rect">
             <a:avLst/>
@@ -1419,7 +1499,7 @@
         <p:spPr>
           <a:xfrm>
             <a:off x="685800" y="4400640"/>
-            <a:ext cx="5486040" cy="3600000"/>
+            <a:ext cx="5485680" cy="3599640"/>
           </a:xfrm>
           <a:prstGeom prst="rect">
             <a:avLst/>
@@ -1461,7 +1541,7 @@
         <p:spPr>
           <a:xfrm>
             <a:off x="3884760" y="8685360"/>
-            <a:ext cx="2971440" cy="458280"/>
+            <a:ext cx="2971080" cy="457920"/>
           </a:xfrm>
           <a:prstGeom prst="rect">
             <a:avLst/>
@@ -1481,6 +1561,9 @@
                 <a:spcPct val="100000"/>
               </a:lnSpc>
               <a:buNone/>
+              <a:tabLst>
+                <a:tab algn="l" pos="0"/>
+              </a:tabLst>
               <a:defRPr lang="en-US" sz="1200" b="0" u="none" strike="noStrike">
                 <a:solidFill>
                   <a:schemeClr val="dk1"/>
@@ -1498,8 +1581,11 @@
                 <a:spcPct val="100000"/>
               </a:lnSpc>
               <a:buNone/>
-            </a:pPr>
-            <a:fld id="{EFAC8129-05A2-49C6-B056-6FB820F63D8A}" type="slidenum">
+              <a:tabLst>
+                <a:tab algn="l" pos="0"/>
+              </a:tabLst>
+            </a:pPr>
+            <a:fld id="{F3306E7C-2886-4029-853D-C2732117CC84}" type="slidenum">
               <a:rPr lang="en-US" sz="1200" b="0" u="none" strike="noStrike">
                 <a:solidFill>
                   <a:schemeClr val="dk1"/>
@@ -1557,7 +1643,7 @@
         <p:spPr>
           <a:xfrm>
             <a:off x="685800" y="1143000"/>
-            <a:ext cx="5486040" cy="3085920"/>
+            <a:ext cx="5485680" cy="3085560"/>
           </a:xfrm>
           <a:prstGeom prst="rect">
             <a:avLst/>
@@ -1580,7 +1666,7 @@
         <p:spPr>
           <a:xfrm>
             <a:off x="685800" y="4400640"/>
-            <a:ext cx="5486040" cy="3600000"/>
+            <a:ext cx="5485680" cy="3599640"/>
           </a:xfrm>
           <a:prstGeom prst="rect">
             <a:avLst/>
@@ -1622,7 +1708,7 @@
         <p:spPr>
           <a:xfrm>
             <a:off x="3884760" y="8685360"/>
-            <a:ext cx="2971440" cy="458280"/>
+            <a:ext cx="2971080" cy="457920"/>
           </a:xfrm>
           <a:prstGeom prst="rect">
             <a:avLst/>
@@ -1642,6 +1728,9 @@
                 <a:spcPct val="100000"/>
               </a:lnSpc>
               <a:buNone/>
+              <a:tabLst>
+                <a:tab algn="l" pos="0"/>
+              </a:tabLst>
               <a:defRPr lang="en-US" sz="1200" b="0" u="none" strike="noStrike">
                 <a:solidFill>
                   <a:schemeClr val="dk1"/>
@@ -1659,8 +1748,11 @@
                 <a:spcPct val="100000"/>
               </a:lnSpc>
               <a:buNone/>
-            </a:pPr>
-            <a:fld id="{385DBAB5-E5BB-459E-AB89-FCBE19E26446}" type="slidenum">
+              <a:tabLst>
+                <a:tab algn="l" pos="0"/>
+              </a:tabLst>
+            </a:pPr>
+            <a:fld id="{D03DBAD7-77A2-42BE-A83B-0BD46BF59726}" type="slidenum">
               <a:rPr lang="en-US" sz="1200" b="0" u="none" strike="noStrike">
                 <a:solidFill>
                   <a:schemeClr val="dk1"/>
@@ -1670,7 +1762,7 @@
                 <a:latin typeface="+mn-lt"/>
                 <a:ea typeface="+mn-ea"/>
               </a:rPr>
-              <a:t>&lt;number&gt;</a:t>
+              <a:t>1</a:t>
             </a:fld>
             <a:endParaRPr lang="es-CO" sz="1200" b="0" u="none" strike="noStrike">
               <a:solidFill>
@@ -1762,27 +1854,27 @@
             <a:noAutofit/>
           </a:bodyPr>
           <a:p>
-            <a:pPr indent="0">
+            <a:pPr indent="0" algn="ctr">
               <a:buNone/>
             </a:pPr>
             <a:r>
-              <a:rPr lang="es-CO" sz="1800" b="0" u="none" strike="noStrike">
-                <a:solidFill>
-                  <a:schemeClr val="dk1"/>
-                </a:solidFill>
-                <a:effectLst/>
-                <a:uFillTx/>
-                <a:latin typeface="Calibri"/>
+              <a:rPr lang="es-CO" sz="4400" b="0" u="none" strike="noStrike">
+                <a:solidFill>
+                  <a:srgbClr val="000000"/>
+                </a:solidFill>
+                <a:effectLst/>
+                <a:uFillTx/>
+                <a:latin typeface="Arial"/>
               </a:rPr>
               <a:t>Click to edit the title text format</a:t>
             </a:r>
-            <a:endParaRPr lang="es-CO" sz="1800" b="0" u="none" strike="noStrike">
-              <a:solidFill>
-                <a:schemeClr val="dk1"/>
-              </a:solidFill>
-              <a:effectLst/>
-              <a:uFillTx/>
-              <a:latin typeface="Calibri"/>
+            <a:endParaRPr lang="es-CO" sz="4400" b="0" u="none" strike="noStrike">
+              <a:solidFill>
+                <a:srgbClr val="000000"/>
+              </a:solidFill>
+              <a:effectLst/>
+              <a:uFillTx/>
+              <a:latin typeface="Arial"/>
             </a:endParaRPr>
           </a:p>
         </p:txBody>
@@ -1812,7 +1904,7 @@
         </p:spPr>
         <p:txBody>
           <a:bodyPr lIns="0" rIns="0" tIns="0" bIns="0" anchor="t">
-            <a:normAutofit lnSpcReduction="9999"/>
+            <a:normAutofit/>
           </a:bodyPr>
           <a:p>
             <a:pPr marL="432000" indent="-324000">
@@ -1829,21 +1921,21 @@
             <a:r>
               <a:rPr lang="es-CO" sz="3200" b="0" u="none" strike="noStrike">
                 <a:solidFill>
-                  <a:schemeClr val="dk1"/>
-                </a:solidFill>
-                <a:effectLst/>
-                <a:uFillTx/>
-                <a:latin typeface="Calibri"/>
+                  <a:srgbClr val="000000"/>
+                </a:solidFill>
+                <a:effectLst/>
+                <a:uFillTx/>
+                <a:latin typeface="Arial"/>
               </a:rPr>
               <a:t>Click to edit the outline text format</a:t>
             </a:r>
             <a:endParaRPr lang="es-CO" sz="3200" b="0" u="none" strike="noStrike">
               <a:solidFill>
-                <a:schemeClr val="dk1"/>
-              </a:solidFill>
-              <a:effectLst/>
-              <a:uFillTx/>
-              <a:latin typeface="Calibri"/>
+                <a:srgbClr val="000000"/>
+              </a:solidFill>
+              <a:effectLst/>
+              <a:uFillTx/>
+              <a:latin typeface="Arial"/>
             </a:endParaRPr>
           </a:p>
           <a:p>
@@ -1859,23 +1951,23 @@
               <a:buChar char=""/>
             </a:pPr>
             <a:r>
-              <a:rPr lang="es-CO" sz="2400" b="0" u="none" strike="noStrike">
-                <a:solidFill>
-                  <a:schemeClr val="dk1"/>
-                </a:solidFill>
-                <a:effectLst/>
-                <a:uFillTx/>
-                <a:latin typeface="Calibri"/>
+              <a:rPr lang="es-CO" sz="2800" b="0" u="none" strike="noStrike">
+                <a:solidFill>
+                  <a:srgbClr val="000000"/>
+                </a:solidFill>
+                <a:effectLst/>
+                <a:uFillTx/>
+                <a:latin typeface="Arial"/>
               </a:rPr>
               <a:t>Second Outline Level</a:t>
             </a:r>
-            <a:endParaRPr lang="es-CO" sz="2400" b="0" u="none" strike="noStrike">
-              <a:solidFill>
-                <a:schemeClr val="dk1"/>
-              </a:solidFill>
-              <a:effectLst/>
-              <a:uFillTx/>
-              <a:latin typeface="Calibri"/>
+            <a:endParaRPr lang="es-CO" sz="2800" b="0" u="none" strike="noStrike">
+              <a:solidFill>
+                <a:srgbClr val="000000"/>
+              </a:solidFill>
+              <a:effectLst/>
+              <a:uFillTx/>
+              <a:latin typeface="Arial"/>
             </a:endParaRPr>
           </a:p>
           <a:p>
@@ -1891,23 +1983,23 @@
               <a:buChar char=""/>
             </a:pPr>
             <a:r>
-              <a:rPr lang="es-CO" sz="2000" b="0" u="none" strike="noStrike">
-                <a:solidFill>
-                  <a:schemeClr val="dk1"/>
-                </a:solidFill>
-                <a:effectLst/>
-                <a:uFillTx/>
-                <a:latin typeface="Calibri"/>
+              <a:rPr lang="es-CO" sz="2400" b="0" u="none" strike="noStrike">
+                <a:solidFill>
+                  <a:srgbClr val="000000"/>
+                </a:solidFill>
+                <a:effectLst/>
+                <a:uFillTx/>
+                <a:latin typeface="Arial"/>
               </a:rPr>
               <a:t>Third Outline Level</a:t>
             </a:r>
-            <a:endParaRPr lang="es-CO" sz="2000" b="0" u="none" strike="noStrike">
-              <a:solidFill>
-                <a:schemeClr val="dk1"/>
-              </a:solidFill>
-              <a:effectLst/>
-              <a:uFillTx/>
-              <a:latin typeface="Calibri"/>
+            <a:endParaRPr lang="es-CO" sz="2400" b="0" u="none" strike="noStrike">
+              <a:solidFill>
+                <a:srgbClr val="000000"/>
+              </a:solidFill>
+              <a:effectLst/>
+              <a:uFillTx/>
+              <a:latin typeface="Arial"/>
             </a:endParaRPr>
           </a:p>
           <a:p>
@@ -1925,21 +2017,21 @@
             <a:r>
               <a:rPr lang="es-CO" sz="2000" b="0" u="none" strike="noStrike">
                 <a:solidFill>
-                  <a:schemeClr val="dk1"/>
-                </a:solidFill>
-                <a:effectLst/>
-                <a:uFillTx/>
-                <a:latin typeface="Calibri"/>
+                  <a:srgbClr val="000000"/>
+                </a:solidFill>
+                <a:effectLst/>
+                <a:uFillTx/>
+                <a:latin typeface="Arial"/>
               </a:rPr>
               <a:t>Fourth Outline Level</a:t>
             </a:r>
             <a:endParaRPr lang="es-CO" sz="2000" b="0" u="none" strike="noStrike">
               <a:solidFill>
-                <a:schemeClr val="dk1"/>
-              </a:solidFill>
-              <a:effectLst/>
-              <a:uFillTx/>
-              <a:latin typeface="Calibri"/>
+                <a:srgbClr val="000000"/>
+              </a:solidFill>
+              <a:effectLst/>
+              <a:uFillTx/>
+              <a:latin typeface="Arial"/>
             </a:endParaRPr>
           </a:p>
           <a:p>
@@ -1957,21 +2049,21 @@
             <a:r>
               <a:rPr lang="es-CO" sz="2000" b="0" u="none" strike="noStrike">
                 <a:solidFill>
-                  <a:schemeClr val="dk1"/>
-                </a:solidFill>
-                <a:effectLst/>
-                <a:uFillTx/>
-                <a:latin typeface="Calibri"/>
+                  <a:srgbClr val="000000"/>
+                </a:solidFill>
+                <a:effectLst/>
+                <a:uFillTx/>
+                <a:latin typeface="Arial"/>
               </a:rPr>
               <a:t>Fifth Outline Level</a:t>
             </a:r>
             <a:endParaRPr lang="es-CO" sz="2000" b="0" u="none" strike="noStrike">
               <a:solidFill>
-                <a:schemeClr val="dk1"/>
-              </a:solidFill>
-              <a:effectLst/>
-              <a:uFillTx/>
-              <a:latin typeface="Calibri"/>
+                <a:srgbClr val="000000"/>
+              </a:solidFill>
+              <a:effectLst/>
+              <a:uFillTx/>
+              <a:latin typeface="Arial"/>
             </a:endParaRPr>
           </a:p>
           <a:p>
@@ -1989,21 +2081,21 @@
             <a:r>
               <a:rPr lang="es-CO" sz="2000" b="0" u="none" strike="noStrike">
                 <a:solidFill>
-                  <a:schemeClr val="dk1"/>
-                </a:solidFill>
-                <a:effectLst/>
-                <a:uFillTx/>
-                <a:latin typeface="Calibri"/>
+                  <a:srgbClr val="000000"/>
+                </a:solidFill>
+                <a:effectLst/>
+                <a:uFillTx/>
+                <a:latin typeface="Arial"/>
               </a:rPr>
               <a:t>Sixth Outline Level</a:t>
             </a:r>
             <a:endParaRPr lang="es-CO" sz="2000" b="0" u="none" strike="noStrike">
               <a:solidFill>
-                <a:schemeClr val="dk1"/>
-              </a:solidFill>
-              <a:effectLst/>
-              <a:uFillTx/>
-              <a:latin typeface="Calibri"/>
+                <a:srgbClr val="000000"/>
+              </a:solidFill>
+              <a:effectLst/>
+              <a:uFillTx/>
+              <a:latin typeface="Arial"/>
             </a:endParaRPr>
           </a:p>
           <a:p>
@@ -2021,21 +2113,21 @@
             <a:r>
               <a:rPr lang="es-CO" sz="2000" b="0" u="none" strike="noStrike">
                 <a:solidFill>
-                  <a:schemeClr val="dk1"/>
-                </a:solidFill>
-                <a:effectLst/>
-                <a:uFillTx/>
-                <a:latin typeface="Calibri"/>
+                  <a:srgbClr val="000000"/>
+                </a:solidFill>
+                <a:effectLst/>
+                <a:uFillTx/>
+                <a:latin typeface="Arial"/>
               </a:rPr>
               <a:t>Seventh Outline Level</a:t>
             </a:r>
             <a:endParaRPr lang="es-CO" sz="2000" b="0" u="none" strike="noStrike">
               <a:solidFill>
-                <a:schemeClr val="dk1"/>
-              </a:solidFill>
-              <a:effectLst/>
-              <a:uFillTx/>
-              <a:latin typeface="Calibri"/>
+                <a:srgbClr val="000000"/>
+              </a:solidFill>
+              <a:effectLst/>
+              <a:uFillTx/>
+              <a:latin typeface="Arial"/>
             </a:endParaRPr>
           </a:p>
         </p:txBody>
@@ -2082,7 +2174,7 @@
         <p:spPr>
           <a:xfrm>
             <a:off x="0" y="0"/>
-            <a:ext cx="164160" cy="5143320"/>
+            <a:ext cx="163800" cy="5142960"/>
           </a:xfrm>
           <a:prstGeom prst="rect">
             <a:avLst/>
@@ -2108,6 +2200,11 @@
             <a:noAutofit/>
           </a:bodyPr>
           <a:p>
+            <a:pPr>
+              <a:lnSpc>
+                <a:spcPct val="100000"/>
+              </a:lnSpc>
+            </a:pPr>
             <a:endParaRPr lang="es-CO" sz="1800" b="0" u="none" strike="noStrike">
               <a:solidFill>
                 <a:srgbClr val="ffffff"/>
@@ -2128,7 +2225,7 @@
         <p:spPr>
           <a:xfrm>
             <a:off x="164520" y="0"/>
-            <a:ext cx="54360" cy="5143320"/>
+            <a:ext cx="54000" cy="5142960"/>
           </a:xfrm>
           <a:prstGeom prst="rect">
             <a:avLst/>
@@ -2154,6 +2251,11 @@
             <a:noAutofit/>
           </a:bodyPr>
           <a:p>
+            <a:pPr>
+              <a:lnSpc>
+                <a:spcPct val="100000"/>
+              </a:lnSpc>
+            </a:pPr>
             <a:endParaRPr lang="es-CO" sz="1800" b="0" u="none" strike="noStrike">
               <a:solidFill>
                 <a:srgbClr val="ffffff"/>
@@ -2174,7 +2276,7 @@
         <p:spPr>
           <a:xfrm>
             <a:off x="640080" y="502920"/>
-            <a:ext cx="2599920" cy="347040"/>
+            <a:ext cx="2599560" cy="346680"/>
           </a:xfrm>
           <a:prstGeom prst="roundRect">
             <a:avLst>
@@ -2204,6 +2306,11 @@
             <a:noAutofit/>
           </a:bodyPr>
           <a:p>
+            <a:pPr>
+              <a:lnSpc>
+                <a:spcPct val="100000"/>
+              </a:lnSpc>
+            </a:pPr>
             <a:endParaRPr lang="es-CO" sz="1800" b="0" u="none" strike="noStrike">
               <a:solidFill>
                 <a:srgbClr val="ffffff"/>
@@ -2224,7 +2331,7 @@
         <p:spPr>
           <a:xfrm>
             <a:off x="640080" y="502920"/>
-            <a:ext cx="2559960" cy="347040"/>
+            <a:ext cx="2559600" cy="346680"/>
           </a:xfrm>
           <a:prstGeom prst="rect">
             <a:avLst/>
@@ -2284,7 +2391,7 @@
         <p:spPr>
           <a:xfrm>
             <a:off x="640080" y="1097280"/>
-            <a:ext cx="8229240" cy="914040"/>
+            <a:ext cx="8228880" cy="913680"/>
           </a:xfrm>
           <a:prstGeom prst="rect">
             <a:avLst/>
@@ -2345,7 +2452,7 @@
         <p:spPr>
           <a:xfrm>
             <a:off x="640080" y="1920240"/>
-            <a:ext cx="8229240" cy="685440"/>
+            <a:ext cx="8228880" cy="685080"/>
           </a:xfrm>
           <a:prstGeom prst="rect">
             <a:avLst/>
@@ -2406,7 +2513,7 @@
         <p:spPr>
           <a:xfrm>
             <a:off x="640080" y="2788920"/>
-            <a:ext cx="6857640" cy="822600"/>
+            <a:ext cx="6857280" cy="822240"/>
           </a:xfrm>
           <a:prstGeom prst="rect">
             <a:avLst/>
@@ -2540,7 +2647,7 @@
         <p:spPr>
           <a:xfrm>
             <a:off x="640080" y="3840480"/>
-            <a:ext cx="8229240" cy="319680"/>
+            <a:ext cx="8228880" cy="319320"/>
           </a:xfrm>
           <a:prstGeom prst="rect">
             <a:avLst/>
@@ -2601,7 +2708,7 @@
         <p:spPr>
           <a:xfrm>
             <a:off x="640080" y="4206240"/>
-            <a:ext cx="8229240" cy="319680"/>
+            <a:ext cx="8228880" cy="319320"/>
           </a:xfrm>
           <a:prstGeom prst="rect">
             <a:avLst/>
@@ -2699,7 +2806,7 @@
         <p:spPr>
           <a:xfrm>
             <a:off x="0" y="0"/>
-            <a:ext cx="109440" cy="5143320"/>
+            <a:ext cx="109080" cy="5142960"/>
           </a:xfrm>
           <a:prstGeom prst="rect">
             <a:avLst/>
@@ -2725,6 +2832,11 @@
             <a:noAutofit/>
           </a:bodyPr>
           <a:p>
+            <a:pPr>
+              <a:lnSpc>
+                <a:spcPct val="100000"/>
+              </a:lnSpc>
+            </a:pPr>
             <a:endParaRPr lang="es-CO" sz="1800" b="0" u="none" strike="noStrike">
               <a:solidFill>
                 <a:srgbClr val="ffffff"/>
@@ -2745,7 +2857,7 @@
         <p:spPr>
           <a:xfrm>
             <a:off x="365760" y="274320"/>
-            <a:ext cx="8503560" cy="639720"/>
+            <a:ext cx="8503200" cy="639360"/>
           </a:xfrm>
           <a:prstGeom prst="rect">
             <a:avLst/>
@@ -2806,7 +2918,7 @@
         <p:spPr>
           <a:xfrm>
             <a:off x="365760" y="1051560"/>
-            <a:ext cx="8412120" cy="776880"/>
+            <a:ext cx="8411760" cy="776520"/>
           </a:xfrm>
           <a:prstGeom prst="rect">
             <a:avLst/>
@@ -2867,7 +2979,7 @@
         <p:spPr>
           <a:xfrm>
             <a:off x="365760" y="1920240"/>
-            <a:ext cx="8412120" cy="685440"/>
+            <a:ext cx="8411760" cy="685080"/>
           </a:xfrm>
           <a:prstGeom prst="rect">
             <a:avLst/>
@@ -2902,6 +3014,11 @@
             <a:noAutofit/>
           </a:bodyPr>
           <a:p>
+            <a:pPr>
+              <a:lnSpc>
+                <a:spcPct val="100000"/>
+              </a:lnSpc>
+            </a:pPr>
             <a:endParaRPr lang="es-CO" sz="1800" b="0" u="none" strike="noStrike">
               <a:solidFill>
                 <a:srgbClr val="ffffff"/>
@@ -2922,7 +3039,7 @@
         <p:spPr>
           <a:xfrm>
             <a:off x="365760" y="1920240"/>
-            <a:ext cx="54360" cy="685440"/>
+            <a:ext cx="54000" cy="685080"/>
           </a:xfrm>
           <a:prstGeom prst="rect">
             <a:avLst/>
@@ -2948,6 +3065,11 @@
             <a:noAutofit/>
           </a:bodyPr>
           <a:p>
+            <a:pPr>
+              <a:lnSpc>
+                <a:spcPct val="100000"/>
+              </a:lnSpc>
+            </a:pPr>
             <a:endParaRPr lang="es-CO" sz="1800" b="0" u="none" strike="noStrike">
               <a:solidFill>
                 <a:srgbClr val="ffffff"/>
@@ -2968,7 +3090,7 @@
         <p:spPr>
           <a:xfrm>
             <a:off x="548640" y="1920240"/>
-            <a:ext cx="8229240" cy="685440"/>
+            <a:ext cx="8228880" cy="685080"/>
           </a:xfrm>
           <a:prstGeom prst="rect">
             <a:avLst/>
@@ -3029,7 +3151,7 @@
         <p:spPr>
           <a:xfrm>
             <a:off x="365760" y="2788920"/>
-            <a:ext cx="2605680" cy="1325520"/>
+            <a:ext cx="2605320" cy="1325160"/>
           </a:xfrm>
           <a:prstGeom prst="rect">
             <a:avLst/>
@@ -3062,6 +3184,11 @@
             <a:noAutofit/>
           </a:bodyPr>
           <a:p>
+            <a:pPr>
+              <a:lnSpc>
+                <a:spcPct val="100000"/>
+              </a:lnSpc>
+            </a:pPr>
             <a:endParaRPr lang="es-CO" sz="1800" b="0" u="none" strike="noStrike">
               <a:solidFill>
                 <a:srgbClr val="000000"/>
@@ -3082,7 +3209,7 @@
         <p:spPr>
           <a:xfrm>
             <a:off x="365760" y="2788920"/>
-            <a:ext cx="2605680" cy="45360"/>
+            <a:ext cx="2605320" cy="45000"/>
           </a:xfrm>
           <a:prstGeom prst="rect">
             <a:avLst/>
@@ -3108,6 +3235,11 @@
             <a:noAutofit/>
           </a:bodyPr>
           <a:p>
+            <a:pPr>
+              <a:lnSpc>
+                <a:spcPct val="100000"/>
+              </a:lnSpc>
+            </a:pPr>
             <a:endParaRPr lang="es-CO" sz="1800" b="0" u="none" strike="noStrike">
               <a:solidFill>
                 <a:srgbClr val="ffffff"/>
@@ -3128,7 +3260,7 @@
         <p:spPr>
           <a:xfrm>
             <a:off x="365760" y="2898720"/>
-            <a:ext cx="2605680" cy="411120"/>
+            <a:ext cx="2605320" cy="410760"/>
           </a:xfrm>
           <a:prstGeom prst="rect">
             <a:avLst/>
@@ -3188,7 +3320,7 @@
         <p:spPr>
           <a:xfrm>
             <a:off x="365760" y="3291840"/>
-            <a:ext cx="2605680" cy="273960"/>
+            <a:ext cx="2605320" cy="273600"/>
           </a:xfrm>
           <a:prstGeom prst="rect">
             <a:avLst/>
@@ -3249,7 +3381,7 @@
         <p:spPr>
           <a:xfrm>
             <a:off x="365760" y="3566160"/>
-            <a:ext cx="2605680" cy="456840"/>
+            <a:ext cx="2605320" cy="456480"/>
           </a:xfrm>
           <a:prstGeom prst="rect">
             <a:avLst/>
@@ -3340,7 +3472,7 @@
         <p:spPr>
           <a:xfrm>
             <a:off x="3127320" y="2788920"/>
-            <a:ext cx="2605680" cy="1325520"/>
+            <a:ext cx="2605320" cy="1325160"/>
           </a:xfrm>
           <a:prstGeom prst="rect">
             <a:avLst/>
@@ -3373,6 +3505,11 @@
             <a:noAutofit/>
           </a:bodyPr>
           <a:p>
+            <a:pPr>
+              <a:lnSpc>
+                <a:spcPct val="100000"/>
+              </a:lnSpc>
+            </a:pPr>
             <a:endParaRPr lang="es-CO" sz="1800" b="0" u="none" strike="noStrike">
               <a:solidFill>
                 <a:srgbClr val="000000"/>
@@ -3393,7 +3530,7 @@
         <p:spPr>
           <a:xfrm>
             <a:off x="3127320" y="2788920"/>
-            <a:ext cx="2605680" cy="45360"/>
+            <a:ext cx="2605320" cy="45000"/>
           </a:xfrm>
           <a:prstGeom prst="rect">
             <a:avLst/>
@@ -3419,6 +3556,11 @@
             <a:noAutofit/>
           </a:bodyPr>
           <a:p>
+            <a:pPr>
+              <a:lnSpc>
+                <a:spcPct val="100000"/>
+              </a:lnSpc>
+            </a:pPr>
             <a:endParaRPr lang="es-CO" sz="1800" b="0" u="none" strike="noStrike">
               <a:solidFill>
                 <a:srgbClr val="ffffff"/>
@@ -3439,7 +3581,7 @@
         <p:spPr>
           <a:xfrm>
             <a:off x="3127320" y="2898720"/>
-            <a:ext cx="2605680" cy="411120"/>
+            <a:ext cx="2605320" cy="410760"/>
           </a:xfrm>
           <a:prstGeom prst="rect">
             <a:avLst/>
@@ -3499,7 +3641,7 @@
         <p:spPr>
           <a:xfrm>
             <a:off x="3127320" y="3291840"/>
-            <a:ext cx="2605680" cy="273960"/>
+            <a:ext cx="2605320" cy="273600"/>
           </a:xfrm>
           <a:prstGeom prst="rect">
             <a:avLst/>
@@ -3560,7 +3702,7 @@
         <p:spPr>
           <a:xfrm>
             <a:off x="3127320" y="3566160"/>
-            <a:ext cx="2605680" cy="456840"/>
+            <a:ext cx="2605320" cy="456480"/>
           </a:xfrm>
           <a:prstGeom prst="rect">
             <a:avLst/>
@@ -3651,7 +3793,7 @@
         <p:spPr>
           <a:xfrm>
             <a:off x="5888880" y="2788920"/>
-            <a:ext cx="2605680" cy="1325520"/>
+            <a:ext cx="2605320" cy="1325160"/>
           </a:xfrm>
           <a:prstGeom prst="rect">
             <a:avLst/>
@@ -3684,6 +3826,11 @@
             <a:noAutofit/>
           </a:bodyPr>
           <a:p>
+            <a:pPr>
+              <a:lnSpc>
+                <a:spcPct val="100000"/>
+              </a:lnSpc>
+            </a:pPr>
             <a:endParaRPr lang="es-CO" sz="1800" b="0" u="none" strike="noStrike">
               <a:solidFill>
                 <a:srgbClr val="000000"/>
@@ -3704,7 +3851,7 @@
         <p:spPr>
           <a:xfrm>
             <a:off x="5888880" y="2788920"/>
-            <a:ext cx="2605680" cy="45360"/>
+            <a:ext cx="2605320" cy="45000"/>
           </a:xfrm>
           <a:prstGeom prst="rect">
             <a:avLst/>
@@ -3730,6 +3877,11 @@
             <a:noAutofit/>
           </a:bodyPr>
           <a:p>
+            <a:pPr>
+              <a:lnSpc>
+                <a:spcPct val="100000"/>
+              </a:lnSpc>
+            </a:pPr>
             <a:endParaRPr lang="es-CO" sz="1800" b="0" u="none" strike="noStrike">
               <a:solidFill>
                 <a:srgbClr val="ffffff"/>
@@ -3750,7 +3902,7 @@
         <p:spPr>
           <a:xfrm>
             <a:off x="5888880" y="2898720"/>
-            <a:ext cx="2605680" cy="411120"/>
+            <a:ext cx="2605320" cy="410760"/>
           </a:xfrm>
           <a:prstGeom prst="rect">
             <a:avLst/>
@@ -3810,7 +3962,7 @@
         <p:spPr>
           <a:xfrm>
             <a:off x="5888880" y="3291840"/>
-            <a:ext cx="2605680" cy="273960"/>
+            <a:ext cx="2605320" cy="273600"/>
           </a:xfrm>
           <a:prstGeom prst="rect">
             <a:avLst/>
@@ -3871,7 +4023,7 @@
         <p:spPr>
           <a:xfrm>
             <a:off x="5888880" y="3566160"/>
-            <a:ext cx="2605680" cy="456840"/>
+            <a:ext cx="2605320" cy="456480"/>
           </a:xfrm>
           <a:prstGeom prst="rect">
             <a:avLst/>
@@ -3999,7 +4151,7 @@
         <p:spPr>
           <a:xfrm>
             <a:off x="0" y="0"/>
-            <a:ext cx="109440" cy="5143320"/>
+            <a:ext cx="109080" cy="5142960"/>
           </a:xfrm>
           <a:prstGeom prst="rect">
             <a:avLst/>
@@ -4025,6 +4177,11 @@
             <a:noAutofit/>
           </a:bodyPr>
           <a:p>
+            <a:pPr>
+              <a:lnSpc>
+                <a:spcPct val="100000"/>
+              </a:lnSpc>
+            </a:pPr>
             <a:endParaRPr lang="es-CO" sz="1800" b="0" u="none" strike="noStrike">
               <a:solidFill>
                 <a:srgbClr val="ffffff"/>
@@ -4045,7 +4202,7 @@
         <p:spPr>
           <a:xfrm>
             <a:off x="365760" y="274320"/>
-            <a:ext cx="8503560" cy="594000"/>
+            <a:ext cx="8503200" cy="593640"/>
           </a:xfrm>
           <a:prstGeom prst="rect">
             <a:avLst/>
@@ -4106,7 +4263,7 @@
         <p:spPr>
           <a:xfrm>
             <a:off x="365760" y="868680"/>
-            <a:ext cx="8503560" cy="319680"/>
+            <a:ext cx="8503200" cy="319320"/>
           </a:xfrm>
           <a:prstGeom prst="rect">
             <a:avLst/>
@@ -4167,7 +4324,7 @@
         <p:spPr>
           <a:xfrm>
             <a:off x="365760" y="1371600"/>
-            <a:ext cx="2011320" cy="2331360"/>
+            <a:ext cx="2010960" cy="2331000"/>
           </a:xfrm>
           <a:prstGeom prst="rect">
             <a:avLst/>
@@ -4200,6 +4357,11 @@
             <a:noAutofit/>
           </a:bodyPr>
           <a:p>
+            <a:pPr>
+              <a:lnSpc>
+                <a:spcPct val="100000"/>
+              </a:lnSpc>
+            </a:pPr>
             <a:endParaRPr lang="es-CO" sz="1800" b="0" u="none" strike="noStrike">
               <a:solidFill>
                 <a:srgbClr val="000000"/>
@@ -4220,7 +4382,7 @@
         <p:spPr>
           <a:xfrm>
             <a:off x="365760" y="1371600"/>
-            <a:ext cx="2011320" cy="502560"/>
+            <a:ext cx="2010960" cy="502200"/>
           </a:xfrm>
           <a:prstGeom prst="rect">
             <a:avLst/>
@@ -4246,6 +4408,11 @@
             <a:noAutofit/>
           </a:bodyPr>
           <a:p>
+            <a:pPr>
+              <a:lnSpc>
+                <a:spcPct val="100000"/>
+              </a:lnSpc>
+            </a:pPr>
             <a:endParaRPr lang="es-CO" sz="1800" b="0" u="none" strike="noStrike">
               <a:solidFill>
                 <a:srgbClr val="ffffff"/>
@@ -4266,7 +4433,7 @@
         <p:spPr>
           <a:xfrm>
             <a:off x="365760" y="1371600"/>
-            <a:ext cx="2011320" cy="502560"/>
+            <a:ext cx="2010960" cy="502200"/>
           </a:xfrm>
           <a:prstGeom prst="rect">
             <a:avLst/>
@@ -4327,7 +4494,7 @@
         <p:spPr>
           <a:xfrm>
             <a:off x="365760" y="1901880"/>
-            <a:ext cx="2011320" cy="319680"/>
+            <a:ext cx="2010960" cy="319320"/>
           </a:xfrm>
           <a:prstGeom prst="rect">
             <a:avLst/>
@@ -4366,7 +4533,7 @@
                 <a:latin typeface="Consolas"/>
                 <a:ea typeface="Consolas"/>
               </a:rPr>
-              <a:t>01_i ngestion_ETL.i pynb</a:t>
+              <a:t>01_ingestion_ETL.i pynb</a:t>
             </a:r>
             <a:endParaRPr lang="es-CO" sz="800" b="0" u="none" strike="noStrike">
               <a:solidFill>
@@ -4388,7 +4555,7 @@
         <p:spPr>
           <a:xfrm>
             <a:off x="365760" y="2212920"/>
-            <a:ext cx="2011320" cy="456840"/>
+            <a:ext cx="2010960" cy="456480"/>
           </a:xfrm>
           <a:prstGeom prst="rect">
             <a:avLst/>
@@ -4449,7 +4616,7 @@
         <p:spPr>
           <a:xfrm>
             <a:off x="457200" y="2688480"/>
-            <a:ext cx="1828440" cy="914040"/>
+            <a:ext cx="1828080" cy="913680"/>
           </a:xfrm>
           <a:prstGeom prst="rect">
             <a:avLst/>
@@ -4540,7 +4707,7 @@
         <p:spPr>
           <a:xfrm>
             <a:off x="2496240" y="1371600"/>
-            <a:ext cx="2011320" cy="2331360"/>
+            <a:ext cx="2010960" cy="2331000"/>
           </a:xfrm>
           <a:prstGeom prst="rect">
             <a:avLst/>
@@ -4573,6 +4740,11 @@
             <a:noAutofit/>
           </a:bodyPr>
           <a:p>
+            <a:pPr>
+              <a:lnSpc>
+                <a:spcPct val="100000"/>
+              </a:lnSpc>
+            </a:pPr>
             <a:endParaRPr lang="es-CO" sz="1800" b="0" u="none" strike="noStrike">
               <a:solidFill>
                 <a:srgbClr val="000000"/>
@@ -4593,7 +4765,7 @@
         <p:spPr>
           <a:xfrm>
             <a:off x="2496240" y="1371600"/>
-            <a:ext cx="2011320" cy="502560"/>
+            <a:ext cx="2010960" cy="502200"/>
           </a:xfrm>
           <a:prstGeom prst="rect">
             <a:avLst/>
@@ -4619,6 +4791,11 @@
             <a:noAutofit/>
           </a:bodyPr>
           <a:p>
+            <a:pPr>
+              <a:lnSpc>
+                <a:spcPct val="100000"/>
+              </a:lnSpc>
+            </a:pPr>
             <a:endParaRPr lang="es-CO" sz="1800" b="0" u="none" strike="noStrike">
               <a:solidFill>
                 <a:srgbClr val="ffffff"/>
@@ -4639,7 +4816,7 @@
         <p:spPr>
           <a:xfrm>
             <a:off x="2496240" y="1371600"/>
-            <a:ext cx="2011320" cy="502560"/>
+            <a:ext cx="2010960" cy="502200"/>
           </a:xfrm>
           <a:prstGeom prst="rect">
             <a:avLst/>
@@ -4700,7 +4877,7 @@
         <p:spPr>
           <a:xfrm>
             <a:off x="2496240" y="1901880"/>
-            <a:ext cx="2011320" cy="319680"/>
+            <a:ext cx="2010960" cy="319320"/>
           </a:xfrm>
           <a:prstGeom prst="rect">
             <a:avLst/>
@@ -4739,7 +4916,7 @@
                 <a:latin typeface="Consolas"/>
                 <a:ea typeface="Consolas"/>
               </a:rPr>
-              <a:t>02_data_qa_l ayer.i pynb</a:t>
+              <a:t>02_data_qa_layer.ipynb</a:t>
             </a:r>
             <a:endParaRPr lang="es-CO" sz="800" b="0" u="none" strike="noStrike">
               <a:solidFill>
@@ -4761,7 +4938,7 @@
         <p:spPr>
           <a:xfrm>
             <a:off x="2496240" y="2212920"/>
-            <a:ext cx="2011320" cy="456840"/>
+            <a:ext cx="2010960" cy="456480"/>
           </a:xfrm>
           <a:prstGeom prst="rect">
             <a:avLst/>
@@ -4822,7 +4999,7 @@
         <p:spPr>
           <a:xfrm>
             <a:off x="2587680" y="2688480"/>
-            <a:ext cx="1828440" cy="914040"/>
+            <a:ext cx="1828080" cy="913680"/>
           </a:xfrm>
           <a:prstGeom prst="rect">
             <a:avLst/>
@@ -4913,7 +5090,7 @@
         <p:spPr>
           <a:xfrm>
             <a:off x="4626720" y="1371600"/>
-            <a:ext cx="2011320" cy="2331360"/>
+            <a:ext cx="2010960" cy="2331000"/>
           </a:xfrm>
           <a:prstGeom prst="rect">
             <a:avLst/>
@@ -4946,6 +5123,11 @@
             <a:noAutofit/>
           </a:bodyPr>
           <a:p>
+            <a:pPr>
+              <a:lnSpc>
+                <a:spcPct val="100000"/>
+              </a:lnSpc>
+            </a:pPr>
             <a:endParaRPr lang="es-CO" sz="1800" b="0" u="none" strike="noStrike">
               <a:solidFill>
                 <a:srgbClr val="000000"/>
@@ -4966,7 +5148,7 @@
         <p:spPr>
           <a:xfrm>
             <a:off x="4626720" y="1371600"/>
-            <a:ext cx="2011320" cy="502560"/>
+            <a:ext cx="2010960" cy="502200"/>
           </a:xfrm>
           <a:prstGeom prst="rect">
             <a:avLst/>
@@ -4992,6 +5174,11 @@
             <a:noAutofit/>
           </a:bodyPr>
           <a:p>
+            <a:pPr>
+              <a:lnSpc>
+                <a:spcPct val="100000"/>
+              </a:lnSpc>
+            </a:pPr>
             <a:endParaRPr lang="es-CO" sz="1800" b="0" u="none" strike="noStrike">
               <a:solidFill>
                 <a:srgbClr val="ffffff"/>
@@ -5012,7 +5199,7 @@
         <p:spPr>
           <a:xfrm>
             <a:off x="4626720" y="1371600"/>
-            <a:ext cx="2011320" cy="502560"/>
+            <a:ext cx="2010960" cy="502200"/>
           </a:xfrm>
           <a:prstGeom prst="rect">
             <a:avLst/>
@@ -5073,7 +5260,7 @@
         <p:spPr>
           <a:xfrm>
             <a:off x="4626720" y="1901880"/>
-            <a:ext cx="2011320" cy="319680"/>
+            <a:ext cx="2010960" cy="319320"/>
           </a:xfrm>
           <a:prstGeom prst="rect">
             <a:avLst/>
@@ -5112,7 +5299,7 @@
                 <a:latin typeface="Consolas"/>
                 <a:ea typeface="Consolas"/>
               </a:rPr>
-              <a:t>03_eda.i pynb</a:t>
+              <a:t>03_eda.ipynb</a:t>
             </a:r>
             <a:endParaRPr lang="es-CO" sz="800" b="0" u="none" strike="noStrike">
               <a:solidFill>
@@ -5134,7 +5321,7 @@
         <p:spPr>
           <a:xfrm>
             <a:off x="4626720" y="2212920"/>
-            <a:ext cx="2011320" cy="456840"/>
+            <a:ext cx="2010960" cy="456480"/>
           </a:xfrm>
           <a:prstGeom prst="rect">
             <a:avLst/>
@@ -5195,7 +5382,7 @@
         <p:spPr>
           <a:xfrm>
             <a:off x="4718160" y="2688480"/>
-            <a:ext cx="1828440" cy="914040"/>
+            <a:ext cx="1828080" cy="913680"/>
           </a:xfrm>
           <a:prstGeom prst="rect">
             <a:avLst/>
@@ -5286,7 +5473,7 @@
         <p:spPr>
           <a:xfrm>
             <a:off x="6757560" y="1371600"/>
-            <a:ext cx="2011320" cy="2331360"/>
+            <a:ext cx="2010960" cy="2331000"/>
           </a:xfrm>
           <a:prstGeom prst="rect">
             <a:avLst/>
@@ -5319,6 +5506,11 @@
             <a:noAutofit/>
           </a:bodyPr>
           <a:p>
+            <a:pPr>
+              <a:lnSpc>
+                <a:spcPct val="100000"/>
+              </a:lnSpc>
+            </a:pPr>
             <a:endParaRPr lang="es-CO" sz="1800" b="0" u="none" strike="noStrike">
               <a:solidFill>
                 <a:srgbClr val="000000"/>
@@ -5339,7 +5531,7 @@
         <p:spPr>
           <a:xfrm>
             <a:off x="6757560" y="1371600"/>
-            <a:ext cx="2011320" cy="502560"/>
+            <a:ext cx="2010960" cy="502200"/>
           </a:xfrm>
           <a:prstGeom prst="rect">
             <a:avLst/>
@@ -5365,6 +5557,11 @@
             <a:noAutofit/>
           </a:bodyPr>
           <a:p>
+            <a:pPr>
+              <a:lnSpc>
+                <a:spcPct val="100000"/>
+              </a:lnSpc>
+            </a:pPr>
             <a:endParaRPr lang="es-CO" sz="1800" b="0" u="none" strike="noStrike">
               <a:solidFill>
                 <a:srgbClr val="ffffff"/>
@@ -5385,7 +5582,7 @@
         <p:spPr>
           <a:xfrm>
             <a:off x="6757560" y="1371600"/>
-            <a:ext cx="2011320" cy="502560"/>
+            <a:ext cx="2010960" cy="502200"/>
           </a:xfrm>
           <a:prstGeom prst="rect">
             <a:avLst/>
@@ -5446,7 +5643,7 @@
         <p:spPr>
           <a:xfrm>
             <a:off x="6757560" y="1901880"/>
-            <a:ext cx="2011320" cy="319680"/>
+            <a:ext cx="2010960" cy="319320"/>
           </a:xfrm>
           <a:prstGeom prst="rect">
             <a:avLst/>
@@ -5485,7 +5682,7 @@
                 <a:latin typeface="Consolas"/>
                 <a:ea typeface="Consolas"/>
               </a:rPr>
-              <a:t>04_cl uster_ml.i pynb</a:t>
+              <a:t>04_cluster_ml.ipynb</a:t>
             </a:r>
             <a:endParaRPr lang="es-CO" sz="800" b="0" u="none" strike="noStrike">
               <a:solidFill>
@@ -5507,7 +5704,7 @@
         <p:spPr>
           <a:xfrm>
             <a:off x="6757560" y="2212920"/>
-            <a:ext cx="2011320" cy="456840"/>
+            <a:ext cx="2010960" cy="456480"/>
           </a:xfrm>
           <a:prstGeom prst="rect">
             <a:avLst/>
@@ -5568,7 +5765,7 @@
         <p:spPr>
           <a:xfrm>
             <a:off x="6849000" y="2688480"/>
-            <a:ext cx="1828440" cy="914040"/>
+            <a:ext cx="1828080" cy="913680"/>
           </a:xfrm>
           <a:prstGeom prst="rect">
             <a:avLst/>
@@ -5696,7 +5893,7 @@
         <p:spPr>
           <a:xfrm>
             <a:off x="0" y="0"/>
-            <a:ext cx="109440" cy="5143320"/>
+            <a:ext cx="109080" cy="5142960"/>
           </a:xfrm>
           <a:prstGeom prst="rect">
             <a:avLst/>
@@ -5722,6 +5919,11 @@
             <a:noAutofit/>
           </a:bodyPr>
           <a:p>
+            <a:pPr>
+              <a:lnSpc>
+                <a:spcPct val="100000"/>
+              </a:lnSpc>
+            </a:pPr>
             <a:endParaRPr lang="es-CO" sz="1800" b="0" u="none" strike="noStrike">
               <a:solidFill>
                 <a:srgbClr val="ffffff"/>
@@ -5742,7 +5944,7 @@
         <p:spPr>
           <a:xfrm>
             <a:off x="365760" y="255960"/>
-            <a:ext cx="8503560" cy="566640"/>
+            <a:ext cx="8503200" cy="566280"/>
           </a:xfrm>
           <a:prstGeom prst="rect">
             <a:avLst/>
@@ -5803,7 +6005,7 @@
         <p:spPr>
           <a:xfrm>
             <a:off x="365760" y="822960"/>
-            <a:ext cx="8503560" cy="292320"/>
+            <a:ext cx="8503200" cy="291960"/>
           </a:xfrm>
           <a:prstGeom prst="rect">
             <a:avLst/>
@@ -5864,7 +6066,7 @@
         <p:spPr>
           <a:xfrm>
             <a:off x="365760" y="1188720"/>
-            <a:ext cx="2605680" cy="1416960"/>
+            <a:ext cx="2605320" cy="1416600"/>
           </a:xfrm>
           <a:prstGeom prst="rect">
             <a:avLst/>
@@ -5897,6 +6099,11 @@
             <a:noAutofit/>
           </a:bodyPr>
           <a:p>
+            <a:pPr>
+              <a:lnSpc>
+                <a:spcPct val="100000"/>
+              </a:lnSpc>
+            </a:pPr>
             <a:endParaRPr lang="es-CO" sz="1800" b="0" u="none" strike="noStrike">
               <a:solidFill>
                 <a:srgbClr val="000000"/>
@@ -5917,7 +6124,7 @@
         <p:spPr>
           <a:xfrm>
             <a:off x="365760" y="1188720"/>
-            <a:ext cx="2605680" cy="438480"/>
+            <a:ext cx="2605320" cy="438120"/>
           </a:xfrm>
           <a:prstGeom prst="rect">
             <a:avLst/>
@@ -5943,6 +6150,11 @@
             <a:noAutofit/>
           </a:bodyPr>
           <a:p>
+            <a:pPr>
+              <a:lnSpc>
+                <a:spcPct val="100000"/>
+              </a:lnSpc>
+            </a:pPr>
             <a:endParaRPr lang="es-CO" sz="1800" b="0" u="none" strike="noStrike">
               <a:solidFill>
                 <a:srgbClr val="ffffff"/>
@@ -5963,7 +6175,7 @@
         <p:spPr>
           <a:xfrm>
             <a:off x="365760" y="1188720"/>
-            <a:ext cx="2605680" cy="438480"/>
+            <a:ext cx="2605320" cy="438120"/>
           </a:xfrm>
           <a:prstGeom prst="rect">
             <a:avLst/>
@@ -6024,7 +6236,7 @@
         <p:spPr>
           <a:xfrm>
             <a:off x="457200" y="1664280"/>
-            <a:ext cx="2422800" cy="347040"/>
+            <a:ext cx="2422440" cy="346680"/>
           </a:xfrm>
           <a:prstGeom prst="rect">
             <a:avLst/>
@@ -6085,7 +6297,7 @@
         <p:spPr>
           <a:xfrm>
             <a:off x="457200" y="2011680"/>
-            <a:ext cx="2422800" cy="502560"/>
+            <a:ext cx="2422440" cy="502200"/>
           </a:xfrm>
           <a:prstGeom prst="rect">
             <a:avLst/>
@@ -6176,7 +6388,7 @@
         <p:spPr>
           <a:xfrm>
             <a:off x="3136320" y="1188720"/>
-            <a:ext cx="2605680" cy="1416960"/>
+            <a:ext cx="2605320" cy="1416600"/>
           </a:xfrm>
           <a:prstGeom prst="rect">
             <a:avLst/>
@@ -6209,6 +6421,11 @@
             <a:noAutofit/>
           </a:bodyPr>
           <a:p>
+            <a:pPr>
+              <a:lnSpc>
+                <a:spcPct val="100000"/>
+              </a:lnSpc>
+            </a:pPr>
             <a:endParaRPr lang="es-CO" sz="1800" b="0" u="none" strike="noStrike">
               <a:solidFill>
                 <a:srgbClr val="000000"/>
@@ -6229,7 +6446,7 @@
         <p:spPr>
           <a:xfrm>
             <a:off x="3136320" y="1188720"/>
-            <a:ext cx="2605680" cy="438480"/>
+            <a:ext cx="2605320" cy="438120"/>
           </a:xfrm>
           <a:prstGeom prst="rect">
             <a:avLst/>
@@ -6255,6 +6472,11 @@
             <a:noAutofit/>
           </a:bodyPr>
           <a:p>
+            <a:pPr>
+              <a:lnSpc>
+                <a:spcPct val="100000"/>
+              </a:lnSpc>
+            </a:pPr>
             <a:endParaRPr lang="es-CO" sz="1800" b="0" u="none" strike="noStrike">
               <a:solidFill>
                 <a:srgbClr val="ffffff"/>
@@ -6275,7 +6497,7 @@
         <p:spPr>
           <a:xfrm>
             <a:off x="3136320" y="1188720"/>
-            <a:ext cx="2605680" cy="438480"/>
+            <a:ext cx="2605320" cy="438120"/>
           </a:xfrm>
           <a:prstGeom prst="rect">
             <a:avLst/>
@@ -6336,7 +6558,7 @@
         <p:spPr>
           <a:xfrm>
             <a:off x="3227760" y="1664280"/>
-            <a:ext cx="2422800" cy="347040"/>
+            <a:ext cx="2422440" cy="346680"/>
           </a:xfrm>
           <a:prstGeom prst="rect">
             <a:avLst/>
@@ -6397,7 +6619,7 @@
         <p:spPr>
           <a:xfrm>
             <a:off x="3227760" y="2011680"/>
-            <a:ext cx="2422800" cy="502560"/>
+            <a:ext cx="2422440" cy="502200"/>
           </a:xfrm>
           <a:prstGeom prst="rect">
             <a:avLst/>
@@ -6488,7 +6710,7 @@
         <p:spPr>
           <a:xfrm>
             <a:off x="5906880" y="1188720"/>
-            <a:ext cx="2605680" cy="1416960"/>
+            <a:ext cx="2605320" cy="1416600"/>
           </a:xfrm>
           <a:prstGeom prst="rect">
             <a:avLst/>
@@ -6521,6 +6743,11 @@
             <a:noAutofit/>
           </a:bodyPr>
           <a:p>
+            <a:pPr>
+              <a:lnSpc>
+                <a:spcPct val="100000"/>
+              </a:lnSpc>
+            </a:pPr>
             <a:endParaRPr lang="es-CO" sz="1800" b="0" u="none" strike="noStrike">
               <a:solidFill>
                 <a:srgbClr val="000000"/>
@@ -6541,7 +6768,7 @@
         <p:spPr>
           <a:xfrm>
             <a:off x="5906880" y="1188720"/>
-            <a:ext cx="2605680" cy="438480"/>
+            <a:ext cx="2605320" cy="438120"/>
           </a:xfrm>
           <a:prstGeom prst="rect">
             <a:avLst/>
@@ -6567,6 +6794,11 @@
             <a:noAutofit/>
           </a:bodyPr>
           <a:p>
+            <a:pPr>
+              <a:lnSpc>
+                <a:spcPct val="100000"/>
+              </a:lnSpc>
+            </a:pPr>
             <a:endParaRPr lang="es-CO" sz="1800" b="0" u="none" strike="noStrike">
               <a:solidFill>
                 <a:srgbClr val="ffffff"/>
@@ -6587,7 +6819,7 @@
         <p:spPr>
           <a:xfrm>
             <a:off x="5906880" y="1188720"/>
-            <a:ext cx="2605680" cy="438480"/>
+            <a:ext cx="2605320" cy="438120"/>
           </a:xfrm>
           <a:prstGeom prst="rect">
             <a:avLst/>
@@ -6648,7 +6880,7 @@
         <p:spPr>
           <a:xfrm>
             <a:off x="5998320" y="1664280"/>
-            <a:ext cx="2422800" cy="347040"/>
+            <a:ext cx="2422440" cy="346680"/>
           </a:xfrm>
           <a:prstGeom prst="rect">
             <a:avLst/>
@@ -6709,7 +6941,7 @@
         <p:spPr>
           <a:xfrm>
             <a:off x="5998320" y="2011680"/>
-            <a:ext cx="2422800" cy="502560"/>
+            <a:ext cx="2422440" cy="502200"/>
           </a:xfrm>
           <a:prstGeom prst="rect">
             <a:avLst/>
@@ -6800,7 +7032,7 @@
         <p:spPr>
           <a:xfrm>
             <a:off x="365760" y="2606040"/>
-            <a:ext cx="8412120" cy="1005480"/>
+            <a:ext cx="8411760" cy="1005120"/>
           </a:xfrm>
           <a:prstGeom prst="rect">
             <a:avLst/>
@@ -6833,6 +7065,11 @@
             <a:noAutofit/>
           </a:bodyPr>
           <a:p>
+            <a:pPr>
+              <a:lnSpc>
+                <a:spcPct val="100000"/>
+              </a:lnSpc>
+            </a:pPr>
             <a:endParaRPr lang="es-CO" sz="1800" b="0" u="none" strike="noStrike">
               <a:solidFill>
                 <a:srgbClr val="ffffff"/>
@@ -6853,7 +7090,7 @@
         <p:spPr>
           <a:xfrm>
             <a:off x="548640" y="2651760"/>
-            <a:ext cx="1096920" cy="347040"/>
+            <a:ext cx="1096560" cy="346680"/>
           </a:xfrm>
           <a:prstGeom prst="rect">
             <a:avLst/>
@@ -6914,7 +7151,7 @@
         <p:spPr>
           <a:xfrm>
             <a:off x="548640" y="2999160"/>
-            <a:ext cx="8046360" cy="383760"/>
+            <a:ext cx="8046000" cy="383400"/>
           </a:xfrm>
           <a:prstGeom prst="rect">
             <a:avLst/>
@@ -6953,7 +7190,7 @@
                 <a:latin typeface="Consolas"/>
                 <a:ea typeface="Consolas"/>
               </a:rPr>
-              <a:t>compl_cri tical_ratio × 0.50  +  i ngr edi ents_qual it y_scor e × 0.35  +  (coplet eness + taxonomy) × 0.15</a:t>
+              <a:t>compl_critical_ratio × 0.50  +  ingredients_quality_score × 0.35  +  (copleteness + taxonomy) × 0.15</a:t>
             </a:r>
             <a:endParaRPr lang="es-CO" sz="1000" b="0" u="none" strike="noStrike">
               <a:solidFill>
@@ -6975,7 +7212,7 @@
         <p:spPr>
           <a:xfrm>
             <a:off x="1737360" y="2651760"/>
-            <a:ext cx="6857640" cy="347040"/>
+            <a:ext cx="6857280" cy="346680"/>
           </a:xfrm>
           <a:prstGeom prst="rect">
             <a:avLst/>
@@ -7014,7 +7251,7 @@
                 <a:latin typeface="Consolas"/>
                 <a:ea typeface="Consolas"/>
               </a:rPr>
-              <a:t>Si  dupl icado → score = 0.0   ·   Si n I ngr edi entes → scor e = -1</a:t>
+              <a:t>Si  dupl icado → score = 0.0   ·   Sin Ingredientes → score = -1</a:t>
             </a:r>
             <a:endParaRPr lang="es-CO" sz="1000" b="0" u="none" strike="noStrike">
               <a:solidFill>
@@ -7036,7 +7273,7 @@
         <p:spPr>
           <a:xfrm>
             <a:off x="365760" y="3749040"/>
-            <a:ext cx="8412120" cy="548280"/>
+            <a:ext cx="8411760" cy="547920"/>
           </a:xfrm>
           <a:prstGeom prst="rect">
             <a:avLst/>
@@ -7062,6 +7299,11 @@
             <a:noAutofit/>
           </a:bodyPr>
           <a:p>
+            <a:pPr>
+              <a:lnSpc>
+                <a:spcPct val="100000"/>
+              </a:lnSpc>
+            </a:pPr>
             <a:endParaRPr lang="es-CO" sz="1800" b="0" u="none" strike="noStrike">
               <a:solidFill>
                 <a:srgbClr val="000000"/>
@@ -7082,7 +7324,7 @@
         <p:spPr>
           <a:xfrm>
             <a:off x="457200" y="3749040"/>
-            <a:ext cx="8229240" cy="548280"/>
+            <a:ext cx="8228880" cy="547920"/>
           </a:xfrm>
           <a:prstGeom prst="rect">
             <a:avLst/>
@@ -7180,7 +7422,7 @@
         <p:spPr>
           <a:xfrm>
             <a:off x="0" y="0"/>
-            <a:ext cx="109440" cy="5143320"/>
+            <a:ext cx="109080" cy="5142960"/>
           </a:xfrm>
           <a:prstGeom prst="rect">
             <a:avLst/>
@@ -7206,6 +7448,11 @@
             <a:noAutofit/>
           </a:bodyPr>
           <a:p>
+            <a:pPr>
+              <a:lnSpc>
+                <a:spcPct val="100000"/>
+              </a:lnSpc>
+            </a:pPr>
             <a:endParaRPr lang="es-CO" sz="1800" b="0" u="none" strike="noStrike">
               <a:solidFill>
                 <a:srgbClr val="ffffff"/>
@@ -7226,7 +7473,7 @@
         <p:spPr>
           <a:xfrm>
             <a:off x="365760" y="182880"/>
-            <a:ext cx="8503560" cy="529920"/>
+            <a:ext cx="8503200" cy="529560"/>
           </a:xfrm>
           <a:prstGeom prst="rect">
             <a:avLst/>
@@ -7287,7 +7534,7 @@
         <p:spPr>
           <a:xfrm>
             <a:off x="365760" y="713160"/>
-            <a:ext cx="8503560" cy="255600"/>
+            <a:ext cx="8503200" cy="255240"/>
           </a:xfrm>
           <a:prstGeom prst="rect">
             <a:avLst/>
@@ -7352,7 +7599,7 @@
         <p:spPr>
           <a:xfrm>
             <a:off x="365760" y="1078920"/>
-            <a:ext cx="8412120" cy="2175840"/>
+            <a:ext cx="8411760" cy="2175480"/>
           </a:xfrm>
           <a:prstGeom prst="rect">
             <a:avLst/>
@@ -7372,7 +7619,7 @@
         <p:spPr>
           <a:xfrm>
             <a:off x="365760" y="3401640"/>
-            <a:ext cx="2651400" cy="1416960"/>
+            <a:ext cx="2651040" cy="1416600"/>
           </a:xfrm>
           <a:prstGeom prst="rect">
             <a:avLst/>
@@ -7405,6 +7652,11 @@
             <a:noAutofit/>
           </a:bodyPr>
           <a:p>
+            <a:pPr>
+              <a:lnSpc>
+                <a:spcPct val="100000"/>
+              </a:lnSpc>
+            </a:pPr>
             <a:endParaRPr lang="es-CO" sz="1800" b="0" u="none" strike="noStrike">
               <a:solidFill>
                 <a:srgbClr val="000000"/>
@@ -7425,7 +7677,7 @@
         <p:spPr>
           <a:xfrm>
             <a:off x="365760" y="3401640"/>
-            <a:ext cx="2651400" cy="54360"/>
+            <a:ext cx="2651040" cy="54000"/>
           </a:xfrm>
           <a:prstGeom prst="rect">
             <a:avLst/>
@@ -7451,6 +7703,11 @@
             <a:noAutofit/>
           </a:bodyPr>
           <a:p>
+            <a:pPr>
+              <a:lnSpc>
+                <a:spcPct val="100000"/>
+              </a:lnSpc>
+            </a:pPr>
             <a:endParaRPr lang="es-CO" sz="1800" b="0" u="none" strike="noStrike">
               <a:solidFill>
                 <a:srgbClr val="ffffff"/>
@@ -7471,7 +7728,7 @@
         <p:spPr>
           <a:xfrm>
             <a:off x="475560" y="3511440"/>
-            <a:ext cx="2431800" cy="301320"/>
+            <a:ext cx="2431440" cy="300960"/>
           </a:xfrm>
           <a:prstGeom prst="rect">
             <a:avLst/>
@@ -7532,7 +7789,7 @@
         <p:spPr>
           <a:xfrm>
             <a:off x="475560" y="3840480"/>
-            <a:ext cx="2431800" cy="868320"/>
+            <a:ext cx="2431440" cy="867960"/>
           </a:xfrm>
           <a:prstGeom prst="rect">
             <a:avLst/>
@@ -7593,7 +7850,7 @@
         <p:spPr>
           <a:xfrm>
             <a:off x="3154680" y="3401640"/>
-            <a:ext cx="2651400" cy="1416960"/>
+            <a:ext cx="2651040" cy="1416600"/>
           </a:xfrm>
           <a:prstGeom prst="rect">
             <a:avLst/>
@@ -7626,6 +7883,11 @@
             <a:noAutofit/>
           </a:bodyPr>
           <a:p>
+            <a:pPr>
+              <a:lnSpc>
+                <a:spcPct val="100000"/>
+              </a:lnSpc>
+            </a:pPr>
             <a:endParaRPr lang="es-CO" sz="1800" b="0" u="none" strike="noStrike">
               <a:solidFill>
                 <a:srgbClr val="000000"/>
@@ -7646,7 +7908,7 @@
         <p:spPr>
           <a:xfrm>
             <a:off x="3154680" y="3401640"/>
-            <a:ext cx="2651400" cy="54360"/>
+            <a:ext cx="2651040" cy="54000"/>
           </a:xfrm>
           <a:prstGeom prst="rect">
             <a:avLst/>
@@ -7672,6 +7934,11 @@
             <a:noAutofit/>
           </a:bodyPr>
           <a:p>
+            <a:pPr>
+              <a:lnSpc>
+                <a:spcPct val="100000"/>
+              </a:lnSpc>
+            </a:pPr>
             <a:endParaRPr lang="es-CO" sz="1800" b="0" u="none" strike="noStrike">
               <a:solidFill>
                 <a:srgbClr val="ffffff"/>
@@ -7692,7 +7959,7 @@
         <p:spPr>
           <a:xfrm>
             <a:off x="3264480" y="3511440"/>
-            <a:ext cx="2431800" cy="301320"/>
+            <a:ext cx="2431440" cy="300960"/>
           </a:xfrm>
           <a:prstGeom prst="rect">
             <a:avLst/>
@@ -7753,7 +8020,7 @@
         <p:spPr>
           <a:xfrm>
             <a:off x="3264480" y="3840480"/>
-            <a:ext cx="2431800" cy="868320"/>
+            <a:ext cx="2431440" cy="867960"/>
           </a:xfrm>
           <a:prstGeom prst="rect">
             <a:avLst/>
@@ -7814,7 +8081,7 @@
         <p:spPr>
           <a:xfrm>
             <a:off x="5943600" y="3401640"/>
-            <a:ext cx="2651400" cy="1416960"/>
+            <a:ext cx="2651040" cy="1416600"/>
           </a:xfrm>
           <a:prstGeom prst="rect">
             <a:avLst/>
@@ -7847,6 +8114,11 @@
             <a:noAutofit/>
           </a:bodyPr>
           <a:p>
+            <a:pPr>
+              <a:lnSpc>
+                <a:spcPct val="100000"/>
+              </a:lnSpc>
+            </a:pPr>
             <a:endParaRPr lang="es-CO" sz="1800" b="0" u="none" strike="noStrike">
               <a:solidFill>
                 <a:srgbClr val="000000"/>
@@ -7867,7 +8139,7 @@
         <p:spPr>
           <a:xfrm>
             <a:off x="5943600" y="3401640"/>
-            <a:ext cx="2651400" cy="54360"/>
+            <a:ext cx="2651040" cy="54000"/>
           </a:xfrm>
           <a:prstGeom prst="rect">
             <a:avLst/>
@@ -7893,6 +8165,11 @@
             <a:noAutofit/>
           </a:bodyPr>
           <a:p>
+            <a:pPr>
+              <a:lnSpc>
+                <a:spcPct val="100000"/>
+              </a:lnSpc>
+            </a:pPr>
             <a:endParaRPr lang="es-CO" sz="1800" b="0" u="none" strike="noStrike">
               <a:solidFill>
                 <a:srgbClr val="ffffff"/>
@@ -7913,7 +8190,7 @@
         <p:spPr>
           <a:xfrm>
             <a:off x="6053400" y="3511440"/>
-            <a:ext cx="2431800" cy="301320"/>
+            <a:ext cx="2431440" cy="300960"/>
           </a:xfrm>
           <a:prstGeom prst="rect">
             <a:avLst/>
@@ -7974,7 +8251,7 @@
         <p:spPr>
           <a:xfrm>
             <a:off x="6053400" y="3840480"/>
-            <a:ext cx="2431800" cy="868320"/>
+            <a:ext cx="2431440" cy="867960"/>
           </a:xfrm>
           <a:prstGeom prst="rect">
             <a:avLst/>
@@ -8072,7 +8349,7 @@
         <p:spPr>
           <a:xfrm>
             <a:off x="0" y="0"/>
-            <a:ext cx="109440" cy="5143320"/>
+            <a:ext cx="109080" cy="5142960"/>
           </a:xfrm>
           <a:prstGeom prst="rect">
             <a:avLst/>
@@ -8098,6 +8375,11 @@
             <a:noAutofit/>
           </a:bodyPr>
           <a:p>
+            <a:pPr>
+              <a:lnSpc>
+                <a:spcPct val="100000"/>
+              </a:lnSpc>
+            </a:pPr>
             <a:endParaRPr lang="es-CO" sz="1800" b="0" u="none" strike="noStrike">
               <a:solidFill>
                 <a:srgbClr val="ffffff"/>
@@ -8118,7 +8400,7 @@
         <p:spPr>
           <a:xfrm>
             <a:off x="365760" y="182880"/>
-            <a:ext cx="8503560" cy="529920"/>
+            <a:ext cx="8503200" cy="529560"/>
           </a:xfrm>
           <a:prstGeom prst="rect">
             <a:avLst/>
@@ -8179,7 +8461,7 @@
         <p:spPr>
           <a:xfrm>
             <a:off x="365760" y="713160"/>
-            <a:ext cx="8503560" cy="255600"/>
+            <a:ext cx="8503200" cy="255240"/>
           </a:xfrm>
           <a:prstGeom prst="rect">
             <a:avLst/>
@@ -8240,7 +8522,7 @@
         <p:spPr>
           <a:xfrm>
             <a:off x="365760" y="1051560"/>
-            <a:ext cx="2874240" cy="712800"/>
+            <a:ext cx="2873880" cy="712440"/>
           </a:xfrm>
           <a:prstGeom prst="rect">
             <a:avLst/>
@@ -8273,6 +8555,11 @@
             <a:noAutofit/>
           </a:bodyPr>
           <a:p>
+            <a:pPr>
+              <a:lnSpc>
+                <a:spcPct val="100000"/>
+              </a:lnSpc>
+            </a:pPr>
             <a:endParaRPr lang="es-CO" sz="1800" b="0" u="none" strike="noStrike">
               <a:solidFill>
                 <a:srgbClr val="000000"/>
@@ -8293,7 +8580,7 @@
         <p:spPr>
           <a:xfrm>
             <a:off x="365760" y="1051560"/>
-            <a:ext cx="63720" cy="712800"/>
+            <a:ext cx="63360" cy="712440"/>
           </a:xfrm>
           <a:prstGeom prst="rect">
             <a:avLst/>
@@ -8319,6 +8606,11 @@
             <a:noAutofit/>
           </a:bodyPr>
           <a:p>
+            <a:pPr>
+              <a:lnSpc>
+                <a:spcPct val="100000"/>
+              </a:lnSpc>
+            </a:pPr>
             <a:endParaRPr lang="es-CO" sz="1800" b="0" u="none" strike="noStrike">
               <a:solidFill>
                 <a:srgbClr val="ffffff"/>
@@ -8339,7 +8631,7 @@
         <p:spPr>
           <a:xfrm>
             <a:off x="548640" y="1097280"/>
-            <a:ext cx="3748680" cy="301320"/>
+            <a:ext cx="3748320" cy="300960"/>
           </a:xfrm>
           <a:prstGeom prst="rect">
             <a:avLst/>
@@ -8400,7 +8692,7 @@
         <p:spPr>
           <a:xfrm>
             <a:off x="548640" y="1417320"/>
-            <a:ext cx="3748680" cy="255600"/>
+            <a:ext cx="3748320" cy="255240"/>
           </a:xfrm>
           <a:prstGeom prst="rect">
             <a:avLst/>
@@ -8461,7 +8753,7 @@
         <p:spPr>
           <a:xfrm>
             <a:off x="365760" y="1856160"/>
-            <a:ext cx="2874240" cy="712800"/>
+            <a:ext cx="2873880" cy="712440"/>
           </a:xfrm>
           <a:prstGeom prst="rect">
             <a:avLst/>
@@ -8494,6 +8786,11 @@
             <a:noAutofit/>
           </a:bodyPr>
           <a:p>
+            <a:pPr>
+              <a:lnSpc>
+                <a:spcPct val="100000"/>
+              </a:lnSpc>
+            </a:pPr>
             <a:endParaRPr lang="es-CO" sz="1800" b="0" u="none" strike="noStrike">
               <a:solidFill>
                 <a:srgbClr val="000000"/>
@@ -8514,7 +8811,7 @@
         <p:spPr>
           <a:xfrm>
             <a:off x="365760" y="1856160"/>
-            <a:ext cx="63720" cy="712800"/>
+            <a:ext cx="63360" cy="712440"/>
           </a:xfrm>
           <a:prstGeom prst="rect">
             <a:avLst/>
@@ -8540,6 +8837,11 @@
             <a:noAutofit/>
           </a:bodyPr>
           <a:p>
+            <a:pPr>
+              <a:lnSpc>
+                <a:spcPct val="100000"/>
+              </a:lnSpc>
+            </a:pPr>
             <a:endParaRPr lang="es-CO" sz="1800" b="0" u="none" strike="noStrike">
               <a:solidFill>
                 <a:srgbClr val="ffffff"/>
@@ -8560,7 +8862,7 @@
         <p:spPr>
           <a:xfrm>
             <a:off x="548640" y="1901880"/>
-            <a:ext cx="3748680" cy="301320"/>
+            <a:ext cx="3748320" cy="300960"/>
           </a:xfrm>
           <a:prstGeom prst="rect">
             <a:avLst/>
@@ -8621,7 +8923,7 @@
         <p:spPr>
           <a:xfrm>
             <a:off x="548640" y="2221920"/>
-            <a:ext cx="3748680" cy="255600"/>
+            <a:ext cx="3748320" cy="255240"/>
           </a:xfrm>
           <a:prstGeom prst="rect">
             <a:avLst/>
@@ -8682,7 +8984,7 @@
         <p:spPr>
           <a:xfrm>
             <a:off x="365760" y="2660760"/>
-            <a:ext cx="2874240" cy="712800"/>
+            <a:ext cx="2873880" cy="712440"/>
           </a:xfrm>
           <a:prstGeom prst="rect">
             <a:avLst/>
@@ -8715,6 +9017,11 @@
             <a:noAutofit/>
           </a:bodyPr>
           <a:p>
+            <a:pPr>
+              <a:lnSpc>
+                <a:spcPct val="100000"/>
+              </a:lnSpc>
+            </a:pPr>
             <a:endParaRPr lang="es-CO" sz="1800" b="0" u="none" strike="noStrike">
               <a:solidFill>
                 <a:srgbClr val="000000"/>
@@ -8735,7 +9042,7 @@
         <p:spPr>
           <a:xfrm>
             <a:off x="365760" y="2660760"/>
-            <a:ext cx="63720" cy="712800"/>
+            <a:ext cx="63360" cy="712440"/>
           </a:xfrm>
           <a:prstGeom prst="rect">
             <a:avLst/>
@@ -8761,6 +9068,11 @@
             <a:noAutofit/>
           </a:bodyPr>
           <a:p>
+            <a:pPr>
+              <a:lnSpc>
+                <a:spcPct val="100000"/>
+              </a:lnSpc>
+            </a:pPr>
             <a:endParaRPr lang="es-CO" sz="1800" b="0" u="none" strike="noStrike">
               <a:solidFill>
                 <a:srgbClr val="ffffff"/>
@@ -8781,7 +9093,7 @@
         <p:spPr>
           <a:xfrm>
             <a:off x="548640" y="2706480"/>
-            <a:ext cx="3748680" cy="301320"/>
+            <a:ext cx="3748320" cy="300960"/>
           </a:xfrm>
           <a:prstGeom prst="rect">
             <a:avLst/>
@@ -8842,7 +9154,7 @@
         <p:spPr>
           <a:xfrm>
             <a:off x="548640" y="3026520"/>
-            <a:ext cx="3748680" cy="255600"/>
+            <a:ext cx="3748320" cy="255240"/>
           </a:xfrm>
           <a:prstGeom prst="rect">
             <a:avLst/>
@@ -8903,7 +9215,7 @@
         <p:spPr>
           <a:xfrm>
             <a:off x="365760" y="3465720"/>
-            <a:ext cx="2874240" cy="712800"/>
+            <a:ext cx="2873880" cy="712440"/>
           </a:xfrm>
           <a:prstGeom prst="rect">
             <a:avLst/>
@@ -8936,6 +9248,11 @@
             <a:noAutofit/>
           </a:bodyPr>
           <a:p>
+            <a:pPr>
+              <a:lnSpc>
+                <a:spcPct val="100000"/>
+              </a:lnSpc>
+            </a:pPr>
             <a:endParaRPr lang="es-CO" sz="1800" b="0" u="none" strike="noStrike">
               <a:solidFill>
                 <a:srgbClr val="000000"/>
@@ -8956,7 +9273,7 @@
         <p:spPr>
           <a:xfrm>
             <a:off x="365760" y="3465720"/>
-            <a:ext cx="63720" cy="712800"/>
+            <a:ext cx="63360" cy="712440"/>
           </a:xfrm>
           <a:prstGeom prst="rect">
             <a:avLst/>
@@ -8982,6 +9299,11 @@
             <a:noAutofit/>
           </a:bodyPr>
           <a:p>
+            <a:pPr>
+              <a:lnSpc>
+                <a:spcPct val="100000"/>
+              </a:lnSpc>
+            </a:pPr>
             <a:endParaRPr lang="es-CO" sz="1800" b="0" u="none" strike="noStrike">
               <a:solidFill>
                 <a:srgbClr val="ffffff"/>
@@ -9002,7 +9324,7 @@
         <p:spPr>
           <a:xfrm>
             <a:off x="548640" y="3511440"/>
-            <a:ext cx="3748680" cy="301320"/>
+            <a:ext cx="3748320" cy="300960"/>
           </a:xfrm>
           <a:prstGeom prst="rect">
             <a:avLst/>
@@ -9063,7 +9385,7 @@
         <p:spPr>
           <a:xfrm>
             <a:off x="548640" y="3831480"/>
-            <a:ext cx="3748680" cy="255600"/>
+            <a:ext cx="3748320" cy="255240"/>
           </a:xfrm>
           <a:prstGeom prst="rect">
             <a:avLst/>
@@ -9124,7 +9446,7 @@
         <p:spPr>
           <a:xfrm>
             <a:off x="365760" y="4270320"/>
-            <a:ext cx="2874240" cy="712800"/>
+            <a:ext cx="2873880" cy="712440"/>
           </a:xfrm>
           <a:prstGeom prst="rect">
             <a:avLst/>
@@ -9157,6 +9479,11 @@
             <a:noAutofit/>
           </a:bodyPr>
           <a:p>
+            <a:pPr>
+              <a:lnSpc>
+                <a:spcPct val="100000"/>
+              </a:lnSpc>
+            </a:pPr>
             <a:endParaRPr lang="es-CO" sz="1800" b="0" u="none" strike="noStrike">
               <a:solidFill>
                 <a:srgbClr val="000000"/>
@@ -9177,7 +9504,7 @@
         <p:spPr>
           <a:xfrm>
             <a:off x="365760" y="4270320"/>
-            <a:ext cx="63720" cy="712800"/>
+            <a:ext cx="63360" cy="712440"/>
           </a:xfrm>
           <a:prstGeom prst="rect">
             <a:avLst/>
@@ -9203,6 +9530,11 @@
             <a:noAutofit/>
           </a:bodyPr>
           <a:p>
+            <a:pPr>
+              <a:lnSpc>
+                <a:spcPct val="100000"/>
+              </a:lnSpc>
+            </a:pPr>
             <a:endParaRPr lang="es-CO" sz="1800" b="0" u="none" strike="noStrike">
               <a:solidFill>
                 <a:srgbClr val="ffffff"/>
@@ -9223,7 +9555,7 @@
         <p:spPr>
           <a:xfrm>
             <a:off x="548640" y="4316040"/>
-            <a:ext cx="3748680" cy="301320"/>
+            <a:ext cx="3748320" cy="300960"/>
           </a:xfrm>
           <a:prstGeom prst="rect">
             <a:avLst/>
@@ -9284,7 +9616,7 @@
         <p:spPr>
           <a:xfrm>
             <a:off x="548640" y="4636080"/>
-            <a:ext cx="3748680" cy="255600"/>
+            <a:ext cx="3748320" cy="255240"/>
           </a:xfrm>
           <a:prstGeom prst="rect">
             <a:avLst/>
@@ -9349,7 +9681,7 @@
         <p:spPr>
           <a:xfrm>
             <a:off x="3600000" y="865440"/>
-            <a:ext cx="4572000" cy="4174560"/>
+            <a:ext cx="4571640" cy="4174200"/>
           </a:xfrm>
           <a:prstGeom prst="rect">
             <a:avLst/>
@@ -9406,7 +9738,7 @@
         <p:spPr>
           <a:xfrm>
             <a:off x="0" y="0"/>
-            <a:ext cx="109440" cy="5143320"/>
+            <a:ext cx="109080" cy="5142960"/>
           </a:xfrm>
           <a:prstGeom prst="rect">
             <a:avLst/>
@@ -9432,6 +9764,11 @@
             <a:noAutofit/>
           </a:bodyPr>
           <a:p>
+            <a:pPr>
+              <a:lnSpc>
+                <a:spcPct val="100000"/>
+              </a:lnSpc>
+            </a:pPr>
             <a:endParaRPr lang="es-CO" sz="1800" b="0" u="none" strike="noStrike">
               <a:solidFill>
                 <a:srgbClr val="ffffff"/>
@@ -9452,7 +9789,7 @@
         <p:spPr>
           <a:xfrm>
             <a:off x="365760" y="255960"/>
-            <a:ext cx="8503560" cy="566640"/>
+            <a:ext cx="8503200" cy="566280"/>
           </a:xfrm>
           <a:prstGeom prst="rect">
             <a:avLst/>
@@ -9513,7 +9850,7 @@
         <p:spPr>
           <a:xfrm>
             <a:off x="365760" y="1051560"/>
-            <a:ext cx="1371240" cy="1005480"/>
+            <a:ext cx="1370880" cy="1005120"/>
           </a:xfrm>
           <a:prstGeom prst="rect">
             <a:avLst/>
@@ -9546,6 +9883,11 @@
             <a:noAutofit/>
           </a:bodyPr>
           <a:p>
+            <a:pPr>
+              <a:lnSpc>
+                <a:spcPct val="100000"/>
+              </a:lnSpc>
+            </a:pPr>
             <a:endParaRPr lang="es-CO" sz="1800" b="0" u="none" strike="noStrike">
               <a:solidFill>
                 <a:srgbClr val="ffffff"/>
@@ -9566,7 +9908,7 @@
         <p:spPr>
           <a:xfrm>
             <a:off x="365760" y="1051560"/>
-            <a:ext cx="1371240" cy="658080"/>
+            <a:ext cx="1370880" cy="657720"/>
           </a:xfrm>
           <a:prstGeom prst="rect">
             <a:avLst/>
@@ -9627,7 +9969,7 @@
         <p:spPr>
           <a:xfrm>
             <a:off x="365760" y="1710000"/>
-            <a:ext cx="1371240" cy="347040"/>
+            <a:ext cx="1370880" cy="346680"/>
           </a:xfrm>
           <a:prstGeom prst="rect">
             <a:avLst/>
@@ -9688,7 +10030,7 @@
         <p:spPr>
           <a:xfrm>
             <a:off x="1920240" y="1188720"/>
-            <a:ext cx="6857640" cy="776880"/>
+            <a:ext cx="6857280" cy="776520"/>
           </a:xfrm>
           <a:prstGeom prst="rect">
             <a:avLst/>
@@ -9779,7 +10121,7 @@
         <p:spPr>
           <a:xfrm>
             <a:off x="365760" y="2286000"/>
-            <a:ext cx="1371240" cy="1005480"/>
+            <a:ext cx="1370880" cy="1005120"/>
           </a:xfrm>
           <a:prstGeom prst="rect">
             <a:avLst/>
@@ -9812,6 +10154,11 @@
             <a:noAutofit/>
           </a:bodyPr>
           <a:p>
+            <a:pPr>
+              <a:lnSpc>
+                <a:spcPct val="100000"/>
+              </a:lnSpc>
+            </a:pPr>
             <a:endParaRPr lang="es-CO" sz="1800" b="0" u="none" strike="noStrike">
               <a:solidFill>
                 <a:srgbClr val="ffffff"/>
@@ -9832,7 +10179,7 @@
         <p:spPr>
           <a:xfrm>
             <a:off x="365760" y="2286000"/>
-            <a:ext cx="1371240" cy="658080"/>
+            <a:ext cx="1370880" cy="657720"/>
           </a:xfrm>
           <a:prstGeom prst="rect">
             <a:avLst/>
@@ -9893,7 +10240,7 @@
         <p:spPr>
           <a:xfrm>
             <a:off x="365760" y="2944440"/>
-            <a:ext cx="1371240" cy="347040"/>
+            <a:ext cx="1370880" cy="346680"/>
           </a:xfrm>
           <a:prstGeom prst="rect">
             <a:avLst/>
@@ -9954,7 +10301,7 @@
         <p:spPr>
           <a:xfrm>
             <a:off x="1920240" y="2423160"/>
-            <a:ext cx="6857640" cy="776880"/>
+            <a:ext cx="6857280" cy="776520"/>
           </a:xfrm>
           <a:prstGeom prst="rect">
             <a:avLst/>
@@ -10045,7 +10392,7 @@
         <p:spPr>
           <a:xfrm>
             <a:off x="365760" y="3520440"/>
-            <a:ext cx="1371240" cy="1005480"/>
+            <a:ext cx="1370880" cy="1005120"/>
           </a:xfrm>
           <a:prstGeom prst="rect">
             <a:avLst/>
@@ -10078,6 +10425,11 @@
             <a:noAutofit/>
           </a:bodyPr>
           <a:p>
+            <a:pPr>
+              <a:lnSpc>
+                <a:spcPct val="100000"/>
+              </a:lnSpc>
+            </a:pPr>
             <a:endParaRPr lang="es-CO" sz="1800" b="0" u="none" strike="noStrike">
               <a:solidFill>
                 <a:srgbClr val="ffffff"/>
@@ -10098,7 +10450,7 @@
         <p:spPr>
           <a:xfrm>
             <a:off x="365760" y="3520440"/>
-            <a:ext cx="1371240" cy="658080"/>
+            <a:ext cx="1370880" cy="657720"/>
           </a:xfrm>
           <a:prstGeom prst="rect">
             <a:avLst/>
@@ -10159,7 +10511,7 @@
         <p:spPr>
           <a:xfrm>
             <a:off x="365760" y="4178880"/>
-            <a:ext cx="1371240" cy="347040"/>
+            <a:ext cx="1370880" cy="346680"/>
           </a:xfrm>
           <a:prstGeom prst="rect">
             <a:avLst/>
@@ -10220,7 +10572,7 @@
         <p:spPr>
           <a:xfrm>
             <a:off x="1920240" y="3657600"/>
-            <a:ext cx="6857640" cy="776880"/>
+            <a:ext cx="6857280" cy="776520"/>
           </a:xfrm>
           <a:prstGeom prst="rect">
             <a:avLst/>
@@ -10348,7 +10700,7 @@
         <p:spPr>
           <a:xfrm>
             <a:off x="0" y="0"/>
-            <a:ext cx="164160" cy="5143320"/>
+            <a:ext cx="163800" cy="5142960"/>
           </a:xfrm>
           <a:prstGeom prst="rect">
             <a:avLst/>
@@ -10374,6 +10726,11 @@
             <a:noAutofit/>
           </a:bodyPr>
           <a:p>
+            <a:pPr>
+              <a:lnSpc>
+                <a:spcPct val="100000"/>
+              </a:lnSpc>
+            </a:pPr>
             <a:endParaRPr lang="es-CO" sz="1800" b="0" u="none" strike="noStrike">
               <a:solidFill>
                 <a:srgbClr val="ffffff"/>
@@ -10394,7 +10751,7 @@
         <p:spPr>
           <a:xfrm>
             <a:off x="164520" y="0"/>
-            <a:ext cx="54360" cy="5143320"/>
+            <a:ext cx="54000" cy="5142960"/>
           </a:xfrm>
           <a:prstGeom prst="rect">
             <a:avLst/>
@@ -10420,6 +10777,11 @@
             <a:noAutofit/>
           </a:bodyPr>
           <a:p>
+            <a:pPr>
+              <a:lnSpc>
+                <a:spcPct val="100000"/>
+              </a:lnSpc>
+            </a:pPr>
             <a:endParaRPr lang="es-CO" sz="1800" b="0" u="none" strike="noStrike">
               <a:solidFill>
                 <a:srgbClr val="ffffff"/>
@@ -10440,7 +10802,7 @@
         <p:spPr>
           <a:xfrm>
             <a:off x="548640" y="1005840"/>
-            <a:ext cx="8229240" cy="914040"/>
+            <a:ext cx="8228880" cy="913680"/>
           </a:xfrm>
           <a:prstGeom prst="rect">
             <a:avLst/>
@@ -10501,7 +10863,7 @@
         <p:spPr>
           <a:xfrm>
             <a:off x="548640" y="2057400"/>
-            <a:ext cx="8229240" cy="1234080"/>
+            <a:ext cx="8228880" cy="1233720"/>
           </a:xfrm>
           <a:prstGeom prst="rect">
             <a:avLst/>
@@ -10665,7 +11027,7 @@
         <p:spPr>
           <a:xfrm>
             <a:off x="548640" y="3566160"/>
-            <a:ext cx="8229240" cy="365400"/>
+            <a:ext cx="8228880" cy="365040"/>
           </a:xfrm>
           <a:prstGeom prst="rect">
             <a:avLst/>
@@ -10726,7 +11088,7 @@
         <p:spPr>
           <a:xfrm>
             <a:off x="548640" y="3977640"/>
-            <a:ext cx="8229240" cy="319680"/>
+            <a:ext cx="8228880" cy="319320"/>
           </a:xfrm>
           <a:prstGeom prst="rect">
             <a:avLst/>
@@ -10778,36 +11140,6 @@
           </a:p>
         </p:txBody>
       </p:sp>
-    </p:spTree>
-  </p:cSld>
-  <mc:AlternateContent>
-    <mc:Choice Requires="p14">
-      <p:transition spd="slow" p14:dur="2000"/>
-    </mc:Choice>
-    <mc:Fallback>
-      <p:transition spd="slow"/>
-    </mc:Fallback>
-  </mc:AlternateContent>
-</p:sld>
-</file>
-
-<file path=ppt/slides/slide9.xml><?xml version="1.0" encoding="utf-8"?>
-<p:sld xmlns:a="http://schemas.openxmlformats.org/drawingml/2006/main" xmlns:p="http://schemas.openxmlformats.org/presentationml/2006/main" xmlns:r="http://schemas.openxmlformats.org/officeDocument/2006/relationships" xmlns:p14="http://schemas.microsoft.com/office/powerpoint/2010/main" xmlns:p15="http://schemas.microsoft.com/office/powerpoint/2012/main" xmlns:mc="http://schemas.openxmlformats.org/markup-compatibility/2006">
-  <p:cSld>
-    <p:spTree>
-      <p:nvGrpSpPr>
-        <p:cNvPr id="1" name=""/>
-        <p:cNvGrpSpPr/>
-        <p:nvPr/>
-      </p:nvGrpSpPr>
-      <p:grpSpPr>
-        <a:xfrm>
-          <a:off x="0" y="0"/>
-          <a:ext cx="0" cy="0"/>
-          <a:chOff x="0" y="0"/>
-          <a:chExt cx="0" cy="0"/>
-        </a:xfrm>
-      </p:grpSpPr>
     </p:spTree>
   </p:cSld>
   <mc:AlternateContent>

--- a/DataQuality_OpenBeautyFacts.pptx
+++ b/DataQuality_OpenBeautyFacts.pptx
@@ -16,6 +16,7 @@
     <p:sldId id="261" r:id="rId9"/>
     <p:sldId id="262" r:id="rId10"/>
     <p:sldId id="263" r:id="rId11"/>
+    <p:sldId id="264" r:id="rId12"/>
   </p:sldIdLst>
   <p:sldSz cx="9144000" cy="5143500"/>
   <p:notesSz cx="5143500" cy="9144000"/>
@@ -77,51 +78,7 @@
                 <a:uFillTx/>
                 <a:latin typeface="Arial"/>
               </a:rPr>
-              <a:t>Click </a:t>
-            </a:r>
-            <a:r>
-              <a:rPr lang="es-CO" sz="4400" b="0" u="none" strike="noStrike">
-                <a:solidFill>
-                  <a:srgbClr val="000000"/>
-                </a:solidFill>
-                <a:effectLst/>
-                <a:uFillTx/>
-                <a:latin typeface="Arial"/>
-              </a:rPr>
-              <a:t>to </a:t>
-            </a:r>
-            <a:r>
-              <a:rPr lang="es-CO" sz="4400" b="0" u="none" strike="noStrike">
-                <a:solidFill>
-                  <a:srgbClr val="000000"/>
-                </a:solidFill>
-                <a:effectLst/>
-                <a:uFillTx/>
-                <a:latin typeface="Arial"/>
-              </a:rPr>
-              <a:t>mov</a:t>
-            </a:r>
-            <a:r>
-              <a:rPr lang="es-CO" sz="4400" b="0" u="none" strike="noStrike">
-                <a:solidFill>
-                  <a:srgbClr val="000000"/>
-                </a:solidFill>
-                <a:effectLst/>
-                <a:uFillTx/>
-                <a:latin typeface="Arial"/>
-              </a:rPr>
-              <a:t>e the </a:t>
-            </a:r>
-            <a:r>
-              <a:rPr lang="es-CO" sz="4400" b="0" u="none" strike="noStrike">
-                <a:solidFill>
-                  <a:srgbClr val="000000"/>
-                </a:solidFill>
-                <a:effectLst/>
-                <a:uFillTx/>
-                <a:latin typeface="Arial"/>
-              </a:rPr>
-              <a:t>slide</a:t>
+              <a:t>Click to move the slide</a:t>
             </a:r>
             <a:endParaRPr lang="es-CO" sz="4400" b="0" u="none" strike="noStrike">
               <a:solidFill>
@@ -174,7 +131,29 @@
                 <a:uFillTx/>
                 <a:latin typeface="Arial"/>
               </a:rPr>
-              <a:t>Click to edit the notes format</a:t>
+              <a:t>Click to edit </a:t>
+            </a:r>
+            <a:r>
+              <a:rPr lang="es-CO" sz="2000" b="0" u="none" strike="noStrike">
+                <a:solidFill>
+                  <a:srgbClr val="000000"/>
+                </a:solidFill>
+                <a:effectLst/>
+                <a:uFillTx/>
+                <a:latin typeface="Arial"/>
+              </a:rPr>
+              <a:t>the notes </a:t>
+            </a:r>
+            <a:r>
+              <a:rPr lang="es-CO" sz="2000" b="0" u="none" strike="noStrike">
+                <a:solidFill>
+                  <a:srgbClr val="000000"/>
+                </a:solidFill>
+                <a:effectLst/>
+                <a:uFillTx/>
+                <a:latin typeface="Arial"/>
+              </a:rPr>
+              <a:t>format</a:t>
             </a:r>
             <a:endParaRPr lang="es-CO" sz="2000" b="0" u="none" strike="noStrike">
               <a:solidFill>
@@ -416,7 +395,7 @@
             <a:pPr indent="0" algn="r">
               <a:buNone/>
             </a:pPr>
-            <a:fld id="{280C7770-D7B9-4D3E-A073-4157342BC579}" type="slidenum">
+            <a:fld id="{55B61BDD-F815-4A2A-BCDB-B76E97476A28}" type="slidenum">
               <a:rPr lang="es-CO" sz="1400" b="0" u="none" strike="noStrike">
                 <a:solidFill>
                   <a:srgbClr val="000000"/>
@@ -463,7 +442,7 @@
       </p:grpSpPr>
       <p:sp>
         <p:nvSpPr>
-          <p:cNvPr id="153" name="PlaceHolder 1"/>
+          <p:cNvPr id="178" name="PlaceHolder 1"/>
           <p:cNvSpPr>
             <a:spLocks noGrp="1"/>
           </p:cNvSpPr>
@@ -474,19 +453,19 @@
         <p:spPr>
           <a:xfrm>
             <a:off x="685800" y="1143000"/>
-            <a:ext cx="5485680" cy="3085560"/>
-          </a:xfrm>
-          <a:prstGeom prst="rect">
-            <a:avLst/>
-          </a:prstGeom>
-          <a:ln w="0">
-            <a:noFill/>
-          </a:ln>
-        </p:spPr>
-      </p:sp>
-      <p:sp>
-        <p:nvSpPr>
-          <p:cNvPr id="154" name="PlaceHolder 2"/>
+            <a:ext cx="5485320" cy="3085200"/>
+          </a:xfrm>
+          <a:prstGeom prst="rect">
+            <a:avLst/>
+          </a:prstGeom>
+          <a:ln w="0">
+            <a:noFill/>
+          </a:ln>
+        </p:spPr>
+      </p:sp>
+      <p:sp>
+        <p:nvSpPr>
+          <p:cNvPr id="179" name="PlaceHolder 2"/>
           <p:cNvSpPr>
             <a:spLocks noGrp="1"/>
           </p:cNvSpPr>
@@ -497,7 +476,7 @@
         <p:spPr>
           <a:xfrm>
             <a:off x="685800" y="4400640"/>
-            <a:ext cx="5485680" cy="3599640"/>
+            <a:ext cx="5485320" cy="3599280"/>
           </a:xfrm>
           <a:prstGeom prst="rect">
             <a:avLst/>
@@ -528,7 +507,7 @@
       </p:sp>
       <p:sp>
         <p:nvSpPr>
-          <p:cNvPr id="155" name="PlaceHolder 3"/>
+          <p:cNvPr id="180" name="PlaceHolder 3"/>
           <p:cNvSpPr>
             <a:spLocks noGrp="1"/>
           </p:cNvSpPr>
@@ -539,7 +518,7 @@
         <p:spPr>
           <a:xfrm>
             <a:off x="3884760" y="8685360"/>
-            <a:ext cx="2971080" cy="457920"/>
+            <a:ext cx="2970720" cy="457560"/>
           </a:xfrm>
           <a:prstGeom prst="rect">
             <a:avLst/>
@@ -583,7 +562,7 @@
                 <a:tab algn="l" pos="0"/>
               </a:tabLst>
             </a:pPr>
-            <a:fld id="{E261839E-9F76-426D-994A-248B9797199D}" type="slidenum">
+            <a:fld id="{B61059A2-23BB-46B8-BC9B-3657015A3314}" type="slidenum">
               <a:rPr lang="en-US" sz="1200" b="0" u="none" strike="noStrike">
                 <a:solidFill>
                   <a:schemeClr val="dk1"/>
@@ -630,7 +609,7 @@
       </p:grpSpPr>
       <p:sp>
         <p:nvSpPr>
-          <p:cNvPr id="156" name="PlaceHolder 1"/>
+          <p:cNvPr id="181" name="PlaceHolder 1"/>
           <p:cNvSpPr>
             <a:spLocks noGrp="1"/>
           </p:cNvSpPr>
@@ -641,19 +620,19 @@
         <p:spPr>
           <a:xfrm>
             <a:off x="685800" y="1143000"/>
-            <a:ext cx="5485680" cy="3085560"/>
-          </a:xfrm>
-          <a:prstGeom prst="rect">
-            <a:avLst/>
-          </a:prstGeom>
-          <a:ln w="0">
-            <a:noFill/>
-          </a:ln>
-        </p:spPr>
-      </p:sp>
-      <p:sp>
-        <p:nvSpPr>
-          <p:cNvPr id="157" name="PlaceHolder 2"/>
+            <a:ext cx="5485320" cy="3085200"/>
+          </a:xfrm>
+          <a:prstGeom prst="rect">
+            <a:avLst/>
+          </a:prstGeom>
+          <a:ln w="0">
+            <a:noFill/>
+          </a:ln>
+        </p:spPr>
+      </p:sp>
+      <p:sp>
+        <p:nvSpPr>
+          <p:cNvPr id="182" name="PlaceHolder 2"/>
           <p:cNvSpPr>
             <a:spLocks noGrp="1"/>
           </p:cNvSpPr>
@@ -664,7 +643,7 @@
         <p:spPr>
           <a:xfrm>
             <a:off x="685800" y="4400640"/>
-            <a:ext cx="5485680" cy="3599640"/>
+            <a:ext cx="5485320" cy="3599280"/>
           </a:xfrm>
           <a:prstGeom prst="rect">
             <a:avLst/>
@@ -695,7 +674,7 @@
       </p:sp>
       <p:sp>
         <p:nvSpPr>
-          <p:cNvPr id="158" name="PlaceHolder 3"/>
+          <p:cNvPr id="183" name="PlaceHolder 3"/>
           <p:cNvSpPr>
             <a:spLocks noGrp="1"/>
           </p:cNvSpPr>
@@ -706,7 +685,7 @@
         <p:spPr>
           <a:xfrm>
             <a:off x="3884760" y="8685360"/>
-            <a:ext cx="2971080" cy="457920"/>
+            <a:ext cx="2970720" cy="457560"/>
           </a:xfrm>
           <a:prstGeom prst="rect">
             <a:avLst/>
@@ -750,7 +729,7 @@
                 <a:tab algn="l" pos="0"/>
               </a:tabLst>
             </a:pPr>
-            <a:fld id="{4F2F164E-24D7-4191-934A-B916155BD38D}" type="slidenum">
+            <a:fld id="{9BCD7145-4421-4FAF-BA9C-327D9D9A32E7}" type="slidenum">
               <a:rPr lang="en-US" sz="1200" b="0" u="none" strike="noStrike">
                 <a:solidFill>
                   <a:schemeClr val="dk1"/>
@@ -797,7 +776,7 @@
       </p:grpSpPr>
       <p:sp>
         <p:nvSpPr>
-          <p:cNvPr id="159" name="PlaceHolder 1"/>
+          <p:cNvPr id="184" name="PlaceHolder 1"/>
           <p:cNvSpPr>
             <a:spLocks noGrp="1"/>
           </p:cNvSpPr>
@@ -808,19 +787,19 @@
         <p:spPr>
           <a:xfrm>
             <a:off x="685800" y="1143000"/>
-            <a:ext cx="5485680" cy="3085560"/>
-          </a:xfrm>
-          <a:prstGeom prst="rect">
-            <a:avLst/>
-          </a:prstGeom>
-          <a:ln w="0">
-            <a:noFill/>
-          </a:ln>
-        </p:spPr>
-      </p:sp>
-      <p:sp>
-        <p:nvSpPr>
-          <p:cNvPr id="160" name="PlaceHolder 2"/>
+            <a:ext cx="5485320" cy="3085200"/>
+          </a:xfrm>
+          <a:prstGeom prst="rect">
+            <a:avLst/>
+          </a:prstGeom>
+          <a:ln w="0">
+            <a:noFill/>
+          </a:ln>
+        </p:spPr>
+      </p:sp>
+      <p:sp>
+        <p:nvSpPr>
+          <p:cNvPr id="185" name="PlaceHolder 2"/>
           <p:cNvSpPr>
             <a:spLocks noGrp="1"/>
           </p:cNvSpPr>
@@ -831,7 +810,7 @@
         <p:spPr>
           <a:xfrm>
             <a:off x="685800" y="4400640"/>
-            <a:ext cx="5485680" cy="3599640"/>
+            <a:ext cx="5485320" cy="3599280"/>
           </a:xfrm>
           <a:prstGeom prst="rect">
             <a:avLst/>
@@ -862,7 +841,7 @@
       </p:sp>
       <p:sp>
         <p:nvSpPr>
-          <p:cNvPr id="161" name="PlaceHolder 3"/>
+          <p:cNvPr id="186" name="PlaceHolder 3"/>
           <p:cNvSpPr>
             <a:spLocks noGrp="1"/>
           </p:cNvSpPr>
@@ -873,7 +852,7 @@
         <p:spPr>
           <a:xfrm>
             <a:off x="3884760" y="8685360"/>
-            <a:ext cx="2971080" cy="457920"/>
+            <a:ext cx="2970720" cy="457560"/>
           </a:xfrm>
           <a:prstGeom prst="rect">
             <a:avLst/>
@@ -917,7 +896,7 @@
                 <a:tab algn="l" pos="0"/>
               </a:tabLst>
             </a:pPr>
-            <a:fld id="{EB2CE9D7-F6AD-4183-9B45-009406CE5468}" type="slidenum">
+            <a:fld id="{C75843F8-D1E4-43B3-ABC4-99E923C98C3A}" type="slidenum">
               <a:rPr lang="en-US" sz="1200" b="0" u="none" strike="noStrike">
                 <a:solidFill>
                   <a:schemeClr val="dk1"/>
@@ -964,7 +943,7 @@
       </p:grpSpPr>
       <p:sp>
         <p:nvSpPr>
-          <p:cNvPr id="162" name="PlaceHolder 1"/>
+          <p:cNvPr id="187" name="PlaceHolder 1"/>
           <p:cNvSpPr>
             <a:spLocks noGrp="1"/>
           </p:cNvSpPr>
@@ -975,19 +954,19 @@
         <p:spPr>
           <a:xfrm>
             <a:off x="685800" y="1143000"/>
-            <a:ext cx="5485680" cy="3085560"/>
-          </a:xfrm>
-          <a:prstGeom prst="rect">
-            <a:avLst/>
-          </a:prstGeom>
-          <a:ln w="0">
-            <a:noFill/>
-          </a:ln>
-        </p:spPr>
-      </p:sp>
-      <p:sp>
-        <p:nvSpPr>
-          <p:cNvPr id="163" name="PlaceHolder 2"/>
+            <a:ext cx="5485320" cy="3085200"/>
+          </a:xfrm>
+          <a:prstGeom prst="rect">
+            <a:avLst/>
+          </a:prstGeom>
+          <a:ln w="0">
+            <a:noFill/>
+          </a:ln>
+        </p:spPr>
+      </p:sp>
+      <p:sp>
+        <p:nvSpPr>
+          <p:cNvPr id="188" name="PlaceHolder 2"/>
           <p:cNvSpPr>
             <a:spLocks noGrp="1"/>
           </p:cNvSpPr>
@@ -998,7 +977,7 @@
         <p:spPr>
           <a:xfrm>
             <a:off x="685800" y="4400640"/>
-            <a:ext cx="5485680" cy="3599640"/>
+            <a:ext cx="5485320" cy="3599280"/>
           </a:xfrm>
           <a:prstGeom prst="rect">
             <a:avLst/>
@@ -1029,7 +1008,7 @@
       </p:sp>
       <p:sp>
         <p:nvSpPr>
-          <p:cNvPr id="164" name="PlaceHolder 3"/>
+          <p:cNvPr id="189" name="PlaceHolder 3"/>
           <p:cNvSpPr>
             <a:spLocks noGrp="1"/>
           </p:cNvSpPr>
@@ -1040,7 +1019,7 @@
         <p:spPr>
           <a:xfrm>
             <a:off x="3884760" y="8685360"/>
-            <a:ext cx="2971080" cy="457920"/>
+            <a:ext cx="2970720" cy="457560"/>
           </a:xfrm>
           <a:prstGeom prst="rect">
             <a:avLst/>
@@ -1084,7 +1063,7 @@
                 <a:tab algn="l" pos="0"/>
               </a:tabLst>
             </a:pPr>
-            <a:fld id="{185CDE13-BD21-4DF4-B16F-ACA6EB8E7981}" type="slidenum">
+            <a:fld id="{86A0DDC4-2C29-4C05-BFD9-D312D13B3DB9}" type="slidenum">
               <a:rPr lang="en-US" sz="1200" b="0" u="none" strike="noStrike">
                 <a:solidFill>
                   <a:schemeClr val="dk1"/>
@@ -1131,7 +1110,7 @@
       </p:grpSpPr>
       <p:sp>
         <p:nvSpPr>
-          <p:cNvPr id="165" name="PlaceHolder 1"/>
+          <p:cNvPr id="190" name="PlaceHolder 1"/>
           <p:cNvSpPr>
             <a:spLocks noGrp="1"/>
           </p:cNvSpPr>
@@ -1142,19 +1121,19 @@
         <p:spPr>
           <a:xfrm>
             <a:off x="685800" y="1143000"/>
-            <a:ext cx="5485680" cy="3085560"/>
-          </a:xfrm>
-          <a:prstGeom prst="rect">
-            <a:avLst/>
-          </a:prstGeom>
-          <a:ln w="0">
-            <a:noFill/>
-          </a:ln>
-        </p:spPr>
-      </p:sp>
-      <p:sp>
-        <p:nvSpPr>
-          <p:cNvPr id="166" name="PlaceHolder 2"/>
+            <a:ext cx="5485320" cy="3085200"/>
+          </a:xfrm>
+          <a:prstGeom prst="rect">
+            <a:avLst/>
+          </a:prstGeom>
+          <a:ln w="0">
+            <a:noFill/>
+          </a:ln>
+        </p:spPr>
+      </p:sp>
+      <p:sp>
+        <p:nvSpPr>
+          <p:cNvPr id="191" name="PlaceHolder 2"/>
           <p:cNvSpPr>
             <a:spLocks noGrp="1"/>
           </p:cNvSpPr>
@@ -1165,7 +1144,7 @@
         <p:spPr>
           <a:xfrm>
             <a:off x="685800" y="4400640"/>
-            <a:ext cx="5485680" cy="3599640"/>
+            <a:ext cx="5485320" cy="3599280"/>
           </a:xfrm>
           <a:prstGeom prst="rect">
             <a:avLst/>
@@ -1196,7 +1175,7 @@
       </p:sp>
       <p:sp>
         <p:nvSpPr>
-          <p:cNvPr id="167" name="PlaceHolder 3"/>
+          <p:cNvPr id="192" name="PlaceHolder 3"/>
           <p:cNvSpPr>
             <a:spLocks noGrp="1"/>
           </p:cNvSpPr>
@@ -1207,7 +1186,7 @@
         <p:spPr>
           <a:xfrm>
             <a:off x="3884760" y="8685360"/>
-            <a:ext cx="2971080" cy="457920"/>
+            <a:ext cx="2970720" cy="457560"/>
           </a:xfrm>
           <a:prstGeom prst="rect">
             <a:avLst/>
@@ -1251,7 +1230,7 @@
                 <a:tab algn="l" pos="0"/>
               </a:tabLst>
             </a:pPr>
-            <a:fld id="{1E5ADDF2-125C-4358-A2FD-FAEDDE331729}" type="slidenum">
+            <a:fld id="{423B9B58-9779-425D-A397-0BD60142120C}" type="slidenum">
               <a:rPr lang="en-US" sz="1200" b="0" u="none" strike="noStrike">
                 <a:solidFill>
                   <a:schemeClr val="dk1"/>
@@ -1298,7 +1277,7 @@
       </p:grpSpPr>
       <p:sp>
         <p:nvSpPr>
-          <p:cNvPr id="168" name="PlaceHolder 1"/>
+          <p:cNvPr id="193" name="PlaceHolder 1"/>
           <p:cNvSpPr>
             <a:spLocks noGrp="1"/>
           </p:cNvSpPr>
@@ -1309,19 +1288,19 @@
         <p:spPr>
           <a:xfrm>
             <a:off x="685800" y="1143000"/>
-            <a:ext cx="5485680" cy="3085560"/>
-          </a:xfrm>
-          <a:prstGeom prst="rect">
-            <a:avLst/>
-          </a:prstGeom>
-          <a:ln w="0">
-            <a:noFill/>
-          </a:ln>
-        </p:spPr>
-      </p:sp>
-      <p:sp>
-        <p:nvSpPr>
-          <p:cNvPr id="169" name="PlaceHolder 2"/>
+            <a:ext cx="5485320" cy="3085200"/>
+          </a:xfrm>
+          <a:prstGeom prst="rect">
+            <a:avLst/>
+          </a:prstGeom>
+          <a:ln w="0">
+            <a:noFill/>
+          </a:ln>
+        </p:spPr>
+      </p:sp>
+      <p:sp>
+        <p:nvSpPr>
+          <p:cNvPr id="194" name="PlaceHolder 2"/>
           <p:cNvSpPr>
             <a:spLocks noGrp="1"/>
           </p:cNvSpPr>
@@ -1332,7 +1311,7 @@
         <p:spPr>
           <a:xfrm>
             <a:off x="685800" y="4400640"/>
-            <a:ext cx="5485680" cy="3599640"/>
+            <a:ext cx="5485320" cy="3599280"/>
           </a:xfrm>
           <a:prstGeom prst="rect">
             <a:avLst/>
@@ -1363,7 +1342,7 @@
       </p:sp>
       <p:sp>
         <p:nvSpPr>
-          <p:cNvPr id="170" name="PlaceHolder 3"/>
+          <p:cNvPr id="195" name="PlaceHolder 3"/>
           <p:cNvSpPr>
             <a:spLocks noGrp="1"/>
           </p:cNvSpPr>
@@ -1374,7 +1353,7 @@
         <p:spPr>
           <a:xfrm>
             <a:off x="3884760" y="8685360"/>
-            <a:ext cx="2971080" cy="457920"/>
+            <a:ext cx="2970720" cy="457560"/>
           </a:xfrm>
           <a:prstGeom prst="rect">
             <a:avLst/>
@@ -1418,7 +1397,7 @@
                 <a:tab algn="l" pos="0"/>
               </a:tabLst>
             </a:pPr>
-            <a:fld id="{1B57E025-960D-4CF2-AC8B-17622B36AD75}" type="slidenum">
+            <a:fld id="{24AA97C6-DD0C-4DA5-97D4-66F1E3F13858}" type="slidenum">
               <a:rPr lang="en-US" sz="1200" b="0" u="none" strike="noStrike">
                 <a:solidFill>
                   <a:schemeClr val="dk1"/>
@@ -1465,7 +1444,7 @@
       </p:grpSpPr>
       <p:sp>
         <p:nvSpPr>
-          <p:cNvPr id="171" name="PlaceHolder 1"/>
+          <p:cNvPr id="196" name="PlaceHolder 1"/>
           <p:cNvSpPr>
             <a:spLocks noGrp="1"/>
           </p:cNvSpPr>
@@ -1476,19 +1455,19 @@
         <p:spPr>
           <a:xfrm>
             <a:off x="685800" y="1143000"/>
-            <a:ext cx="5485680" cy="3085560"/>
-          </a:xfrm>
-          <a:prstGeom prst="rect">
-            <a:avLst/>
-          </a:prstGeom>
-          <a:ln w="0">
-            <a:noFill/>
-          </a:ln>
-        </p:spPr>
-      </p:sp>
-      <p:sp>
-        <p:nvSpPr>
-          <p:cNvPr id="172" name="PlaceHolder 2"/>
+            <a:ext cx="5485320" cy="3085200"/>
+          </a:xfrm>
+          <a:prstGeom prst="rect">
+            <a:avLst/>
+          </a:prstGeom>
+          <a:ln w="0">
+            <a:noFill/>
+          </a:ln>
+        </p:spPr>
+      </p:sp>
+      <p:sp>
+        <p:nvSpPr>
+          <p:cNvPr id="197" name="PlaceHolder 2"/>
           <p:cNvSpPr>
             <a:spLocks noGrp="1"/>
           </p:cNvSpPr>
@@ -1499,7 +1478,7 @@
         <p:spPr>
           <a:xfrm>
             <a:off x="685800" y="4400640"/>
-            <a:ext cx="5485680" cy="3599640"/>
+            <a:ext cx="5485320" cy="3599280"/>
           </a:xfrm>
           <a:prstGeom prst="rect">
             <a:avLst/>
@@ -1530,7 +1509,7 @@
       </p:sp>
       <p:sp>
         <p:nvSpPr>
-          <p:cNvPr id="173" name="PlaceHolder 3"/>
+          <p:cNvPr id="198" name="PlaceHolder 3"/>
           <p:cNvSpPr>
             <a:spLocks noGrp="1"/>
           </p:cNvSpPr>
@@ -1541,7 +1520,7 @@
         <p:spPr>
           <a:xfrm>
             <a:off x="3884760" y="8685360"/>
-            <a:ext cx="2971080" cy="457920"/>
+            <a:ext cx="2970720" cy="457560"/>
           </a:xfrm>
           <a:prstGeom prst="rect">
             <a:avLst/>
@@ -1585,7 +1564,7 @@
                 <a:tab algn="l" pos="0"/>
               </a:tabLst>
             </a:pPr>
-            <a:fld id="{F3306E7C-2886-4029-853D-C2732117CC84}" type="slidenum">
+            <a:fld id="{1CCA2530-8A14-4B2E-BE4E-88703D829B8F}" type="slidenum">
               <a:rPr lang="en-US" sz="1200" b="0" u="none" strike="noStrike">
                 <a:solidFill>
                   <a:schemeClr val="dk1"/>
@@ -1632,7 +1611,7 @@
       </p:grpSpPr>
       <p:sp>
         <p:nvSpPr>
-          <p:cNvPr id="174" name="PlaceHolder 1"/>
+          <p:cNvPr id="199" name="PlaceHolder 1"/>
           <p:cNvSpPr>
             <a:spLocks noGrp="1"/>
           </p:cNvSpPr>
@@ -1643,19 +1622,19 @@
         <p:spPr>
           <a:xfrm>
             <a:off x="685800" y="1143000"/>
-            <a:ext cx="5485680" cy="3085560"/>
-          </a:xfrm>
-          <a:prstGeom prst="rect">
-            <a:avLst/>
-          </a:prstGeom>
-          <a:ln w="0">
-            <a:noFill/>
-          </a:ln>
-        </p:spPr>
-      </p:sp>
-      <p:sp>
-        <p:nvSpPr>
-          <p:cNvPr id="175" name="PlaceHolder 2"/>
+            <a:ext cx="5485320" cy="3085200"/>
+          </a:xfrm>
+          <a:prstGeom prst="rect">
+            <a:avLst/>
+          </a:prstGeom>
+          <a:ln w="0">
+            <a:noFill/>
+          </a:ln>
+        </p:spPr>
+      </p:sp>
+      <p:sp>
+        <p:nvSpPr>
+          <p:cNvPr id="200" name="PlaceHolder 2"/>
           <p:cNvSpPr>
             <a:spLocks noGrp="1"/>
           </p:cNvSpPr>
@@ -1666,7 +1645,7 @@
         <p:spPr>
           <a:xfrm>
             <a:off x="685800" y="4400640"/>
-            <a:ext cx="5485680" cy="3599640"/>
+            <a:ext cx="5485320" cy="3599280"/>
           </a:xfrm>
           <a:prstGeom prst="rect">
             <a:avLst/>
@@ -1697,7 +1676,7 @@
       </p:sp>
       <p:sp>
         <p:nvSpPr>
-          <p:cNvPr id="176" name="PlaceHolder 3"/>
+          <p:cNvPr id="201" name="PlaceHolder 3"/>
           <p:cNvSpPr>
             <a:spLocks noGrp="1"/>
           </p:cNvSpPr>
@@ -1708,7 +1687,7 @@
         <p:spPr>
           <a:xfrm>
             <a:off x="3884760" y="8685360"/>
-            <a:ext cx="2971080" cy="457920"/>
+            <a:ext cx="2970720" cy="457560"/>
           </a:xfrm>
           <a:prstGeom prst="rect">
             <a:avLst/>
@@ -1752,7 +1731,174 @@
                 <a:tab algn="l" pos="0"/>
               </a:tabLst>
             </a:pPr>
-            <a:fld id="{D03DBAD7-77A2-42BE-A83B-0BD46BF59726}" type="slidenum">
+            <a:fld id="{D86ADF8B-CB4C-4DB2-871F-4CC0CD0B0915}" type="slidenum">
+              <a:rPr lang="en-US" sz="1200" b="0" u="none" strike="noStrike">
+                <a:solidFill>
+                  <a:schemeClr val="dk1"/>
+                </a:solidFill>
+                <a:effectLst/>
+                <a:uFillTx/>
+                <a:latin typeface="+mn-lt"/>
+                <a:ea typeface="+mn-ea"/>
+              </a:rPr>
+              <a:t>1</a:t>
+            </a:fld>
+            <a:endParaRPr lang="es-CO" sz="1200" b="0" u="none" strike="noStrike">
+              <a:solidFill>
+                <a:srgbClr val="000000"/>
+              </a:solidFill>
+              <a:effectLst/>
+              <a:uFillTx/>
+              <a:latin typeface="Times New Roman"/>
+            </a:endParaRPr>
+          </a:p>
+        </p:txBody>
+      </p:sp>
+    </p:spTree>
+  </p:cSld>
+</p:notes>
+</file>
+
+<file path=ppt/notesSlides/notesSlide9.xml><?xml version="1.0" encoding="utf-8"?>
+<p:notes xmlns:a="http://schemas.openxmlformats.org/drawingml/2006/main" xmlns:p="http://schemas.openxmlformats.org/presentationml/2006/main" xmlns:r="http://schemas.openxmlformats.org/officeDocument/2006/relationships" xmlns:p14="http://schemas.microsoft.com/office/powerpoint/2010/main" xmlns:p15="http://schemas.microsoft.com/office/powerpoint/2012/main" xmlns:mc="http://schemas.openxmlformats.org/markup-compatibility/2006">
+  <p:cSld>
+    <p:spTree>
+      <p:nvGrpSpPr>
+        <p:cNvPr id="1" name=""/>
+        <p:cNvGrpSpPr/>
+        <p:nvPr/>
+      </p:nvGrpSpPr>
+      <p:grpSpPr>
+        <a:xfrm>
+          <a:off x="0" y="0"/>
+          <a:ext cx="0" cy="0"/>
+          <a:chOff x="0" y="0"/>
+          <a:chExt cx="0" cy="0"/>
+        </a:xfrm>
+      </p:grpSpPr>
+      <p:sp>
+        <p:nvSpPr>
+          <p:cNvPr id="202" name="PlaceHolder 1"/>
+          <p:cNvSpPr>
+            <a:spLocks noGrp="1"/>
+          </p:cNvSpPr>
+          <p:nvPr>
+            <p:ph type="sldImg"/>
+          </p:nvPr>
+        </p:nvSpPr>
+        <p:spPr>
+          <a:xfrm>
+            <a:off x="685800" y="1143000"/>
+            <a:ext cx="5485320" cy="3085200"/>
+          </a:xfrm>
+          <a:prstGeom prst="rect">
+            <a:avLst/>
+          </a:prstGeom>
+          <a:ln w="0">
+            <a:noFill/>
+          </a:ln>
+        </p:spPr>
+      </p:sp>
+      <p:sp>
+        <p:nvSpPr>
+          <p:cNvPr id="203" name="PlaceHolder 2"/>
+          <p:cNvSpPr>
+            <a:spLocks noGrp="1"/>
+          </p:cNvSpPr>
+          <p:nvPr>
+            <p:ph type="body"/>
+          </p:nvPr>
+        </p:nvSpPr>
+        <p:spPr>
+          <a:xfrm>
+            <a:off x="685800" y="4400640"/>
+            <a:ext cx="5485320" cy="3599280"/>
+          </a:xfrm>
+          <a:prstGeom prst="rect">
+            <a:avLst/>
+          </a:prstGeom>
+          <a:noFill/>
+          <a:ln w="0">
+            <a:noFill/>
+          </a:ln>
+        </p:spPr>
+        <p:txBody>
+          <a:bodyPr lIns="91440" rIns="91440" tIns="45720" bIns="45720" anchor="t">
+            <a:noAutofit/>
+          </a:bodyPr>
+          <a:p>
+            <a:pPr indent="0">
+              <a:buNone/>
+            </a:pPr>
+            <a:endParaRPr lang="es-CO" sz="1800" b="0" u="none" strike="noStrike">
+              <a:solidFill>
+                <a:srgbClr val="000000"/>
+              </a:solidFill>
+              <a:effectLst/>
+              <a:uFillTx/>
+              <a:latin typeface="Arial"/>
+            </a:endParaRPr>
+          </a:p>
+        </p:txBody>
+      </p:sp>
+      <p:sp>
+        <p:nvSpPr>
+          <p:cNvPr id="204" name="PlaceHolder 3"/>
+          <p:cNvSpPr>
+            <a:spLocks noGrp="1"/>
+          </p:cNvSpPr>
+          <p:nvPr>
+            <p:ph type="sldNum" idx="12"/>
+          </p:nvPr>
+        </p:nvSpPr>
+        <p:spPr>
+          <a:xfrm>
+            <a:off x="3884760" y="8685360"/>
+            <a:ext cx="2970720" cy="457560"/>
+          </a:xfrm>
+          <a:prstGeom prst="rect">
+            <a:avLst/>
+          </a:prstGeom>
+          <a:noFill/>
+          <a:ln w="0">
+            <a:noFill/>
+          </a:ln>
+        </p:spPr>
+        <p:txBody>
+          <a:bodyPr lIns="91440" rIns="91440" tIns="45720" bIns="45720" anchor="b">
+            <a:noAutofit/>
+          </a:bodyPr>
+          <a:lstStyle>
+            <a:lvl1pPr indent="0" algn="r" defTabSz="914400">
+              <a:lnSpc>
+                <a:spcPct val="100000"/>
+              </a:lnSpc>
+              <a:buNone/>
+              <a:tabLst>
+                <a:tab algn="l" pos="0"/>
+              </a:tabLst>
+              <a:defRPr lang="en-US" sz="1200" b="0" u="none" strike="noStrike">
+                <a:solidFill>
+                  <a:schemeClr val="dk1"/>
+                </a:solidFill>
+                <a:effectLst/>
+                <a:uFillTx/>
+                <a:latin typeface="+mn-lt"/>
+                <a:ea typeface="+mn-ea"/>
+              </a:defRPr>
+            </a:lvl1pPr>
+          </a:lstStyle>
+          <a:p>
+            <a:pPr indent="0" algn="r" defTabSz="914400">
+              <a:lnSpc>
+                <a:spcPct val="100000"/>
+              </a:lnSpc>
+              <a:buNone/>
+              <a:tabLst>
+                <a:tab algn="l" pos="0"/>
+              </a:tabLst>
+            </a:pPr>
+            <a:fld id="{96161847-E341-4951-A24E-A232B90390F7}" type="slidenum">
               <a:rPr lang="en-US" sz="1200" b="0" u="none" strike="noStrike">
                 <a:solidFill>
                   <a:schemeClr val="dk1"/>
@@ -2174,7 +2320,7 @@
         <p:spPr>
           <a:xfrm>
             <a:off x="0" y="0"/>
-            <a:ext cx="163800" cy="5142960"/>
+            <a:ext cx="163440" cy="5142600"/>
           </a:xfrm>
           <a:prstGeom prst="rect">
             <a:avLst/>
@@ -2225,7 +2371,7 @@
         <p:spPr>
           <a:xfrm>
             <a:off x="164520" y="0"/>
-            <a:ext cx="54000" cy="5142960"/>
+            <a:ext cx="53640" cy="5142600"/>
           </a:xfrm>
           <a:prstGeom prst="rect">
             <a:avLst/>
@@ -2276,7 +2422,7 @@
         <p:spPr>
           <a:xfrm>
             <a:off x="640080" y="502920"/>
-            <a:ext cx="2599560" cy="346680"/>
+            <a:ext cx="2599200" cy="346320"/>
           </a:xfrm>
           <a:prstGeom prst="roundRect">
             <a:avLst>
@@ -2331,7 +2477,7 @@
         <p:spPr>
           <a:xfrm>
             <a:off x="640080" y="502920"/>
-            <a:ext cx="2559600" cy="346680"/>
+            <a:ext cx="2559240" cy="346320"/>
           </a:xfrm>
           <a:prstGeom prst="rect">
             <a:avLst/>
@@ -2391,7 +2537,7 @@
         <p:spPr>
           <a:xfrm>
             <a:off x="640080" y="1097280"/>
-            <a:ext cx="8228880" cy="913680"/>
+            <a:ext cx="8228520" cy="913320"/>
           </a:xfrm>
           <a:prstGeom prst="rect">
             <a:avLst/>
@@ -2452,7 +2598,7 @@
         <p:spPr>
           <a:xfrm>
             <a:off x="640080" y="1920240"/>
-            <a:ext cx="8228880" cy="685080"/>
+            <a:ext cx="8228520" cy="684720"/>
           </a:xfrm>
           <a:prstGeom prst="rect">
             <a:avLst/>
@@ -2513,7 +2659,7 @@
         <p:spPr>
           <a:xfrm>
             <a:off x="640080" y="2788920"/>
-            <a:ext cx="6857280" cy="822240"/>
+            <a:ext cx="6856920" cy="821880"/>
           </a:xfrm>
           <a:prstGeom prst="rect">
             <a:avLst/>
@@ -2647,7 +2793,7 @@
         <p:spPr>
           <a:xfrm>
             <a:off x="640080" y="3840480"/>
-            <a:ext cx="8228880" cy="319320"/>
+            <a:ext cx="8228520" cy="318960"/>
           </a:xfrm>
           <a:prstGeom prst="rect">
             <a:avLst/>
@@ -2708,7 +2854,7 @@
         <p:spPr>
           <a:xfrm>
             <a:off x="640080" y="4206240"/>
-            <a:ext cx="8228880" cy="319320"/>
+            <a:ext cx="8228520" cy="318960"/>
           </a:xfrm>
           <a:prstGeom prst="rect">
             <a:avLst/>
@@ -2806,7 +2952,7 @@
         <p:spPr>
           <a:xfrm>
             <a:off x="0" y="0"/>
-            <a:ext cx="109080" cy="5142960"/>
+            <a:ext cx="108720" cy="5142600"/>
           </a:xfrm>
           <a:prstGeom prst="rect">
             <a:avLst/>
@@ -2857,7 +3003,7 @@
         <p:spPr>
           <a:xfrm>
             <a:off x="365760" y="274320"/>
-            <a:ext cx="8503200" cy="639360"/>
+            <a:ext cx="8502840" cy="639000"/>
           </a:xfrm>
           <a:prstGeom prst="rect">
             <a:avLst/>
@@ -2918,7 +3064,7 @@
         <p:spPr>
           <a:xfrm>
             <a:off x="365760" y="1051560"/>
-            <a:ext cx="8411760" cy="776520"/>
+            <a:ext cx="8411400" cy="776160"/>
           </a:xfrm>
           <a:prstGeom prst="rect">
             <a:avLst/>
@@ -2979,7 +3125,7 @@
         <p:spPr>
           <a:xfrm>
             <a:off x="365760" y="1920240"/>
-            <a:ext cx="8411760" cy="685080"/>
+            <a:ext cx="8411400" cy="684720"/>
           </a:xfrm>
           <a:prstGeom prst="rect">
             <a:avLst/>
@@ -3039,7 +3185,7 @@
         <p:spPr>
           <a:xfrm>
             <a:off x="365760" y="1920240"/>
-            <a:ext cx="54000" cy="685080"/>
+            <a:ext cx="53640" cy="684720"/>
           </a:xfrm>
           <a:prstGeom prst="rect">
             <a:avLst/>
@@ -3090,7 +3236,7 @@
         <p:spPr>
           <a:xfrm>
             <a:off x="548640" y="1920240"/>
-            <a:ext cx="8228880" cy="685080"/>
+            <a:ext cx="8228520" cy="684720"/>
           </a:xfrm>
           <a:prstGeom prst="rect">
             <a:avLst/>
@@ -3151,7 +3297,7 @@
         <p:spPr>
           <a:xfrm>
             <a:off x="365760" y="2788920"/>
-            <a:ext cx="2605320" cy="1325160"/>
+            <a:ext cx="2604960" cy="1324800"/>
           </a:xfrm>
           <a:prstGeom prst="rect">
             <a:avLst/>
@@ -3209,7 +3355,7 @@
         <p:spPr>
           <a:xfrm>
             <a:off x="365760" y="2788920"/>
-            <a:ext cx="2605320" cy="45000"/>
+            <a:ext cx="2604960" cy="44640"/>
           </a:xfrm>
           <a:prstGeom prst="rect">
             <a:avLst/>
@@ -3260,7 +3406,7 @@
         <p:spPr>
           <a:xfrm>
             <a:off x="365760" y="2898720"/>
-            <a:ext cx="2605320" cy="410760"/>
+            <a:ext cx="2604960" cy="410400"/>
           </a:xfrm>
           <a:prstGeom prst="rect">
             <a:avLst/>
@@ -3320,7 +3466,7 @@
         <p:spPr>
           <a:xfrm>
             <a:off x="365760" y="3291840"/>
-            <a:ext cx="2605320" cy="273600"/>
+            <a:ext cx="2604960" cy="273240"/>
           </a:xfrm>
           <a:prstGeom prst="rect">
             <a:avLst/>
@@ -3381,7 +3527,7 @@
         <p:spPr>
           <a:xfrm>
             <a:off x="365760" y="3566160"/>
-            <a:ext cx="2605320" cy="456480"/>
+            <a:ext cx="2604960" cy="456120"/>
           </a:xfrm>
           <a:prstGeom prst="rect">
             <a:avLst/>
@@ -3472,7 +3618,7 @@
         <p:spPr>
           <a:xfrm>
             <a:off x="3127320" y="2788920"/>
-            <a:ext cx="2605320" cy="1325160"/>
+            <a:ext cx="2604960" cy="1324800"/>
           </a:xfrm>
           <a:prstGeom prst="rect">
             <a:avLst/>
@@ -3530,7 +3676,7 @@
         <p:spPr>
           <a:xfrm>
             <a:off x="3127320" y="2788920"/>
-            <a:ext cx="2605320" cy="45000"/>
+            <a:ext cx="2604960" cy="44640"/>
           </a:xfrm>
           <a:prstGeom prst="rect">
             <a:avLst/>
@@ -3581,7 +3727,7 @@
         <p:spPr>
           <a:xfrm>
             <a:off x="3127320" y="2898720"/>
-            <a:ext cx="2605320" cy="410760"/>
+            <a:ext cx="2604960" cy="410400"/>
           </a:xfrm>
           <a:prstGeom prst="rect">
             <a:avLst/>
@@ -3641,7 +3787,7 @@
         <p:spPr>
           <a:xfrm>
             <a:off x="3127320" y="3291840"/>
-            <a:ext cx="2605320" cy="273600"/>
+            <a:ext cx="2604960" cy="273240"/>
           </a:xfrm>
           <a:prstGeom prst="rect">
             <a:avLst/>
@@ -3702,7 +3848,7 @@
         <p:spPr>
           <a:xfrm>
             <a:off x="3127320" y="3566160"/>
-            <a:ext cx="2605320" cy="456480"/>
+            <a:ext cx="2604960" cy="456120"/>
           </a:xfrm>
           <a:prstGeom prst="rect">
             <a:avLst/>
@@ -3793,7 +3939,7 @@
         <p:spPr>
           <a:xfrm>
             <a:off x="5888880" y="2788920"/>
-            <a:ext cx="2605320" cy="1325160"/>
+            <a:ext cx="2604960" cy="1324800"/>
           </a:xfrm>
           <a:prstGeom prst="rect">
             <a:avLst/>
@@ -3851,7 +3997,7 @@
         <p:spPr>
           <a:xfrm>
             <a:off x="5888880" y="2788920"/>
-            <a:ext cx="2605320" cy="45000"/>
+            <a:ext cx="2604960" cy="44640"/>
           </a:xfrm>
           <a:prstGeom prst="rect">
             <a:avLst/>
@@ -3902,7 +4048,7 @@
         <p:spPr>
           <a:xfrm>
             <a:off x="5888880" y="2898720"/>
-            <a:ext cx="2605320" cy="410760"/>
+            <a:ext cx="2604960" cy="410400"/>
           </a:xfrm>
           <a:prstGeom prst="rect">
             <a:avLst/>
@@ -3962,7 +4108,7 @@
         <p:spPr>
           <a:xfrm>
             <a:off x="5888880" y="3291840"/>
-            <a:ext cx="2605320" cy="273600"/>
+            <a:ext cx="2604960" cy="273240"/>
           </a:xfrm>
           <a:prstGeom prst="rect">
             <a:avLst/>
@@ -4023,7 +4169,7 @@
         <p:spPr>
           <a:xfrm>
             <a:off x="5888880" y="3566160"/>
-            <a:ext cx="2605320" cy="456480"/>
+            <a:ext cx="2604960" cy="456120"/>
           </a:xfrm>
           <a:prstGeom prst="rect">
             <a:avLst/>
@@ -4151,7 +4297,7 @@
         <p:spPr>
           <a:xfrm>
             <a:off x="0" y="0"/>
-            <a:ext cx="109080" cy="5142960"/>
+            <a:ext cx="108720" cy="5142600"/>
           </a:xfrm>
           <a:prstGeom prst="rect">
             <a:avLst/>
@@ -4202,7 +4348,7 @@
         <p:spPr>
           <a:xfrm>
             <a:off x="365760" y="274320"/>
-            <a:ext cx="8503200" cy="593640"/>
+            <a:ext cx="8502840" cy="593280"/>
           </a:xfrm>
           <a:prstGeom prst="rect">
             <a:avLst/>
@@ -4263,7 +4409,7 @@
         <p:spPr>
           <a:xfrm>
             <a:off x="365760" y="868680"/>
-            <a:ext cx="8503200" cy="319320"/>
+            <a:ext cx="8502840" cy="318960"/>
           </a:xfrm>
           <a:prstGeom prst="rect">
             <a:avLst/>
@@ -4324,7 +4470,7 @@
         <p:spPr>
           <a:xfrm>
             <a:off x="365760" y="1371600"/>
-            <a:ext cx="2010960" cy="2331000"/>
+            <a:ext cx="2010600" cy="2330640"/>
           </a:xfrm>
           <a:prstGeom prst="rect">
             <a:avLst/>
@@ -4382,7 +4528,7 @@
         <p:spPr>
           <a:xfrm>
             <a:off x="365760" y="1371600"/>
-            <a:ext cx="2010960" cy="502200"/>
+            <a:ext cx="2010600" cy="501840"/>
           </a:xfrm>
           <a:prstGeom prst="rect">
             <a:avLst/>
@@ -4433,7 +4579,7 @@
         <p:spPr>
           <a:xfrm>
             <a:off x="365760" y="1371600"/>
-            <a:ext cx="2010960" cy="502200"/>
+            <a:ext cx="2010600" cy="501840"/>
           </a:xfrm>
           <a:prstGeom prst="rect">
             <a:avLst/>
@@ -4494,7 +4640,7 @@
         <p:spPr>
           <a:xfrm>
             <a:off x="365760" y="1901880"/>
-            <a:ext cx="2010960" cy="319320"/>
+            <a:ext cx="2010600" cy="318960"/>
           </a:xfrm>
           <a:prstGeom prst="rect">
             <a:avLst/>
@@ -4555,7 +4701,7 @@
         <p:spPr>
           <a:xfrm>
             <a:off x="365760" y="2212920"/>
-            <a:ext cx="2010960" cy="456480"/>
+            <a:ext cx="2010600" cy="456120"/>
           </a:xfrm>
           <a:prstGeom prst="rect">
             <a:avLst/>
@@ -4616,7 +4762,7 @@
         <p:spPr>
           <a:xfrm>
             <a:off x="457200" y="2688480"/>
-            <a:ext cx="1828080" cy="913680"/>
+            <a:ext cx="1827720" cy="913320"/>
           </a:xfrm>
           <a:prstGeom prst="rect">
             <a:avLst/>
@@ -4707,7 +4853,7 @@
         <p:spPr>
           <a:xfrm>
             <a:off x="2496240" y="1371600"/>
-            <a:ext cx="2010960" cy="2331000"/>
+            <a:ext cx="2010600" cy="2330640"/>
           </a:xfrm>
           <a:prstGeom prst="rect">
             <a:avLst/>
@@ -4765,7 +4911,7 @@
         <p:spPr>
           <a:xfrm>
             <a:off x="2496240" y="1371600"/>
-            <a:ext cx="2010960" cy="502200"/>
+            <a:ext cx="2010600" cy="501840"/>
           </a:xfrm>
           <a:prstGeom prst="rect">
             <a:avLst/>
@@ -4816,7 +4962,7 @@
         <p:spPr>
           <a:xfrm>
             <a:off x="2496240" y="1371600"/>
-            <a:ext cx="2010960" cy="502200"/>
+            <a:ext cx="2010600" cy="501840"/>
           </a:xfrm>
           <a:prstGeom prst="rect">
             <a:avLst/>
@@ -4877,7 +5023,7 @@
         <p:spPr>
           <a:xfrm>
             <a:off x="2496240" y="1901880"/>
-            <a:ext cx="2010960" cy="319320"/>
+            <a:ext cx="2010600" cy="318960"/>
           </a:xfrm>
           <a:prstGeom prst="rect">
             <a:avLst/>
@@ -4938,7 +5084,7 @@
         <p:spPr>
           <a:xfrm>
             <a:off x="2496240" y="2212920"/>
-            <a:ext cx="2010960" cy="456480"/>
+            <a:ext cx="2010600" cy="456120"/>
           </a:xfrm>
           <a:prstGeom prst="rect">
             <a:avLst/>
@@ -4999,7 +5145,7 @@
         <p:spPr>
           <a:xfrm>
             <a:off x="2587680" y="2688480"/>
-            <a:ext cx="1828080" cy="913680"/>
+            <a:ext cx="1827720" cy="913320"/>
           </a:xfrm>
           <a:prstGeom prst="rect">
             <a:avLst/>
@@ -5090,7 +5236,7 @@
         <p:spPr>
           <a:xfrm>
             <a:off x="4626720" y="1371600"/>
-            <a:ext cx="2010960" cy="2331000"/>
+            <a:ext cx="2010600" cy="2330640"/>
           </a:xfrm>
           <a:prstGeom prst="rect">
             <a:avLst/>
@@ -5148,7 +5294,7 @@
         <p:spPr>
           <a:xfrm>
             <a:off x="4626720" y="1371600"/>
-            <a:ext cx="2010960" cy="502200"/>
+            <a:ext cx="2010600" cy="501840"/>
           </a:xfrm>
           <a:prstGeom prst="rect">
             <a:avLst/>
@@ -5199,7 +5345,7 @@
         <p:spPr>
           <a:xfrm>
             <a:off x="4626720" y="1371600"/>
-            <a:ext cx="2010960" cy="502200"/>
+            <a:ext cx="2010600" cy="501840"/>
           </a:xfrm>
           <a:prstGeom prst="rect">
             <a:avLst/>
@@ -5260,7 +5406,7 @@
         <p:spPr>
           <a:xfrm>
             <a:off x="4626720" y="1901880"/>
-            <a:ext cx="2010960" cy="319320"/>
+            <a:ext cx="2010600" cy="318960"/>
           </a:xfrm>
           <a:prstGeom prst="rect">
             <a:avLst/>
@@ -5321,7 +5467,7 @@
         <p:spPr>
           <a:xfrm>
             <a:off x="4626720" y="2212920"/>
-            <a:ext cx="2010960" cy="456480"/>
+            <a:ext cx="2010600" cy="456120"/>
           </a:xfrm>
           <a:prstGeom prst="rect">
             <a:avLst/>
@@ -5382,7 +5528,7 @@
         <p:spPr>
           <a:xfrm>
             <a:off x="4718160" y="2688480"/>
-            <a:ext cx="1828080" cy="913680"/>
+            <a:ext cx="1827720" cy="913320"/>
           </a:xfrm>
           <a:prstGeom prst="rect">
             <a:avLst/>
@@ -5473,7 +5619,7 @@
         <p:spPr>
           <a:xfrm>
             <a:off x="6757560" y="1371600"/>
-            <a:ext cx="2010960" cy="2331000"/>
+            <a:ext cx="2010600" cy="2330640"/>
           </a:xfrm>
           <a:prstGeom prst="rect">
             <a:avLst/>
@@ -5531,7 +5677,7 @@
         <p:spPr>
           <a:xfrm>
             <a:off x="6757560" y="1371600"/>
-            <a:ext cx="2010960" cy="502200"/>
+            <a:ext cx="2010600" cy="501840"/>
           </a:xfrm>
           <a:prstGeom prst="rect">
             <a:avLst/>
@@ -5582,7 +5728,7 @@
         <p:spPr>
           <a:xfrm>
             <a:off x="6757560" y="1371600"/>
-            <a:ext cx="2010960" cy="502200"/>
+            <a:ext cx="2010600" cy="501840"/>
           </a:xfrm>
           <a:prstGeom prst="rect">
             <a:avLst/>
@@ -5643,7 +5789,7 @@
         <p:spPr>
           <a:xfrm>
             <a:off x="6757560" y="1901880"/>
-            <a:ext cx="2010960" cy="319320"/>
+            <a:ext cx="2010600" cy="318960"/>
           </a:xfrm>
           <a:prstGeom prst="rect">
             <a:avLst/>
@@ -5704,7 +5850,7 @@
         <p:spPr>
           <a:xfrm>
             <a:off x="6757560" y="2212920"/>
-            <a:ext cx="2010960" cy="456480"/>
+            <a:ext cx="2010600" cy="456120"/>
           </a:xfrm>
           <a:prstGeom prst="rect">
             <a:avLst/>
@@ -5765,7 +5911,7 @@
         <p:spPr>
           <a:xfrm>
             <a:off x="6849000" y="2688480"/>
-            <a:ext cx="1828080" cy="913680"/>
+            <a:ext cx="1827720" cy="913320"/>
           </a:xfrm>
           <a:prstGeom prst="rect">
             <a:avLst/>
@@ -5893,7 +6039,7 @@
         <p:spPr>
           <a:xfrm>
             <a:off x="0" y="0"/>
-            <a:ext cx="109080" cy="5142960"/>
+            <a:ext cx="108720" cy="5142600"/>
           </a:xfrm>
           <a:prstGeom prst="rect">
             <a:avLst/>
@@ -5944,7 +6090,7 @@
         <p:spPr>
           <a:xfrm>
             <a:off x="365760" y="255960"/>
-            <a:ext cx="8503200" cy="566280"/>
+            <a:ext cx="8502840" cy="565920"/>
           </a:xfrm>
           <a:prstGeom prst="rect">
             <a:avLst/>
@@ -6005,7 +6151,7 @@
         <p:spPr>
           <a:xfrm>
             <a:off x="365760" y="822960"/>
-            <a:ext cx="8503200" cy="291960"/>
+            <a:ext cx="8502840" cy="291600"/>
           </a:xfrm>
           <a:prstGeom prst="rect">
             <a:avLst/>
@@ -6066,7 +6212,7 @@
         <p:spPr>
           <a:xfrm>
             <a:off x="365760" y="1188720"/>
-            <a:ext cx="2605320" cy="1416600"/>
+            <a:ext cx="2604960" cy="1416240"/>
           </a:xfrm>
           <a:prstGeom prst="rect">
             <a:avLst/>
@@ -6124,7 +6270,7 @@
         <p:spPr>
           <a:xfrm>
             <a:off x="365760" y="1188720"/>
-            <a:ext cx="2605320" cy="438120"/>
+            <a:ext cx="2604960" cy="437760"/>
           </a:xfrm>
           <a:prstGeom prst="rect">
             <a:avLst/>
@@ -6175,7 +6321,7 @@
         <p:spPr>
           <a:xfrm>
             <a:off x="365760" y="1188720"/>
-            <a:ext cx="2605320" cy="438120"/>
+            <a:ext cx="2604960" cy="437760"/>
           </a:xfrm>
           <a:prstGeom prst="rect">
             <a:avLst/>
@@ -6236,7 +6382,7 @@
         <p:spPr>
           <a:xfrm>
             <a:off x="457200" y="1664280"/>
-            <a:ext cx="2422440" cy="346680"/>
+            <a:ext cx="2422080" cy="346320"/>
           </a:xfrm>
           <a:prstGeom prst="rect">
             <a:avLst/>
@@ -6297,7 +6443,7 @@
         <p:spPr>
           <a:xfrm>
             <a:off x="457200" y="2011680"/>
-            <a:ext cx="2422440" cy="502200"/>
+            <a:ext cx="2422080" cy="501840"/>
           </a:xfrm>
           <a:prstGeom prst="rect">
             <a:avLst/>
@@ -6388,7 +6534,7 @@
         <p:spPr>
           <a:xfrm>
             <a:off x="3136320" y="1188720"/>
-            <a:ext cx="2605320" cy="1416600"/>
+            <a:ext cx="2604960" cy="1416240"/>
           </a:xfrm>
           <a:prstGeom prst="rect">
             <a:avLst/>
@@ -6446,7 +6592,7 @@
         <p:spPr>
           <a:xfrm>
             <a:off x="3136320" y="1188720"/>
-            <a:ext cx="2605320" cy="438120"/>
+            <a:ext cx="2604960" cy="437760"/>
           </a:xfrm>
           <a:prstGeom prst="rect">
             <a:avLst/>
@@ -6497,7 +6643,7 @@
         <p:spPr>
           <a:xfrm>
             <a:off x="3136320" y="1188720"/>
-            <a:ext cx="2605320" cy="438120"/>
+            <a:ext cx="2604960" cy="437760"/>
           </a:xfrm>
           <a:prstGeom prst="rect">
             <a:avLst/>
@@ -6558,7 +6704,7 @@
         <p:spPr>
           <a:xfrm>
             <a:off x="3227760" y="1664280"/>
-            <a:ext cx="2422440" cy="346680"/>
+            <a:ext cx="2422080" cy="346320"/>
           </a:xfrm>
           <a:prstGeom prst="rect">
             <a:avLst/>
@@ -6619,7 +6765,7 @@
         <p:spPr>
           <a:xfrm>
             <a:off x="3227760" y="2011680"/>
-            <a:ext cx="2422440" cy="502200"/>
+            <a:ext cx="2422080" cy="501840"/>
           </a:xfrm>
           <a:prstGeom prst="rect">
             <a:avLst/>
@@ -6710,7 +6856,7 @@
         <p:spPr>
           <a:xfrm>
             <a:off x="5906880" y="1188720"/>
-            <a:ext cx="2605320" cy="1416600"/>
+            <a:ext cx="2604960" cy="1416240"/>
           </a:xfrm>
           <a:prstGeom prst="rect">
             <a:avLst/>
@@ -6768,7 +6914,7 @@
         <p:spPr>
           <a:xfrm>
             <a:off x="5906880" y="1188720"/>
-            <a:ext cx="2605320" cy="438120"/>
+            <a:ext cx="2604960" cy="437760"/>
           </a:xfrm>
           <a:prstGeom prst="rect">
             <a:avLst/>
@@ -6819,7 +6965,7 @@
         <p:spPr>
           <a:xfrm>
             <a:off x="5906880" y="1188720"/>
-            <a:ext cx="2605320" cy="438120"/>
+            <a:ext cx="2604960" cy="437760"/>
           </a:xfrm>
           <a:prstGeom prst="rect">
             <a:avLst/>
@@ -6880,7 +7026,7 @@
         <p:spPr>
           <a:xfrm>
             <a:off x="5998320" y="1664280"/>
-            <a:ext cx="2422440" cy="346680"/>
+            <a:ext cx="2422080" cy="346320"/>
           </a:xfrm>
           <a:prstGeom prst="rect">
             <a:avLst/>
@@ -6941,7 +7087,7 @@
         <p:spPr>
           <a:xfrm>
             <a:off x="5998320" y="2011680"/>
-            <a:ext cx="2422440" cy="502200"/>
+            <a:ext cx="2422080" cy="501840"/>
           </a:xfrm>
           <a:prstGeom prst="rect">
             <a:avLst/>
@@ -7032,7 +7178,7 @@
         <p:spPr>
           <a:xfrm>
             <a:off x="365760" y="2606040"/>
-            <a:ext cx="8411760" cy="1005120"/>
+            <a:ext cx="8411400" cy="1004760"/>
           </a:xfrm>
           <a:prstGeom prst="rect">
             <a:avLst/>
@@ -7090,7 +7236,7 @@
         <p:spPr>
           <a:xfrm>
             <a:off x="548640" y="2651760"/>
-            <a:ext cx="1096560" cy="346680"/>
+            <a:ext cx="1096200" cy="346320"/>
           </a:xfrm>
           <a:prstGeom prst="rect">
             <a:avLst/>
@@ -7151,7 +7297,7 @@
         <p:spPr>
           <a:xfrm>
             <a:off x="548640" y="2999160"/>
-            <a:ext cx="8046000" cy="383400"/>
+            <a:ext cx="8045640" cy="383040"/>
           </a:xfrm>
           <a:prstGeom prst="rect">
             <a:avLst/>
@@ -7212,7 +7358,7 @@
         <p:spPr>
           <a:xfrm>
             <a:off x="1737360" y="2651760"/>
-            <a:ext cx="6857280" cy="346680"/>
+            <a:ext cx="6856920" cy="346320"/>
           </a:xfrm>
           <a:prstGeom prst="rect">
             <a:avLst/>
@@ -7273,7 +7419,7 @@
         <p:spPr>
           <a:xfrm>
             <a:off x="365760" y="3749040"/>
-            <a:ext cx="8411760" cy="547920"/>
+            <a:ext cx="8411400" cy="547560"/>
           </a:xfrm>
           <a:prstGeom prst="rect">
             <a:avLst/>
@@ -7324,7 +7470,7 @@
         <p:spPr>
           <a:xfrm>
             <a:off x="457200" y="3749040"/>
-            <a:ext cx="8228880" cy="547920"/>
+            <a:ext cx="8228520" cy="547560"/>
           </a:xfrm>
           <a:prstGeom prst="rect">
             <a:avLst/>
@@ -7422,7 +7568,7 @@
         <p:spPr>
           <a:xfrm>
             <a:off x="0" y="0"/>
-            <a:ext cx="109080" cy="5142960"/>
+            <a:ext cx="108720" cy="5142600"/>
           </a:xfrm>
           <a:prstGeom prst="rect">
             <a:avLst/>
@@ -7473,7 +7619,7 @@
         <p:spPr>
           <a:xfrm>
             <a:off x="365760" y="182880"/>
-            <a:ext cx="8503200" cy="529560"/>
+            <a:ext cx="8502840" cy="529200"/>
           </a:xfrm>
           <a:prstGeom prst="rect">
             <a:avLst/>
@@ -7534,7 +7680,7 @@
         <p:spPr>
           <a:xfrm>
             <a:off x="365760" y="713160"/>
-            <a:ext cx="8503200" cy="255240"/>
+            <a:ext cx="8502840" cy="254880"/>
           </a:xfrm>
           <a:prstGeom prst="rect">
             <a:avLst/>
@@ -7599,7 +7745,7 @@
         <p:spPr>
           <a:xfrm>
             <a:off x="365760" y="1078920"/>
-            <a:ext cx="8411760" cy="2175480"/>
+            <a:ext cx="8411400" cy="2175120"/>
           </a:xfrm>
           <a:prstGeom prst="rect">
             <a:avLst/>
@@ -7619,7 +7765,7 @@
         <p:spPr>
           <a:xfrm>
             <a:off x="365760" y="3401640"/>
-            <a:ext cx="2651040" cy="1416600"/>
+            <a:ext cx="2650680" cy="1416240"/>
           </a:xfrm>
           <a:prstGeom prst="rect">
             <a:avLst/>
@@ -7677,7 +7823,7 @@
         <p:spPr>
           <a:xfrm>
             <a:off x="365760" y="3401640"/>
-            <a:ext cx="2651040" cy="54000"/>
+            <a:ext cx="2650680" cy="53640"/>
           </a:xfrm>
           <a:prstGeom prst="rect">
             <a:avLst/>
@@ -7728,7 +7874,7 @@
         <p:spPr>
           <a:xfrm>
             <a:off x="475560" y="3511440"/>
-            <a:ext cx="2431440" cy="300960"/>
+            <a:ext cx="2431080" cy="300600"/>
           </a:xfrm>
           <a:prstGeom prst="rect">
             <a:avLst/>
@@ -7789,7 +7935,7 @@
         <p:spPr>
           <a:xfrm>
             <a:off x="475560" y="3840480"/>
-            <a:ext cx="2431440" cy="867960"/>
+            <a:ext cx="2431080" cy="867600"/>
           </a:xfrm>
           <a:prstGeom prst="rect">
             <a:avLst/>
@@ -7850,7 +7996,7 @@
         <p:spPr>
           <a:xfrm>
             <a:off x="3154680" y="3401640"/>
-            <a:ext cx="2651040" cy="1416600"/>
+            <a:ext cx="2650680" cy="1416240"/>
           </a:xfrm>
           <a:prstGeom prst="rect">
             <a:avLst/>
@@ -7908,7 +8054,7 @@
         <p:spPr>
           <a:xfrm>
             <a:off x="3154680" y="3401640"/>
-            <a:ext cx="2651040" cy="54000"/>
+            <a:ext cx="2650680" cy="53640"/>
           </a:xfrm>
           <a:prstGeom prst="rect">
             <a:avLst/>
@@ -7959,7 +8105,7 @@
         <p:spPr>
           <a:xfrm>
             <a:off x="3264480" y="3511440"/>
-            <a:ext cx="2431440" cy="300960"/>
+            <a:ext cx="2431080" cy="300600"/>
           </a:xfrm>
           <a:prstGeom prst="rect">
             <a:avLst/>
@@ -8020,7 +8166,7 @@
         <p:spPr>
           <a:xfrm>
             <a:off x="3264480" y="3840480"/>
-            <a:ext cx="2431440" cy="867960"/>
+            <a:ext cx="2431080" cy="867600"/>
           </a:xfrm>
           <a:prstGeom prst="rect">
             <a:avLst/>
@@ -8081,7 +8227,7 @@
         <p:spPr>
           <a:xfrm>
             <a:off x="5943600" y="3401640"/>
-            <a:ext cx="2651040" cy="1416600"/>
+            <a:ext cx="2650680" cy="1416240"/>
           </a:xfrm>
           <a:prstGeom prst="rect">
             <a:avLst/>
@@ -8139,7 +8285,7 @@
         <p:spPr>
           <a:xfrm>
             <a:off x="5943600" y="3401640"/>
-            <a:ext cx="2651040" cy="54000"/>
+            <a:ext cx="2650680" cy="53640"/>
           </a:xfrm>
           <a:prstGeom prst="rect">
             <a:avLst/>
@@ -8190,7 +8336,7 @@
         <p:spPr>
           <a:xfrm>
             <a:off x="6053400" y="3511440"/>
-            <a:ext cx="2431440" cy="300960"/>
+            <a:ext cx="2431080" cy="300600"/>
           </a:xfrm>
           <a:prstGeom prst="rect">
             <a:avLst/>
@@ -8251,7 +8397,7 @@
         <p:spPr>
           <a:xfrm>
             <a:off x="6053400" y="3840480"/>
-            <a:ext cx="2431440" cy="867960"/>
+            <a:ext cx="2431080" cy="867600"/>
           </a:xfrm>
           <a:prstGeom prst="rect">
             <a:avLst/>
@@ -8349,7 +8495,7 @@
         <p:spPr>
           <a:xfrm>
             <a:off x="0" y="0"/>
-            <a:ext cx="109080" cy="5142960"/>
+            <a:ext cx="108720" cy="5142600"/>
           </a:xfrm>
           <a:prstGeom prst="rect">
             <a:avLst/>
@@ -8400,7 +8546,7 @@
         <p:spPr>
           <a:xfrm>
             <a:off x="365760" y="182880"/>
-            <a:ext cx="8503200" cy="529560"/>
+            <a:ext cx="8502840" cy="529200"/>
           </a:xfrm>
           <a:prstGeom prst="rect">
             <a:avLst/>
@@ -8461,7 +8607,7 @@
         <p:spPr>
           <a:xfrm>
             <a:off x="365760" y="713160"/>
-            <a:ext cx="8503200" cy="255240"/>
+            <a:ext cx="8502840" cy="254880"/>
           </a:xfrm>
           <a:prstGeom prst="rect">
             <a:avLst/>
@@ -8522,7 +8668,7 @@
         <p:spPr>
           <a:xfrm>
             <a:off x="365760" y="1051560"/>
-            <a:ext cx="2873880" cy="712440"/>
+            <a:ext cx="2873520" cy="712080"/>
           </a:xfrm>
           <a:prstGeom prst="rect">
             <a:avLst/>
@@ -8580,7 +8726,7 @@
         <p:spPr>
           <a:xfrm>
             <a:off x="365760" y="1051560"/>
-            <a:ext cx="63360" cy="712440"/>
+            <a:ext cx="63000" cy="712080"/>
           </a:xfrm>
           <a:prstGeom prst="rect">
             <a:avLst/>
@@ -8631,7 +8777,7 @@
         <p:spPr>
           <a:xfrm>
             <a:off x="548640" y="1097280"/>
-            <a:ext cx="3748320" cy="300960"/>
+            <a:ext cx="3747960" cy="300600"/>
           </a:xfrm>
           <a:prstGeom prst="rect">
             <a:avLst/>
@@ -8692,7 +8838,7 @@
         <p:spPr>
           <a:xfrm>
             <a:off x="548640" y="1417320"/>
-            <a:ext cx="3748320" cy="255240"/>
+            <a:ext cx="3747960" cy="254880"/>
           </a:xfrm>
           <a:prstGeom prst="rect">
             <a:avLst/>
@@ -8753,7 +8899,7 @@
         <p:spPr>
           <a:xfrm>
             <a:off x="365760" y="1856160"/>
-            <a:ext cx="2873880" cy="712440"/>
+            <a:ext cx="2873520" cy="712080"/>
           </a:xfrm>
           <a:prstGeom prst="rect">
             <a:avLst/>
@@ -8811,7 +8957,7 @@
         <p:spPr>
           <a:xfrm>
             <a:off x="365760" y="1856160"/>
-            <a:ext cx="63360" cy="712440"/>
+            <a:ext cx="63000" cy="712080"/>
           </a:xfrm>
           <a:prstGeom prst="rect">
             <a:avLst/>
@@ -8862,7 +9008,7 @@
         <p:spPr>
           <a:xfrm>
             <a:off x="548640" y="1901880"/>
-            <a:ext cx="3748320" cy="300960"/>
+            <a:ext cx="3747960" cy="300600"/>
           </a:xfrm>
           <a:prstGeom prst="rect">
             <a:avLst/>
@@ -8923,7 +9069,7 @@
         <p:spPr>
           <a:xfrm>
             <a:off x="548640" y="2221920"/>
-            <a:ext cx="3748320" cy="255240"/>
+            <a:ext cx="3747960" cy="254880"/>
           </a:xfrm>
           <a:prstGeom prst="rect">
             <a:avLst/>
@@ -8984,7 +9130,7 @@
         <p:spPr>
           <a:xfrm>
             <a:off x="365760" y="2660760"/>
-            <a:ext cx="2873880" cy="712440"/>
+            <a:ext cx="2873520" cy="712080"/>
           </a:xfrm>
           <a:prstGeom prst="rect">
             <a:avLst/>
@@ -9042,7 +9188,7 @@
         <p:spPr>
           <a:xfrm>
             <a:off x="365760" y="2660760"/>
-            <a:ext cx="63360" cy="712440"/>
+            <a:ext cx="63000" cy="712080"/>
           </a:xfrm>
           <a:prstGeom prst="rect">
             <a:avLst/>
@@ -9093,7 +9239,7 @@
         <p:spPr>
           <a:xfrm>
             <a:off x="548640" y="2706480"/>
-            <a:ext cx="3748320" cy="300960"/>
+            <a:ext cx="3747960" cy="300600"/>
           </a:xfrm>
           <a:prstGeom prst="rect">
             <a:avLst/>
@@ -9154,7 +9300,7 @@
         <p:spPr>
           <a:xfrm>
             <a:off x="548640" y="3026520"/>
-            <a:ext cx="3748320" cy="255240"/>
+            <a:ext cx="3747960" cy="254880"/>
           </a:xfrm>
           <a:prstGeom prst="rect">
             <a:avLst/>
@@ -9215,7 +9361,7 @@
         <p:spPr>
           <a:xfrm>
             <a:off x="365760" y="3465720"/>
-            <a:ext cx="2873880" cy="712440"/>
+            <a:ext cx="2873520" cy="712080"/>
           </a:xfrm>
           <a:prstGeom prst="rect">
             <a:avLst/>
@@ -9273,7 +9419,7 @@
         <p:spPr>
           <a:xfrm>
             <a:off x="365760" y="3465720"/>
-            <a:ext cx="63360" cy="712440"/>
+            <a:ext cx="63000" cy="712080"/>
           </a:xfrm>
           <a:prstGeom prst="rect">
             <a:avLst/>
@@ -9324,7 +9470,7 @@
         <p:spPr>
           <a:xfrm>
             <a:off x="548640" y="3511440"/>
-            <a:ext cx="3748320" cy="300960"/>
+            <a:ext cx="3747960" cy="300600"/>
           </a:xfrm>
           <a:prstGeom prst="rect">
             <a:avLst/>
@@ -9385,7 +9531,7 @@
         <p:spPr>
           <a:xfrm>
             <a:off x="548640" y="3831480"/>
-            <a:ext cx="3748320" cy="255240"/>
+            <a:ext cx="3747960" cy="254880"/>
           </a:xfrm>
           <a:prstGeom prst="rect">
             <a:avLst/>
@@ -9446,7 +9592,7 @@
         <p:spPr>
           <a:xfrm>
             <a:off x="365760" y="4270320"/>
-            <a:ext cx="2873880" cy="712440"/>
+            <a:ext cx="2873520" cy="712080"/>
           </a:xfrm>
           <a:prstGeom prst="rect">
             <a:avLst/>
@@ -9504,7 +9650,7 @@
         <p:spPr>
           <a:xfrm>
             <a:off x="365760" y="4270320"/>
-            <a:ext cx="63360" cy="712440"/>
+            <a:ext cx="63000" cy="712080"/>
           </a:xfrm>
           <a:prstGeom prst="rect">
             <a:avLst/>
@@ -9555,7 +9701,7 @@
         <p:spPr>
           <a:xfrm>
             <a:off x="548640" y="4316040"/>
-            <a:ext cx="3748320" cy="300960"/>
+            <a:ext cx="3747960" cy="300600"/>
           </a:xfrm>
           <a:prstGeom prst="rect">
             <a:avLst/>
@@ -9616,7 +9762,7 @@
         <p:spPr>
           <a:xfrm>
             <a:off x="548640" y="4636080"/>
-            <a:ext cx="3748320" cy="255240"/>
+            <a:ext cx="3747960" cy="254880"/>
           </a:xfrm>
           <a:prstGeom prst="rect">
             <a:avLst/>
@@ -9681,7 +9827,7 @@
         <p:spPr>
           <a:xfrm>
             <a:off x="3600000" y="865440"/>
-            <a:ext cx="4571640" cy="4174200"/>
+            <a:ext cx="4571280" cy="4173840"/>
           </a:xfrm>
           <a:prstGeom prst="rect">
             <a:avLst/>
@@ -9738,7 +9884,7 @@
         <p:spPr>
           <a:xfrm>
             <a:off x="0" y="0"/>
-            <a:ext cx="109080" cy="5142960"/>
+            <a:ext cx="108720" cy="5142600"/>
           </a:xfrm>
           <a:prstGeom prst="rect">
             <a:avLst/>
@@ -9789,7 +9935,7 @@
         <p:spPr>
           <a:xfrm>
             <a:off x="365760" y="255960"/>
-            <a:ext cx="8503200" cy="566280"/>
+            <a:ext cx="8502840" cy="565920"/>
           </a:xfrm>
           <a:prstGeom prst="rect">
             <a:avLst/>
@@ -9843,14 +9989,365 @@
       </p:sp>
       <p:sp>
         <p:nvSpPr>
-          <p:cNvPr id="134" name="Shape 2"/>
-          <p:cNvSpPr/>
-          <p:nvPr/>
-        </p:nvSpPr>
-        <p:spPr>
-          <a:xfrm>
-            <a:off x="365760" y="1051560"/>
-            <a:ext cx="1370880" cy="1005120"/>
+          <p:cNvPr id="134" name="Text 4"/>
+          <p:cNvSpPr/>
+          <p:nvPr/>
+        </p:nvSpPr>
+        <p:spPr>
+          <a:xfrm>
+            <a:off x="365760" y="1710000"/>
+            <a:ext cx="1370520" cy="346320"/>
+          </a:xfrm>
+          <a:prstGeom prst="rect">
+            <a:avLst/>
+          </a:prstGeom>
+          <a:noFill/>
+          <a:ln w="0">
+            <a:noFill/>
+          </a:ln>
+        </p:spPr>
+        <p:style>
+          <a:lnRef idx="0"/>
+          <a:fillRef idx="0"/>
+          <a:effectRef idx="0"/>
+          <a:fontRef idx="minor"/>
+        </p:style>
+        <p:txBody>
+          <a:bodyPr lIns="0" rIns="0" tIns="0" bIns="0" anchor="t">
+            <a:noAutofit/>
+          </a:bodyPr>
+          <a:p>
+            <a:pPr algn="ctr" defTabSz="914400">
+              <a:lnSpc>
+                <a:spcPct val="100000"/>
+              </a:lnSpc>
+              <a:tabLst>
+                <a:tab algn="l" pos="0"/>
+              </a:tabLst>
+            </a:pPr>
+            <a:endParaRPr lang="es-CO" sz="1800" b="0" u="none" strike="noStrike">
+              <a:solidFill>
+                <a:srgbClr val="000000"/>
+              </a:solidFill>
+              <a:effectLst/>
+              <a:uFillTx/>
+              <a:latin typeface="Arial"/>
+            </a:endParaRPr>
+          </a:p>
+        </p:txBody>
+      </p:sp>
+      <p:sp>
+        <p:nvSpPr>
+          <p:cNvPr id="135" name="Shape 6"/>
+          <p:cNvSpPr/>
+          <p:nvPr/>
+        </p:nvSpPr>
+        <p:spPr>
+          <a:xfrm>
+            <a:off x="365760" y="1836720"/>
+            <a:ext cx="894240" cy="760320"/>
+          </a:xfrm>
+          <a:prstGeom prst="rect">
+            <a:avLst/>
+          </a:prstGeom>
+          <a:solidFill>
+            <a:srgbClr val="028090"/>
+          </a:solidFill>
+          <a:ln w="12700">
+            <a:solidFill>
+              <a:srgbClr val="028090"/>
+            </a:solidFill>
+            <a:round/>
+          </a:ln>
+          <a:effectLst>
+            <a:outerShdw algn="bl" blurRad="101520" dir="8100000" dist="37674" kx="0" ky="0" rotWithShape="0" sx="100000" sy="100000">
+              <a:srgbClr val="000000">
+                <a:alpha val="12000"/>
+              </a:srgbClr>
+            </a:outerShdw>
+          </a:effectLst>
+        </p:spPr>
+        <p:style>
+          <a:lnRef idx="0"/>
+          <a:fillRef idx="0"/>
+          <a:effectRef idx="0"/>
+          <a:fontRef idx="minor"/>
+        </p:style>
+        <p:txBody>
+          <a:bodyPr lIns="90000" rIns="90000" tIns="45000" bIns="45000" anchor="t">
+            <a:noAutofit/>
+          </a:bodyPr>
+          <a:p>
+            <a:pPr>
+              <a:lnSpc>
+                <a:spcPct val="100000"/>
+              </a:lnSpc>
+            </a:pPr>
+            <a:endParaRPr lang="es-CO" sz="1800" b="0" u="none" strike="noStrike">
+              <a:solidFill>
+                <a:srgbClr val="ffffff"/>
+              </a:solidFill>
+              <a:effectLst/>
+              <a:uFillTx/>
+              <a:latin typeface="Arial"/>
+            </a:endParaRPr>
+          </a:p>
+        </p:txBody>
+      </p:sp>
+      <p:sp>
+        <p:nvSpPr>
+          <p:cNvPr id="136" name="Text 7"/>
+          <p:cNvSpPr/>
+          <p:nvPr/>
+        </p:nvSpPr>
+        <p:spPr>
+          <a:xfrm>
+            <a:off x="365760" y="1836720"/>
+            <a:ext cx="894240" cy="657360"/>
+          </a:xfrm>
+          <a:prstGeom prst="rect">
+            <a:avLst/>
+          </a:prstGeom>
+          <a:noFill/>
+          <a:ln w="0">
+            <a:noFill/>
+          </a:ln>
+        </p:spPr>
+        <p:style>
+          <a:lnRef idx="0"/>
+          <a:fillRef idx="0"/>
+          <a:effectRef idx="0"/>
+          <a:fontRef idx="minor"/>
+        </p:style>
+        <p:txBody>
+          <a:bodyPr lIns="0" rIns="0" tIns="0" bIns="0" anchor="b">
+            <a:noAutofit/>
+          </a:bodyPr>
+          <a:p>
+            <a:pPr algn="ctr" defTabSz="914400">
+              <a:lnSpc>
+                <a:spcPct val="100000"/>
+              </a:lnSpc>
+              <a:tabLst>
+                <a:tab algn="l" pos="0"/>
+              </a:tabLst>
+            </a:pPr>
+            <a:r>
+              <a:rPr lang="en-US" sz="3600" b="1" u="none" strike="noStrike">
+                <a:solidFill>
+                  <a:srgbClr val="ffffff"/>
+                </a:solidFill>
+                <a:effectLst/>
+                <a:uFillTx/>
+                <a:latin typeface="Georgia"/>
+                <a:ea typeface="Georgia"/>
+              </a:rPr>
+              <a:t>5</a:t>
+            </a:r>
+            <a:endParaRPr lang="es-CO" sz="3600" b="0" u="none" strike="noStrike">
+              <a:solidFill>
+                <a:srgbClr val="000000"/>
+              </a:solidFill>
+              <a:effectLst/>
+              <a:uFillTx/>
+              <a:latin typeface="Arial"/>
+            </a:endParaRPr>
+          </a:p>
+        </p:txBody>
+      </p:sp>
+      <p:sp>
+        <p:nvSpPr>
+          <p:cNvPr id="137" name="Text 8"/>
+          <p:cNvSpPr/>
+          <p:nvPr/>
+        </p:nvSpPr>
+        <p:spPr>
+          <a:xfrm>
+            <a:off x="365760" y="2944440"/>
+            <a:ext cx="1370520" cy="346320"/>
+          </a:xfrm>
+          <a:prstGeom prst="rect">
+            <a:avLst/>
+          </a:prstGeom>
+          <a:noFill/>
+          <a:ln w="0">
+            <a:noFill/>
+          </a:ln>
+        </p:spPr>
+        <p:style>
+          <a:lnRef idx="0"/>
+          <a:fillRef idx="0"/>
+          <a:effectRef idx="0"/>
+          <a:fontRef idx="minor"/>
+        </p:style>
+        <p:txBody>
+          <a:bodyPr lIns="0" rIns="0" tIns="0" bIns="0" anchor="t">
+            <a:noAutofit/>
+          </a:bodyPr>
+          <a:p>
+            <a:pPr algn="ctr" defTabSz="914400">
+              <a:lnSpc>
+                <a:spcPct val="100000"/>
+              </a:lnSpc>
+              <a:tabLst>
+                <a:tab algn="l" pos="0"/>
+              </a:tabLst>
+            </a:pPr>
+            <a:r>
+              <a:rPr lang="en-US" sz="1000" b="0" u="none" strike="noStrike">
+                <a:solidFill>
+                  <a:srgbClr val="ffffff"/>
+                </a:solidFill>
+                <a:effectLst/>
+                <a:uFillTx/>
+                <a:latin typeface="Calibri"/>
+                <a:ea typeface="Calibri"/>
+              </a:rPr>
+              <a:t>segmentos</a:t>
+            </a:r>
+            <a:endParaRPr lang="es-CO" sz="1000" b="0" u="none" strike="noStrike">
+              <a:solidFill>
+                <a:srgbClr val="000000"/>
+              </a:solidFill>
+              <a:effectLst/>
+              <a:uFillTx/>
+              <a:latin typeface="Arial"/>
+            </a:endParaRPr>
+          </a:p>
+        </p:txBody>
+      </p:sp>
+      <p:sp>
+        <p:nvSpPr>
+          <p:cNvPr id="138" name="Text 9"/>
+          <p:cNvSpPr/>
+          <p:nvPr/>
+        </p:nvSpPr>
+        <p:spPr>
+          <a:xfrm>
+            <a:off x="1440000" y="1876320"/>
+            <a:ext cx="7380000" cy="180000"/>
+          </a:xfrm>
+          <a:prstGeom prst="rect">
+            <a:avLst/>
+          </a:prstGeom>
+          <a:noFill/>
+          <a:ln w="0">
+            <a:noFill/>
+          </a:ln>
+        </p:spPr>
+        <p:style>
+          <a:lnRef idx="0"/>
+          <a:fillRef idx="0"/>
+          <a:effectRef idx="0"/>
+          <a:fontRef idx="minor"/>
+        </p:style>
+        <p:txBody>
+          <a:bodyPr lIns="0" rIns="0" tIns="0" bIns="0" anchor="ctr">
+            <a:noAutofit/>
+          </a:bodyPr>
+          <a:p>
+            <a:pPr defTabSz="914400">
+              <a:lnSpc>
+                <a:spcPct val="100000"/>
+              </a:lnSpc>
+              <a:tabLst>
+                <a:tab algn="l" pos="0"/>
+              </a:tabLst>
+            </a:pPr>
+            <a:r>
+              <a:rPr lang="en-US" sz="1050" b="0" u="none" strike="noStrike">
+                <a:solidFill>
+                  <a:srgbClr val="1e1e1e"/>
+                </a:solidFill>
+                <a:effectLst/>
+                <a:uFillTx/>
+                <a:latin typeface="Calibri"/>
+                <a:ea typeface="Calibri"/>
+              </a:rPr>
+              <a:t>El clustering confirmó que el catálogo no es homogéneo — hay perfiles muy distintos sin distinción visible</a:t>
+            </a:r>
+            <a:endParaRPr lang="es-CO" sz="1050" b="0" u="none" strike="noStrike">
+              <a:solidFill>
+                <a:srgbClr val="000000"/>
+              </a:solidFill>
+              <a:effectLst/>
+              <a:uFillTx/>
+              <a:latin typeface="Arial"/>
+            </a:endParaRPr>
+          </a:p>
+        </p:txBody>
+      </p:sp>
+      <p:sp>
+        <p:nvSpPr>
+          <p:cNvPr id="139" name="Text 11"/>
+          <p:cNvSpPr/>
+          <p:nvPr/>
+        </p:nvSpPr>
+        <p:spPr>
+          <a:xfrm>
+            <a:off x="365760" y="3520440"/>
+            <a:ext cx="1370520" cy="657360"/>
+          </a:xfrm>
+          <a:prstGeom prst="rect">
+            <a:avLst/>
+          </a:prstGeom>
+          <a:noFill/>
+          <a:ln w="0">
+            <a:noFill/>
+          </a:ln>
+        </p:spPr>
+        <p:style>
+          <a:lnRef idx="0"/>
+          <a:fillRef idx="0"/>
+          <a:effectRef idx="0"/>
+          <a:fontRef idx="minor"/>
+        </p:style>
+        <p:txBody>
+          <a:bodyPr lIns="0" rIns="0" tIns="0" bIns="0" anchor="b">
+            <a:noAutofit/>
+          </a:bodyPr>
+          <a:p>
+            <a:pPr algn="ctr" defTabSz="914400">
+              <a:lnSpc>
+                <a:spcPct val="100000"/>
+              </a:lnSpc>
+              <a:tabLst>
+                <a:tab algn="l" pos="0"/>
+              </a:tabLst>
+            </a:pPr>
+            <a:r>
+              <a:rPr lang="en-US" sz="3600" b="1" u="none" strike="noStrike">
+                <a:solidFill>
+                  <a:srgbClr val="ffffff"/>
+                </a:solidFill>
+                <a:effectLst/>
+                <a:uFillTx/>
+                <a:latin typeface="Georgia"/>
+                <a:ea typeface="Georgia"/>
+              </a:rPr>
+              <a:t>♻️</a:t>
+            </a:r>
+            <a:endParaRPr lang="es-CO" sz="3600" b="0" u="none" strike="noStrike">
+              <a:solidFill>
+                <a:srgbClr val="000000"/>
+              </a:solidFill>
+              <a:effectLst/>
+              <a:uFillTx/>
+              <a:latin typeface="Arial"/>
+            </a:endParaRPr>
+          </a:p>
+        </p:txBody>
+      </p:sp>
+      <p:sp>
+        <p:nvSpPr>
+          <p:cNvPr id="140" name="Shape 5"/>
+          <p:cNvSpPr/>
+          <p:nvPr/>
+        </p:nvSpPr>
+        <p:spPr>
+          <a:xfrm>
+            <a:off x="365400" y="905040"/>
+            <a:ext cx="1554120" cy="685440"/>
           </a:xfrm>
           <a:prstGeom prst="rect">
             <a:avLst/>
@@ -9883,11 +10380,6 @@
             <a:noAutofit/>
           </a:bodyPr>
           <a:p>
-            <a:pPr>
-              <a:lnSpc>
-                <a:spcPct val="100000"/>
-              </a:lnSpc>
-            </a:pPr>
             <a:endParaRPr lang="es-CO" sz="1800" b="0" u="none" strike="noStrike">
               <a:solidFill>
                 <a:srgbClr val="ffffff"/>
@@ -9901,14 +10393,14 @@
       </p:sp>
       <p:sp>
         <p:nvSpPr>
-          <p:cNvPr id="135" name="Text 3"/>
-          <p:cNvSpPr/>
-          <p:nvPr/>
-        </p:nvSpPr>
-        <p:spPr>
-          <a:xfrm>
-            <a:off x="365760" y="1051560"/>
-            <a:ext cx="1370880" cy="657720"/>
+          <p:cNvPr id="141" name="Text 46"/>
+          <p:cNvSpPr/>
+          <p:nvPr/>
+        </p:nvSpPr>
+        <p:spPr>
+          <a:xfrm>
+            <a:off x="365400" y="905040"/>
+            <a:ext cx="1554120" cy="438480"/>
           </a:xfrm>
           <a:prstGeom prst="rect">
             <a:avLst/>
@@ -9938,7 +10430,7 @@
               </a:tabLst>
             </a:pPr>
             <a:r>
-              <a:rPr lang="en-US" sz="2800" b="1" u="none" strike="noStrike">
+              <a:rPr lang="en-US" sz="2200" b="1" u="none" strike="noStrike">
                 <a:solidFill>
                   <a:srgbClr val="ffffff"/>
                 </a:solidFill>
@@ -9949,27 +10441,27 @@
               </a:rPr>
               <a:t>70.9%</a:t>
             </a:r>
-            <a:endParaRPr lang="es-CO" sz="2800" b="0" u="none" strike="noStrike">
-              <a:solidFill>
-                <a:srgbClr val="000000"/>
-              </a:solidFill>
-              <a:effectLst/>
-              <a:uFillTx/>
-              <a:latin typeface="Arial"/>
-            </a:endParaRPr>
-          </a:p>
-        </p:txBody>
-      </p:sp>
-      <p:sp>
-        <p:nvSpPr>
-          <p:cNvPr id="136" name="Text 4"/>
-          <p:cNvSpPr/>
-          <p:nvPr/>
-        </p:nvSpPr>
-        <p:spPr>
-          <a:xfrm>
-            <a:off x="365760" y="1710000"/>
-            <a:ext cx="1370880" cy="346680"/>
+            <a:endParaRPr lang="es-CO" sz="2200" b="0" u="none" strike="noStrike">
+              <a:solidFill>
+                <a:srgbClr val="000000"/>
+              </a:solidFill>
+              <a:effectLst/>
+              <a:uFillTx/>
+              <a:latin typeface="Arial"/>
+            </a:endParaRPr>
+          </a:p>
+        </p:txBody>
+      </p:sp>
+      <p:sp>
+        <p:nvSpPr>
+          <p:cNvPr id="142" name="Text 47"/>
+          <p:cNvSpPr/>
+          <p:nvPr/>
+        </p:nvSpPr>
+        <p:spPr>
+          <a:xfrm>
+            <a:off x="365400" y="1343880"/>
+            <a:ext cx="1554120" cy="246600"/>
           </a:xfrm>
           <a:prstGeom prst="rect">
             <a:avLst/>
@@ -9986,7 +10478,7 @@
           <a:fontRef idx="minor"/>
         </p:style>
         <p:txBody>
-          <a:bodyPr lIns="0" rIns="0" tIns="0" bIns="0" anchor="t">
+          <a:bodyPr lIns="0" rIns="0" tIns="0" bIns="0" anchor="ctr">
             <a:noAutofit/>
           </a:bodyPr>
           <a:p>
@@ -9999,7 +10491,7 @@
               </a:tabLst>
             </a:pPr>
             <a:r>
-              <a:rPr lang="en-US" sz="1000" b="0" u="none" strike="noStrike">
+              <a:rPr lang="en-US" sz="900" b="0" u="none" strike="noStrike">
                 <a:solidFill>
                   <a:srgbClr val="ffffff"/>
                 </a:solidFill>
@@ -10010,118 +10502,27 @@
               </a:rPr>
               <a:t>no evaluable</a:t>
             </a:r>
-            <a:endParaRPr lang="es-CO" sz="1000" b="0" u="none" strike="noStrike">
-              <a:solidFill>
-                <a:srgbClr val="000000"/>
-              </a:solidFill>
-              <a:effectLst/>
-              <a:uFillTx/>
-              <a:latin typeface="Arial"/>
-            </a:endParaRPr>
-          </a:p>
-        </p:txBody>
-      </p:sp>
-      <p:sp>
-        <p:nvSpPr>
-          <p:cNvPr id="137" name="Text 5"/>
-          <p:cNvSpPr/>
-          <p:nvPr/>
-        </p:nvSpPr>
-        <p:spPr>
-          <a:xfrm>
-            <a:off x="1920240" y="1188720"/>
-            <a:ext cx="6857280" cy="776520"/>
-          </a:xfrm>
-          <a:prstGeom prst="rect">
-            <a:avLst/>
-          </a:prstGeom>
-          <a:noFill/>
-          <a:ln w="0">
-            <a:noFill/>
-          </a:ln>
-        </p:spPr>
-        <p:style>
-          <a:lnRef idx="0"/>
-          <a:fillRef idx="0"/>
-          <a:effectRef idx="0"/>
-          <a:fontRef idx="minor"/>
-        </p:style>
-        <p:txBody>
-          <a:bodyPr lIns="0" rIns="0" tIns="0" bIns="0" anchor="ctr">
-            <a:noAutofit/>
-          </a:bodyPr>
-          <a:p>
-            <a:pPr defTabSz="914400">
-              <a:lnSpc>
-                <a:spcPct val="100000"/>
-              </a:lnSpc>
-              <a:tabLst>
-                <a:tab algn="l" pos="0"/>
-              </a:tabLst>
-            </a:pPr>
-            <a:r>
-              <a:rPr lang="en-US" sz="1250" b="0" u="none" strike="noStrike">
-                <a:solidFill>
-                  <a:srgbClr val="1e1e1e"/>
-                </a:solidFill>
-                <a:effectLst/>
-                <a:uFillTx/>
-                <a:latin typeface="Calibri"/>
-                <a:ea typeface="Calibri"/>
-              </a:rPr>
-              <a:t>35.474 de 50.000 productos recibieron score -1</a:t>
-            </a:r>
-            <a:endParaRPr lang="es-CO" sz="1250" b="0" u="none" strike="noStrike">
-              <a:solidFill>
-                <a:srgbClr val="000000"/>
-              </a:solidFill>
-              <a:effectLst/>
-              <a:uFillTx/>
-              <a:latin typeface="Arial"/>
-            </a:endParaRPr>
-          </a:p>
-          <a:p>
-            <a:pPr defTabSz="914400">
-              <a:lnSpc>
-                <a:spcPct val="100000"/>
-              </a:lnSpc>
-              <a:tabLst>
-                <a:tab algn="l" pos="0"/>
-              </a:tabLst>
-            </a:pPr>
-            <a:r>
-              <a:rPr lang="en-US" sz="1250" b="0" u="none" strike="noStrike">
-                <a:solidFill>
-                  <a:srgbClr val="1e1e1e"/>
-                </a:solidFill>
-                <a:effectLst/>
-                <a:uFillTx/>
-                <a:latin typeface="Calibri"/>
-                <a:ea typeface="Calibri"/>
-              </a:rPr>
-              <a:t>por ausencia total de ingredientes declarados</a:t>
-            </a:r>
-            <a:endParaRPr lang="es-CO" sz="1250" b="0" u="none" strike="noStrike">
-              <a:solidFill>
-                <a:srgbClr val="000000"/>
-              </a:solidFill>
-              <a:effectLst/>
-              <a:uFillTx/>
-              <a:latin typeface="Arial"/>
-            </a:endParaRPr>
-          </a:p>
-        </p:txBody>
-      </p:sp>
-      <p:sp>
-        <p:nvSpPr>
-          <p:cNvPr id="138" name="Shape 6"/>
-          <p:cNvSpPr/>
-          <p:nvPr/>
-        </p:nvSpPr>
-        <p:spPr>
-          <a:xfrm>
-            <a:off x="365760" y="2286000"/>
-            <a:ext cx="1370880" cy="1005120"/>
+            <a:endParaRPr lang="es-CO" sz="900" b="0" u="none" strike="noStrike">
+              <a:solidFill>
+                <a:srgbClr val="000000"/>
+              </a:solidFill>
+              <a:effectLst/>
+              <a:uFillTx/>
+              <a:latin typeface="Arial"/>
+            </a:endParaRPr>
+          </a:p>
+        </p:txBody>
+      </p:sp>
+      <p:sp>
+        <p:nvSpPr>
+          <p:cNvPr id="143" name="Shape 39"/>
+          <p:cNvSpPr/>
+          <p:nvPr/>
+        </p:nvSpPr>
+        <p:spPr>
+          <a:xfrm>
+            <a:off x="2194200" y="905040"/>
+            <a:ext cx="1554120" cy="685440"/>
           </a:xfrm>
           <a:prstGeom prst="rect">
             <a:avLst/>
@@ -10154,11 +10555,6 @@
             <a:noAutofit/>
           </a:bodyPr>
           <a:p>
-            <a:pPr>
-              <a:lnSpc>
-                <a:spcPct val="100000"/>
-              </a:lnSpc>
-            </a:pPr>
             <a:endParaRPr lang="es-CO" sz="1800" b="0" u="none" strike="noStrike">
               <a:solidFill>
                 <a:srgbClr val="ffffff"/>
@@ -10172,14 +10568,14 @@
       </p:sp>
       <p:sp>
         <p:nvSpPr>
-          <p:cNvPr id="139" name="Text 7"/>
-          <p:cNvSpPr/>
-          <p:nvPr/>
-        </p:nvSpPr>
-        <p:spPr>
-          <a:xfrm>
-            <a:off x="365760" y="2286000"/>
-            <a:ext cx="1370880" cy="657720"/>
+          <p:cNvPr id="144" name="Text 48"/>
+          <p:cNvSpPr/>
+          <p:nvPr/>
+        </p:nvSpPr>
+        <p:spPr>
+          <a:xfrm>
+            <a:off x="2194200" y="905040"/>
+            <a:ext cx="1554120" cy="438480"/>
           </a:xfrm>
           <a:prstGeom prst="rect">
             <a:avLst/>
@@ -10209,7 +10605,7 @@
               </a:tabLst>
             </a:pPr>
             <a:r>
-              <a:rPr lang="en-US" sz="3600" b="1" u="none" strike="noStrike">
+              <a:rPr lang="en-US" sz="2200" b="1" u="none" strike="noStrike">
                 <a:solidFill>
                   <a:srgbClr val="ffffff"/>
                 </a:solidFill>
@@ -10218,29 +10614,29 @@
                 <a:latin typeface="Georgia"/>
                 <a:ea typeface="Georgia"/>
               </a:rPr>
-              <a:t>5</a:t>
+              <a:t>29.1%</a:t>
             </a:r>
-            <a:endParaRPr lang="es-CO" sz="3600" b="0" u="none" strike="noStrike">
-              <a:solidFill>
-                <a:srgbClr val="000000"/>
-              </a:solidFill>
-              <a:effectLst/>
-              <a:uFillTx/>
-              <a:latin typeface="Arial"/>
-            </a:endParaRPr>
-          </a:p>
-        </p:txBody>
-      </p:sp>
-      <p:sp>
-        <p:nvSpPr>
-          <p:cNvPr id="140" name="Text 8"/>
-          <p:cNvSpPr/>
-          <p:nvPr/>
-        </p:nvSpPr>
-        <p:spPr>
-          <a:xfrm>
-            <a:off x="365760" y="2944440"/>
-            <a:ext cx="1370880" cy="346680"/>
+            <a:endParaRPr lang="es-CO" sz="2200" b="0" u="none" strike="noStrike">
+              <a:solidFill>
+                <a:srgbClr val="000000"/>
+              </a:solidFill>
+              <a:effectLst/>
+              <a:uFillTx/>
+              <a:latin typeface="Arial"/>
+            </a:endParaRPr>
+          </a:p>
+        </p:txBody>
+      </p:sp>
+      <p:sp>
+        <p:nvSpPr>
+          <p:cNvPr id="145" name="Text 49"/>
+          <p:cNvSpPr/>
+          <p:nvPr/>
+        </p:nvSpPr>
+        <p:spPr>
+          <a:xfrm>
+            <a:off x="2194200" y="1343880"/>
+            <a:ext cx="1554120" cy="246600"/>
           </a:xfrm>
           <a:prstGeom prst="rect">
             <a:avLst/>
@@ -10257,7 +10653,7 @@
           <a:fontRef idx="minor"/>
         </p:style>
         <p:txBody>
-          <a:bodyPr lIns="0" rIns="0" tIns="0" bIns="0" anchor="t">
+          <a:bodyPr lIns="0" rIns="0" tIns="0" bIns="0" anchor="ctr">
             <a:noAutofit/>
           </a:bodyPr>
           <a:p>
@@ -10270,7 +10666,7 @@
               </a:tabLst>
             </a:pPr>
             <a:r>
-              <a:rPr lang="en-US" sz="1000" b="0" u="none" strike="noStrike">
+              <a:rPr lang="en-US" sz="900" b="0" u="none" strike="noStrike">
                 <a:solidFill>
                   <a:srgbClr val="ffffff"/>
                 </a:solidFill>
@@ -10279,29 +10675,29 @@
                 <a:latin typeface="Calibri"/>
                 <a:ea typeface="Calibri"/>
               </a:rPr>
-              <a:t>segmentos</a:t>
+              <a:t>score válido</a:t>
             </a:r>
-            <a:endParaRPr lang="es-CO" sz="1000" b="0" u="none" strike="noStrike">
-              <a:solidFill>
-                <a:srgbClr val="000000"/>
-              </a:solidFill>
-              <a:effectLst/>
-              <a:uFillTx/>
-              <a:latin typeface="Arial"/>
-            </a:endParaRPr>
-          </a:p>
-        </p:txBody>
-      </p:sp>
-      <p:sp>
-        <p:nvSpPr>
-          <p:cNvPr id="141" name="Text 9"/>
-          <p:cNvSpPr/>
-          <p:nvPr/>
-        </p:nvSpPr>
-        <p:spPr>
-          <a:xfrm>
-            <a:off x="1920240" y="2423160"/>
-            <a:ext cx="6857280" cy="776520"/>
+            <a:endParaRPr lang="es-CO" sz="900" b="0" u="none" strike="noStrike">
+              <a:solidFill>
+                <a:srgbClr val="000000"/>
+              </a:solidFill>
+              <a:effectLst/>
+              <a:uFillTx/>
+              <a:latin typeface="Arial"/>
+            </a:endParaRPr>
+          </a:p>
+        </p:txBody>
+      </p:sp>
+      <p:sp>
+        <p:nvSpPr>
+          <p:cNvPr id="146" name="Text 50"/>
+          <p:cNvSpPr/>
+          <p:nvPr/>
+        </p:nvSpPr>
+        <p:spPr>
+          <a:xfrm>
+            <a:off x="4114440" y="905040"/>
+            <a:ext cx="4663080" cy="712800"/>
           </a:xfrm>
           <a:prstGeom prst="rect">
             <a:avLst/>
@@ -10331,7 +10727,7 @@
               </a:tabLst>
             </a:pPr>
             <a:r>
-              <a:rPr lang="en-US" sz="1250" b="0" u="none" strike="noStrike">
+              <a:rPr lang="en-US" sz="1050" b="0" u="none" strike="noStrike">
                 <a:solidFill>
                   <a:srgbClr val="1e1e1e"/>
                 </a:solidFill>
@@ -10340,9 +10736,9 @@
                 <a:latin typeface="Calibri"/>
                 <a:ea typeface="Calibri"/>
               </a:rPr>
-              <a:t>El clustering confirmó que el catálogo no es homogéneo —</a:t>
+              <a:t>35.474 productos recibieron score -1 por ausencia total de ingredientes.</a:t>
             </a:r>
-            <a:endParaRPr lang="es-CO" sz="1250" b="0" u="none" strike="noStrike">
+            <a:endParaRPr lang="es-CO" sz="1050" b="0" u="none" strike="noStrike">
               <a:solidFill>
                 <a:srgbClr val="000000"/>
               </a:solidFill>
@@ -10361,7 +10757,7 @@
               </a:tabLst>
             </a:pPr>
             <a:r>
-              <a:rPr lang="en-US" sz="1250" b="0" u="none" strike="noStrike">
+              <a:rPr lang="en-US" sz="1050" b="0" u="none" strike="noStrike">
                 <a:solidFill>
                   <a:srgbClr val="1e1e1e"/>
                 </a:solidFill>
@@ -10370,39 +10766,353 @@
                 <a:latin typeface="Calibri"/>
                 <a:ea typeface="Calibri"/>
               </a:rPr>
-              <a:t>hay perfiles muy distintos sin distinción visible</a:t>
+              <a:t>Del 29.1% válido, la calidad no es uniforme —</a:t>
             </a:r>
-            <a:endParaRPr lang="es-CO" sz="1250" b="0" u="none" strike="noStrike">
-              <a:solidFill>
-                <a:srgbClr val="000000"/>
-              </a:solidFill>
-              <a:effectLst/>
-              <a:uFillTx/>
-              <a:latin typeface="Arial"/>
-            </a:endParaRPr>
-          </a:p>
-        </p:txBody>
-      </p:sp>
-      <p:sp>
-        <p:nvSpPr>
-          <p:cNvPr id="142" name="Shape 10"/>
-          <p:cNvSpPr/>
-          <p:nvPr/>
-        </p:nvSpPr>
-        <p:spPr>
-          <a:xfrm>
-            <a:off x="365760" y="3520440"/>
-            <a:ext cx="1370880" cy="1005120"/>
+            <a:r>
+              <a:rPr lang="en-US" sz="1050" b="1" u="none" strike="noStrike">
+                <a:solidFill>
+                  <a:srgbClr val="1e1e1e"/>
+                </a:solidFill>
+                <a:effectLst/>
+                <a:uFillTx/>
+                <a:latin typeface="Calibri"/>
+                <a:ea typeface="Calibri"/>
+              </a:rPr>
+              <a:t> el catálogo no puede tratarse como dataset homogéneo.</a:t>
+            </a:r>
+            <a:endParaRPr lang="es-CO" sz="1050" b="0" u="none" strike="noStrike">
+              <a:solidFill>
+                <a:srgbClr val="000000"/>
+              </a:solidFill>
+              <a:effectLst/>
+              <a:uFillTx/>
+              <a:latin typeface="Arial"/>
+            </a:endParaRPr>
+          </a:p>
+        </p:txBody>
+      </p:sp>
+      <p:sp>
+        <p:nvSpPr>
+          <p:cNvPr id="147" name="Shape 40"/>
+          <p:cNvSpPr/>
+          <p:nvPr/>
+        </p:nvSpPr>
+        <p:spPr>
+          <a:xfrm>
+            <a:off x="365400" y="1709640"/>
+            <a:ext cx="8412480" cy="360"/>
+          </a:xfrm>
+          <a:prstGeom prst="line">
+            <a:avLst/>
+          </a:prstGeom>
+          <a:ln w="10160">
+            <a:solidFill>
+              <a:srgbClr val="e0d8df"/>
+            </a:solidFill>
+            <a:round/>
+          </a:ln>
+        </p:spPr>
+        <p:style>
+          <a:lnRef idx="0"/>
+          <a:fillRef idx="0"/>
+          <a:effectRef idx="0"/>
+          <a:fontRef idx="minor"/>
+        </p:style>
+        <p:txBody>
+          <a:bodyPr lIns="90000" rIns="90000" tIns="-44640" bIns="-44640" anchor="t" anchorCtr="1">
+            <a:noAutofit/>
+          </a:bodyPr>
+          <a:p>
+            <a:endParaRPr lang="es-CO" sz="1800" b="0" u="none" strike="noStrike">
+              <a:solidFill>
+                <a:srgbClr val="000000"/>
+              </a:solidFill>
+              <a:effectLst/>
+              <a:uFillTx/>
+              <a:latin typeface="Arial"/>
+            </a:endParaRPr>
+          </a:p>
+        </p:txBody>
+      </p:sp>
+      <p:pic>
+        <p:nvPicPr>
+          <p:cNvPr id="148" name=""/>
+          <p:cNvPicPr/>
+          <p:nvPr/>
+        </p:nvPicPr>
+        <p:blipFill>
+          <a:blip r:embed="rId1"/>
+          <a:stretch/>
+        </p:blipFill>
+        <p:spPr>
+          <a:xfrm>
+            <a:off x="1736280" y="2160000"/>
+            <a:ext cx="6363720" cy="1651680"/>
+          </a:xfrm>
+          <a:prstGeom prst="rect">
+            <a:avLst/>
+          </a:prstGeom>
+          <a:noFill/>
+          <a:ln w="0">
+            <a:noFill/>
+          </a:ln>
+        </p:spPr>
+      </p:pic>
+      <p:sp>
+        <p:nvSpPr>
+          <p:cNvPr id="149" name="Text 64"/>
+          <p:cNvSpPr/>
+          <p:nvPr/>
+        </p:nvSpPr>
+        <p:spPr>
+          <a:xfrm>
+            <a:off x="360000" y="3780000"/>
+            <a:ext cx="8412120" cy="273960"/>
+          </a:xfrm>
+          <a:prstGeom prst="rect">
+            <a:avLst/>
+          </a:prstGeom>
+          <a:noFill/>
+          <a:ln w="0">
+            <a:noFill/>
+          </a:ln>
+        </p:spPr>
+        <p:style>
+          <a:lnRef idx="0"/>
+          <a:fillRef idx="0"/>
+          <a:effectRef idx="0"/>
+          <a:fontRef idx="minor"/>
+        </p:style>
+        <p:txBody>
+          <a:bodyPr lIns="0" rIns="0" tIns="0" bIns="0" anchor="ctr">
+            <a:noAutofit/>
+          </a:bodyPr>
+          <a:p>
+            <a:pPr defTabSz="914400">
+              <a:lnSpc>
+                <a:spcPct val="100000"/>
+              </a:lnSpc>
+              <a:spcBef>
+                <a:spcPts val="1191"/>
+              </a:spcBef>
+              <a:spcAft>
+                <a:spcPts val="992"/>
+              </a:spcAft>
+              <a:tabLst>
+                <a:tab algn="l" pos="0"/>
+              </a:tabLst>
+            </a:pPr>
+            <a:r>
+              <a:rPr lang="en-US" sz="1100" b="1" u="none" strike="noStrike">
+                <a:solidFill>
+                  <a:srgbClr val="2d1b36"/>
+                </a:solidFill>
+                <a:effectLst/>
+                <a:uFillTx/>
+                <a:latin typeface="Calibri"/>
+                <a:ea typeface="Calibri"/>
+              </a:rPr>
+              <a:t>Problemas más frecuentes </a:t>
+            </a:r>
+            <a:endParaRPr lang="es-CO" sz="1100" b="0" u="none" strike="noStrike">
+              <a:solidFill>
+                <a:srgbClr val="000000"/>
+              </a:solidFill>
+              <a:effectLst/>
+              <a:uFillTx/>
+              <a:latin typeface="Arial"/>
+            </a:endParaRPr>
+          </a:p>
+        </p:txBody>
+      </p:sp>
+      <p:sp>
+        <p:nvSpPr>
+          <p:cNvPr id="150" name="Shape 47"/>
+          <p:cNvSpPr/>
+          <p:nvPr/>
+        </p:nvSpPr>
+        <p:spPr>
+          <a:xfrm>
+            <a:off x="360000" y="4118400"/>
+            <a:ext cx="2605680" cy="36360"/>
           </a:xfrm>
           <a:prstGeom prst="rect">
             <a:avLst/>
           </a:prstGeom>
           <a:solidFill>
-            <a:srgbClr val="2c5f2d"/>
+            <a:srgbClr val="6d2e46"/>
           </a:solidFill>
           <a:ln w="12700">
             <a:solidFill>
-              <a:srgbClr val="2c5f2d"/>
+              <a:srgbClr val="6d2e46"/>
+            </a:solidFill>
+            <a:round/>
+          </a:ln>
+        </p:spPr>
+        <p:style>
+          <a:lnRef idx="0"/>
+          <a:fillRef idx="0"/>
+          <a:effectRef idx="0"/>
+          <a:fontRef idx="minor"/>
+        </p:style>
+        <p:txBody>
+          <a:bodyPr lIns="90000" rIns="90000" tIns="-8280" bIns="-8280" anchor="t">
+            <a:noAutofit/>
+          </a:bodyPr>
+          <a:p>
+            <a:endParaRPr lang="es-CO" sz="1800" b="0" u="none" strike="noStrike">
+              <a:solidFill>
+                <a:srgbClr val="ffffff"/>
+              </a:solidFill>
+              <a:effectLst/>
+              <a:uFillTx/>
+              <a:latin typeface="Arial"/>
+            </a:endParaRPr>
+          </a:p>
+        </p:txBody>
+      </p:sp>
+      <p:sp>
+        <p:nvSpPr>
+          <p:cNvPr id="151" name="Text 65"/>
+          <p:cNvSpPr/>
+          <p:nvPr/>
+        </p:nvSpPr>
+        <p:spPr>
+          <a:xfrm>
+            <a:off x="360000" y="4164120"/>
+            <a:ext cx="2605680" cy="347040"/>
+          </a:xfrm>
+          <a:prstGeom prst="rect">
+            <a:avLst/>
+          </a:prstGeom>
+          <a:noFill/>
+          <a:ln w="0">
+            <a:noFill/>
+          </a:ln>
+        </p:spPr>
+        <p:style>
+          <a:lnRef idx="0"/>
+          <a:fillRef idx="0"/>
+          <a:effectRef idx="0"/>
+          <a:fontRef idx="minor"/>
+        </p:style>
+        <p:txBody>
+          <a:bodyPr lIns="0" rIns="0" tIns="0" bIns="0" anchor="ctr">
+            <a:noAutofit/>
+          </a:bodyPr>
+          <a:p>
+            <a:pPr algn="ctr" defTabSz="914400">
+              <a:lnSpc>
+                <a:spcPct val="100000"/>
+              </a:lnSpc>
+              <a:tabLst>
+                <a:tab algn="l" pos="0"/>
+              </a:tabLst>
+            </a:pPr>
+            <a:r>
+              <a:rPr lang="en-US" sz="2000" b="1" u="none" strike="noStrike">
+                <a:solidFill>
+                  <a:srgbClr val="6d2e46"/>
+                </a:solidFill>
+                <a:effectLst/>
+                <a:uFillTx/>
+                <a:latin typeface="Georgia"/>
+                <a:ea typeface="Georgia"/>
+              </a:rPr>
+              <a:t>~2.800</a:t>
+            </a:r>
+            <a:endParaRPr lang="es-CO" sz="2000" b="0" u="none" strike="noStrike">
+              <a:solidFill>
+                <a:srgbClr val="000000"/>
+              </a:solidFill>
+              <a:effectLst/>
+              <a:uFillTx/>
+              <a:latin typeface="Arial"/>
+            </a:endParaRPr>
+          </a:p>
+        </p:txBody>
+      </p:sp>
+      <p:sp>
+        <p:nvSpPr>
+          <p:cNvPr id="152" name="Text 66"/>
+          <p:cNvSpPr/>
+          <p:nvPr/>
+        </p:nvSpPr>
+        <p:spPr>
+          <a:xfrm>
+            <a:off x="360000" y="4511520"/>
+            <a:ext cx="2605680" cy="438480"/>
+          </a:xfrm>
+          <a:prstGeom prst="rect">
+            <a:avLst/>
+          </a:prstGeom>
+          <a:noFill/>
+          <a:ln w="0">
+            <a:noFill/>
+          </a:ln>
+        </p:spPr>
+        <p:style>
+          <a:lnRef idx="0"/>
+          <a:fillRef idx="0"/>
+          <a:effectRef idx="0"/>
+          <a:fontRef idx="minor"/>
+        </p:style>
+        <p:txBody>
+          <a:bodyPr lIns="0" rIns="0" tIns="0" bIns="0" anchor="ctr">
+            <a:noAutofit/>
+          </a:bodyPr>
+          <a:p>
+            <a:pPr algn="ctr" defTabSz="914400">
+              <a:lnSpc>
+                <a:spcPct val="100000"/>
+              </a:lnSpc>
+              <a:tabLst>
+                <a:tab algn="l" pos="0"/>
+              </a:tabLst>
+            </a:pPr>
+            <a:r>
+              <a:rPr lang="en-US" sz="950" b="0" u="none" strike="noStrike">
+                <a:solidFill>
+                  <a:srgbClr val="6b6b6b"/>
+                </a:solidFill>
+                <a:effectLst/>
+                <a:uFillTx/>
+                <a:latin typeface="Calibri"/>
+                <a:ea typeface="Calibri"/>
+              </a:rPr>
+              <a:t>nombres duplicados</a:t>
+            </a:r>
+            <a:endParaRPr lang="es-CO" sz="950" b="0" u="none" strike="noStrike">
+              <a:solidFill>
+                <a:srgbClr val="000000"/>
+              </a:solidFill>
+              <a:effectLst/>
+              <a:uFillTx/>
+              <a:latin typeface="Arial"/>
+            </a:endParaRPr>
+          </a:p>
+        </p:txBody>
+      </p:sp>
+      <p:sp>
+        <p:nvSpPr>
+          <p:cNvPr id="153" name="Shape 48"/>
+          <p:cNvSpPr/>
+          <p:nvPr/>
+        </p:nvSpPr>
+        <p:spPr>
+          <a:xfrm>
+            <a:off x="3194640" y="4118400"/>
+            <a:ext cx="2605680" cy="868320"/>
+          </a:xfrm>
+          <a:prstGeom prst="rect">
+            <a:avLst/>
+          </a:prstGeom>
+          <a:solidFill>
+            <a:srgbClr val="ffffff"/>
+          </a:solidFill>
+          <a:ln w="12700">
+            <a:solidFill>
+              <a:srgbClr val="e0d8df"/>
             </a:solidFill>
             <a:round/>
           </a:ln>
@@ -10425,13 +11135,54 @@
             <a:noAutofit/>
           </a:bodyPr>
           <a:p>
-            <a:pPr>
-              <a:lnSpc>
-                <a:spcPct val="100000"/>
-              </a:lnSpc>
-            </a:pPr>
             <a:endParaRPr lang="es-CO" sz="1800" b="0" u="none" strike="noStrike">
               <a:solidFill>
+                <a:srgbClr val="000000"/>
+              </a:solidFill>
+              <a:effectLst/>
+              <a:uFillTx/>
+              <a:latin typeface="Arial"/>
+            </a:endParaRPr>
+          </a:p>
+        </p:txBody>
+      </p:sp>
+      <p:sp>
+        <p:nvSpPr>
+          <p:cNvPr id="154" name="Shape 49"/>
+          <p:cNvSpPr/>
+          <p:nvPr/>
+        </p:nvSpPr>
+        <p:spPr>
+          <a:xfrm>
+            <a:off x="3194640" y="4118400"/>
+            <a:ext cx="2605680" cy="36360"/>
+          </a:xfrm>
+          <a:prstGeom prst="rect">
+            <a:avLst/>
+          </a:prstGeom>
+          <a:solidFill>
+            <a:srgbClr val="a26769"/>
+          </a:solidFill>
+          <a:ln w="12700">
+            <a:solidFill>
+              <a:srgbClr val="a26769"/>
+            </a:solidFill>
+            <a:round/>
+          </a:ln>
+        </p:spPr>
+        <p:style>
+          <a:lnRef idx="0"/>
+          <a:fillRef idx="0"/>
+          <a:effectRef idx="0"/>
+          <a:fontRef idx="minor"/>
+        </p:style>
+        <p:txBody>
+          <a:bodyPr lIns="90000" rIns="90000" tIns="-8280" bIns="-8280" anchor="t">
+            <a:noAutofit/>
+          </a:bodyPr>
+          <a:p>
+            <a:endParaRPr lang="es-CO" sz="1800" b="0" u="none" strike="noStrike">
+              <a:solidFill>
                 <a:srgbClr val="ffffff"/>
               </a:solidFill>
               <a:effectLst/>
@@ -10443,14 +11194,14 @@
       </p:sp>
       <p:sp>
         <p:nvSpPr>
-          <p:cNvPr id="143" name="Text 11"/>
-          <p:cNvSpPr/>
-          <p:nvPr/>
-        </p:nvSpPr>
-        <p:spPr>
-          <a:xfrm>
-            <a:off x="365760" y="3520440"/>
-            <a:ext cx="1370880" cy="657720"/>
+          <p:cNvPr id="155" name="Text 67"/>
+          <p:cNvSpPr/>
+          <p:nvPr/>
+        </p:nvSpPr>
+        <p:spPr>
+          <a:xfrm>
+            <a:off x="3194640" y="4164120"/>
+            <a:ext cx="2605680" cy="347040"/>
           </a:xfrm>
           <a:prstGeom prst="rect">
             <a:avLst/>
@@ -10467,7 +11218,7 @@
           <a:fontRef idx="minor"/>
         </p:style>
         <p:txBody>
-          <a:bodyPr lIns="0" rIns="0" tIns="0" bIns="0" anchor="b">
+          <a:bodyPr lIns="0" rIns="0" tIns="0" bIns="0" anchor="ctr">
             <a:noAutofit/>
           </a:bodyPr>
           <a:p>
@@ -10480,38 +11231,38 @@
               </a:tabLst>
             </a:pPr>
             <a:r>
-              <a:rPr lang="en-US" sz="3600" b="1" u="none" strike="noStrike">
-                <a:solidFill>
-                  <a:srgbClr val="ffffff"/>
+              <a:rPr lang="en-US" sz="2000" b="1" u="none" strike="noStrike">
+                <a:solidFill>
+                  <a:srgbClr val="a26769"/>
                 </a:solidFill>
                 <a:effectLst/>
                 <a:uFillTx/>
                 <a:latin typeface="Georgia"/>
                 <a:ea typeface="Georgia"/>
               </a:rPr>
-              <a:t>♻️</a:t>
+              <a:t>~1.600</a:t>
             </a:r>
-            <a:endParaRPr lang="es-CO" sz="3600" b="0" u="none" strike="noStrike">
-              <a:solidFill>
-                <a:srgbClr val="000000"/>
-              </a:solidFill>
-              <a:effectLst/>
-              <a:uFillTx/>
-              <a:latin typeface="Arial"/>
-            </a:endParaRPr>
-          </a:p>
-        </p:txBody>
-      </p:sp>
-      <p:sp>
-        <p:nvSpPr>
-          <p:cNvPr id="144" name="Text 12"/>
-          <p:cNvSpPr/>
-          <p:nvPr/>
-        </p:nvSpPr>
-        <p:spPr>
-          <a:xfrm>
-            <a:off x="365760" y="4178880"/>
-            <a:ext cx="1370880" cy="346680"/>
+            <a:endParaRPr lang="es-CO" sz="2000" b="0" u="none" strike="noStrike">
+              <a:solidFill>
+                <a:srgbClr val="000000"/>
+              </a:solidFill>
+              <a:effectLst/>
+              <a:uFillTx/>
+              <a:latin typeface="Arial"/>
+            </a:endParaRPr>
+          </a:p>
+        </p:txBody>
+      </p:sp>
+      <p:sp>
+        <p:nvSpPr>
+          <p:cNvPr id="156" name="Text 68"/>
+          <p:cNvSpPr/>
+          <p:nvPr/>
+        </p:nvSpPr>
+        <p:spPr>
+          <a:xfrm>
+            <a:off x="3194640" y="4511520"/>
+            <a:ext cx="2605680" cy="438480"/>
           </a:xfrm>
           <a:prstGeom prst="rect">
             <a:avLst/>
@@ -10528,7 +11279,7 @@
           <a:fontRef idx="minor"/>
         </p:style>
         <p:txBody>
-          <a:bodyPr lIns="0" rIns="0" tIns="0" bIns="0" anchor="t">
+          <a:bodyPr lIns="0" rIns="0" tIns="0" bIns="0" anchor="ctr">
             <a:noAutofit/>
           </a:bodyPr>
           <a:p>
@@ -10541,59 +11292,28 @@
               </a:tabLst>
             </a:pPr>
             <a:r>
-              <a:rPr lang="en-US" sz="1000" b="0" u="none" strike="noStrike">
-                <a:solidFill>
-                  <a:srgbClr val="ffffff"/>
+              <a:rPr lang="en-US" sz="950" b="0" u="none" strike="noStrike">
+                <a:solidFill>
+                  <a:srgbClr val="6b6b6b"/>
                 </a:solidFill>
                 <a:effectLst/>
                 <a:uFillTx/>
                 <a:latin typeface="Calibri"/>
                 <a:ea typeface="Calibri"/>
               </a:rPr>
-              <a:t>reutilizable</a:t>
+              <a:t>conflicto de idioma</a:t>
             </a:r>
-            <a:endParaRPr lang="es-CO" sz="1000" b="0" u="none" strike="noStrike">
-              <a:solidFill>
-                <a:srgbClr val="000000"/>
-              </a:solidFill>
-              <a:effectLst/>
-              <a:uFillTx/>
-              <a:latin typeface="Arial"/>
-            </a:endParaRPr>
-          </a:p>
-        </p:txBody>
-      </p:sp>
-      <p:sp>
-        <p:nvSpPr>
-          <p:cNvPr id="145" name="Text 13"/>
-          <p:cNvSpPr/>
-          <p:nvPr/>
-        </p:nvSpPr>
-        <p:spPr>
-          <a:xfrm>
-            <a:off x="1920240" y="3657600"/>
-            <a:ext cx="6857280" cy="776520"/>
-          </a:xfrm>
-          <a:prstGeom prst="rect">
-            <a:avLst/>
-          </a:prstGeom>
-          <a:noFill/>
-          <a:ln w="0">
-            <a:noFill/>
-          </a:ln>
-        </p:spPr>
-        <p:style>
-          <a:lnRef idx="0"/>
-          <a:fillRef idx="0"/>
-          <a:effectRef idx="0"/>
-          <a:fontRef idx="minor"/>
-        </p:style>
-        <p:txBody>
-          <a:bodyPr lIns="0" rIns="0" tIns="0" bIns="0" anchor="ctr">
-            <a:noAutofit/>
-          </a:bodyPr>
-          <a:p>
-            <a:pPr defTabSz="914400">
+            <a:endParaRPr lang="es-CO" sz="950" b="0" u="none" strike="noStrike">
+              <a:solidFill>
+                <a:srgbClr val="000000"/>
+              </a:solidFill>
+              <a:effectLst/>
+              <a:uFillTx/>
+              <a:latin typeface="Arial"/>
+            </a:endParaRPr>
+          </a:p>
+          <a:p>
+            <a:pPr algn="ctr" defTabSz="914400">
               <a:lnSpc>
                 <a:spcPct val="100000"/>
               </a:lnSpc>
@@ -10602,28 +11322,158 @@
               </a:tabLst>
             </a:pPr>
             <a:r>
-              <a:rPr lang="en-US" sz="1250" b="0" u="none" strike="noStrike">
-                <a:solidFill>
-                  <a:srgbClr val="1e1e1e"/>
+              <a:rPr lang="en-US" sz="950" b="0" u="none" strike="noStrike">
+                <a:solidFill>
+                  <a:srgbClr val="6b6b6b"/>
                 </a:solidFill>
                 <a:effectLst/>
                 <a:uFillTx/>
                 <a:latin typeface="Calibri"/>
                 <a:ea typeface="Calibri"/>
               </a:rPr>
-              <a:t>El Random Forest clasifica nuevos productos automáticamente</a:t>
+              <a:t>países vs categorías</a:t>
             </a:r>
-            <a:endParaRPr lang="es-CO" sz="1250" b="0" u="none" strike="noStrike">
-              <a:solidFill>
-                <a:srgbClr val="000000"/>
-              </a:solidFill>
-              <a:effectLst/>
-              <a:uFillTx/>
-              <a:latin typeface="Arial"/>
-            </a:endParaRPr>
-          </a:p>
-          <a:p>
-            <a:pPr defTabSz="914400">
+            <a:endParaRPr lang="es-CO" sz="950" b="0" u="none" strike="noStrike">
+              <a:solidFill>
+                <a:srgbClr val="000000"/>
+              </a:solidFill>
+              <a:effectLst/>
+              <a:uFillTx/>
+              <a:latin typeface="Arial"/>
+            </a:endParaRPr>
+          </a:p>
+        </p:txBody>
+      </p:sp>
+      <p:sp>
+        <p:nvSpPr>
+          <p:cNvPr id="157" name="Shape 50"/>
+          <p:cNvSpPr/>
+          <p:nvPr/>
+        </p:nvSpPr>
+        <p:spPr>
+          <a:xfrm>
+            <a:off x="6029280" y="4118400"/>
+            <a:ext cx="2605680" cy="868320"/>
+          </a:xfrm>
+          <a:prstGeom prst="rect">
+            <a:avLst/>
+          </a:prstGeom>
+          <a:solidFill>
+            <a:srgbClr val="ffffff"/>
+          </a:solidFill>
+          <a:ln w="12700">
+            <a:solidFill>
+              <a:srgbClr val="e0d8df"/>
+            </a:solidFill>
+            <a:round/>
+          </a:ln>
+          <a:effectLst>
+            <a:outerShdw algn="bl" blurRad="101520" dir="8100000" dist="37674" kx="0" ky="0" rotWithShape="0" sx="100000" sy="100000">
+              <a:srgbClr val="000000">
+                <a:alpha val="12000"/>
+              </a:srgbClr>
+            </a:outerShdw>
+          </a:effectLst>
+        </p:spPr>
+        <p:style>
+          <a:lnRef idx="0"/>
+          <a:fillRef idx="0"/>
+          <a:effectRef idx="0"/>
+          <a:fontRef idx="minor"/>
+        </p:style>
+        <p:txBody>
+          <a:bodyPr lIns="90000" rIns="90000" tIns="45000" bIns="45000" anchor="t">
+            <a:noAutofit/>
+          </a:bodyPr>
+          <a:p>
+            <a:endParaRPr lang="es-CO" sz="1800" b="0" u="none" strike="noStrike">
+              <a:solidFill>
+                <a:srgbClr val="000000"/>
+              </a:solidFill>
+              <a:effectLst/>
+              <a:uFillTx/>
+              <a:latin typeface="Arial"/>
+            </a:endParaRPr>
+          </a:p>
+        </p:txBody>
+      </p:sp>
+      <p:sp>
+        <p:nvSpPr>
+          <p:cNvPr id="158" name="Shape 51"/>
+          <p:cNvSpPr/>
+          <p:nvPr/>
+        </p:nvSpPr>
+        <p:spPr>
+          <a:xfrm>
+            <a:off x="6029280" y="4118400"/>
+            <a:ext cx="2605680" cy="36360"/>
+          </a:xfrm>
+          <a:prstGeom prst="rect">
+            <a:avLst/>
+          </a:prstGeom>
+          <a:solidFill>
+            <a:srgbClr val="b8860b"/>
+          </a:solidFill>
+          <a:ln w="12700">
+            <a:solidFill>
+              <a:srgbClr val="b8860b"/>
+            </a:solidFill>
+            <a:round/>
+          </a:ln>
+        </p:spPr>
+        <p:style>
+          <a:lnRef idx="0"/>
+          <a:fillRef idx="0"/>
+          <a:effectRef idx="0"/>
+          <a:fontRef idx="minor"/>
+        </p:style>
+        <p:txBody>
+          <a:bodyPr lIns="90000" rIns="90000" tIns="-8280" bIns="-8280" anchor="t">
+            <a:noAutofit/>
+          </a:bodyPr>
+          <a:p>
+            <a:endParaRPr lang="es-CO" sz="1800" b="0" u="none" strike="noStrike">
+              <a:solidFill>
+                <a:srgbClr val="ffffff"/>
+              </a:solidFill>
+              <a:effectLst/>
+              <a:uFillTx/>
+              <a:latin typeface="Arial"/>
+            </a:endParaRPr>
+          </a:p>
+        </p:txBody>
+      </p:sp>
+      <p:sp>
+        <p:nvSpPr>
+          <p:cNvPr id="159" name="Text 69"/>
+          <p:cNvSpPr/>
+          <p:nvPr/>
+        </p:nvSpPr>
+        <p:spPr>
+          <a:xfrm>
+            <a:off x="6029280" y="4164120"/>
+            <a:ext cx="2605680" cy="347040"/>
+          </a:xfrm>
+          <a:prstGeom prst="rect">
+            <a:avLst/>
+          </a:prstGeom>
+          <a:noFill/>
+          <a:ln w="0">
+            <a:noFill/>
+          </a:ln>
+        </p:spPr>
+        <p:style>
+          <a:lnRef idx="0"/>
+          <a:fillRef idx="0"/>
+          <a:effectRef idx="0"/>
+          <a:fontRef idx="minor"/>
+        </p:style>
+        <p:txBody>
+          <a:bodyPr lIns="0" rIns="0" tIns="0" bIns="0" anchor="ctr">
+            <a:noAutofit/>
+          </a:bodyPr>
+          <a:p>
+            <a:pPr algn="ctr" defTabSz="914400">
               <a:lnSpc>
                 <a:spcPct val="100000"/>
               </a:lnSpc>
@@ -10632,18 +11482,152 @@
               </a:tabLst>
             </a:pPr>
             <a:r>
-              <a:rPr lang="en-US" sz="1250" b="0" u="none" strike="noStrike">
-                <a:solidFill>
-                  <a:srgbClr val="1e1e1e"/>
+              <a:rPr lang="en-US" sz="2000" b="1" u="none" strike="noStrike">
+                <a:solidFill>
+                  <a:srgbClr val="b8860b"/>
+                </a:solidFill>
+                <a:effectLst/>
+                <a:uFillTx/>
+                <a:latin typeface="Georgia"/>
+                <a:ea typeface="Georgia"/>
+              </a:rPr>
+              <a:t>~4.000</a:t>
+            </a:r>
+            <a:endParaRPr lang="es-CO" sz="2000" b="0" u="none" strike="noStrike">
+              <a:solidFill>
+                <a:srgbClr val="000000"/>
+              </a:solidFill>
+              <a:effectLst/>
+              <a:uFillTx/>
+              <a:latin typeface="Arial"/>
+            </a:endParaRPr>
+          </a:p>
+        </p:txBody>
+      </p:sp>
+      <p:sp>
+        <p:nvSpPr>
+          <p:cNvPr id="160" name="Text 70"/>
+          <p:cNvSpPr/>
+          <p:nvPr/>
+        </p:nvSpPr>
+        <p:spPr>
+          <a:xfrm>
+            <a:off x="6029280" y="4511520"/>
+            <a:ext cx="2605680" cy="438480"/>
+          </a:xfrm>
+          <a:prstGeom prst="rect">
+            <a:avLst/>
+          </a:prstGeom>
+          <a:noFill/>
+          <a:ln w="0">
+            <a:noFill/>
+          </a:ln>
+        </p:spPr>
+        <p:style>
+          <a:lnRef idx="0"/>
+          <a:fillRef idx="0"/>
+          <a:effectRef idx="0"/>
+          <a:fontRef idx="minor"/>
+        </p:style>
+        <p:txBody>
+          <a:bodyPr lIns="0" rIns="0" tIns="0" bIns="0" anchor="ctr">
+            <a:noAutofit/>
+          </a:bodyPr>
+          <a:p>
+            <a:pPr algn="ctr" defTabSz="914400">
+              <a:lnSpc>
+                <a:spcPct val="100000"/>
+              </a:lnSpc>
+              <a:tabLst>
+                <a:tab algn="l" pos="0"/>
+              </a:tabLst>
+            </a:pPr>
+            <a:r>
+              <a:rPr lang="en-US" sz="950" b="0" u="none" strike="noStrike">
+                <a:solidFill>
+                  <a:srgbClr val="6b6b6b"/>
                 </a:solidFill>
                 <a:effectLst/>
                 <a:uFillTx/>
                 <a:latin typeface="Calibri"/>
                 <a:ea typeface="Calibri"/>
               </a:rPr>
-              <a:t>nueva descarga → mismo análisis reproducible</a:t>
+              <a:t>discrepancia</a:t>
             </a:r>
-            <a:endParaRPr lang="es-CO" sz="1250" b="0" u="none" strike="noStrike">
+            <a:endParaRPr lang="es-CO" sz="950" b="0" u="none" strike="noStrike">
+              <a:solidFill>
+                <a:srgbClr val="000000"/>
+              </a:solidFill>
+              <a:effectLst/>
+              <a:uFillTx/>
+              <a:latin typeface="Arial"/>
+            </a:endParaRPr>
+          </a:p>
+          <a:p>
+            <a:pPr algn="ctr" defTabSz="914400">
+              <a:lnSpc>
+                <a:spcPct val="100000"/>
+              </a:lnSpc>
+              <a:tabLst>
+                <a:tab algn="l" pos="0"/>
+              </a:tabLst>
+            </a:pPr>
+            <a:r>
+              <a:rPr lang="en-US" sz="950" b="0" u="none" strike="noStrike">
+                <a:solidFill>
+                  <a:srgbClr val="6b6b6b"/>
+                </a:solidFill>
+                <a:effectLst/>
+                <a:uFillTx/>
+                <a:latin typeface="Calibri"/>
+                <a:ea typeface="Calibri"/>
+              </a:rPr>
+              <a:t>Sum &gt; total ingredientes</a:t>
+            </a:r>
+            <a:endParaRPr lang="es-CO" sz="950" b="0" u="none" strike="noStrike">
+              <a:solidFill>
+                <a:srgbClr val="000000"/>
+              </a:solidFill>
+              <a:effectLst/>
+              <a:uFillTx/>
+              <a:latin typeface="Arial"/>
+            </a:endParaRPr>
+          </a:p>
+        </p:txBody>
+      </p:sp>
+      <p:sp>
+        <p:nvSpPr>
+          <p:cNvPr id="161" name="Shape 52"/>
+          <p:cNvSpPr/>
+          <p:nvPr/>
+        </p:nvSpPr>
+        <p:spPr>
+          <a:xfrm>
+            <a:off x="360000" y="5078520"/>
+            <a:ext cx="8412480" cy="360"/>
+          </a:xfrm>
+          <a:prstGeom prst="line">
+            <a:avLst/>
+          </a:prstGeom>
+          <a:ln w="10160">
+            <a:solidFill>
+              <a:srgbClr val="e0d8df"/>
+            </a:solidFill>
+            <a:round/>
+          </a:ln>
+        </p:spPr>
+        <p:style>
+          <a:lnRef idx="0"/>
+          <a:fillRef idx="0"/>
+          <a:effectRef idx="0"/>
+          <a:fontRef idx="minor"/>
+        </p:style>
+        <p:txBody>
+          <a:bodyPr lIns="90000" rIns="90000" tIns="-44640" bIns="-44640" anchor="t" anchorCtr="1">
+            <a:noAutofit/>
+          </a:bodyPr>
+          <a:p>
+            <a:endParaRPr lang="es-CO" sz="1800" b="0" u="none" strike="noStrike">
               <a:solidFill>
                 <a:srgbClr val="000000"/>
               </a:solidFill>
@@ -10668,6 +11652,562 @@
 </file>
 
 <file path=ppt/slides/slide8.xml><?xml version="1.0" encoding="utf-8"?>
+<p:sld xmlns:a="http://schemas.openxmlformats.org/drawingml/2006/main" xmlns:p="http://schemas.openxmlformats.org/presentationml/2006/main" xmlns:r="http://schemas.openxmlformats.org/officeDocument/2006/relationships" xmlns:p14="http://schemas.microsoft.com/office/powerpoint/2010/main" xmlns:p15="http://schemas.microsoft.com/office/powerpoint/2012/main" xmlns:mc="http://schemas.openxmlformats.org/markup-compatibility/2006">
+  <p:cSld>
+    <p:bg>
+      <p:bgPr>
+        <a:solidFill>
+          <a:srgbClr val="faf7f5"/>
+        </a:solidFill>
+      </p:bgPr>
+    </p:bg>
+    <p:spTree>
+      <p:nvGrpSpPr>
+        <p:cNvPr id="1" name=""/>
+        <p:cNvGrpSpPr/>
+        <p:nvPr/>
+      </p:nvGrpSpPr>
+      <p:grpSpPr>
+        <a:xfrm>
+          <a:off x="0" y="0"/>
+          <a:ext cx="0" cy="0"/>
+          <a:chOff x="0" y="0"/>
+          <a:chExt cx="0" cy="0"/>
+        </a:xfrm>
+      </p:grpSpPr>
+      <p:sp>
+        <p:nvSpPr>
+          <p:cNvPr id="162" name="Shape 41"/>
+          <p:cNvSpPr/>
+          <p:nvPr/>
+        </p:nvSpPr>
+        <p:spPr>
+          <a:xfrm>
+            <a:off x="0" y="0"/>
+            <a:ext cx="108720" cy="5142600"/>
+          </a:xfrm>
+          <a:prstGeom prst="rect">
+            <a:avLst/>
+          </a:prstGeom>
+          <a:solidFill>
+            <a:srgbClr val="028090"/>
+          </a:solidFill>
+          <a:ln w="12700">
+            <a:solidFill>
+              <a:srgbClr val="028090"/>
+            </a:solidFill>
+            <a:round/>
+          </a:ln>
+        </p:spPr>
+        <p:style>
+          <a:lnRef idx="0"/>
+          <a:fillRef idx="0"/>
+          <a:effectRef idx="0"/>
+          <a:fontRef idx="minor"/>
+        </p:style>
+        <p:txBody>
+          <a:bodyPr lIns="90000" rIns="90000" tIns="45000" bIns="45000" anchor="t">
+            <a:noAutofit/>
+          </a:bodyPr>
+          <a:p>
+            <a:endParaRPr lang="es-CO" sz="1800" b="0" u="none" strike="noStrike">
+              <a:solidFill>
+                <a:srgbClr val="ffffff"/>
+              </a:solidFill>
+              <a:effectLst/>
+              <a:uFillTx/>
+              <a:latin typeface="Arial"/>
+            </a:endParaRPr>
+          </a:p>
+        </p:txBody>
+      </p:sp>
+      <p:sp>
+        <p:nvSpPr>
+          <p:cNvPr id="163" name="Text 51"/>
+          <p:cNvSpPr/>
+          <p:nvPr/>
+        </p:nvSpPr>
+        <p:spPr>
+          <a:xfrm>
+            <a:off x="365760" y="255960"/>
+            <a:ext cx="8502840" cy="565920"/>
+          </a:xfrm>
+          <a:prstGeom prst="rect">
+            <a:avLst/>
+          </a:prstGeom>
+          <a:noFill/>
+          <a:ln w="0">
+            <a:noFill/>
+          </a:ln>
+        </p:spPr>
+        <p:style>
+          <a:lnRef idx="0"/>
+          <a:fillRef idx="0"/>
+          <a:effectRef idx="0"/>
+          <a:fontRef idx="minor"/>
+        </p:style>
+        <p:txBody>
+          <a:bodyPr lIns="0" rIns="0" tIns="0" bIns="0" anchor="ctr">
+            <a:noAutofit/>
+          </a:bodyPr>
+          <a:p>
+            <a:pPr defTabSz="914400">
+              <a:lnSpc>
+                <a:spcPct val="100000"/>
+              </a:lnSpc>
+              <a:tabLst>
+                <a:tab algn="l" pos="0"/>
+              </a:tabLst>
+            </a:pPr>
+            <a:r>
+              <a:rPr lang="en-US" sz="3400" b="1" u="none" strike="noStrike">
+                <a:solidFill>
+                  <a:srgbClr val="2d1b36"/>
+                </a:solidFill>
+                <a:effectLst/>
+                <a:uFillTx/>
+                <a:latin typeface="Georgia"/>
+                <a:ea typeface="Georgia"/>
+              </a:rPr>
+              <a:t>Conclusiones</a:t>
+            </a:r>
+            <a:endParaRPr lang="es-CO" sz="3400" b="0" u="none" strike="noStrike">
+              <a:solidFill>
+                <a:srgbClr val="000000"/>
+              </a:solidFill>
+              <a:effectLst/>
+              <a:uFillTx/>
+              <a:latin typeface="Arial"/>
+            </a:endParaRPr>
+          </a:p>
+        </p:txBody>
+      </p:sp>
+      <p:sp>
+        <p:nvSpPr>
+          <p:cNvPr id="164" name="Text 54"/>
+          <p:cNvSpPr/>
+          <p:nvPr/>
+        </p:nvSpPr>
+        <p:spPr>
+          <a:xfrm>
+            <a:off x="249480" y="1800000"/>
+            <a:ext cx="1370520" cy="346320"/>
+          </a:xfrm>
+          <a:prstGeom prst="rect">
+            <a:avLst/>
+          </a:prstGeom>
+          <a:noFill/>
+          <a:ln w="0">
+            <a:noFill/>
+          </a:ln>
+        </p:spPr>
+        <p:style>
+          <a:lnRef idx="0"/>
+          <a:fillRef idx="0"/>
+          <a:effectRef idx="0"/>
+          <a:fontRef idx="minor"/>
+        </p:style>
+        <p:txBody>
+          <a:bodyPr lIns="0" rIns="0" tIns="0" bIns="0" anchor="t">
+            <a:noAutofit/>
+          </a:bodyPr>
+          <a:p>
+            <a:pPr algn="ctr" defTabSz="914400">
+              <a:lnSpc>
+                <a:spcPct val="100000"/>
+              </a:lnSpc>
+              <a:tabLst>
+                <a:tab algn="l" pos="0"/>
+              </a:tabLst>
+            </a:pPr>
+            <a:r>
+              <a:rPr lang="en-US" sz="1000" b="0" u="none" strike="noStrike">
+                <a:solidFill>
+                  <a:srgbClr val="ffffff"/>
+                </a:solidFill>
+                <a:effectLst/>
+                <a:uFillTx/>
+                <a:latin typeface="Calibri"/>
+                <a:ea typeface="Calibri"/>
+              </a:rPr>
+              <a:t>segmentos</a:t>
+            </a:r>
+            <a:endParaRPr lang="es-CO" sz="1000" b="0" u="none" strike="noStrike">
+              <a:solidFill>
+                <a:srgbClr val="000000"/>
+              </a:solidFill>
+              <a:effectLst/>
+              <a:uFillTx/>
+              <a:latin typeface="Arial"/>
+            </a:endParaRPr>
+          </a:p>
+        </p:txBody>
+      </p:sp>
+      <p:sp>
+        <p:nvSpPr>
+          <p:cNvPr id="165" name="Shape 43"/>
+          <p:cNvSpPr/>
+          <p:nvPr/>
+        </p:nvSpPr>
+        <p:spPr>
+          <a:xfrm>
+            <a:off x="435240" y="1399680"/>
+            <a:ext cx="1004760" cy="940320"/>
+          </a:xfrm>
+          <a:prstGeom prst="rect">
+            <a:avLst/>
+          </a:prstGeom>
+          <a:solidFill>
+            <a:srgbClr val="2c5f2d"/>
+          </a:solidFill>
+          <a:ln w="12700">
+            <a:solidFill>
+              <a:srgbClr val="2c5f2d"/>
+            </a:solidFill>
+            <a:round/>
+          </a:ln>
+          <a:effectLst>
+            <a:outerShdw algn="bl" blurRad="101520" dir="8100000" dist="37674" kx="0" ky="0" rotWithShape="0" sx="100000" sy="100000">
+              <a:srgbClr val="000000">
+                <a:alpha val="12000"/>
+              </a:srgbClr>
+            </a:outerShdw>
+          </a:effectLst>
+        </p:spPr>
+        <p:style>
+          <a:lnRef idx="0"/>
+          <a:fillRef idx="0"/>
+          <a:effectRef idx="0"/>
+          <a:fontRef idx="minor"/>
+        </p:style>
+        <p:txBody>
+          <a:bodyPr lIns="90000" rIns="90000" tIns="45000" bIns="45000" anchor="t">
+            <a:noAutofit/>
+          </a:bodyPr>
+          <a:p>
+            <a:endParaRPr lang="es-CO" sz="1800" b="0" u="none" strike="noStrike">
+              <a:solidFill>
+                <a:srgbClr val="ffffff"/>
+              </a:solidFill>
+              <a:effectLst/>
+              <a:uFillTx/>
+              <a:latin typeface="Arial"/>
+            </a:endParaRPr>
+          </a:p>
+        </p:txBody>
+      </p:sp>
+      <p:sp>
+        <p:nvSpPr>
+          <p:cNvPr id="166" name="Text 56"/>
+          <p:cNvSpPr/>
+          <p:nvPr/>
+        </p:nvSpPr>
+        <p:spPr>
+          <a:xfrm>
+            <a:off x="365760" y="3520440"/>
+            <a:ext cx="1370520" cy="657360"/>
+          </a:xfrm>
+          <a:prstGeom prst="rect">
+            <a:avLst/>
+          </a:prstGeom>
+          <a:noFill/>
+          <a:ln w="0">
+            <a:noFill/>
+          </a:ln>
+        </p:spPr>
+        <p:style>
+          <a:lnRef idx="0"/>
+          <a:fillRef idx="0"/>
+          <a:effectRef idx="0"/>
+          <a:fontRef idx="minor"/>
+        </p:style>
+        <p:txBody>
+          <a:bodyPr lIns="0" rIns="0" tIns="0" bIns="0" anchor="b">
+            <a:noAutofit/>
+          </a:bodyPr>
+          <a:p>
+            <a:pPr algn="ctr" defTabSz="914400">
+              <a:lnSpc>
+                <a:spcPct val="100000"/>
+              </a:lnSpc>
+              <a:tabLst>
+                <a:tab algn="l" pos="0"/>
+              </a:tabLst>
+            </a:pPr>
+            <a:r>
+              <a:rPr lang="en-US" sz="3600" b="1" u="none" strike="noStrike">
+                <a:solidFill>
+                  <a:srgbClr val="ffffff"/>
+                </a:solidFill>
+                <a:effectLst/>
+                <a:uFillTx/>
+                <a:latin typeface="Georgia"/>
+                <a:ea typeface="Georgia"/>
+              </a:rPr>
+              <a:t>♻️</a:t>
+            </a:r>
+            <a:endParaRPr lang="es-CO" sz="3600" b="0" u="none" strike="noStrike">
+              <a:solidFill>
+                <a:srgbClr val="000000"/>
+              </a:solidFill>
+              <a:effectLst/>
+              <a:uFillTx/>
+              <a:latin typeface="Arial"/>
+            </a:endParaRPr>
+          </a:p>
+        </p:txBody>
+      </p:sp>
+      <p:sp>
+        <p:nvSpPr>
+          <p:cNvPr id="167" name="Text 57"/>
+          <p:cNvSpPr/>
+          <p:nvPr/>
+        </p:nvSpPr>
+        <p:spPr>
+          <a:xfrm>
+            <a:off x="435240" y="1759680"/>
+            <a:ext cx="1004760" cy="346320"/>
+          </a:xfrm>
+          <a:prstGeom prst="rect">
+            <a:avLst/>
+          </a:prstGeom>
+          <a:noFill/>
+          <a:ln w="0">
+            <a:noFill/>
+          </a:ln>
+        </p:spPr>
+        <p:style>
+          <a:lnRef idx="0"/>
+          <a:fillRef idx="0"/>
+          <a:effectRef idx="0"/>
+          <a:fontRef idx="minor"/>
+        </p:style>
+        <p:txBody>
+          <a:bodyPr lIns="0" rIns="0" tIns="0" bIns="0" anchor="t">
+            <a:noAutofit/>
+          </a:bodyPr>
+          <a:p>
+            <a:pPr algn="ctr" defTabSz="914400">
+              <a:lnSpc>
+                <a:spcPct val="100000"/>
+              </a:lnSpc>
+              <a:tabLst>
+                <a:tab algn="l" pos="0"/>
+              </a:tabLst>
+            </a:pPr>
+            <a:r>
+              <a:rPr lang="en-US" sz="1000" b="0" u="none" strike="noStrike">
+                <a:solidFill>
+                  <a:srgbClr val="ffffff"/>
+                </a:solidFill>
+                <a:effectLst/>
+                <a:uFillTx/>
+                <a:latin typeface="Calibri"/>
+                <a:ea typeface="Calibri"/>
+              </a:rPr>
+              <a:t>reutilizable</a:t>
+            </a:r>
+            <a:endParaRPr lang="es-CO" sz="1000" b="0" u="none" strike="noStrike">
+              <a:solidFill>
+                <a:srgbClr val="000000"/>
+              </a:solidFill>
+              <a:effectLst/>
+              <a:uFillTx/>
+              <a:latin typeface="Arial"/>
+            </a:endParaRPr>
+          </a:p>
+        </p:txBody>
+      </p:sp>
+      <p:sp>
+        <p:nvSpPr>
+          <p:cNvPr id="168" name="Text 58"/>
+          <p:cNvSpPr/>
+          <p:nvPr/>
+        </p:nvSpPr>
+        <p:spPr>
+          <a:xfrm>
+            <a:off x="1603080" y="1440000"/>
+            <a:ext cx="1816920" cy="776160"/>
+          </a:xfrm>
+          <a:prstGeom prst="rect">
+            <a:avLst/>
+          </a:prstGeom>
+          <a:noFill/>
+          <a:ln w="0">
+            <a:noFill/>
+          </a:ln>
+        </p:spPr>
+        <p:style>
+          <a:lnRef idx="0"/>
+          <a:fillRef idx="0"/>
+          <a:effectRef idx="0"/>
+          <a:fontRef idx="minor"/>
+        </p:style>
+        <p:txBody>
+          <a:bodyPr lIns="0" rIns="0" tIns="0" bIns="0" anchor="ctr">
+            <a:noAutofit/>
+          </a:bodyPr>
+          <a:p>
+            <a:pPr defTabSz="914400">
+              <a:lnSpc>
+                <a:spcPct val="100000"/>
+              </a:lnSpc>
+              <a:tabLst>
+                <a:tab algn="l" pos="0"/>
+              </a:tabLst>
+            </a:pPr>
+            <a:r>
+              <a:rPr lang="en-US" sz="1050" b="0" u="none" strike="noStrike">
+                <a:solidFill>
+                  <a:srgbClr val="1e1e1e"/>
+                </a:solidFill>
+                <a:effectLst/>
+                <a:uFillTx/>
+                <a:latin typeface="Calibri"/>
+                <a:ea typeface="Calibri"/>
+              </a:rPr>
+              <a:t>El Random Forest clasifica nuevos productos automáticamente</a:t>
+            </a:r>
+            <a:endParaRPr lang="es-CO" sz="1050" b="0" u="none" strike="noStrike">
+              <a:solidFill>
+                <a:srgbClr val="000000"/>
+              </a:solidFill>
+              <a:effectLst/>
+              <a:uFillTx/>
+              <a:latin typeface="Arial"/>
+            </a:endParaRPr>
+          </a:p>
+          <a:p>
+            <a:pPr defTabSz="914400">
+              <a:lnSpc>
+                <a:spcPct val="100000"/>
+              </a:lnSpc>
+              <a:tabLst>
+                <a:tab algn="l" pos="0"/>
+              </a:tabLst>
+            </a:pPr>
+            <a:endParaRPr lang="es-CO" sz="1050" b="0" u="none" strike="noStrike">
+              <a:solidFill>
+                <a:srgbClr val="000000"/>
+              </a:solidFill>
+              <a:effectLst/>
+              <a:uFillTx/>
+              <a:latin typeface="Arial"/>
+            </a:endParaRPr>
+          </a:p>
+          <a:p>
+            <a:pPr defTabSz="914400">
+              <a:lnSpc>
+                <a:spcPct val="100000"/>
+              </a:lnSpc>
+              <a:tabLst>
+                <a:tab algn="l" pos="0"/>
+              </a:tabLst>
+            </a:pPr>
+            <a:r>
+              <a:rPr lang="en-US" sz="1050" b="0" u="none" strike="noStrike">
+                <a:solidFill>
+                  <a:srgbClr val="1e1e1e"/>
+                </a:solidFill>
+                <a:effectLst/>
+                <a:uFillTx/>
+                <a:latin typeface="Calibri"/>
+                <a:ea typeface="Calibri"/>
+              </a:rPr>
+              <a:t>nueva descarga → mismo análisis reproducible</a:t>
+            </a:r>
+            <a:endParaRPr lang="es-CO" sz="1050" b="0" u="none" strike="noStrike">
+              <a:solidFill>
+                <a:srgbClr val="000000"/>
+              </a:solidFill>
+              <a:effectLst/>
+              <a:uFillTx/>
+              <a:latin typeface="Arial"/>
+            </a:endParaRPr>
+          </a:p>
+        </p:txBody>
+      </p:sp>
+      <p:sp>
+        <p:nvSpPr>
+          <p:cNvPr id="169" name="Shape 46"/>
+          <p:cNvSpPr/>
+          <p:nvPr/>
+        </p:nvSpPr>
+        <p:spPr>
+          <a:xfrm>
+            <a:off x="360000" y="899640"/>
+            <a:ext cx="8412480" cy="360"/>
+          </a:xfrm>
+          <a:prstGeom prst="line">
+            <a:avLst/>
+          </a:prstGeom>
+          <a:ln w="10160">
+            <a:solidFill>
+              <a:srgbClr val="e0d8df"/>
+            </a:solidFill>
+            <a:round/>
+          </a:ln>
+        </p:spPr>
+        <p:style>
+          <a:lnRef idx="0"/>
+          <a:fillRef idx="0"/>
+          <a:effectRef idx="0"/>
+          <a:fontRef idx="minor"/>
+        </p:style>
+        <p:txBody>
+          <a:bodyPr lIns="90000" rIns="90000" tIns="-44640" bIns="-44640" anchor="t" anchorCtr="1">
+            <a:noAutofit/>
+          </a:bodyPr>
+          <a:p>
+            <a:endParaRPr lang="es-CO" sz="1800" b="0" u="none" strike="noStrike">
+              <a:solidFill>
+                <a:srgbClr val="000000"/>
+              </a:solidFill>
+              <a:effectLst/>
+              <a:uFillTx/>
+              <a:latin typeface="Arial"/>
+            </a:endParaRPr>
+          </a:p>
+        </p:txBody>
+      </p:sp>
+      <p:pic>
+        <p:nvPicPr>
+          <p:cNvPr id="170" name=""/>
+          <p:cNvPicPr/>
+          <p:nvPr/>
+        </p:nvPicPr>
+        <p:blipFill>
+          <a:blip r:embed="rId1"/>
+          <a:stretch/>
+        </p:blipFill>
+        <p:spPr>
+          <a:xfrm>
+            <a:off x="3600000" y="1080000"/>
+            <a:ext cx="4680000" cy="3905640"/>
+          </a:xfrm>
+          <a:prstGeom prst="rect">
+            <a:avLst/>
+          </a:prstGeom>
+          <a:noFill/>
+          <a:ln w="0">
+            <a:noFill/>
+          </a:ln>
+        </p:spPr>
+      </p:pic>
+    </p:spTree>
+  </p:cSld>
+  <mc:AlternateContent>
+    <mc:Choice Requires="p14">
+      <p:transition spd="slow" p14:dur="2000"/>
+    </mc:Choice>
+    <mc:Fallback>
+      <p:transition spd="slow"/>
+    </mc:Fallback>
+  </mc:AlternateContent>
+</p:sld>
+</file>
+
+<file path=ppt/slides/slide9.xml><?xml version="1.0" encoding="utf-8"?>
 <p:sld xmlns:a="http://schemas.openxmlformats.org/drawingml/2006/main" xmlns:p="http://schemas.openxmlformats.org/presentationml/2006/main" xmlns:r="http://schemas.openxmlformats.org/officeDocument/2006/relationships" xmlns:p14="http://schemas.microsoft.com/office/powerpoint/2010/main" xmlns:p15="http://schemas.microsoft.com/office/powerpoint/2012/main" xmlns:mc="http://schemas.openxmlformats.org/markup-compatibility/2006">
   <p:cSld>
     <p:bg>
@@ -10693,14 +12233,14 @@
       </p:grpSpPr>
       <p:sp>
         <p:nvSpPr>
-          <p:cNvPr id="146" name="Shape 0"/>
+          <p:cNvPr id="171" name="Shape 0"/>
           <p:cNvSpPr/>
           <p:nvPr/>
         </p:nvSpPr>
         <p:spPr>
           <a:xfrm>
             <a:off x="0" y="0"/>
-            <a:ext cx="163800" cy="5142960"/>
+            <a:ext cx="163440" cy="5142600"/>
           </a:xfrm>
           <a:prstGeom prst="rect">
             <a:avLst/>
@@ -10744,14 +12284,14 @@
       </p:sp>
       <p:sp>
         <p:nvSpPr>
-          <p:cNvPr id="147" name="Shape 1"/>
+          <p:cNvPr id="172" name="Shape 1"/>
           <p:cNvSpPr/>
           <p:nvPr/>
         </p:nvSpPr>
         <p:spPr>
           <a:xfrm>
             <a:off x="164520" y="0"/>
-            <a:ext cx="54000" cy="5142960"/>
+            <a:ext cx="53640" cy="5142600"/>
           </a:xfrm>
           <a:prstGeom prst="rect">
             <a:avLst/>
@@ -10795,14 +12335,14 @@
       </p:sp>
       <p:sp>
         <p:nvSpPr>
-          <p:cNvPr id="148" name="Text 2"/>
+          <p:cNvPr id="173" name="Text 2"/>
           <p:cNvSpPr/>
           <p:nvPr/>
         </p:nvSpPr>
         <p:spPr>
           <a:xfrm>
             <a:off x="548640" y="1005840"/>
-            <a:ext cx="8228880" cy="913680"/>
+            <a:ext cx="8228520" cy="913320"/>
           </a:xfrm>
           <a:prstGeom prst="rect">
             <a:avLst/>
@@ -10856,14 +12396,14 @@
       </p:sp>
       <p:sp>
         <p:nvSpPr>
-          <p:cNvPr id="149" name="Text 3"/>
+          <p:cNvPr id="174" name="Text 3"/>
           <p:cNvSpPr/>
           <p:nvPr/>
         </p:nvSpPr>
         <p:spPr>
           <a:xfrm>
             <a:off x="548640" y="2057400"/>
-            <a:ext cx="8228880" cy="1233720"/>
+            <a:ext cx="8228520" cy="1233360"/>
           </a:xfrm>
           <a:prstGeom prst="rect">
             <a:avLst/>
@@ -10977,7 +12517,7 @@
       </p:sp>
       <p:sp>
         <p:nvSpPr>
-          <p:cNvPr id="150" name="Shape 4"/>
+          <p:cNvPr id="175" name="Shape 4"/>
           <p:cNvSpPr/>
           <p:nvPr/>
         </p:nvSpPr>
@@ -11020,14 +12560,14 @@
       </p:sp>
       <p:sp>
         <p:nvSpPr>
-          <p:cNvPr id="151" name="Text 5"/>
+          <p:cNvPr id="176" name="Text 5"/>
           <p:cNvSpPr/>
           <p:nvPr/>
         </p:nvSpPr>
         <p:spPr>
           <a:xfrm>
             <a:off x="548640" y="3566160"/>
-            <a:ext cx="8228880" cy="365040"/>
+            <a:ext cx="8228520" cy="364680"/>
           </a:xfrm>
           <a:prstGeom prst="rect">
             <a:avLst/>
@@ -11081,14 +12621,14 @@
       </p:sp>
       <p:sp>
         <p:nvSpPr>
-          <p:cNvPr id="152" name="Text 6"/>
+          <p:cNvPr id="177" name="Text 6"/>
           <p:cNvSpPr/>
           <p:nvPr/>
         </p:nvSpPr>
         <p:spPr>
           <a:xfrm>
             <a:off x="548640" y="3977640"/>
-            <a:ext cx="8228880" cy="319320"/>
+            <a:ext cx="8228520" cy="318960"/>
           </a:xfrm>
           <a:prstGeom prst="rect">
             <a:avLst/>

--- a/DataQuality_OpenBeautyFacts.pptx
+++ b/DataQuality_OpenBeautyFacts.pptx
@@ -78,7 +78,84 @@
                 <a:uFillTx/>
                 <a:latin typeface="Arial"/>
               </a:rPr>
-              <a:t>Click to move the slide</a:t>
+              <a:t>Cli</a:t>
+            </a:r>
+            <a:r>
+              <a:rPr lang="es-CO" sz="4400" b="0" u="none" strike="noStrike">
+                <a:solidFill>
+                  <a:srgbClr val="000000"/>
+                </a:solidFill>
+                <a:effectLst/>
+                <a:uFillTx/>
+                <a:latin typeface="Arial"/>
+              </a:rPr>
+              <a:t>ck </a:t>
+            </a:r>
+            <a:r>
+              <a:rPr lang="es-CO" sz="4400" b="0" u="none" strike="noStrike">
+                <a:solidFill>
+                  <a:srgbClr val="000000"/>
+                </a:solidFill>
+                <a:effectLst/>
+                <a:uFillTx/>
+                <a:latin typeface="Arial"/>
+              </a:rPr>
+              <a:t>to </a:t>
+            </a:r>
+            <a:r>
+              <a:rPr lang="es-CO" sz="4400" b="0" u="none" strike="noStrike">
+                <a:solidFill>
+                  <a:srgbClr val="000000"/>
+                </a:solidFill>
+                <a:effectLst/>
+                <a:uFillTx/>
+                <a:latin typeface="Arial"/>
+              </a:rPr>
+              <a:t>mo</a:t>
+            </a:r>
+            <a:r>
+              <a:rPr lang="es-CO" sz="4400" b="0" u="none" strike="noStrike">
+                <a:solidFill>
+                  <a:srgbClr val="000000"/>
+                </a:solidFill>
+                <a:effectLst/>
+                <a:uFillTx/>
+                <a:latin typeface="Arial"/>
+              </a:rPr>
+              <a:t>ve </a:t>
+            </a:r>
+            <a:r>
+              <a:rPr lang="es-CO" sz="4400" b="0" u="none" strike="noStrike">
+                <a:solidFill>
+                  <a:srgbClr val="000000"/>
+                </a:solidFill>
+                <a:effectLst/>
+                <a:uFillTx/>
+                <a:latin typeface="Arial"/>
+              </a:rPr>
+              <a:t>the </a:t>
+            </a:r>
+            <a:r>
+              <a:rPr lang="es-CO" sz="4400" b="0" u="none" strike="noStrike">
+                <a:solidFill>
+                  <a:srgbClr val="000000"/>
+                </a:solidFill>
+                <a:effectLst/>
+                <a:uFillTx/>
+                <a:latin typeface="Arial"/>
+              </a:rPr>
+              <a:t>slid</a:t>
+            </a:r>
+            <a:r>
+              <a:rPr lang="es-CO" sz="4400" b="0" u="none" strike="noStrike">
+                <a:solidFill>
+                  <a:srgbClr val="000000"/>
+                </a:solidFill>
+                <a:effectLst/>
+                <a:uFillTx/>
+                <a:latin typeface="Arial"/>
+              </a:rPr>
+              <a:t>e</a:t>
             </a:r>
             <a:endParaRPr lang="es-CO" sz="4400" b="0" u="none" strike="noStrike">
               <a:solidFill>
@@ -131,29 +208,7 @@
                 <a:uFillTx/>
                 <a:latin typeface="Arial"/>
               </a:rPr>
-              <a:t>Click to edit </a:t>
-            </a:r>
-            <a:r>
-              <a:rPr lang="es-CO" sz="2000" b="0" u="none" strike="noStrike">
-                <a:solidFill>
-                  <a:srgbClr val="000000"/>
-                </a:solidFill>
-                <a:effectLst/>
-                <a:uFillTx/>
-                <a:latin typeface="Arial"/>
-              </a:rPr>
-              <a:t>the notes </a:t>
-            </a:r>
-            <a:r>
-              <a:rPr lang="es-CO" sz="2000" b="0" u="none" strike="noStrike">
-                <a:solidFill>
-                  <a:srgbClr val="000000"/>
-                </a:solidFill>
-                <a:effectLst/>
-                <a:uFillTx/>
-                <a:latin typeface="Arial"/>
-              </a:rPr>
-              <a:t>format</a:t>
+              <a:t>Click to edit the notes format</a:t>
             </a:r>
             <a:endParaRPr lang="es-CO" sz="2000" b="0" u="none" strike="noStrike">
               <a:solidFill>
@@ -395,7 +450,7 @@
             <a:pPr indent="0" algn="r">
               <a:buNone/>
             </a:pPr>
-            <a:fld id="{55B61BDD-F815-4A2A-BCDB-B76E97476A28}" type="slidenum">
+            <a:fld id="{FF7F9F79-AF4A-485A-AF02-D47BB2254788}" type="slidenum">
               <a:rPr lang="es-CO" sz="1400" b="0" u="none" strike="noStrike">
                 <a:solidFill>
                   <a:srgbClr val="000000"/>
@@ -442,7 +497,7 @@
       </p:grpSpPr>
       <p:sp>
         <p:nvSpPr>
-          <p:cNvPr id="178" name="PlaceHolder 1"/>
+          <p:cNvPr id="180" name="PlaceHolder 1"/>
           <p:cNvSpPr>
             <a:spLocks noGrp="1"/>
           </p:cNvSpPr>
@@ -453,19 +508,19 @@
         <p:spPr>
           <a:xfrm>
             <a:off x="685800" y="1143000"/>
-            <a:ext cx="5485320" cy="3085200"/>
-          </a:xfrm>
-          <a:prstGeom prst="rect">
-            <a:avLst/>
-          </a:prstGeom>
-          <a:ln w="0">
-            <a:noFill/>
-          </a:ln>
-        </p:spPr>
-      </p:sp>
-      <p:sp>
-        <p:nvSpPr>
-          <p:cNvPr id="179" name="PlaceHolder 2"/>
+            <a:ext cx="5484960" cy="3084840"/>
+          </a:xfrm>
+          <a:prstGeom prst="rect">
+            <a:avLst/>
+          </a:prstGeom>
+          <a:ln w="0">
+            <a:noFill/>
+          </a:ln>
+        </p:spPr>
+      </p:sp>
+      <p:sp>
+        <p:nvSpPr>
+          <p:cNvPr id="181" name="PlaceHolder 2"/>
           <p:cNvSpPr>
             <a:spLocks noGrp="1"/>
           </p:cNvSpPr>
@@ -476,7 +531,7 @@
         <p:spPr>
           <a:xfrm>
             <a:off x="685800" y="4400640"/>
-            <a:ext cx="5485320" cy="3599280"/>
+            <a:ext cx="5484960" cy="3598920"/>
           </a:xfrm>
           <a:prstGeom prst="rect">
             <a:avLst/>
@@ -507,7 +562,7 @@
       </p:sp>
       <p:sp>
         <p:nvSpPr>
-          <p:cNvPr id="180" name="PlaceHolder 3"/>
+          <p:cNvPr id="182" name="PlaceHolder 3"/>
           <p:cNvSpPr>
             <a:spLocks noGrp="1"/>
           </p:cNvSpPr>
@@ -518,7 +573,7 @@
         <p:spPr>
           <a:xfrm>
             <a:off x="3884760" y="8685360"/>
-            <a:ext cx="2970720" cy="457560"/>
+            <a:ext cx="2970360" cy="457200"/>
           </a:xfrm>
           <a:prstGeom prst="rect">
             <a:avLst/>
@@ -562,7 +617,7 @@
                 <a:tab algn="l" pos="0"/>
               </a:tabLst>
             </a:pPr>
-            <a:fld id="{B61059A2-23BB-46B8-BC9B-3657015A3314}" type="slidenum">
+            <a:fld id="{7D1C1362-E7E3-42BD-90B8-6B8D22738699}" type="slidenum">
               <a:rPr lang="en-US" sz="1200" b="0" u="none" strike="noStrike">
                 <a:solidFill>
                   <a:schemeClr val="dk1"/>
@@ -609,7 +664,7 @@
       </p:grpSpPr>
       <p:sp>
         <p:nvSpPr>
-          <p:cNvPr id="181" name="PlaceHolder 1"/>
+          <p:cNvPr id="183" name="PlaceHolder 1"/>
           <p:cNvSpPr>
             <a:spLocks noGrp="1"/>
           </p:cNvSpPr>
@@ -620,19 +675,19 @@
         <p:spPr>
           <a:xfrm>
             <a:off x="685800" y="1143000"/>
-            <a:ext cx="5485320" cy="3085200"/>
-          </a:xfrm>
-          <a:prstGeom prst="rect">
-            <a:avLst/>
-          </a:prstGeom>
-          <a:ln w="0">
-            <a:noFill/>
-          </a:ln>
-        </p:spPr>
-      </p:sp>
-      <p:sp>
-        <p:nvSpPr>
-          <p:cNvPr id="182" name="PlaceHolder 2"/>
+            <a:ext cx="5484960" cy="3084840"/>
+          </a:xfrm>
+          <a:prstGeom prst="rect">
+            <a:avLst/>
+          </a:prstGeom>
+          <a:ln w="0">
+            <a:noFill/>
+          </a:ln>
+        </p:spPr>
+      </p:sp>
+      <p:sp>
+        <p:nvSpPr>
+          <p:cNvPr id="184" name="PlaceHolder 2"/>
           <p:cNvSpPr>
             <a:spLocks noGrp="1"/>
           </p:cNvSpPr>
@@ -643,7 +698,7 @@
         <p:spPr>
           <a:xfrm>
             <a:off x="685800" y="4400640"/>
-            <a:ext cx="5485320" cy="3599280"/>
+            <a:ext cx="5484960" cy="3598920"/>
           </a:xfrm>
           <a:prstGeom prst="rect">
             <a:avLst/>
@@ -674,7 +729,7 @@
       </p:sp>
       <p:sp>
         <p:nvSpPr>
-          <p:cNvPr id="183" name="PlaceHolder 3"/>
+          <p:cNvPr id="185" name="PlaceHolder 3"/>
           <p:cNvSpPr>
             <a:spLocks noGrp="1"/>
           </p:cNvSpPr>
@@ -685,7 +740,7 @@
         <p:spPr>
           <a:xfrm>
             <a:off x="3884760" y="8685360"/>
-            <a:ext cx="2970720" cy="457560"/>
+            <a:ext cx="2970360" cy="457200"/>
           </a:xfrm>
           <a:prstGeom prst="rect">
             <a:avLst/>
@@ -729,7 +784,7 @@
                 <a:tab algn="l" pos="0"/>
               </a:tabLst>
             </a:pPr>
-            <a:fld id="{9BCD7145-4421-4FAF-BA9C-327D9D9A32E7}" type="slidenum">
+            <a:fld id="{72F2BC25-25BB-4AD8-B6E7-70031943B237}" type="slidenum">
               <a:rPr lang="en-US" sz="1200" b="0" u="none" strike="noStrike">
                 <a:solidFill>
                   <a:schemeClr val="dk1"/>
@@ -776,7 +831,7 @@
       </p:grpSpPr>
       <p:sp>
         <p:nvSpPr>
-          <p:cNvPr id="184" name="PlaceHolder 1"/>
+          <p:cNvPr id="186" name="PlaceHolder 1"/>
           <p:cNvSpPr>
             <a:spLocks noGrp="1"/>
           </p:cNvSpPr>
@@ -787,19 +842,19 @@
         <p:spPr>
           <a:xfrm>
             <a:off x="685800" y="1143000"/>
-            <a:ext cx="5485320" cy="3085200"/>
-          </a:xfrm>
-          <a:prstGeom prst="rect">
-            <a:avLst/>
-          </a:prstGeom>
-          <a:ln w="0">
-            <a:noFill/>
-          </a:ln>
-        </p:spPr>
-      </p:sp>
-      <p:sp>
-        <p:nvSpPr>
-          <p:cNvPr id="185" name="PlaceHolder 2"/>
+            <a:ext cx="5484960" cy="3084840"/>
+          </a:xfrm>
+          <a:prstGeom prst="rect">
+            <a:avLst/>
+          </a:prstGeom>
+          <a:ln w="0">
+            <a:noFill/>
+          </a:ln>
+        </p:spPr>
+      </p:sp>
+      <p:sp>
+        <p:nvSpPr>
+          <p:cNvPr id="187" name="PlaceHolder 2"/>
           <p:cNvSpPr>
             <a:spLocks noGrp="1"/>
           </p:cNvSpPr>
@@ -810,7 +865,7 @@
         <p:spPr>
           <a:xfrm>
             <a:off x="685800" y="4400640"/>
-            <a:ext cx="5485320" cy="3599280"/>
+            <a:ext cx="5484960" cy="3598920"/>
           </a:xfrm>
           <a:prstGeom prst="rect">
             <a:avLst/>
@@ -841,7 +896,7 @@
       </p:sp>
       <p:sp>
         <p:nvSpPr>
-          <p:cNvPr id="186" name="PlaceHolder 3"/>
+          <p:cNvPr id="188" name="PlaceHolder 3"/>
           <p:cNvSpPr>
             <a:spLocks noGrp="1"/>
           </p:cNvSpPr>
@@ -852,7 +907,7 @@
         <p:spPr>
           <a:xfrm>
             <a:off x="3884760" y="8685360"/>
-            <a:ext cx="2970720" cy="457560"/>
+            <a:ext cx="2970360" cy="457200"/>
           </a:xfrm>
           <a:prstGeom prst="rect">
             <a:avLst/>
@@ -896,7 +951,7 @@
                 <a:tab algn="l" pos="0"/>
               </a:tabLst>
             </a:pPr>
-            <a:fld id="{C75843F8-D1E4-43B3-ABC4-99E923C98C3A}" type="slidenum">
+            <a:fld id="{19A13914-0EFC-42BB-8AC5-1FA9D2F2F266}" type="slidenum">
               <a:rPr lang="en-US" sz="1200" b="0" u="none" strike="noStrike">
                 <a:solidFill>
                   <a:schemeClr val="dk1"/>
@@ -943,7 +998,7 @@
       </p:grpSpPr>
       <p:sp>
         <p:nvSpPr>
-          <p:cNvPr id="187" name="PlaceHolder 1"/>
+          <p:cNvPr id="189" name="PlaceHolder 1"/>
           <p:cNvSpPr>
             <a:spLocks noGrp="1"/>
           </p:cNvSpPr>
@@ -954,19 +1009,19 @@
         <p:spPr>
           <a:xfrm>
             <a:off x="685800" y="1143000"/>
-            <a:ext cx="5485320" cy="3085200"/>
-          </a:xfrm>
-          <a:prstGeom prst="rect">
-            <a:avLst/>
-          </a:prstGeom>
-          <a:ln w="0">
-            <a:noFill/>
-          </a:ln>
-        </p:spPr>
-      </p:sp>
-      <p:sp>
-        <p:nvSpPr>
-          <p:cNvPr id="188" name="PlaceHolder 2"/>
+            <a:ext cx="5484960" cy="3084840"/>
+          </a:xfrm>
+          <a:prstGeom prst="rect">
+            <a:avLst/>
+          </a:prstGeom>
+          <a:ln w="0">
+            <a:noFill/>
+          </a:ln>
+        </p:spPr>
+      </p:sp>
+      <p:sp>
+        <p:nvSpPr>
+          <p:cNvPr id="190" name="PlaceHolder 2"/>
           <p:cNvSpPr>
             <a:spLocks noGrp="1"/>
           </p:cNvSpPr>
@@ -977,7 +1032,7 @@
         <p:spPr>
           <a:xfrm>
             <a:off x="685800" y="4400640"/>
-            <a:ext cx="5485320" cy="3599280"/>
+            <a:ext cx="5484960" cy="3598920"/>
           </a:xfrm>
           <a:prstGeom prst="rect">
             <a:avLst/>
@@ -1008,7 +1063,7 @@
       </p:sp>
       <p:sp>
         <p:nvSpPr>
-          <p:cNvPr id="189" name="PlaceHolder 3"/>
+          <p:cNvPr id="191" name="PlaceHolder 3"/>
           <p:cNvSpPr>
             <a:spLocks noGrp="1"/>
           </p:cNvSpPr>
@@ -1019,7 +1074,7 @@
         <p:spPr>
           <a:xfrm>
             <a:off x="3884760" y="8685360"/>
-            <a:ext cx="2970720" cy="457560"/>
+            <a:ext cx="2970360" cy="457200"/>
           </a:xfrm>
           <a:prstGeom prst="rect">
             <a:avLst/>
@@ -1063,7 +1118,7 @@
                 <a:tab algn="l" pos="0"/>
               </a:tabLst>
             </a:pPr>
-            <a:fld id="{86A0DDC4-2C29-4C05-BFD9-D312D13B3DB9}" type="slidenum">
+            <a:fld id="{EBDB8890-FFF1-49E4-A6A0-D5B3AD87C028}" type="slidenum">
               <a:rPr lang="en-US" sz="1200" b="0" u="none" strike="noStrike">
                 <a:solidFill>
                   <a:schemeClr val="dk1"/>
@@ -1110,7 +1165,7 @@
       </p:grpSpPr>
       <p:sp>
         <p:nvSpPr>
-          <p:cNvPr id="190" name="PlaceHolder 1"/>
+          <p:cNvPr id="192" name="PlaceHolder 1"/>
           <p:cNvSpPr>
             <a:spLocks noGrp="1"/>
           </p:cNvSpPr>
@@ -1121,19 +1176,19 @@
         <p:spPr>
           <a:xfrm>
             <a:off x="685800" y="1143000"/>
-            <a:ext cx="5485320" cy="3085200"/>
-          </a:xfrm>
-          <a:prstGeom prst="rect">
-            <a:avLst/>
-          </a:prstGeom>
-          <a:ln w="0">
-            <a:noFill/>
-          </a:ln>
-        </p:spPr>
-      </p:sp>
-      <p:sp>
-        <p:nvSpPr>
-          <p:cNvPr id="191" name="PlaceHolder 2"/>
+            <a:ext cx="5484960" cy="3084840"/>
+          </a:xfrm>
+          <a:prstGeom prst="rect">
+            <a:avLst/>
+          </a:prstGeom>
+          <a:ln w="0">
+            <a:noFill/>
+          </a:ln>
+        </p:spPr>
+      </p:sp>
+      <p:sp>
+        <p:nvSpPr>
+          <p:cNvPr id="193" name="PlaceHolder 2"/>
           <p:cNvSpPr>
             <a:spLocks noGrp="1"/>
           </p:cNvSpPr>
@@ -1144,7 +1199,7 @@
         <p:spPr>
           <a:xfrm>
             <a:off x="685800" y="4400640"/>
-            <a:ext cx="5485320" cy="3599280"/>
+            <a:ext cx="5484960" cy="3598920"/>
           </a:xfrm>
           <a:prstGeom prst="rect">
             <a:avLst/>
@@ -1175,7 +1230,7 @@
       </p:sp>
       <p:sp>
         <p:nvSpPr>
-          <p:cNvPr id="192" name="PlaceHolder 3"/>
+          <p:cNvPr id="194" name="PlaceHolder 3"/>
           <p:cNvSpPr>
             <a:spLocks noGrp="1"/>
           </p:cNvSpPr>
@@ -1186,7 +1241,7 @@
         <p:spPr>
           <a:xfrm>
             <a:off x="3884760" y="8685360"/>
-            <a:ext cx="2970720" cy="457560"/>
+            <a:ext cx="2970360" cy="457200"/>
           </a:xfrm>
           <a:prstGeom prst="rect">
             <a:avLst/>
@@ -1230,7 +1285,7 @@
                 <a:tab algn="l" pos="0"/>
               </a:tabLst>
             </a:pPr>
-            <a:fld id="{423B9B58-9779-425D-A397-0BD60142120C}" type="slidenum">
+            <a:fld id="{809CB620-7322-4504-AB1D-C6257AA0CFA4}" type="slidenum">
               <a:rPr lang="en-US" sz="1200" b="0" u="none" strike="noStrike">
                 <a:solidFill>
                   <a:schemeClr val="dk1"/>
@@ -1277,7 +1332,7 @@
       </p:grpSpPr>
       <p:sp>
         <p:nvSpPr>
-          <p:cNvPr id="193" name="PlaceHolder 1"/>
+          <p:cNvPr id="195" name="PlaceHolder 1"/>
           <p:cNvSpPr>
             <a:spLocks noGrp="1"/>
           </p:cNvSpPr>
@@ -1288,19 +1343,19 @@
         <p:spPr>
           <a:xfrm>
             <a:off x="685800" y="1143000"/>
-            <a:ext cx="5485320" cy="3085200"/>
-          </a:xfrm>
-          <a:prstGeom prst="rect">
-            <a:avLst/>
-          </a:prstGeom>
-          <a:ln w="0">
-            <a:noFill/>
-          </a:ln>
-        </p:spPr>
-      </p:sp>
-      <p:sp>
-        <p:nvSpPr>
-          <p:cNvPr id="194" name="PlaceHolder 2"/>
+            <a:ext cx="5484960" cy="3084840"/>
+          </a:xfrm>
+          <a:prstGeom prst="rect">
+            <a:avLst/>
+          </a:prstGeom>
+          <a:ln w="0">
+            <a:noFill/>
+          </a:ln>
+        </p:spPr>
+      </p:sp>
+      <p:sp>
+        <p:nvSpPr>
+          <p:cNvPr id="196" name="PlaceHolder 2"/>
           <p:cNvSpPr>
             <a:spLocks noGrp="1"/>
           </p:cNvSpPr>
@@ -1311,7 +1366,7 @@
         <p:spPr>
           <a:xfrm>
             <a:off x="685800" y="4400640"/>
-            <a:ext cx="5485320" cy="3599280"/>
+            <a:ext cx="5484960" cy="3598920"/>
           </a:xfrm>
           <a:prstGeom prst="rect">
             <a:avLst/>
@@ -1342,7 +1397,7 @@
       </p:sp>
       <p:sp>
         <p:nvSpPr>
-          <p:cNvPr id="195" name="PlaceHolder 3"/>
+          <p:cNvPr id="197" name="PlaceHolder 3"/>
           <p:cNvSpPr>
             <a:spLocks noGrp="1"/>
           </p:cNvSpPr>
@@ -1353,7 +1408,7 @@
         <p:spPr>
           <a:xfrm>
             <a:off x="3884760" y="8685360"/>
-            <a:ext cx="2970720" cy="457560"/>
+            <a:ext cx="2970360" cy="457200"/>
           </a:xfrm>
           <a:prstGeom prst="rect">
             <a:avLst/>
@@ -1397,7 +1452,7 @@
                 <a:tab algn="l" pos="0"/>
               </a:tabLst>
             </a:pPr>
-            <a:fld id="{24AA97C6-DD0C-4DA5-97D4-66F1E3F13858}" type="slidenum">
+            <a:fld id="{A0AC4D1A-4192-40BD-9650-47CC212B304D}" type="slidenum">
               <a:rPr lang="en-US" sz="1200" b="0" u="none" strike="noStrike">
                 <a:solidFill>
                   <a:schemeClr val="dk1"/>
@@ -1444,7 +1499,7 @@
       </p:grpSpPr>
       <p:sp>
         <p:nvSpPr>
-          <p:cNvPr id="196" name="PlaceHolder 1"/>
+          <p:cNvPr id="198" name="PlaceHolder 1"/>
           <p:cNvSpPr>
             <a:spLocks noGrp="1"/>
           </p:cNvSpPr>
@@ -1455,19 +1510,19 @@
         <p:spPr>
           <a:xfrm>
             <a:off x="685800" y="1143000"/>
-            <a:ext cx="5485320" cy="3085200"/>
-          </a:xfrm>
-          <a:prstGeom prst="rect">
-            <a:avLst/>
-          </a:prstGeom>
-          <a:ln w="0">
-            <a:noFill/>
-          </a:ln>
-        </p:spPr>
-      </p:sp>
-      <p:sp>
-        <p:nvSpPr>
-          <p:cNvPr id="197" name="PlaceHolder 2"/>
+            <a:ext cx="5484960" cy="3084840"/>
+          </a:xfrm>
+          <a:prstGeom prst="rect">
+            <a:avLst/>
+          </a:prstGeom>
+          <a:ln w="0">
+            <a:noFill/>
+          </a:ln>
+        </p:spPr>
+      </p:sp>
+      <p:sp>
+        <p:nvSpPr>
+          <p:cNvPr id="199" name="PlaceHolder 2"/>
           <p:cNvSpPr>
             <a:spLocks noGrp="1"/>
           </p:cNvSpPr>
@@ -1478,7 +1533,7 @@
         <p:spPr>
           <a:xfrm>
             <a:off x="685800" y="4400640"/>
-            <a:ext cx="5485320" cy="3599280"/>
+            <a:ext cx="5484960" cy="3598920"/>
           </a:xfrm>
           <a:prstGeom prst="rect">
             <a:avLst/>
@@ -1509,7 +1564,7 @@
       </p:sp>
       <p:sp>
         <p:nvSpPr>
-          <p:cNvPr id="198" name="PlaceHolder 3"/>
+          <p:cNvPr id="200" name="PlaceHolder 3"/>
           <p:cNvSpPr>
             <a:spLocks noGrp="1"/>
           </p:cNvSpPr>
@@ -1520,7 +1575,7 @@
         <p:spPr>
           <a:xfrm>
             <a:off x="3884760" y="8685360"/>
-            <a:ext cx="2970720" cy="457560"/>
+            <a:ext cx="2970360" cy="457200"/>
           </a:xfrm>
           <a:prstGeom prst="rect">
             <a:avLst/>
@@ -1564,7 +1619,7 @@
                 <a:tab algn="l" pos="0"/>
               </a:tabLst>
             </a:pPr>
-            <a:fld id="{1CCA2530-8A14-4B2E-BE4E-88703D829B8F}" type="slidenum">
+            <a:fld id="{13EDEB22-0E72-4172-80DF-E39B481FB4F2}" type="slidenum">
               <a:rPr lang="en-US" sz="1200" b="0" u="none" strike="noStrike">
                 <a:solidFill>
                   <a:schemeClr val="dk1"/>
@@ -1611,7 +1666,7 @@
       </p:grpSpPr>
       <p:sp>
         <p:nvSpPr>
-          <p:cNvPr id="199" name="PlaceHolder 1"/>
+          <p:cNvPr id="201" name="PlaceHolder 1"/>
           <p:cNvSpPr>
             <a:spLocks noGrp="1"/>
           </p:cNvSpPr>
@@ -1622,19 +1677,19 @@
         <p:spPr>
           <a:xfrm>
             <a:off x="685800" y="1143000"/>
-            <a:ext cx="5485320" cy="3085200"/>
-          </a:xfrm>
-          <a:prstGeom prst="rect">
-            <a:avLst/>
-          </a:prstGeom>
-          <a:ln w="0">
-            <a:noFill/>
-          </a:ln>
-        </p:spPr>
-      </p:sp>
-      <p:sp>
-        <p:nvSpPr>
-          <p:cNvPr id="200" name="PlaceHolder 2"/>
+            <a:ext cx="5484960" cy="3084840"/>
+          </a:xfrm>
+          <a:prstGeom prst="rect">
+            <a:avLst/>
+          </a:prstGeom>
+          <a:ln w="0">
+            <a:noFill/>
+          </a:ln>
+        </p:spPr>
+      </p:sp>
+      <p:sp>
+        <p:nvSpPr>
+          <p:cNvPr id="202" name="PlaceHolder 2"/>
           <p:cNvSpPr>
             <a:spLocks noGrp="1"/>
           </p:cNvSpPr>
@@ -1645,7 +1700,7 @@
         <p:spPr>
           <a:xfrm>
             <a:off x="685800" y="4400640"/>
-            <a:ext cx="5485320" cy="3599280"/>
+            <a:ext cx="5484960" cy="3598920"/>
           </a:xfrm>
           <a:prstGeom prst="rect">
             <a:avLst/>
@@ -1676,7 +1731,7 @@
       </p:sp>
       <p:sp>
         <p:nvSpPr>
-          <p:cNvPr id="201" name="PlaceHolder 3"/>
+          <p:cNvPr id="203" name="PlaceHolder 3"/>
           <p:cNvSpPr>
             <a:spLocks noGrp="1"/>
           </p:cNvSpPr>
@@ -1687,7 +1742,7 @@
         <p:spPr>
           <a:xfrm>
             <a:off x="3884760" y="8685360"/>
-            <a:ext cx="2970720" cy="457560"/>
+            <a:ext cx="2970360" cy="457200"/>
           </a:xfrm>
           <a:prstGeom prst="rect">
             <a:avLst/>
@@ -1731,7 +1786,7 @@
                 <a:tab algn="l" pos="0"/>
               </a:tabLst>
             </a:pPr>
-            <a:fld id="{D86ADF8B-CB4C-4DB2-871F-4CC0CD0B0915}" type="slidenum">
+            <a:fld id="{80BA618D-696F-4E36-94DB-846ADD594FD6}" type="slidenum">
               <a:rPr lang="en-US" sz="1200" b="0" u="none" strike="noStrike">
                 <a:solidFill>
                   <a:schemeClr val="dk1"/>
@@ -1778,7 +1833,7 @@
       </p:grpSpPr>
       <p:sp>
         <p:nvSpPr>
-          <p:cNvPr id="202" name="PlaceHolder 1"/>
+          <p:cNvPr id="204" name="PlaceHolder 1"/>
           <p:cNvSpPr>
             <a:spLocks noGrp="1"/>
           </p:cNvSpPr>
@@ -1789,19 +1844,19 @@
         <p:spPr>
           <a:xfrm>
             <a:off x="685800" y="1143000"/>
-            <a:ext cx="5485320" cy="3085200"/>
-          </a:xfrm>
-          <a:prstGeom prst="rect">
-            <a:avLst/>
-          </a:prstGeom>
-          <a:ln w="0">
-            <a:noFill/>
-          </a:ln>
-        </p:spPr>
-      </p:sp>
-      <p:sp>
-        <p:nvSpPr>
-          <p:cNvPr id="203" name="PlaceHolder 2"/>
+            <a:ext cx="5484960" cy="3084840"/>
+          </a:xfrm>
+          <a:prstGeom prst="rect">
+            <a:avLst/>
+          </a:prstGeom>
+          <a:ln w="0">
+            <a:noFill/>
+          </a:ln>
+        </p:spPr>
+      </p:sp>
+      <p:sp>
+        <p:nvSpPr>
+          <p:cNvPr id="205" name="PlaceHolder 2"/>
           <p:cNvSpPr>
             <a:spLocks noGrp="1"/>
           </p:cNvSpPr>
@@ -1812,7 +1867,7 @@
         <p:spPr>
           <a:xfrm>
             <a:off x="685800" y="4400640"/>
-            <a:ext cx="5485320" cy="3599280"/>
+            <a:ext cx="5484960" cy="3598920"/>
           </a:xfrm>
           <a:prstGeom prst="rect">
             <a:avLst/>
@@ -1843,7 +1898,7 @@
       </p:sp>
       <p:sp>
         <p:nvSpPr>
-          <p:cNvPr id="204" name="PlaceHolder 3"/>
+          <p:cNvPr id="206" name="PlaceHolder 3"/>
           <p:cNvSpPr>
             <a:spLocks noGrp="1"/>
           </p:cNvSpPr>
@@ -1854,7 +1909,7 @@
         <p:spPr>
           <a:xfrm>
             <a:off x="3884760" y="8685360"/>
-            <a:ext cx="2970720" cy="457560"/>
+            <a:ext cx="2970360" cy="457200"/>
           </a:xfrm>
           <a:prstGeom prst="rect">
             <a:avLst/>
@@ -1898,7 +1953,7 @@
                 <a:tab algn="l" pos="0"/>
               </a:tabLst>
             </a:pPr>
-            <a:fld id="{96161847-E341-4951-A24E-A232B90390F7}" type="slidenum">
+            <a:fld id="{C6306B51-A2AB-448E-9D22-63FB1B435405}" type="slidenum">
               <a:rPr lang="en-US" sz="1200" b="0" u="none" strike="noStrike">
                 <a:solidFill>
                   <a:schemeClr val="dk1"/>
@@ -1908,7 +1963,7 @@
                 <a:latin typeface="+mn-lt"/>
                 <a:ea typeface="+mn-ea"/>
               </a:rPr>
-              <a:t>1</a:t>
+              <a:t>&lt;number&gt;</a:t>
             </a:fld>
             <a:endParaRPr lang="es-CO" sz="1200" b="0" u="none" strike="noStrike">
               <a:solidFill>
@@ -2320,7 +2375,7 @@
         <p:spPr>
           <a:xfrm>
             <a:off x="0" y="0"/>
-            <a:ext cx="163440" cy="5142600"/>
+            <a:ext cx="163080" cy="5142240"/>
           </a:xfrm>
           <a:prstGeom prst="rect">
             <a:avLst/>
@@ -2371,7 +2426,7 @@
         <p:spPr>
           <a:xfrm>
             <a:off x="164520" y="0"/>
-            <a:ext cx="53640" cy="5142600"/>
+            <a:ext cx="53280" cy="5142240"/>
           </a:xfrm>
           <a:prstGeom prst="rect">
             <a:avLst/>
@@ -2422,7 +2477,7 @@
         <p:spPr>
           <a:xfrm>
             <a:off x="640080" y="502920"/>
-            <a:ext cx="2599200" cy="346320"/>
+            <a:ext cx="2598840" cy="345960"/>
           </a:xfrm>
           <a:prstGeom prst="roundRect">
             <a:avLst>
@@ -2477,7 +2532,7 @@
         <p:spPr>
           <a:xfrm>
             <a:off x="640080" y="502920"/>
-            <a:ext cx="2559240" cy="346320"/>
+            <a:ext cx="2558880" cy="345960"/>
           </a:xfrm>
           <a:prstGeom prst="rect">
             <a:avLst/>
@@ -2537,7 +2592,7 @@
         <p:spPr>
           <a:xfrm>
             <a:off x="640080" y="1097280"/>
-            <a:ext cx="8228520" cy="913320"/>
+            <a:ext cx="8228160" cy="912960"/>
           </a:xfrm>
           <a:prstGeom prst="rect">
             <a:avLst/>
@@ -2598,7 +2653,7 @@
         <p:spPr>
           <a:xfrm>
             <a:off x="640080" y="1920240"/>
-            <a:ext cx="8228520" cy="684720"/>
+            <a:ext cx="8228160" cy="684360"/>
           </a:xfrm>
           <a:prstGeom prst="rect">
             <a:avLst/>
@@ -2659,7 +2714,7 @@
         <p:spPr>
           <a:xfrm>
             <a:off x="640080" y="2788920"/>
-            <a:ext cx="6856920" cy="821880"/>
+            <a:ext cx="6856560" cy="821520"/>
           </a:xfrm>
           <a:prstGeom prst="rect">
             <a:avLst/>
@@ -2793,7 +2848,7 @@
         <p:spPr>
           <a:xfrm>
             <a:off x="640080" y="3840480"/>
-            <a:ext cx="8228520" cy="318960"/>
+            <a:ext cx="8228160" cy="318600"/>
           </a:xfrm>
           <a:prstGeom prst="rect">
             <a:avLst/>
@@ -2854,7 +2909,7 @@
         <p:spPr>
           <a:xfrm>
             <a:off x="640080" y="4206240"/>
-            <a:ext cx="8228520" cy="318960"/>
+            <a:ext cx="8228160" cy="318600"/>
           </a:xfrm>
           <a:prstGeom prst="rect">
             <a:avLst/>
@@ -2952,7 +3007,7 @@
         <p:spPr>
           <a:xfrm>
             <a:off x="0" y="0"/>
-            <a:ext cx="108720" cy="5142600"/>
+            <a:ext cx="108360" cy="5142240"/>
           </a:xfrm>
           <a:prstGeom prst="rect">
             <a:avLst/>
@@ -3003,7 +3058,7 @@
         <p:spPr>
           <a:xfrm>
             <a:off x="365760" y="274320"/>
-            <a:ext cx="8502840" cy="639000"/>
+            <a:ext cx="8502480" cy="638640"/>
           </a:xfrm>
           <a:prstGeom prst="rect">
             <a:avLst/>
@@ -3064,7 +3119,7 @@
         <p:spPr>
           <a:xfrm>
             <a:off x="365760" y="1051560"/>
-            <a:ext cx="8411400" cy="776160"/>
+            <a:ext cx="8411040" cy="775800"/>
           </a:xfrm>
           <a:prstGeom prst="rect">
             <a:avLst/>
@@ -3125,7 +3180,7 @@
         <p:spPr>
           <a:xfrm>
             <a:off x="365760" y="1920240"/>
-            <a:ext cx="8411400" cy="684720"/>
+            <a:ext cx="8411040" cy="684360"/>
           </a:xfrm>
           <a:prstGeom prst="rect">
             <a:avLst/>
@@ -3185,7 +3240,7 @@
         <p:spPr>
           <a:xfrm>
             <a:off x="365760" y="1920240"/>
-            <a:ext cx="53640" cy="684720"/>
+            <a:ext cx="53280" cy="684360"/>
           </a:xfrm>
           <a:prstGeom prst="rect">
             <a:avLst/>
@@ -3236,7 +3291,7 @@
         <p:spPr>
           <a:xfrm>
             <a:off x="548640" y="1920240"/>
-            <a:ext cx="8228520" cy="684720"/>
+            <a:ext cx="8228160" cy="684360"/>
           </a:xfrm>
           <a:prstGeom prst="rect">
             <a:avLst/>
@@ -3297,7 +3352,7 @@
         <p:spPr>
           <a:xfrm>
             <a:off x="365760" y="2788920"/>
-            <a:ext cx="2604960" cy="1324800"/>
+            <a:ext cx="2604600" cy="1324440"/>
           </a:xfrm>
           <a:prstGeom prst="rect">
             <a:avLst/>
@@ -3355,7 +3410,7 @@
         <p:spPr>
           <a:xfrm>
             <a:off x="365760" y="2788920"/>
-            <a:ext cx="2604960" cy="44640"/>
+            <a:ext cx="2604600" cy="44280"/>
           </a:xfrm>
           <a:prstGeom prst="rect">
             <a:avLst/>
@@ -3406,7 +3461,7 @@
         <p:spPr>
           <a:xfrm>
             <a:off x="365760" y="2898720"/>
-            <a:ext cx="2604960" cy="410400"/>
+            <a:ext cx="2604600" cy="410040"/>
           </a:xfrm>
           <a:prstGeom prst="rect">
             <a:avLst/>
@@ -3466,7 +3521,7 @@
         <p:spPr>
           <a:xfrm>
             <a:off x="365760" y="3291840"/>
-            <a:ext cx="2604960" cy="273240"/>
+            <a:ext cx="2604600" cy="272880"/>
           </a:xfrm>
           <a:prstGeom prst="rect">
             <a:avLst/>
@@ -3527,7 +3582,7 @@
         <p:spPr>
           <a:xfrm>
             <a:off x="365760" y="3566160"/>
-            <a:ext cx="2604960" cy="456120"/>
+            <a:ext cx="2604600" cy="455760"/>
           </a:xfrm>
           <a:prstGeom prst="rect">
             <a:avLst/>
@@ -3618,7 +3673,7 @@
         <p:spPr>
           <a:xfrm>
             <a:off x="3127320" y="2788920"/>
-            <a:ext cx="2604960" cy="1324800"/>
+            <a:ext cx="2604600" cy="1324440"/>
           </a:xfrm>
           <a:prstGeom prst="rect">
             <a:avLst/>
@@ -3676,7 +3731,7 @@
         <p:spPr>
           <a:xfrm>
             <a:off x="3127320" y="2788920"/>
-            <a:ext cx="2604960" cy="44640"/>
+            <a:ext cx="2604600" cy="44280"/>
           </a:xfrm>
           <a:prstGeom prst="rect">
             <a:avLst/>
@@ -3727,7 +3782,7 @@
         <p:spPr>
           <a:xfrm>
             <a:off x="3127320" y="2898720"/>
-            <a:ext cx="2604960" cy="410400"/>
+            <a:ext cx="2604600" cy="410040"/>
           </a:xfrm>
           <a:prstGeom prst="rect">
             <a:avLst/>
@@ -3787,7 +3842,7 @@
         <p:spPr>
           <a:xfrm>
             <a:off x="3127320" y="3291840"/>
-            <a:ext cx="2604960" cy="273240"/>
+            <a:ext cx="2604600" cy="272880"/>
           </a:xfrm>
           <a:prstGeom prst="rect">
             <a:avLst/>
@@ -3848,7 +3903,7 @@
         <p:spPr>
           <a:xfrm>
             <a:off x="3127320" y="3566160"/>
-            <a:ext cx="2604960" cy="456120"/>
+            <a:ext cx="2604600" cy="455760"/>
           </a:xfrm>
           <a:prstGeom prst="rect">
             <a:avLst/>
@@ -3939,7 +3994,7 @@
         <p:spPr>
           <a:xfrm>
             <a:off x="5888880" y="2788920"/>
-            <a:ext cx="2604960" cy="1324800"/>
+            <a:ext cx="2604600" cy="1324440"/>
           </a:xfrm>
           <a:prstGeom prst="rect">
             <a:avLst/>
@@ -3997,7 +4052,7 @@
         <p:spPr>
           <a:xfrm>
             <a:off x="5888880" y="2788920"/>
-            <a:ext cx="2604960" cy="44640"/>
+            <a:ext cx="2604600" cy="44280"/>
           </a:xfrm>
           <a:prstGeom prst="rect">
             <a:avLst/>
@@ -4048,7 +4103,7 @@
         <p:spPr>
           <a:xfrm>
             <a:off x="5888880" y="2898720"/>
-            <a:ext cx="2604960" cy="410400"/>
+            <a:ext cx="2604600" cy="410040"/>
           </a:xfrm>
           <a:prstGeom prst="rect">
             <a:avLst/>
@@ -4108,7 +4163,7 @@
         <p:spPr>
           <a:xfrm>
             <a:off x="5888880" y="3291840"/>
-            <a:ext cx="2604960" cy="273240"/>
+            <a:ext cx="2604600" cy="272880"/>
           </a:xfrm>
           <a:prstGeom prst="rect">
             <a:avLst/>
@@ -4169,7 +4224,7 @@
         <p:spPr>
           <a:xfrm>
             <a:off x="5888880" y="3566160"/>
-            <a:ext cx="2604960" cy="456120"/>
+            <a:ext cx="2604600" cy="455760"/>
           </a:xfrm>
           <a:prstGeom prst="rect">
             <a:avLst/>
@@ -4297,7 +4352,7 @@
         <p:spPr>
           <a:xfrm>
             <a:off x="0" y="0"/>
-            <a:ext cx="108720" cy="5142600"/>
+            <a:ext cx="108360" cy="5142240"/>
           </a:xfrm>
           <a:prstGeom prst="rect">
             <a:avLst/>
@@ -4348,7 +4403,7 @@
         <p:spPr>
           <a:xfrm>
             <a:off x="365760" y="274320"/>
-            <a:ext cx="8502840" cy="593280"/>
+            <a:ext cx="8502480" cy="592920"/>
           </a:xfrm>
           <a:prstGeom prst="rect">
             <a:avLst/>
@@ -4409,7 +4464,7 @@
         <p:spPr>
           <a:xfrm>
             <a:off x="365760" y="868680"/>
-            <a:ext cx="8502840" cy="318960"/>
+            <a:ext cx="8502480" cy="318600"/>
           </a:xfrm>
           <a:prstGeom prst="rect">
             <a:avLst/>
@@ -4470,7 +4525,7 @@
         <p:spPr>
           <a:xfrm>
             <a:off x="365760" y="1371600"/>
-            <a:ext cx="2010600" cy="2330640"/>
+            <a:ext cx="2010240" cy="2330280"/>
           </a:xfrm>
           <a:prstGeom prst="rect">
             <a:avLst/>
@@ -4528,7 +4583,7 @@
         <p:spPr>
           <a:xfrm>
             <a:off x="365760" y="1371600"/>
-            <a:ext cx="2010600" cy="501840"/>
+            <a:ext cx="2010240" cy="501480"/>
           </a:xfrm>
           <a:prstGeom prst="rect">
             <a:avLst/>
@@ -4579,7 +4634,7 @@
         <p:spPr>
           <a:xfrm>
             <a:off x="365760" y="1371600"/>
-            <a:ext cx="2010600" cy="501840"/>
+            <a:ext cx="2010240" cy="501480"/>
           </a:xfrm>
           <a:prstGeom prst="rect">
             <a:avLst/>
@@ -4640,7 +4695,7 @@
         <p:spPr>
           <a:xfrm>
             <a:off x="365760" y="1901880"/>
-            <a:ext cx="2010600" cy="318960"/>
+            <a:ext cx="2010240" cy="318600"/>
           </a:xfrm>
           <a:prstGeom prst="rect">
             <a:avLst/>
@@ -4701,7 +4756,7 @@
         <p:spPr>
           <a:xfrm>
             <a:off x="365760" y="2212920"/>
-            <a:ext cx="2010600" cy="456120"/>
+            <a:ext cx="2010240" cy="455760"/>
           </a:xfrm>
           <a:prstGeom prst="rect">
             <a:avLst/>
@@ -4762,7 +4817,7 @@
         <p:spPr>
           <a:xfrm>
             <a:off x="457200" y="2688480"/>
-            <a:ext cx="1827720" cy="913320"/>
+            <a:ext cx="1827360" cy="912960"/>
           </a:xfrm>
           <a:prstGeom prst="rect">
             <a:avLst/>
@@ -4853,7 +4908,7 @@
         <p:spPr>
           <a:xfrm>
             <a:off x="2496240" y="1371600"/>
-            <a:ext cx="2010600" cy="2330640"/>
+            <a:ext cx="2010240" cy="2330280"/>
           </a:xfrm>
           <a:prstGeom prst="rect">
             <a:avLst/>
@@ -4911,7 +4966,7 @@
         <p:spPr>
           <a:xfrm>
             <a:off x="2496240" y="1371600"/>
-            <a:ext cx="2010600" cy="501840"/>
+            <a:ext cx="2010240" cy="501480"/>
           </a:xfrm>
           <a:prstGeom prst="rect">
             <a:avLst/>
@@ -4962,7 +5017,7 @@
         <p:spPr>
           <a:xfrm>
             <a:off x="2496240" y="1371600"/>
-            <a:ext cx="2010600" cy="501840"/>
+            <a:ext cx="2010240" cy="501480"/>
           </a:xfrm>
           <a:prstGeom prst="rect">
             <a:avLst/>
@@ -5023,7 +5078,7 @@
         <p:spPr>
           <a:xfrm>
             <a:off x="2496240" y="1901880"/>
-            <a:ext cx="2010600" cy="318960"/>
+            <a:ext cx="2010240" cy="318600"/>
           </a:xfrm>
           <a:prstGeom prst="rect">
             <a:avLst/>
@@ -5084,7 +5139,7 @@
         <p:spPr>
           <a:xfrm>
             <a:off x="2496240" y="2212920"/>
-            <a:ext cx="2010600" cy="456120"/>
+            <a:ext cx="2010240" cy="455760"/>
           </a:xfrm>
           <a:prstGeom prst="rect">
             <a:avLst/>
@@ -5145,7 +5200,7 @@
         <p:spPr>
           <a:xfrm>
             <a:off x="2587680" y="2688480"/>
-            <a:ext cx="1827720" cy="913320"/>
+            <a:ext cx="1827360" cy="912960"/>
           </a:xfrm>
           <a:prstGeom prst="rect">
             <a:avLst/>
@@ -5236,7 +5291,7 @@
         <p:spPr>
           <a:xfrm>
             <a:off x="4626720" y="1371600"/>
-            <a:ext cx="2010600" cy="2330640"/>
+            <a:ext cx="2010240" cy="2330280"/>
           </a:xfrm>
           <a:prstGeom prst="rect">
             <a:avLst/>
@@ -5294,7 +5349,7 @@
         <p:spPr>
           <a:xfrm>
             <a:off x="4626720" y="1371600"/>
-            <a:ext cx="2010600" cy="501840"/>
+            <a:ext cx="2010240" cy="501480"/>
           </a:xfrm>
           <a:prstGeom prst="rect">
             <a:avLst/>
@@ -5345,7 +5400,7 @@
         <p:spPr>
           <a:xfrm>
             <a:off x="4626720" y="1371600"/>
-            <a:ext cx="2010600" cy="501840"/>
+            <a:ext cx="2010240" cy="501480"/>
           </a:xfrm>
           <a:prstGeom prst="rect">
             <a:avLst/>
@@ -5406,7 +5461,7 @@
         <p:spPr>
           <a:xfrm>
             <a:off x="4626720" y="1901880"/>
-            <a:ext cx="2010600" cy="318960"/>
+            <a:ext cx="2010240" cy="318600"/>
           </a:xfrm>
           <a:prstGeom prst="rect">
             <a:avLst/>
@@ -5467,7 +5522,7 @@
         <p:spPr>
           <a:xfrm>
             <a:off x="4626720" y="2212920"/>
-            <a:ext cx="2010600" cy="456120"/>
+            <a:ext cx="2010240" cy="455760"/>
           </a:xfrm>
           <a:prstGeom prst="rect">
             <a:avLst/>
@@ -5528,7 +5583,7 @@
         <p:spPr>
           <a:xfrm>
             <a:off x="4718160" y="2688480"/>
-            <a:ext cx="1827720" cy="913320"/>
+            <a:ext cx="1827360" cy="912960"/>
           </a:xfrm>
           <a:prstGeom prst="rect">
             <a:avLst/>
@@ -5619,7 +5674,7 @@
         <p:spPr>
           <a:xfrm>
             <a:off x="6757560" y="1371600"/>
-            <a:ext cx="2010600" cy="2330640"/>
+            <a:ext cx="2010240" cy="2330280"/>
           </a:xfrm>
           <a:prstGeom prst="rect">
             <a:avLst/>
@@ -5677,7 +5732,7 @@
         <p:spPr>
           <a:xfrm>
             <a:off x="6757560" y="1371600"/>
-            <a:ext cx="2010600" cy="501840"/>
+            <a:ext cx="2010240" cy="501480"/>
           </a:xfrm>
           <a:prstGeom prst="rect">
             <a:avLst/>
@@ -5728,7 +5783,7 @@
         <p:spPr>
           <a:xfrm>
             <a:off x="6757560" y="1371600"/>
-            <a:ext cx="2010600" cy="501840"/>
+            <a:ext cx="2010240" cy="501480"/>
           </a:xfrm>
           <a:prstGeom prst="rect">
             <a:avLst/>
@@ -5789,7 +5844,7 @@
         <p:spPr>
           <a:xfrm>
             <a:off x="6757560" y="1901880"/>
-            <a:ext cx="2010600" cy="318960"/>
+            <a:ext cx="2010240" cy="318600"/>
           </a:xfrm>
           <a:prstGeom prst="rect">
             <a:avLst/>
@@ -5850,7 +5905,7 @@
         <p:spPr>
           <a:xfrm>
             <a:off x="6757560" y="2212920"/>
-            <a:ext cx="2010600" cy="456120"/>
+            <a:ext cx="2010240" cy="455760"/>
           </a:xfrm>
           <a:prstGeom prst="rect">
             <a:avLst/>
@@ -5911,7 +5966,7 @@
         <p:spPr>
           <a:xfrm>
             <a:off x="6849000" y="2688480"/>
-            <a:ext cx="1827720" cy="913320"/>
+            <a:ext cx="1827360" cy="912960"/>
           </a:xfrm>
           <a:prstGeom prst="rect">
             <a:avLst/>
@@ -6039,7 +6094,7 @@
         <p:spPr>
           <a:xfrm>
             <a:off x="0" y="0"/>
-            <a:ext cx="108720" cy="5142600"/>
+            <a:ext cx="108360" cy="5142240"/>
           </a:xfrm>
           <a:prstGeom prst="rect">
             <a:avLst/>
@@ -6090,7 +6145,7 @@
         <p:spPr>
           <a:xfrm>
             <a:off x="365760" y="255960"/>
-            <a:ext cx="8502840" cy="565920"/>
+            <a:ext cx="8502480" cy="565560"/>
           </a:xfrm>
           <a:prstGeom prst="rect">
             <a:avLst/>
@@ -6151,7 +6206,7 @@
         <p:spPr>
           <a:xfrm>
             <a:off x="365760" y="822960"/>
-            <a:ext cx="8502840" cy="291600"/>
+            <a:ext cx="8502480" cy="291240"/>
           </a:xfrm>
           <a:prstGeom prst="rect">
             <a:avLst/>
@@ -6212,7 +6267,7 @@
         <p:spPr>
           <a:xfrm>
             <a:off x="365760" y="1188720"/>
-            <a:ext cx="2604960" cy="1416240"/>
+            <a:ext cx="2604600" cy="1415880"/>
           </a:xfrm>
           <a:prstGeom prst="rect">
             <a:avLst/>
@@ -6270,7 +6325,7 @@
         <p:spPr>
           <a:xfrm>
             <a:off x="365760" y="1188720"/>
-            <a:ext cx="2604960" cy="437760"/>
+            <a:ext cx="2604600" cy="437400"/>
           </a:xfrm>
           <a:prstGeom prst="rect">
             <a:avLst/>
@@ -6321,7 +6376,7 @@
         <p:spPr>
           <a:xfrm>
             <a:off x="365760" y="1188720"/>
-            <a:ext cx="2604960" cy="437760"/>
+            <a:ext cx="2604600" cy="437400"/>
           </a:xfrm>
           <a:prstGeom prst="rect">
             <a:avLst/>
@@ -6382,7 +6437,7 @@
         <p:spPr>
           <a:xfrm>
             <a:off x="457200" y="1664280"/>
-            <a:ext cx="2422080" cy="346320"/>
+            <a:ext cx="2421720" cy="345960"/>
           </a:xfrm>
           <a:prstGeom prst="rect">
             <a:avLst/>
@@ -6443,7 +6498,7 @@
         <p:spPr>
           <a:xfrm>
             <a:off x="457200" y="2011680"/>
-            <a:ext cx="2422080" cy="501840"/>
+            <a:ext cx="2421720" cy="501480"/>
           </a:xfrm>
           <a:prstGeom prst="rect">
             <a:avLst/>
@@ -6534,7 +6589,7 @@
         <p:spPr>
           <a:xfrm>
             <a:off x="3136320" y="1188720"/>
-            <a:ext cx="2604960" cy="1416240"/>
+            <a:ext cx="2604600" cy="1415880"/>
           </a:xfrm>
           <a:prstGeom prst="rect">
             <a:avLst/>
@@ -6592,7 +6647,7 @@
         <p:spPr>
           <a:xfrm>
             <a:off x="3136320" y="1188720"/>
-            <a:ext cx="2604960" cy="437760"/>
+            <a:ext cx="2604600" cy="437400"/>
           </a:xfrm>
           <a:prstGeom prst="rect">
             <a:avLst/>
@@ -6643,7 +6698,7 @@
         <p:spPr>
           <a:xfrm>
             <a:off x="3136320" y="1188720"/>
-            <a:ext cx="2604960" cy="437760"/>
+            <a:ext cx="2604600" cy="437400"/>
           </a:xfrm>
           <a:prstGeom prst="rect">
             <a:avLst/>
@@ -6704,7 +6759,7 @@
         <p:spPr>
           <a:xfrm>
             <a:off x="3227760" y="1664280"/>
-            <a:ext cx="2422080" cy="346320"/>
+            <a:ext cx="2421720" cy="345960"/>
           </a:xfrm>
           <a:prstGeom prst="rect">
             <a:avLst/>
@@ -6765,7 +6820,7 @@
         <p:spPr>
           <a:xfrm>
             <a:off x="3227760" y="2011680"/>
-            <a:ext cx="2422080" cy="501840"/>
+            <a:ext cx="2421720" cy="501480"/>
           </a:xfrm>
           <a:prstGeom prst="rect">
             <a:avLst/>
@@ -6856,7 +6911,7 @@
         <p:spPr>
           <a:xfrm>
             <a:off x="5906880" y="1188720"/>
-            <a:ext cx="2604960" cy="1416240"/>
+            <a:ext cx="2604600" cy="1415880"/>
           </a:xfrm>
           <a:prstGeom prst="rect">
             <a:avLst/>
@@ -6914,7 +6969,7 @@
         <p:spPr>
           <a:xfrm>
             <a:off x="5906880" y="1188720"/>
-            <a:ext cx="2604960" cy="437760"/>
+            <a:ext cx="2604600" cy="437400"/>
           </a:xfrm>
           <a:prstGeom prst="rect">
             <a:avLst/>
@@ -6965,7 +7020,7 @@
         <p:spPr>
           <a:xfrm>
             <a:off x="5906880" y="1188720"/>
-            <a:ext cx="2604960" cy="437760"/>
+            <a:ext cx="2604600" cy="437400"/>
           </a:xfrm>
           <a:prstGeom prst="rect">
             <a:avLst/>
@@ -7026,7 +7081,7 @@
         <p:spPr>
           <a:xfrm>
             <a:off x="5998320" y="1664280"/>
-            <a:ext cx="2422080" cy="346320"/>
+            <a:ext cx="2421720" cy="345960"/>
           </a:xfrm>
           <a:prstGeom prst="rect">
             <a:avLst/>
@@ -7087,7 +7142,7 @@
         <p:spPr>
           <a:xfrm>
             <a:off x="5998320" y="2011680"/>
-            <a:ext cx="2422080" cy="501840"/>
+            <a:ext cx="2421720" cy="501480"/>
           </a:xfrm>
           <a:prstGeom prst="rect">
             <a:avLst/>
@@ -7178,7 +7233,7 @@
         <p:spPr>
           <a:xfrm>
             <a:off x="365760" y="2606040"/>
-            <a:ext cx="8411400" cy="1004760"/>
+            <a:ext cx="8411040" cy="1004400"/>
           </a:xfrm>
           <a:prstGeom prst="rect">
             <a:avLst/>
@@ -7236,7 +7291,7 @@
         <p:spPr>
           <a:xfrm>
             <a:off x="548640" y="2651760"/>
-            <a:ext cx="1096200" cy="346320"/>
+            <a:ext cx="1095840" cy="345960"/>
           </a:xfrm>
           <a:prstGeom prst="rect">
             <a:avLst/>
@@ -7297,7 +7352,7 @@
         <p:spPr>
           <a:xfrm>
             <a:off x="548640" y="2999160"/>
-            <a:ext cx="8045640" cy="383040"/>
+            <a:ext cx="8045280" cy="382680"/>
           </a:xfrm>
           <a:prstGeom prst="rect">
             <a:avLst/>
@@ -7358,7 +7413,7 @@
         <p:spPr>
           <a:xfrm>
             <a:off x="1737360" y="2651760"/>
-            <a:ext cx="6856920" cy="346320"/>
+            <a:ext cx="6856560" cy="345960"/>
           </a:xfrm>
           <a:prstGeom prst="rect">
             <a:avLst/>
@@ -7419,7 +7474,7 @@
         <p:spPr>
           <a:xfrm>
             <a:off x="365760" y="3749040"/>
-            <a:ext cx="8411400" cy="547560"/>
+            <a:ext cx="8411040" cy="547200"/>
           </a:xfrm>
           <a:prstGeom prst="rect">
             <a:avLst/>
@@ -7470,7 +7525,7 @@
         <p:spPr>
           <a:xfrm>
             <a:off x="457200" y="3749040"/>
-            <a:ext cx="8228520" cy="547560"/>
+            <a:ext cx="8228160" cy="547200"/>
           </a:xfrm>
           <a:prstGeom prst="rect">
             <a:avLst/>
@@ -7568,7 +7623,7 @@
         <p:spPr>
           <a:xfrm>
             <a:off x="0" y="0"/>
-            <a:ext cx="108720" cy="5142600"/>
+            <a:ext cx="108360" cy="5142240"/>
           </a:xfrm>
           <a:prstGeom prst="rect">
             <a:avLst/>
@@ -7619,7 +7674,7 @@
         <p:spPr>
           <a:xfrm>
             <a:off x="365760" y="182880"/>
-            <a:ext cx="8502840" cy="529200"/>
+            <a:ext cx="8502480" cy="528840"/>
           </a:xfrm>
           <a:prstGeom prst="rect">
             <a:avLst/>
@@ -7680,7 +7735,7 @@
         <p:spPr>
           <a:xfrm>
             <a:off x="365760" y="713160"/>
-            <a:ext cx="8502840" cy="254880"/>
+            <a:ext cx="8502480" cy="254520"/>
           </a:xfrm>
           <a:prstGeom prst="rect">
             <a:avLst/>
@@ -7745,7 +7800,7 @@
         <p:spPr>
           <a:xfrm>
             <a:off x="365760" y="1078920"/>
-            <a:ext cx="8411400" cy="2175120"/>
+            <a:ext cx="8411040" cy="2174760"/>
           </a:xfrm>
           <a:prstGeom prst="rect">
             <a:avLst/>
@@ -7765,7 +7820,7 @@
         <p:spPr>
           <a:xfrm>
             <a:off x="365760" y="3401640"/>
-            <a:ext cx="2650680" cy="1416240"/>
+            <a:ext cx="2650320" cy="1415880"/>
           </a:xfrm>
           <a:prstGeom prst="rect">
             <a:avLst/>
@@ -7823,7 +7878,7 @@
         <p:spPr>
           <a:xfrm>
             <a:off x="365760" y="3401640"/>
-            <a:ext cx="2650680" cy="53640"/>
+            <a:ext cx="2650320" cy="53280"/>
           </a:xfrm>
           <a:prstGeom prst="rect">
             <a:avLst/>
@@ -7874,7 +7929,7 @@
         <p:spPr>
           <a:xfrm>
             <a:off x="475560" y="3511440"/>
-            <a:ext cx="2431080" cy="300600"/>
+            <a:ext cx="2430720" cy="300240"/>
           </a:xfrm>
           <a:prstGeom prst="rect">
             <a:avLst/>
@@ -7935,7 +7990,7 @@
         <p:spPr>
           <a:xfrm>
             <a:off x="475560" y="3840480"/>
-            <a:ext cx="2431080" cy="867600"/>
+            <a:ext cx="2430720" cy="867240"/>
           </a:xfrm>
           <a:prstGeom prst="rect">
             <a:avLst/>
@@ -7996,7 +8051,7 @@
         <p:spPr>
           <a:xfrm>
             <a:off x="3154680" y="3401640"/>
-            <a:ext cx="2650680" cy="1416240"/>
+            <a:ext cx="2650320" cy="1415880"/>
           </a:xfrm>
           <a:prstGeom prst="rect">
             <a:avLst/>
@@ -8054,7 +8109,7 @@
         <p:spPr>
           <a:xfrm>
             <a:off x="3154680" y="3401640"/>
-            <a:ext cx="2650680" cy="53640"/>
+            <a:ext cx="2650320" cy="53280"/>
           </a:xfrm>
           <a:prstGeom prst="rect">
             <a:avLst/>
@@ -8105,7 +8160,7 @@
         <p:spPr>
           <a:xfrm>
             <a:off x="3264480" y="3511440"/>
-            <a:ext cx="2431080" cy="300600"/>
+            <a:ext cx="2430720" cy="300240"/>
           </a:xfrm>
           <a:prstGeom prst="rect">
             <a:avLst/>
@@ -8166,7 +8221,7 @@
         <p:spPr>
           <a:xfrm>
             <a:off x="3264480" y="3840480"/>
-            <a:ext cx="2431080" cy="867600"/>
+            <a:ext cx="2430720" cy="867240"/>
           </a:xfrm>
           <a:prstGeom prst="rect">
             <a:avLst/>
@@ -8227,7 +8282,7 @@
         <p:spPr>
           <a:xfrm>
             <a:off x="5943600" y="3401640"/>
-            <a:ext cx="2650680" cy="1416240"/>
+            <a:ext cx="2650320" cy="1415880"/>
           </a:xfrm>
           <a:prstGeom prst="rect">
             <a:avLst/>
@@ -8285,7 +8340,7 @@
         <p:spPr>
           <a:xfrm>
             <a:off x="5943600" y="3401640"/>
-            <a:ext cx="2650680" cy="53640"/>
+            <a:ext cx="2650320" cy="53280"/>
           </a:xfrm>
           <a:prstGeom prst="rect">
             <a:avLst/>
@@ -8336,7 +8391,7 @@
         <p:spPr>
           <a:xfrm>
             <a:off x="6053400" y="3511440"/>
-            <a:ext cx="2431080" cy="300600"/>
+            <a:ext cx="2430720" cy="300240"/>
           </a:xfrm>
           <a:prstGeom prst="rect">
             <a:avLst/>
@@ -8397,7 +8452,7 @@
         <p:spPr>
           <a:xfrm>
             <a:off x="6053400" y="3840480"/>
-            <a:ext cx="2431080" cy="867600"/>
+            <a:ext cx="2430720" cy="867240"/>
           </a:xfrm>
           <a:prstGeom prst="rect">
             <a:avLst/>
@@ -8495,7 +8550,7 @@
         <p:spPr>
           <a:xfrm>
             <a:off x="0" y="0"/>
-            <a:ext cx="108720" cy="5142600"/>
+            <a:ext cx="108360" cy="5142240"/>
           </a:xfrm>
           <a:prstGeom prst="rect">
             <a:avLst/>
@@ -8546,7 +8601,7 @@
         <p:spPr>
           <a:xfrm>
             <a:off x="365760" y="182880"/>
-            <a:ext cx="8502840" cy="529200"/>
+            <a:ext cx="8502480" cy="528840"/>
           </a:xfrm>
           <a:prstGeom prst="rect">
             <a:avLst/>
@@ -8607,7 +8662,7 @@
         <p:spPr>
           <a:xfrm>
             <a:off x="365760" y="713160"/>
-            <a:ext cx="8502840" cy="254880"/>
+            <a:ext cx="8502480" cy="254520"/>
           </a:xfrm>
           <a:prstGeom prst="rect">
             <a:avLst/>
@@ -8668,7 +8723,7 @@
         <p:spPr>
           <a:xfrm>
             <a:off x="365760" y="1051560"/>
-            <a:ext cx="2873520" cy="712080"/>
+            <a:ext cx="2873160" cy="711720"/>
           </a:xfrm>
           <a:prstGeom prst="rect">
             <a:avLst/>
@@ -8726,7 +8781,7 @@
         <p:spPr>
           <a:xfrm>
             <a:off x="365760" y="1051560"/>
-            <a:ext cx="63000" cy="712080"/>
+            <a:ext cx="62640" cy="711720"/>
           </a:xfrm>
           <a:prstGeom prst="rect">
             <a:avLst/>
@@ -8777,7 +8832,7 @@
         <p:spPr>
           <a:xfrm>
             <a:off x="548640" y="1097280"/>
-            <a:ext cx="3747960" cy="300600"/>
+            <a:ext cx="3747600" cy="300240"/>
           </a:xfrm>
           <a:prstGeom prst="rect">
             <a:avLst/>
@@ -8838,7 +8893,7 @@
         <p:spPr>
           <a:xfrm>
             <a:off x="548640" y="1417320"/>
-            <a:ext cx="3747960" cy="254880"/>
+            <a:ext cx="3747600" cy="254520"/>
           </a:xfrm>
           <a:prstGeom prst="rect">
             <a:avLst/>
@@ -8899,7 +8954,7 @@
         <p:spPr>
           <a:xfrm>
             <a:off x="365760" y="1856160"/>
-            <a:ext cx="2873520" cy="712080"/>
+            <a:ext cx="2873160" cy="711720"/>
           </a:xfrm>
           <a:prstGeom prst="rect">
             <a:avLst/>
@@ -8957,7 +9012,7 @@
         <p:spPr>
           <a:xfrm>
             <a:off x="365760" y="1856160"/>
-            <a:ext cx="63000" cy="712080"/>
+            <a:ext cx="62640" cy="711720"/>
           </a:xfrm>
           <a:prstGeom prst="rect">
             <a:avLst/>
@@ -9008,7 +9063,7 @@
         <p:spPr>
           <a:xfrm>
             <a:off x="548640" y="1901880"/>
-            <a:ext cx="3747960" cy="300600"/>
+            <a:ext cx="3747600" cy="300240"/>
           </a:xfrm>
           <a:prstGeom prst="rect">
             <a:avLst/>
@@ -9069,7 +9124,7 @@
         <p:spPr>
           <a:xfrm>
             <a:off x="548640" y="2221920"/>
-            <a:ext cx="3747960" cy="254880"/>
+            <a:ext cx="3747600" cy="254520"/>
           </a:xfrm>
           <a:prstGeom prst="rect">
             <a:avLst/>
@@ -9130,7 +9185,7 @@
         <p:spPr>
           <a:xfrm>
             <a:off x="365760" y="2660760"/>
-            <a:ext cx="2873520" cy="712080"/>
+            <a:ext cx="2873160" cy="711720"/>
           </a:xfrm>
           <a:prstGeom prst="rect">
             <a:avLst/>
@@ -9188,7 +9243,7 @@
         <p:spPr>
           <a:xfrm>
             <a:off x="365760" y="2660760"/>
-            <a:ext cx="63000" cy="712080"/>
+            <a:ext cx="62640" cy="711720"/>
           </a:xfrm>
           <a:prstGeom prst="rect">
             <a:avLst/>
@@ -9239,7 +9294,7 @@
         <p:spPr>
           <a:xfrm>
             <a:off x="548640" y="2706480"/>
-            <a:ext cx="3747960" cy="300600"/>
+            <a:ext cx="3747600" cy="300240"/>
           </a:xfrm>
           <a:prstGeom prst="rect">
             <a:avLst/>
@@ -9300,7 +9355,7 @@
         <p:spPr>
           <a:xfrm>
             <a:off x="548640" y="3026520"/>
-            <a:ext cx="3747960" cy="254880"/>
+            <a:ext cx="3747600" cy="254520"/>
           </a:xfrm>
           <a:prstGeom prst="rect">
             <a:avLst/>
@@ -9361,7 +9416,7 @@
         <p:spPr>
           <a:xfrm>
             <a:off x="365760" y="3465720"/>
-            <a:ext cx="2873520" cy="712080"/>
+            <a:ext cx="2873160" cy="711720"/>
           </a:xfrm>
           <a:prstGeom prst="rect">
             <a:avLst/>
@@ -9419,7 +9474,7 @@
         <p:spPr>
           <a:xfrm>
             <a:off x="365760" y="3465720"/>
-            <a:ext cx="63000" cy="712080"/>
+            <a:ext cx="62640" cy="711720"/>
           </a:xfrm>
           <a:prstGeom prst="rect">
             <a:avLst/>
@@ -9470,7 +9525,7 @@
         <p:spPr>
           <a:xfrm>
             <a:off x="548640" y="3511440"/>
-            <a:ext cx="3747960" cy="300600"/>
+            <a:ext cx="3747600" cy="300240"/>
           </a:xfrm>
           <a:prstGeom prst="rect">
             <a:avLst/>
@@ -9531,7 +9586,7 @@
         <p:spPr>
           <a:xfrm>
             <a:off x="548640" y="3831480"/>
-            <a:ext cx="3747960" cy="254880"/>
+            <a:ext cx="3747600" cy="254520"/>
           </a:xfrm>
           <a:prstGeom prst="rect">
             <a:avLst/>
@@ -9592,7 +9647,7 @@
         <p:spPr>
           <a:xfrm>
             <a:off x="365760" y="4270320"/>
-            <a:ext cx="2873520" cy="712080"/>
+            <a:ext cx="2873160" cy="711720"/>
           </a:xfrm>
           <a:prstGeom prst="rect">
             <a:avLst/>
@@ -9650,7 +9705,7 @@
         <p:spPr>
           <a:xfrm>
             <a:off x="365760" y="4270320"/>
-            <a:ext cx="63000" cy="712080"/>
+            <a:ext cx="62640" cy="711720"/>
           </a:xfrm>
           <a:prstGeom prst="rect">
             <a:avLst/>
@@ -9701,7 +9756,7 @@
         <p:spPr>
           <a:xfrm>
             <a:off x="548640" y="4316040"/>
-            <a:ext cx="3747960" cy="300600"/>
+            <a:ext cx="3747600" cy="300240"/>
           </a:xfrm>
           <a:prstGeom prst="rect">
             <a:avLst/>
@@ -9762,7 +9817,7 @@
         <p:spPr>
           <a:xfrm>
             <a:off x="548640" y="4636080"/>
-            <a:ext cx="3747960" cy="254880"/>
+            <a:ext cx="3747600" cy="254520"/>
           </a:xfrm>
           <a:prstGeom prst="rect">
             <a:avLst/>
@@ -9827,7 +9882,7 @@
         <p:spPr>
           <a:xfrm>
             <a:off x="3600000" y="865440"/>
-            <a:ext cx="4571280" cy="4173840"/>
+            <a:ext cx="4570920" cy="4173480"/>
           </a:xfrm>
           <a:prstGeom prst="rect">
             <a:avLst/>
@@ -9884,7 +9939,7 @@
         <p:spPr>
           <a:xfrm>
             <a:off x="0" y="0"/>
-            <a:ext cx="108720" cy="5142600"/>
+            <a:ext cx="108360" cy="5142240"/>
           </a:xfrm>
           <a:prstGeom prst="rect">
             <a:avLst/>
@@ -9935,7 +9990,7 @@
         <p:spPr>
           <a:xfrm>
             <a:off x="365760" y="255960"/>
-            <a:ext cx="8502840" cy="565920"/>
+            <a:ext cx="8502480" cy="565560"/>
           </a:xfrm>
           <a:prstGeom prst="rect">
             <a:avLst/>
@@ -9996,7 +10051,7 @@
         <p:spPr>
           <a:xfrm>
             <a:off x="365760" y="1710000"/>
-            <a:ext cx="1370520" cy="346320"/>
+            <a:ext cx="1370160" cy="345960"/>
           </a:xfrm>
           <a:prstGeom prst="rect">
             <a:avLst/>
@@ -10045,7 +10100,7 @@
         <p:spPr>
           <a:xfrm>
             <a:off x="365760" y="1836720"/>
-            <a:ext cx="894240" cy="760320"/>
+            <a:ext cx="893880" cy="759960"/>
           </a:xfrm>
           <a:prstGeom prst="rect">
             <a:avLst/>
@@ -10103,7 +10158,7 @@
         <p:spPr>
           <a:xfrm>
             <a:off x="365760" y="1836720"/>
-            <a:ext cx="894240" cy="657360"/>
+            <a:ext cx="893880" cy="657000"/>
           </a:xfrm>
           <a:prstGeom prst="rect">
             <a:avLst/>
@@ -10164,7 +10219,7 @@
         <p:spPr>
           <a:xfrm>
             <a:off x="365760" y="2944440"/>
-            <a:ext cx="1370520" cy="346320"/>
+            <a:ext cx="1370160" cy="345960"/>
           </a:xfrm>
           <a:prstGeom prst="rect">
             <a:avLst/>
@@ -10225,7 +10280,7 @@
         <p:spPr>
           <a:xfrm>
             <a:off x="1440000" y="1876320"/>
-            <a:ext cx="7380000" cy="180000"/>
+            <a:ext cx="7379640" cy="179640"/>
           </a:xfrm>
           <a:prstGeom prst="rect">
             <a:avLst/>
@@ -10250,6 +10305,12 @@
               <a:lnSpc>
                 <a:spcPct val="100000"/>
               </a:lnSpc>
+              <a:spcBef>
+                <a:spcPts val="1191"/>
+              </a:spcBef>
+              <a:spcAft>
+                <a:spcPts val="992"/>
+              </a:spcAft>
               <a:tabLst>
                 <a:tab algn="l" pos="0"/>
               </a:tabLst>
@@ -10264,7 +10325,7 @@
                 <a:latin typeface="Calibri"/>
                 <a:ea typeface="Calibri"/>
               </a:rPr>
-              <a:t>El clustering confirmó que el catálogo no es homogéneo — hay perfiles muy distintos sin distinción visible</a:t>
+              <a:t>perfiles diferenciados — desde productos bien documentados con scores superiores a 0.8, hasta registros sin taxonomía ni datos mínimos.</a:t>
             </a:r>
             <a:endParaRPr lang="es-CO" sz="1050" b="0" u="none" strike="noStrike">
               <a:solidFill>
@@ -10286,7 +10347,7 @@
         <p:spPr>
           <a:xfrm>
             <a:off x="365760" y="3520440"/>
-            <a:ext cx="1370520" cy="657360"/>
+            <a:ext cx="1370160" cy="657000"/>
           </a:xfrm>
           <a:prstGeom prst="rect">
             <a:avLst/>
@@ -10347,7 +10408,7 @@
         <p:spPr>
           <a:xfrm>
             <a:off x="365400" y="905040"/>
-            <a:ext cx="1554120" cy="685440"/>
+            <a:ext cx="1553760" cy="685080"/>
           </a:xfrm>
           <a:prstGeom prst="rect">
             <a:avLst/>
@@ -10380,6 +10441,11 @@
             <a:noAutofit/>
           </a:bodyPr>
           <a:p>
+            <a:pPr>
+              <a:lnSpc>
+                <a:spcPct val="100000"/>
+              </a:lnSpc>
+            </a:pPr>
             <a:endParaRPr lang="es-CO" sz="1800" b="0" u="none" strike="noStrike">
               <a:solidFill>
                 <a:srgbClr val="ffffff"/>
@@ -10400,7 +10466,7 @@
         <p:spPr>
           <a:xfrm>
             <a:off x="365400" y="905040"/>
-            <a:ext cx="1554120" cy="438480"/>
+            <a:ext cx="1553760" cy="438120"/>
           </a:xfrm>
           <a:prstGeom prst="rect">
             <a:avLst/>
@@ -10461,7 +10527,7 @@
         <p:spPr>
           <a:xfrm>
             <a:off x="365400" y="1343880"/>
-            <a:ext cx="1554120" cy="246600"/>
+            <a:ext cx="1553760" cy="246240"/>
           </a:xfrm>
           <a:prstGeom prst="rect">
             <a:avLst/>
@@ -10522,7 +10588,7 @@
         <p:spPr>
           <a:xfrm>
             <a:off x="2194200" y="905040"/>
-            <a:ext cx="1554120" cy="685440"/>
+            <a:ext cx="1553760" cy="685080"/>
           </a:xfrm>
           <a:prstGeom prst="rect">
             <a:avLst/>
@@ -10555,6 +10621,11 @@
             <a:noAutofit/>
           </a:bodyPr>
           <a:p>
+            <a:pPr>
+              <a:lnSpc>
+                <a:spcPct val="100000"/>
+              </a:lnSpc>
+            </a:pPr>
             <a:endParaRPr lang="es-CO" sz="1800" b="0" u="none" strike="noStrike">
               <a:solidFill>
                 <a:srgbClr val="ffffff"/>
@@ -10575,7 +10646,7 @@
         <p:spPr>
           <a:xfrm>
             <a:off x="2194200" y="905040"/>
-            <a:ext cx="1554120" cy="438480"/>
+            <a:ext cx="1553760" cy="438120"/>
           </a:xfrm>
           <a:prstGeom prst="rect">
             <a:avLst/>
@@ -10636,7 +10707,7 @@
         <p:spPr>
           <a:xfrm>
             <a:off x="2194200" y="1343880"/>
-            <a:ext cx="1554120" cy="246600"/>
+            <a:ext cx="1553760" cy="246240"/>
           </a:xfrm>
           <a:prstGeom prst="rect">
             <a:avLst/>
@@ -10697,7 +10768,7 @@
         <p:spPr>
           <a:xfrm>
             <a:off x="4114440" y="905040"/>
-            <a:ext cx="4663080" cy="712800"/>
+            <a:ext cx="4662720" cy="712440"/>
           </a:xfrm>
           <a:prstGeom prst="rect">
             <a:avLst/>
@@ -10834,40 +10905,16 @@
           </a:p>
         </p:txBody>
       </p:sp>
-      <p:pic>
-        <p:nvPicPr>
-          <p:cNvPr id="148" name=""/>
-          <p:cNvPicPr/>
-          <p:nvPr/>
-        </p:nvPicPr>
-        <p:blipFill>
-          <a:blip r:embed="rId1"/>
-          <a:stretch/>
-        </p:blipFill>
-        <p:spPr>
-          <a:xfrm>
-            <a:off x="1736280" y="2160000"/>
-            <a:ext cx="6363720" cy="1651680"/>
-          </a:xfrm>
-          <a:prstGeom prst="rect">
-            <a:avLst/>
-          </a:prstGeom>
-          <a:noFill/>
-          <a:ln w="0">
-            <a:noFill/>
-          </a:ln>
-        </p:spPr>
-      </p:pic>
-      <p:sp>
-        <p:nvSpPr>
-          <p:cNvPr id="149" name="Text 64"/>
-          <p:cNvSpPr/>
-          <p:nvPr/>
-        </p:nvSpPr>
-        <p:spPr>
-          <a:xfrm>
-            <a:off x="360000" y="3780000"/>
-            <a:ext cx="8412120" cy="273960"/>
+      <p:sp>
+        <p:nvSpPr>
+          <p:cNvPr id="148" name="Text 64"/>
+          <p:cNvSpPr/>
+          <p:nvPr/>
+        </p:nvSpPr>
+        <p:spPr>
+          <a:xfrm>
+            <a:off x="365760" y="4027320"/>
+            <a:ext cx="8411760" cy="273600"/>
           </a:xfrm>
           <a:prstGeom prst="rect">
             <a:avLst/>
@@ -10927,14 +10974,632 @@
       </p:sp>
       <p:sp>
         <p:nvSpPr>
-          <p:cNvPr id="150" name="Shape 47"/>
-          <p:cNvSpPr/>
-          <p:nvPr/>
-        </p:nvSpPr>
-        <p:spPr>
-          <a:xfrm>
-            <a:off x="360000" y="4118400"/>
-            <a:ext cx="2605680" cy="36360"/>
+          <p:cNvPr id="149" name="Shape 48"/>
+          <p:cNvSpPr/>
+          <p:nvPr/>
+        </p:nvSpPr>
+        <p:spPr>
+          <a:xfrm>
+            <a:off x="3194640" y="4320000"/>
+            <a:ext cx="2605320" cy="724680"/>
+          </a:xfrm>
+          <a:prstGeom prst="rect">
+            <a:avLst/>
+          </a:prstGeom>
+          <a:solidFill>
+            <a:srgbClr val="ffffff"/>
+          </a:solidFill>
+          <a:ln w="12700">
+            <a:solidFill>
+              <a:srgbClr val="e0d8df"/>
+            </a:solidFill>
+            <a:round/>
+          </a:ln>
+          <a:effectLst>
+            <a:outerShdw algn="bl" blurRad="101520" dir="8100000" dist="37674" kx="0" ky="0" rotWithShape="0" sx="100000" sy="100000">
+              <a:srgbClr val="000000">
+                <a:alpha val="12000"/>
+              </a:srgbClr>
+            </a:outerShdw>
+          </a:effectLst>
+        </p:spPr>
+        <p:style>
+          <a:lnRef idx="0"/>
+          <a:fillRef idx="0"/>
+          <a:effectRef idx="0"/>
+          <a:fontRef idx="minor"/>
+        </p:style>
+        <p:txBody>
+          <a:bodyPr lIns="90000" rIns="90000" tIns="45000" bIns="45000" anchor="t">
+            <a:noAutofit/>
+          </a:bodyPr>
+          <a:p>
+            <a:pPr>
+              <a:lnSpc>
+                <a:spcPct val="100000"/>
+              </a:lnSpc>
+            </a:pPr>
+            <a:endParaRPr lang="es-CO" sz="1800" b="0" u="none" strike="noStrike">
+              <a:solidFill>
+                <a:srgbClr val="000000"/>
+              </a:solidFill>
+              <a:effectLst/>
+              <a:uFillTx/>
+              <a:latin typeface="Arial"/>
+            </a:endParaRPr>
+          </a:p>
+        </p:txBody>
+      </p:sp>
+      <p:sp>
+        <p:nvSpPr>
+          <p:cNvPr id="150" name="Shape 49"/>
+          <p:cNvSpPr/>
+          <p:nvPr/>
+        </p:nvSpPr>
+        <p:spPr>
+          <a:xfrm>
+            <a:off x="3200040" y="4300560"/>
+            <a:ext cx="2605320" cy="36000"/>
+          </a:xfrm>
+          <a:prstGeom prst="rect">
+            <a:avLst/>
+          </a:prstGeom>
+          <a:solidFill>
+            <a:srgbClr val="a26769"/>
+          </a:solidFill>
+          <a:ln w="12700">
+            <a:solidFill>
+              <a:srgbClr val="a26769"/>
+            </a:solidFill>
+            <a:round/>
+          </a:ln>
+        </p:spPr>
+        <p:style>
+          <a:lnRef idx="0"/>
+          <a:fillRef idx="0"/>
+          <a:effectRef idx="0"/>
+          <a:fontRef idx="minor"/>
+        </p:style>
+        <p:txBody>
+          <a:bodyPr lIns="90000" rIns="90000" tIns="-8280" bIns="-8280" anchor="t">
+            <a:noAutofit/>
+          </a:bodyPr>
+          <a:p>
+            <a:pPr>
+              <a:lnSpc>
+                <a:spcPct val="100000"/>
+              </a:lnSpc>
+            </a:pPr>
+            <a:endParaRPr lang="es-CO" sz="1800" b="0" u="none" strike="noStrike">
+              <a:solidFill>
+                <a:srgbClr val="ffffff"/>
+              </a:solidFill>
+              <a:effectLst/>
+              <a:uFillTx/>
+              <a:latin typeface="Arial"/>
+            </a:endParaRPr>
+          </a:p>
+        </p:txBody>
+      </p:sp>
+      <p:sp>
+        <p:nvSpPr>
+          <p:cNvPr id="151" name="Text 67"/>
+          <p:cNvSpPr/>
+          <p:nvPr/>
+        </p:nvSpPr>
+        <p:spPr>
+          <a:xfrm>
+            <a:off x="3194640" y="4333320"/>
+            <a:ext cx="2605320" cy="346680"/>
+          </a:xfrm>
+          <a:prstGeom prst="rect">
+            <a:avLst/>
+          </a:prstGeom>
+          <a:noFill/>
+          <a:ln w="0">
+            <a:noFill/>
+          </a:ln>
+        </p:spPr>
+        <p:style>
+          <a:lnRef idx="0"/>
+          <a:fillRef idx="0"/>
+          <a:effectRef idx="0"/>
+          <a:fontRef idx="minor"/>
+        </p:style>
+        <p:txBody>
+          <a:bodyPr lIns="0" rIns="0" tIns="0" bIns="0" anchor="ctr">
+            <a:noAutofit/>
+          </a:bodyPr>
+          <a:p>
+            <a:pPr algn="ctr" defTabSz="914400">
+              <a:lnSpc>
+                <a:spcPct val="100000"/>
+              </a:lnSpc>
+              <a:tabLst>
+                <a:tab algn="l" pos="0"/>
+              </a:tabLst>
+            </a:pPr>
+            <a:r>
+              <a:rPr lang="en-US" sz="1800" b="1" u="none" strike="noStrike">
+                <a:solidFill>
+                  <a:srgbClr val="a26769"/>
+                </a:solidFill>
+                <a:effectLst/>
+                <a:uFillTx/>
+                <a:latin typeface="Georgia"/>
+                <a:ea typeface="Georgia"/>
+              </a:rPr>
+              <a:t>~1.600</a:t>
+            </a:r>
+            <a:endParaRPr lang="es-CO" sz="1800" b="0" u="none" strike="noStrike">
+              <a:solidFill>
+                <a:srgbClr val="000000"/>
+              </a:solidFill>
+              <a:effectLst/>
+              <a:uFillTx/>
+              <a:latin typeface="Arial"/>
+            </a:endParaRPr>
+          </a:p>
+        </p:txBody>
+      </p:sp>
+      <p:sp>
+        <p:nvSpPr>
+          <p:cNvPr id="152" name="Text 68"/>
+          <p:cNvSpPr/>
+          <p:nvPr/>
+        </p:nvSpPr>
+        <p:spPr>
+          <a:xfrm>
+            <a:off x="3194640" y="4680000"/>
+            <a:ext cx="2605320" cy="269640"/>
+          </a:xfrm>
+          <a:prstGeom prst="rect">
+            <a:avLst/>
+          </a:prstGeom>
+          <a:noFill/>
+          <a:ln w="0">
+            <a:noFill/>
+          </a:ln>
+        </p:spPr>
+        <p:style>
+          <a:lnRef idx="0"/>
+          <a:fillRef idx="0"/>
+          <a:effectRef idx="0"/>
+          <a:fontRef idx="minor"/>
+        </p:style>
+        <p:txBody>
+          <a:bodyPr lIns="0" rIns="0" tIns="0" bIns="0" anchor="ctr">
+            <a:noAutofit/>
+          </a:bodyPr>
+          <a:p>
+            <a:pPr algn="ctr" defTabSz="914400">
+              <a:lnSpc>
+                <a:spcPct val="100000"/>
+              </a:lnSpc>
+              <a:tabLst>
+                <a:tab algn="l" pos="0"/>
+              </a:tabLst>
+            </a:pPr>
+            <a:r>
+              <a:rPr lang="en-US" sz="950" b="0" u="none" strike="noStrike">
+                <a:solidFill>
+                  <a:srgbClr val="6b6b6b"/>
+                </a:solidFill>
+                <a:effectLst/>
+                <a:uFillTx/>
+                <a:latin typeface="Calibri"/>
+                <a:ea typeface="Calibri"/>
+              </a:rPr>
+              <a:t>conflicto de idioma</a:t>
+            </a:r>
+            <a:endParaRPr lang="es-CO" sz="950" b="0" u="none" strike="noStrike">
+              <a:solidFill>
+                <a:srgbClr val="000000"/>
+              </a:solidFill>
+              <a:effectLst/>
+              <a:uFillTx/>
+              <a:latin typeface="Arial"/>
+            </a:endParaRPr>
+          </a:p>
+          <a:p>
+            <a:pPr algn="ctr" defTabSz="914400">
+              <a:lnSpc>
+                <a:spcPct val="100000"/>
+              </a:lnSpc>
+              <a:tabLst>
+                <a:tab algn="l" pos="0"/>
+              </a:tabLst>
+            </a:pPr>
+            <a:r>
+              <a:rPr lang="en-US" sz="950" b="0" u="none" strike="noStrike">
+                <a:solidFill>
+                  <a:srgbClr val="6b6b6b"/>
+                </a:solidFill>
+                <a:effectLst/>
+                <a:uFillTx/>
+                <a:latin typeface="Calibri"/>
+                <a:ea typeface="Calibri"/>
+              </a:rPr>
+              <a:t>países vs categorías</a:t>
+            </a:r>
+            <a:endParaRPr lang="es-CO" sz="950" b="0" u="none" strike="noStrike">
+              <a:solidFill>
+                <a:srgbClr val="000000"/>
+              </a:solidFill>
+              <a:effectLst/>
+              <a:uFillTx/>
+              <a:latin typeface="Arial"/>
+            </a:endParaRPr>
+          </a:p>
+        </p:txBody>
+      </p:sp>
+      <p:sp>
+        <p:nvSpPr>
+          <p:cNvPr id="153" name="Shape 50"/>
+          <p:cNvSpPr/>
+          <p:nvPr/>
+        </p:nvSpPr>
+        <p:spPr>
+          <a:xfrm>
+            <a:off x="6034680" y="4336920"/>
+            <a:ext cx="2605320" cy="724680"/>
+          </a:xfrm>
+          <a:prstGeom prst="rect">
+            <a:avLst/>
+          </a:prstGeom>
+          <a:solidFill>
+            <a:srgbClr val="ffffff"/>
+          </a:solidFill>
+          <a:ln w="12700">
+            <a:solidFill>
+              <a:srgbClr val="e0d8df"/>
+            </a:solidFill>
+            <a:round/>
+          </a:ln>
+          <a:effectLst>
+            <a:outerShdw algn="bl" blurRad="101520" dir="8100000" dist="37674" kx="0" ky="0" rotWithShape="0" sx="100000" sy="100000">
+              <a:srgbClr val="000000">
+                <a:alpha val="12000"/>
+              </a:srgbClr>
+            </a:outerShdw>
+          </a:effectLst>
+        </p:spPr>
+        <p:style>
+          <a:lnRef idx="0"/>
+          <a:fillRef idx="0"/>
+          <a:effectRef idx="0"/>
+          <a:fontRef idx="minor"/>
+        </p:style>
+        <p:txBody>
+          <a:bodyPr lIns="90000" rIns="90000" tIns="45000" bIns="45000" anchor="t">
+            <a:noAutofit/>
+          </a:bodyPr>
+          <a:p>
+            <a:pPr>
+              <a:lnSpc>
+                <a:spcPct val="100000"/>
+              </a:lnSpc>
+            </a:pPr>
+            <a:endParaRPr lang="es-CO" sz="1800" b="0" u="none" strike="noStrike">
+              <a:solidFill>
+                <a:srgbClr val="000000"/>
+              </a:solidFill>
+              <a:effectLst/>
+              <a:uFillTx/>
+              <a:latin typeface="Arial"/>
+            </a:endParaRPr>
+          </a:p>
+        </p:txBody>
+      </p:sp>
+      <p:sp>
+        <p:nvSpPr>
+          <p:cNvPr id="154" name="Shape 51"/>
+          <p:cNvSpPr/>
+          <p:nvPr/>
+        </p:nvSpPr>
+        <p:spPr>
+          <a:xfrm>
+            <a:off x="6034680" y="4300560"/>
+            <a:ext cx="2605320" cy="36000"/>
+          </a:xfrm>
+          <a:prstGeom prst="rect">
+            <a:avLst/>
+          </a:prstGeom>
+          <a:solidFill>
+            <a:srgbClr val="b8860b"/>
+          </a:solidFill>
+          <a:ln w="12700">
+            <a:solidFill>
+              <a:srgbClr val="b8860b"/>
+            </a:solidFill>
+            <a:round/>
+          </a:ln>
+        </p:spPr>
+        <p:style>
+          <a:lnRef idx="0"/>
+          <a:fillRef idx="0"/>
+          <a:effectRef idx="0"/>
+          <a:fontRef idx="minor"/>
+        </p:style>
+        <p:txBody>
+          <a:bodyPr lIns="90000" rIns="90000" tIns="-8280" bIns="-8280" anchor="t">
+            <a:noAutofit/>
+          </a:bodyPr>
+          <a:p>
+            <a:pPr>
+              <a:lnSpc>
+                <a:spcPct val="100000"/>
+              </a:lnSpc>
+            </a:pPr>
+            <a:endParaRPr lang="es-CO" sz="1800" b="0" u="none" strike="noStrike">
+              <a:solidFill>
+                <a:srgbClr val="ffffff"/>
+              </a:solidFill>
+              <a:effectLst/>
+              <a:uFillTx/>
+              <a:latin typeface="Arial"/>
+            </a:endParaRPr>
+          </a:p>
+        </p:txBody>
+      </p:sp>
+      <p:sp>
+        <p:nvSpPr>
+          <p:cNvPr id="155" name="Text 69"/>
+          <p:cNvSpPr/>
+          <p:nvPr/>
+        </p:nvSpPr>
+        <p:spPr>
+          <a:xfrm>
+            <a:off x="6029280" y="4320000"/>
+            <a:ext cx="2605320" cy="346680"/>
+          </a:xfrm>
+          <a:prstGeom prst="rect">
+            <a:avLst/>
+          </a:prstGeom>
+          <a:noFill/>
+          <a:ln w="0">
+            <a:noFill/>
+          </a:ln>
+        </p:spPr>
+        <p:style>
+          <a:lnRef idx="0"/>
+          <a:fillRef idx="0"/>
+          <a:effectRef idx="0"/>
+          <a:fontRef idx="minor"/>
+        </p:style>
+        <p:txBody>
+          <a:bodyPr lIns="0" rIns="0" tIns="0" bIns="0" anchor="ctr">
+            <a:noAutofit/>
+          </a:bodyPr>
+          <a:p>
+            <a:pPr algn="ctr" defTabSz="914400">
+              <a:lnSpc>
+                <a:spcPct val="100000"/>
+              </a:lnSpc>
+              <a:tabLst>
+                <a:tab algn="l" pos="0"/>
+              </a:tabLst>
+            </a:pPr>
+            <a:r>
+              <a:rPr lang="en-US" sz="1800" b="1" u="none" strike="noStrike">
+                <a:solidFill>
+                  <a:srgbClr val="b8860b"/>
+                </a:solidFill>
+                <a:effectLst/>
+                <a:uFillTx/>
+                <a:latin typeface="Georgia"/>
+                <a:ea typeface="Georgia"/>
+              </a:rPr>
+              <a:t>~4.000</a:t>
+            </a:r>
+            <a:endParaRPr lang="es-CO" sz="1800" b="0" u="none" strike="noStrike">
+              <a:solidFill>
+                <a:srgbClr val="000000"/>
+              </a:solidFill>
+              <a:effectLst/>
+              <a:uFillTx/>
+              <a:latin typeface="Arial"/>
+            </a:endParaRPr>
+          </a:p>
+        </p:txBody>
+      </p:sp>
+      <p:sp>
+        <p:nvSpPr>
+          <p:cNvPr id="156" name="Text 70"/>
+          <p:cNvSpPr/>
+          <p:nvPr/>
+        </p:nvSpPr>
+        <p:spPr>
+          <a:xfrm>
+            <a:off x="6029280" y="4680000"/>
+            <a:ext cx="2605320" cy="269640"/>
+          </a:xfrm>
+          <a:prstGeom prst="rect">
+            <a:avLst/>
+          </a:prstGeom>
+          <a:noFill/>
+          <a:ln w="0">
+            <a:noFill/>
+          </a:ln>
+        </p:spPr>
+        <p:style>
+          <a:lnRef idx="0"/>
+          <a:fillRef idx="0"/>
+          <a:effectRef idx="0"/>
+          <a:fontRef idx="minor"/>
+        </p:style>
+        <p:txBody>
+          <a:bodyPr lIns="0" rIns="0" tIns="0" bIns="0" anchor="ctr">
+            <a:noAutofit/>
+          </a:bodyPr>
+          <a:p>
+            <a:pPr algn="ctr" defTabSz="914400">
+              <a:lnSpc>
+                <a:spcPct val="100000"/>
+              </a:lnSpc>
+              <a:tabLst>
+                <a:tab algn="l" pos="0"/>
+              </a:tabLst>
+            </a:pPr>
+            <a:r>
+              <a:rPr lang="en-US" sz="950" b="0" u="none" strike="noStrike">
+                <a:solidFill>
+                  <a:srgbClr val="6b6b6b"/>
+                </a:solidFill>
+                <a:effectLst/>
+                <a:uFillTx/>
+                <a:latin typeface="Calibri"/>
+                <a:ea typeface="Calibri"/>
+              </a:rPr>
+              <a:t>discrepancia</a:t>
+            </a:r>
+            <a:endParaRPr lang="es-CO" sz="950" b="0" u="none" strike="noStrike">
+              <a:solidFill>
+                <a:srgbClr val="000000"/>
+              </a:solidFill>
+              <a:effectLst/>
+              <a:uFillTx/>
+              <a:latin typeface="Arial"/>
+            </a:endParaRPr>
+          </a:p>
+          <a:p>
+            <a:pPr algn="ctr" defTabSz="914400">
+              <a:lnSpc>
+                <a:spcPct val="100000"/>
+              </a:lnSpc>
+              <a:tabLst>
+                <a:tab algn="l" pos="0"/>
+              </a:tabLst>
+            </a:pPr>
+            <a:r>
+              <a:rPr lang="en-US" sz="950" b="0" u="none" strike="noStrike">
+                <a:solidFill>
+                  <a:srgbClr val="6b6b6b"/>
+                </a:solidFill>
+                <a:effectLst/>
+                <a:uFillTx/>
+                <a:latin typeface="Calibri"/>
+                <a:ea typeface="Calibri"/>
+              </a:rPr>
+              <a:t>Sum &gt; total ingredientes</a:t>
+            </a:r>
+            <a:endParaRPr lang="es-CO" sz="950" b="0" u="none" strike="noStrike">
+              <a:solidFill>
+                <a:srgbClr val="000000"/>
+              </a:solidFill>
+              <a:effectLst/>
+              <a:uFillTx/>
+              <a:latin typeface="Arial"/>
+            </a:endParaRPr>
+          </a:p>
+        </p:txBody>
+      </p:sp>
+      <p:sp>
+        <p:nvSpPr>
+          <p:cNvPr id="157" name="Shape 52"/>
+          <p:cNvSpPr/>
+          <p:nvPr/>
+        </p:nvSpPr>
+        <p:spPr>
+          <a:xfrm>
+            <a:off x="360000" y="5078520"/>
+            <a:ext cx="8412480" cy="360"/>
+          </a:xfrm>
+          <a:prstGeom prst="line">
+            <a:avLst/>
+          </a:prstGeom>
+          <a:ln w="10160">
+            <a:solidFill>
+              <a:srgbClr val="e0d8df"/>
+            </a:solidFill>
+            <a:round/>
+          </a:ln>
+        </p:spPr>
+        <p:style>
+          <a:lnRef idx="0"/>
+          <a:fillRef idx="0"/>
+          <a:effectRef idx="0"/>
+          <a:fontRef idx="minor"/>
+        </p:style>
+        <p:txBody>
+          <a:bodyPr lIns="90000" rIns="90000" tIns="-44640" bIns="-44640" anchor="t" anchorCtr="1">
+            <a:noAutofit/>
+          </a:bodyPr>
+          <a:p>
+            <a:endParaRPr lang="es-CO" sz="1800" b="0" u="none" strike="noStrike">
+              <a:solidFill>
+                <a:srgbClr val="000000"/>
+              </a:solidFill>
+              <a:effectLst/>
+              <a:uFillTx/>
+              <a:latin typeface="Arial"/>
+            </a:endParaRPr>
+          </a:p>
+        </p:txBody>
+      </p:sp>
+      <p:sp>
+        <p:nvSpPr>
+          <p:cNvPr id="158" name="Shape 42"/>
+          <p:cNvSpPr/>
+          <p:nvPr/>
+        </p:nvSpPr>
+        <p:spPr>
+          <a:xfrm>
+            <a:off x="365760" y="4336920"/>
+            <a:ext cx="2605320" cy="682560"/>
+          </a:xfrm>
+          <a:prstGeom prst="rect">
+            <a:avLst/>
+          </a:prstGeom>
+          <a:solidFill>
+            <a:srgbClr val="ffffff"/>
+          </a:solidFill>
+          <a:ln w="12700">
+            <a:solidFill>
+              <a:srgbClr val="e0d8df"/>
+            </a:solidFill>
+            <a:round/>
+          </a:ln>
+          <a:effectLst>
+            <a:outerShdw algn="bl" blurRad="101520" dir="8100000" dist="37674" kx="0" ky="0" rotWithShape="0" sx="100000" sy="100000">
+              <a:srgbClr val="000000">
+                <a:alpha val="12000"/>
+              </a:srgbClr>
+            </a:outerShdw>
+          </a:effectLst>
+        </p:spPr>
+        <p:style>
+          <a:lnRef idx="0"/>
+          <a:fillRef idx="0"/>
+          <a:effectRef idx="0"/>
+          <a:fontRef idx="minor"/>
+        </p:style>
+        <p:txBody>
+          <a:bodyPr lIns="90000" rIns="90000" tIns="45000" bIns="45000" anchor="t">
+            <a:noAutofit/>
+          </a:bodyPr>
+          <a:p>
+            <a:endParaRPr lang="es-CO" sz="1800" b="0" u="none" strike="noStrike">
+              <a:solidFill>
+                <a:srgbClr val="000000"/>
+              </a:solidFill>
+              <a:effectLst/>
+              <a:uFillTx/>
+              <a:latin typeface="Arial"/>
+            </a:endParaRPr>
+          </a:p>
+        </p:txBody>
+      </p:sp>
+      <p:sp>
+        <p:nvSpPr>
+          <p:cNvPr id="159" name="Shape 47"/>
+          <p:cNvSpPr/>
+          <p:nvPr/>
+        </p:nvSpPr>
+        <p:spPr>
+          <a:xfrm>
+            <a:off x="365760" y="4300920"/>
+            <a:ext cx="2605320" cy="36000"/>
           </a:xfrm>
           <a:prstGeom prst="rect">
             <a:avLst/>
@@ -10973,14 +11638,14 @@
       </p:sp>
       <p:sp>
         <p:nvSpPr>
-          <p:cNvPr id="151" name="Text 65"/>
-          <p:cNvSpPr/>
-          <p:nvPr/>
-        </p:nvSpPr>
-        <p:spPr>
-          <a:xfrm>
-            <a:off x="360000" y="4164120"/>
-            <a:ext cx="2605680" cy="347040"/>
+          <p:cNvPr id="160" name="Text 65"/>
+          <p:cNvSpPr/>
+          <p:nvPr/>
+        </p:nvSpPr>
+        <p:spPr>
+          <a:xfrm>
+            <a:off x="360360" y="4320000"/>
+            <a:ext cx="2605320" cy="346680"/>
           </a:xfrm>
           <a:prstGeom prst="rect">
             <a:avLst/>
@@ -11010,7 +11675,7 @@
               </a:tabLst>
             </a:pPr>
             <a:r>
-              <a:rPr lang="en-US" sz="2000" b="1" u="none" strike="noStrike">
+              <a:rPr lang="en-US" sz="1800" b="1" u="none" strike="noStrike">
                 <a:solidFill>
                   <a:srgbClr val="6d2e46"/>
                 </a:solidFill>
@@ -11021,27 +11686,27 @@
               </a:rPr>
               <a:t>~2.800</a:t>
             </a:r>
-            <a:endParaRPr lang="es-CO" sz="2000" b="0" u="none" strike="noStrike">
-              <a:solidFill>
-                <a:srgbClr val="000000"/>
-              </a:solidFill>
-              <a:effectLst/>
-              <a:uFillTx/>
-              <a:latin typeface="Arial"/>
-            </a:endParaRPr>
-          </a:p>
-        </p:txBody>
-      </p:sp>
-      <p:sp>
-        <p:nvSpPr>
-          <p:cNvPr id="152" name="Text 66"/>
-          <p:cNvSpPr/>
-          <p:nvPr/>
-        </p:nvSpPr>
-        <p:spPr>
-          <a:xfrm>
-            <a:off x="360000" y="4511520"/>
-            <a:ext cx="2605680" cy="438480"/>
+            <a:endParaRPr lang="es-CO" sz="1800" b="0" u="none" strike="noStrike">
+              <a:solidFill>
+                <a:srgbClr val="000000"/>
+              </a:solidFill>
+              <a:effectLst/>
+              <a:uFillTx/>
+              <a:latin typeface="Arial"/>
+            </a:endParaRPr>
+          </a:p>
+        </p:txBody>
+      </p:sp>
+      <p:sp>
+        <p:nvSpPr>
+          <p:cNvPr id="161" name="Text 66"/>
+          <p:cNvSpPr/>
+          <p:nvPr/>
+        </p:nvSpPr>
+        <p:spPr>
+          <a:xfrm>
+            <a:off x="360360" y="4511880"/>
+            <a:ext cx="2605320" cy="438120"/>
           </a:xfrm>
           <a:prstGeom prst="rect">
             <a:avLst/>
@@ -11093,115 +11758,20 @@
           </a:p>
         </p:txBody>
       </p:sp>
-      <p:sp>
-        <p:nvSpPr>
-          <p:cNvPr id="153" name="Shape 48"/>
-          <p:cNvSpPr/>
-          <p:nvPr/>
-        </p:nvSpPr>
-        <p:spPr>
-          <a:xfrm>
-            <a:off x="3194640" y="4118400"/>
-            <a:ext cx="2605680" cy="868320"/>
-          </a:xfrm>
-          <a:prstGeom prst="rect">
-            <a:avLst/>
-          </a:prstGeom>
-          <a:solidFill>
-            <a:srgbClr val="ffffff"/>
-          </a:solidFill>
-          <a:ln w="12700">
-            <a:solidFill>
-              <a:srgbClr val="e0d8df"/>
-            </a:solidFill>
-            <a:round/>
-          </a:ln>
-          <a:effectLst>
-            <a:outerShdw algn="bl" blurRad="101520" dir="8100000" dist="37674" kx="0" ky="0" rotWithShape="0" sx="100000" sy="100000">
-              <a:srgbClr val="000000">
-                <a:alpha val="12000"/>
-              </a:srgbClr>
-            </a:outerShdw>
-          </a:effectLst>
-        </p:spPr>
-        <p:style>
-          <a:lnRef idx="0"/>
-          <a:fillRef idx="0"/>
-          <a:effectRef idx="0"/>
-          <a:fontRef idx="minor"/>
-        </p:style>
-        <p:txBody>
-          <a:bodyPr lIns="90000" rIns="90000" tIns="45000" bIns="45000" anchor="t">
-            <a:noAutofit/>
-          </a:bodyPr>
-          <a:p>
-            <a:endParaRPr lang="es-CO" sz="1800" b="0" u="none" strike="noStrike">
-              <a:solidFill>
-                <a:srgbClr val="000000"/>
-              </a:solidFill>
-              <a:effectLst/>
-              <a:uFillTx/>
-              <a:latin typeface="Arial"/>
-            </a:endParaRPr>
-          </a:p>
-        </p:txBody>
-      </p:sp>
-      <p:sp>
-        <p:nvSpPr>
-          <p:cNvPr id="154" name="Shape 49"/>
-          <p:cNvSpPr/>
-          <p:nvPr/>
-        </p:nvSpPr>
-        <p:spPr>
-          <a:xfrm>
-            <a:off x="3194640" y="4118400"/>
-            <a:ext cx="2605680" cy="36360"/>
-          </a:xfrm>
-          <a:prstGeom prst="rect">
-            <a:avLst/>
-          </a:prstGeom>
-          <a:solidFill>
-            <a:srgbClr val="a26769"/>
-          </a:solidFill>
-          <a:ln w="12700">
-            <a:solidFill>
-              <a:srgbClr val="a26769"/>
-            </a:solidFill>
-            <a:round/>
-          </a:ln>
-        </p:spPr>
-        <p:style>
-          <a:lnRef idx="0"/>
-          <a:fillRef idx="0"/>
-          <a:effectRef idx="0"/>
-          <a:fontRef idx="minor"/>
-        </p:style>
-        <p:txBody>
-          <a:bodyPr lIns="90000" rIns="90000" tIns="-8280" bIns="-8280" anchor="t">
-            <a:noAutofit/>
-          </a:bodyPr>
-          <a:p>
-            <a:endParaRPr lang="es-CO" sz="1800" b="0" u="none" strike="noStrike">
-              <a:solidFill>
-                <a:srgbClr val="ffffff"/>
-              </a:solidFill>
-              <a:effectLst/>
-              <a:uFillTx/>
-              <a:latin typeface="Arial"/>
-            </a:endParaRPr>
-          </a:p>
-        </p:txBody>
-      </p:sp>
-      <p:sp>
-        <p:nvSpPr>
-          <p:cNvPr id="155" name="Text 67"/>
-          <p:cNvSpPr/>
-          <p:nvPr/>
-        </p:nvSpPr>
-        <p:spPr>
-          <a:xfrm>
-            <a:off x="3194640" y="4164120"/>
-            <a:ext cx="2605680" cy="347040"/>
+      <p:pic>
+        <p:nvPicPr>
+          <p:cNvPr id="162" name=""/>
+          <p:cNvPicPr/>
+          <p:nvPr/>
+        </p:nvPicPr>
+        <p:blipFill>
+          <a:blip r:embed="rId1"/>
+          <a:stretch/>
+        </p:blipFill>
+        <p:spPr>
+          <a:xfrm>
+            <a:off x="1440000" y="2266200"/>
+            <a:ext cx="7380000" cy="1466280"/>
           </a:xfrm>
           <a:prstGeom prst="rect">
             <a:avLst/>
@@ -11211,58 +11781,21 @@
             <a:noFill/>
           </a:ln>
         </p:spPr>
-        <p:style>
-          <a:lnRef idx="0"/>
-          <a:fillRef idx="0"/>
-          <a:effectRef idx="0"/>
-          <a:fontRef idx="minor"/>
-        </p:style>
-        <p:txBody>
-          <a:bodyPr lIns="0" rIns="0" tIns="0" bIns="0" anchor="ctr">
-            <a:noAutofit/>
-          </a:bodyPr>
-          <a:p>
-            <a:pPr algn="ctr" defTabSz="914400">
-              <a:lnSpc>
-                <a:spcPct val="100000"/>
-              </a:lnSpc>
-              <a:tabLst>
-                <a:tab algn="l" pos="0"/>
-              </a:tabLst>
-            </a:pPr>
-            <a:r>
-              <a:rPr lang="en-US" sz="2000" b="1" u="none" strike="noStrike">
-                <a:solidFill>
-                  <a:srgbClr val="a26769"/>
-                </a:solidFill>
-                <a:effectLst/>
-                <a:uFillTx/>
-                <a:latin typeface="Georgia"/>
-                <a:ea typeface="Georgia"/>
-              </a:rPr>
-              <a:t>~1.600</a:t>
-            </a:r>
-            <a:endParaRPr lang="es-CO" sz="2000" b="0" u="none" strike="noStrike">
-              <a:solidFill>
-                <a:srgbClr val="000000"/>
-              </a:solidFill>
-              <a:effectLst/>
-              <a:uFillTx/>
-              <a:latin typeface="Arial"/>
-            </a:endParaRPr>
-          </a:p>
-        </p:txBody>
-      </p:sp>
-      <p:sp>
-        <p:nvSpPr>
-          <p:cNvPr id="156" name="Text 68"/>
-          <p:cNvSpPr/>
-          <p:nvPr/>
-        </p:nvSpPr>
-        <p:spPr>
-          <a:xfrm>
-            <a:off x="3194640" y="4511520"/>
-            <a:ext cx="2605680" cy="438480"/>
+      </p:pic>
+      <p:pic>
+        <p:nvPicPr>
+          <p:cNvPr id="163" name=""/>
+          <p:cNvPicPr/>
+          <p:nvPr/>
+        </p:nvPicPr>
+        <p:blipFill>
+          <a:blip r:embed="rId2"/>
+          <a:stretch/>
+        </p:blipFill>
+        <p:spPr>
+          <a:xfrm rot="12600">
+            <a:off x="358560" y="2881800"/>
+            <a:ext cx="1074240" cy="616680"/>
           </a:xfrm>
           <a:prstGeom prst="rect">
             <a:avLst/>
@@ -11272,372 +11805,7 @@
             <a:noFill/>
           </a:ln>
         </p:spPr>
-        <p:style>
-          <a:lnRef idx="0"/>
-          <a:fillRef idx="0"/>
-          <a:effectRef idx="0"/>
-          <a:fontRef idx="minor"/>
-        </p:style>
-        <p:txBody>
-          <a:bodyPr lIns="0" rIns="0" tIns="0" bIns="0" anchor="ctr">
-            <a:noAutofit/>
-          </a:bodyPr>
-          <a:p>
-            <a:pPr algn="ctr" defTabSz="914400">
-              <a:lnSpc>
-                <a:spcPct val="100000"/>
-              </a:lnSpc>
-              <a:tabLst>
-                <a:tab algn="l" pos="0"/>
-              </a:tabLst>
-            </a:pPr>
-            <a:r>
-              <a:rPr lang="en-US" sz="950" b="0" u="none" strike="noStrike">
-                <a:solidFill>
-                  <a:srgbClr val="6b6b6b"/>
-                </a:solidFill>
-                <a:effectLst/>
-                <a:uFillTx/>
-                <a:latin typeface="Calibri"/>
-                <a:ea typeface="Calibri"/>
-              </a:rPr>
-              <a:t>conflicto de idioma</a:t>
-            </a:r>
-            <a:endParaRPr lang="es-CO" sz="950" b="0" u="none" strike="noStrike">
-              <a:solidFill>
-                <a:srgbClr val="000000"/>
-              </a:solidFill>
-              <a:effectLst/>
-              <a:uFillTx/>
-              <a:latin typeface="Arial"/>
-            </a:endParaRPr>
-          </a:p>
-          <a:p>
-            <a:pPr algn="ctr" defTabSz="914400">
-              <a:lnSpc>
-                <a:spcPct val="100000"/>
-              </a:lnSpc>
-              <a:tabLst>
-                <a:tab algn="l" pos="0"/>
-              </a:tabLst>
-            </a:pPr>
-            <a:r>
-              <a:rPr lang="en-US" sz="950" b="0" u="none" strike="noStrike">
-                <a:solidFill>
-                  <a:srgbClr val="6b6b6b"/>
-                </a:solidFill>
-                <a:effectLst/>
-                <a:uFillTx/>
-                <a:latin typeface="Calibri"/>
-                <a:ea typeface="Calibri"/>
-              </a:rPr>
-              <a:t>países vs categorías</a:t>
-            </a:r>
-            <a:endParaRPr lang="es-CO" sz="950" b="0" u="none" strike="noStrike">
-              <a:solidFill>
-                <a:srgbClr val="000000"/>
-              </a:solidFill>
-              <a:effectLst/>
-              <a:uFillTx/>
-              <a:latin typeface="Arial"/>
-            </a:endParaRPr>
-          </a:p>
-        </p:txBody>
-      </p:sp>
-      <p:sp>
-        <p:nvSpPr>
-          <p:cNvPr id="157" name="Shape 50"/>
-          <p:cNvSpPr/>
-          <p:nvPr/>
-        </p:nvSpPr>
-        <p:spPr>
-          <a:xfrm>
-            <a:off x="6029280" y="4118400"/>
-            <a:ext cx="2605680" cy="868320"/>
-          </a:xfrm>
-          <a:prstGeom prst="rect">
-            <a:avLst/>
-          </a:prstGeom>
-          <a:solidFill>
-            <a:srgbClr val="ffffff"/>
-          </a:solidFill>
-          <a:ln w="12700">
-            <a:solidFill>
-              <a:srgbClr val="e0d8df"/>
-            </a:solidFill>
-            <a:round/>
-          </a:ln>
-          <a:effectLst>
-            <a:outerShdw algn="bl" blurRad="101520" dir="8100000" dist="37674" kx="0" ky="0" rotWithShape="0" sx="100000" sy="100000">
-              <a:srgbClr val="000000">
-                <a:alpha val="12000"/>
-              </a:srgbClr>
-            </a:outerShdw>
-          </a:effectLst>
-        </p:spPr>
-        <p:style>
-          <a:lnRef idx="0"/>
-          <a:fillRef idx="0"/>
-          <a:effectRef idx="0"/>
-          <a:fontRef idx="minor"/>
-        </p:style>
-        <p:txBody>
-          <a:bodyPr lIns="90000" rIns="90000" tIns="45000" bIns="45000" anchor="t">
-            <a:noAutofit/>
-          </a:bodyPr>
-          <a:p>
-            <a:endParaRPr lang="es-CO" sz="1800" b="0" u="none" strike="noStrike">
-              <a:solidFill>
-                <a:srgbClr val="000000"/>
-              </a:solidFill>
-              <a:effectLst/>
-              <a:uFillTx/>
-              <a:latin typeface="Arial"/>
-            </a:endParaRPr>
-          </a:p>
-        </p:txBody>
-      </p:sp>
-      <p:sp>
-        <p:nvSpPr>
-          <p:cNvPr id="158" name="Shape 51"/>
-          <p:cNvSpPr/>
-          <p:nvPr/>
-        </p:nvSpPr>
-        <p:spPr>
-          <a:xfrm>
-            <a:off x="6029280" y="4118400"/>
-            <a:ext cx="2605680" cy="36360"/>
-          </a:xfrm>
-          <a:prstGeom prst="rect">
-            <a:avLst/>
-          </a:prstGeom>
-          <a:solidFill>
-            <a:srgbClr val="b8860b"/>
-          </a:solidFill>
-          <a:ln w="12700">
-            <a:solidFill>
-              <a:srgbClr val="b8860b"/>
-            </a:solidFill>
-            <a:round/>
-          </a:ln>
-        </p:spPr>
-        <p:style>
-          <a:lnRef idx="0"/>
-          <a:fillRef idx="0"/>
-          <a:effectRef idx="0"/>
-          <a:fontRef idx="minor"/>
-        </p:style>
-        <p:txBody>
-          <a:bodyPr lIns="90000" rIns="90000" tIns="-8280" bIns="-8280" anchor="t">
-            <a:noAutofit/>
-          </a:bodyPr>
-          <a:p>
-            <a:endParaRPr lang="es-CO" sz="1800" b="0" u="none" strike="noStrike">
-              <a:solidFill>
-                <a:srgbClr val="ffffff"/>
-              </a:solidFill>
-              <a:effectLst/>
-              <a:uFillTx/>
-              <a:latin typeface="Arial"/>
-            </a:endParaRPr>
-          </a:p>
-        </p:txBody>
-      </p:sp>
-      <p:sp>
-        <p:nvSpPr>
-          <p:cNvPr id="159" name="Text 69"/>
-          <p:cNvSpPr/>
-          <p:nvPr/>
-        </p:nvSpPr>
-        <p:spPr>
-          <a:xfrm>
-            <a:off x="6029280" y="4164120"/>
-            <a:ext cx="2605680" cy="347040"/>
-          </a:xfrm>
-          <a:prstGeom prst="rect">
-            <a:avLst/>
-          </a:prstGeom>
-          <a:noFill/>
-          <a:ln w="0">
-            <a:noFill/>
-          </a:ln>
-        </p:spPr>
-        <p:style>
-          <a:lnRef idx="0"/>
-          <a:fillRef idx="0"/>
-          <a:effectRef idx="0"/>
-          <a:fontRef idx="minor"/>
-        </p:style>
-        <p:txBody>
-          <a:bodyPr lIns="0" rIns="0" tIns="0" bIns="0" anchor="ctr">
-            <a:noAutofit/>
-          </a:bodyPr>
-          <a:p>
-            <a:pPr algn="ctr" defTabSz="914400">
-              <a:lnSpc>
-                <a:spcPct val="100000"/>
-              </a:lnSpc>
-              <a:tabLst>
-                <a:tab algn="l" pos="0"/>
-              </a:tabLst>
-            </a:pPr>
-            <a:r>
-              <a:rPr lang="en-US" sz="2000" b="1" u="none" strike="noStrike">
-                <a:solidFill>
-                  <a:srgbClr val="b8860b"/>
-                </a:solidFill>
-                <a:effectLst/>
-                <a:uFillTx/>
-                <a:latin typeface="Georgia"/>
-                <a:ea typeface="Georgia"/>
-              </a:rPr>
-              <a:t>~4.000</a:t>
-            </a:r>
-            <a:endParaRPr lang="es-CO" sz="2000" b="0" u="none" strike="noStrike">
-              <a:solidFill>
-                <a:srgbClr val="000000"/>
-              </a:solidFill>
-              <a:effectLst/>
-              <a:uFillTx/>
-              <a:latin typeface="Arial"/>
-            </a:endParaRPr>
-          </a:p>
-        </p:txBody>
-      </p:sp>
-      <p:sp>
-        <p:nvSpPr>
-          <p:cNvPr id="160" name="Text 70"/>
-          <p:cNvSpPr/>
-          <p:nvPr/>
-        </p:nvSpPr>
-        <p:spPr>
-          <a:xfrm>
-            <a:off x="6029280" y="4511520"/>
-            <a:ext cx="2605680" cy="438480"/>
-          </a:xfrm>
-          <a:prstGeom prst="rect">
-            <a:avLst/>
-          </a:prstGeom>
-          <a:noFill/>
-          <a:ln w="0">
-            <a:noFill/>
-          </a:ln>
-        </p:spPr>
-        <p:style>
-          <a:lnRef idx="0"/>
-          <a:fillRef idx="0"/>
-          <a:effectRef idx="0"/>
-          <a:fontRef idx="minor"/>
-        </p:style>
-        <p:txBody>
-          <a:bodyPr lIns="0" rIns="0" tIns="0" bIns="0" anchor="ctr">
-            <a:noAutofit/>
-          </a:bodyPr>
-          <a:p>
-            <a:pPr algn="ctr" defTabSz="914400">
-              <a:lnSpc>
-                <a:spcPct val="100000"/>
-              </a:lnSpc>
-              <a:tabLst>
-                <a:tab algn="l" pos="0"/>
-              </a:tabLst>
-            </a:pPr>
-            <a:r>
-              <a:rPr lang="en-US" sz="950" b="0" u="none" strike="noStrike">
-                <a:solidFill>
-                  <a:srgbClr val="6b6b6b"/>
-                </a:solidFill>
-                <a:effectLst/>
-                <a:uFillTx/>
-                <a:latin typeface="Calibri"/>
-                <a:ea typeface="Calibri"/>
-              </a:rPr>
-              <a:t>discrepancia</a:t>
-            </a:r>
-            <a:endParaRPr lang="es-CO" sz="950" b="0" u="none" strike="noStrike">
-              <a:solidFill>
-                <a:srgbClr val="000000"/>
-              </a:solidFill>
-              <a:effectLst/>
-              <a:uFillTx/>
-              <a:latin typeface="Arial"/>
-            </a:endParaRPr>
-          </a:p>
-          <a:p>
-            <a:pPr algn="ctr" defTabSz="914400">
-              <a:lnSpc>
-                <a:spcPct val="100000"/>
-              </a:lnSpc>
-              <a:tabLst>
-                <a:tab algn="l" pos="0"/>
-              </a:tabLst>
-            </a:pPr>
-            <a:r>
-              <a:rPr lang="en-US" sz="950" b="0" u="none" strike="noStrike">
-                <a:solidFill>
-                  <a:srgbClr val="6b6b6b"/>
-                </a:solidFill>
-                <a:effectLst/>
-                <a:uFillTx/>
-                <a:latin typeface="Calibri"/>
-                <a:ea typeface="Calibri"/>
-              </a:rPr>
-              <a:t>Sum &gt; total ingredientes</a:t>
-            </a:r>
-            <a:endParaRPr lang="es-CO" sz="950" b="0" u="none" strike="noStrike">
-              <a:solidFill>
-                <a:srgbClr val="000000"/>
-              </a:solidFill>
-              <a:effectLst/>
-              <a:uFillTx/>
-              <a:latin typeface="Arial"/>
-            </a:endParaRPr>
-          </a:p>
-        </p:txBody>
-      </p:sp>
-      <p:sp>
-        <p:nvSpPr>
-          <p:cNvPr id="161" name="Shape 52"/>
-          <p:cNvSpPr/>
-          <p:nvPr/>
-        </p:nvSpPr>
-        <p:spPr>
-          <a:xfrm>
-            <a:off x="360000" y="5078520"/>
-            <a:ext cx="8412480" cy="360"/>
-          </a:xfrm>
-          <a:prstGeom prst="line">
-            <a:avLst/>
-          </a:prstGeom>
-          <a:ln w="10160">
-            <a:solidFill>
-              <a:srgbClr val="e0d8df"/>
-            </a:solidFill>
-            <a:round/>
-          </a:ln>
-        </p:spPr>
-        <p:style>
-          <a:lnRef idx="0"/>
-          <a:fillRef idx="0"/>
-          <a:effectRef idx="0"/>
-          <a:fontRef idx="minor"/>
-        </p:style>
-        <p:txBody>
-          <a:bodyPr lIns="90000" rIns="90000" tIns="-44640" bIns="-44640" anchor="t" anchorCtr="1">
-            <a:noAutofit/>
-          </a:bodyPr>
-          <a:p>
-            <a:endParaRPr lang="es-CO" sz="1800" b="0" u="none" strike="noStrike">
-              <a:solidFill>
-                <a:srgbClr val="000000"/>
-              </a:solidFill>
-              <a:effectLst/>
-              <a:uFillTx/>
-              <a:latin typeface="Arial"/>
-            </a:endParaRPr>
-          </a:p>
-        </p:txBody>
-      </p:sp>
+      </p:pic>
     </p:spTree>
   </p:cSld>
   <mc:AlternateContent>
@@ -11677,14 +11845,14 @@
       </p:grpSpPr>
       <p:sp>
         <p:nvSpPr>
-          <p:cNvPr id="162" name="Shape 41"/>
+          <p:cNvPr id="164" name="Shape 41"/>
           <p:cNvSpPr/>
           <p:nvPr/>
         </p:nvSpPr>
         <p:spPr>
           <a:xfrm>
             <a:off x="0" y="0"/>
-            <a:ext cx="108720" cy="5142600"/>
+            <a:ext cx="108360" cy="5142240"/>
           </a:xfrm>
           <a:prstGeom prst="rect">
             <a:avLst/>
@@ -11710,6 +11878,11 @@
             <a:noAutofit/>
           </a:bodyPr>
           <a:p>
+            <a:pPr>
+              <a:lnSpc>
+                <a:spcPct val="100000"/>
+              </a:lnSpc>
+            </a:pPr>
             <a:endParaRPr lang="es-CO" sz="1800" b="0" u="none" strike="noStrike">
               <a:solidFill>
                 <a:srgbClr val="ffffff"/>
@@ -11723,14 +11896,14 @@
       </p:sp>
       <p:sp>
         <p:nvSpPr>
-          <p:cNvPr id="163" name="Text 51"/>
+          <p:cNvPr id="165" name="Text 51"/>
           <p:cNvSpPr/>
           <p:nvPr/>
         </p:nvSpPr>
         <p:spPr>
           <a:xfrm>
             <a:off x="365760" y="255960"/>
-            <a:ext cx="8502840" cy="565920"/>
+            <a:ext cx="8502480" cy="565560"/>
           </a:xfrm>
           <a:prstGeom prst="rect">
             <a:avLst/>
@@ -11784,14 +11957,14 @@
       </p:sp>
       <p:sp>
         <p:nvSpPr>
-          <p:cNvPr id="164" name="Text 54"/>
+          <p:cNvPr id="166" name="Text 54"/>
           <p:cNvSpPr/>
           <p:nvPr/>
         </p:nvSpPr>
         <p:spPr>
           <a:xfrm>
             <a:off x="249480" y="1800000"/>
-            <a:ext cx="1370520" cy="346320"/>
+            <a:ext cx="1370160" cy="345960"/>
           </a:xfrm>
           <a:prstGeom prst="rect">
             <a:avLst/>
@@ -11845,14 +12018,14 @@
       </p:sp>
       <p:sp>
         <p:nvSpPr>
-          <p:cNvPr id="165" name="Shape 43"/>
+          <p:cNvPr id="167" name="Shape 43"/>
           <p:cNvSpPr/>
           <p:nvPr/>
         </p:nvSpPr>
         <p:spPr>
           <a:xfrm>
             <a:off x="435240" y="1399680"/>
-            <a:ext cx="1004760" cy="940320"/>
+            <a:ext cx="1004400" cy="939960"/>
           </a:xfrm>
           <a:prstGeom prst="rect">
             <a:avLst/>
@@ -11885,6 +12058,11 @@
             <a:noAutofit/>
           </a:bodyPr>
           <a:p>
+            <a:pPr>
+              <a:lnSpc>
+                <a:spcPct val="100000"/>
+              </a:lnSpc>
+            </a:pPr>
             <a:endParaRPr lang="es-CO" sz="1800" b="0" u="none" strike="noStrike">
               <a:solidFill>
                 <a:srgbClr val="ffffff"/>
@@ -11898,14 +12076,14 @@
       </p:sp>
       <p:sp>
         <p:nvSpPr>
-          <p:cNvPr id="166" name="Text 56"/>
+          <p:cNvPr id="168" name="Text 56"/>
           <p:cNvSpPr/>
           <p:nvPr/>
         </p:nvSpPr>
         <p:spPr>
           <a:xfrm>
             <a:off x="365760" y="3520440"/>
-            <a:ext cx="1370520" cy="657360"/>
+            <a:ext cx="1370160" cy="657000"/>
           </a:xfrm>
           <a:prstGeom prst="rect">
             <a:avLst/>
@@ -11959,14 +12137,14 @@
       </p:sp>
       <p:sp>
         <p:nvSpPr>
-          <p:cNvPr id="167" name="Text 57"/>
+          <p:cNvPr id="169" name="Text 57"/>
           <p:cNvSpPr/>
           <p:nvPr/>
         </p:nvSpPr>
         <p:spPr>
           <a:xfrm>
             <a:off x="435240" y="1759680"/>
-            <a:ext cx="1004760" cy="346320"/>
+            <a:ext cx="1004400" cy="345960"/>
           </a:xfrm>
           <a:prstGeom prst="rect">
             <a:avLst/>
@@ -12020,14 +12198,14 @@
       </p:sp>
       <p:sp>
         <p:nvSpPr>
-          <p:cNvPr id="168" name="Text 58"/>
+          <p:cNvPr id="170" name="Text 58"/>
           <p:cNvSpPr/>
           <p:nvPr/>
         </p:nvSpPr>
         <p:spPr>
           <a:xfrm>
             <a:off x="1603080" y="1440000"/>
-            <a:ext cx="1816920" cy="776160"/>
+            <a:ext cx="1816560" cy="775800"/>
           </a:xfrm>
           <a:prstGeom prst="rect">
             <a:avLst/>
@@ -12129,7 +12307,7 @@
       </p:sp>
       <p:sp>
         <p:nvSpPr>
-          <p:cNvPr id="169" name="Shape 46"/>
+          <p:cNvPr id="171" name="Shape 46"/>
           <p:cNvSpPr/>
           <p:nvPr/>
         </p:nvSpPr>
@@ -12172,7 +12350,7 @@
       </p:sp>
       <p:pic>
         <p:nvPicPr>
-          <p:cNvPr id="170" name=""/>
+          <p:cNvPr id="172" name=""/>
           <p:cNvPicPr/>
           <p:nvPr/>
         </p:nvPicPr>
@@ -12183,7 +12361,7 @@
         <p:spPr>
           <a:xfrm>
             <a:off x="3600000" y="1080000"/>
-            <a:ext cx="4680000" cy="3905640"/>
+            <a:ext cx="4679640" cy="3905280"/>
           </a:xfrm>
           <a:prstGeom prst="rect">
             <a:avLst/>
@@ -12233,14 +12411,14 @@
       </p:grpSpPr>
       <p:sp>
         <p:nvSpPr>
-          <p:cNvPr id="171" name="Shape 0"/>
+          <p:cNvPr id="173" name="Shape 0"/>
           <p:cNvSpPr/>
           <p:nvPr/>
         </p:nvSpPr>
         <p:spPr>
           <a:xfrm>
             <a:off x="0" y="0"/>
-            <a:ext cx="163440" cy="5142600"/>
+            <a:ext cx="163080" cy="5142240"/>
           </a:xfrm>
           <a:prstGeom prst="rect">
             <a:avLst/>
@@ -12284,14 +12462,14 @@
       </p:sp>
       <p:sp>
         <p:nvSpPr>
-          <p:cNvPr id="172" name="Shape 1"/>
+          <p:cNvPr id="174" name="Shape 1"/>
           <p:cNvSpPr/>
           <p:nvPr/>
         </p:nvSpPr>
         <p:spPr>
           <a:xfrm>
             <a:off x="164520" y="0"/>
-            <a:ext cx="53640" cy="5142600"/>
+            <a:ext cx="53280" cy="5142240"/>
           </a:xfrm>
           <a:prstGeom prst="rect">
             <a:avLst/>
@@ -12335,14 +12513,14 @@
       </p:sp>
       <p:sp>
         <p:nvSpPr>
-          <p:cNvPr id="173" name="Text 2"/>
+          <p:cNvPr id="175" name="Text 2"/>
           <p:cNvSpPr/>
           <p:nvPr/>
         </p:nvSpPr>
         <p:spPr>
           <a:xfrm>
             <a:off x="548640" y="1005840"/>
-            <a:ext cx="8228520" cy="913320"/>
+            <a:ext cx="8228160" cy="912960"/>
           </a:xfrm>
           <a:prstGeom prst="rect">
             <a:avLst/>
@@ -12396,14 +12574,14 @@
       </p:sp>
       <p:sp>
         <p:nvSpPr>
-          <p:cNvPr id="174" name="Text 3"/>
+          <p:cNvPr id="176" name="Text 3"/>
           <p:cNvSpPr/>
           <p:nvPr/>
         </p:nvSpPr>
         <p:spPr>
           <a:xfrm>
             <a:off x="548640" y="2057400"/>
-            <a:ext cx="8228520" cy="1233360"/>
+            <a:ext cx="8228160" cy="1233000"/>
           </a:xfrm>
           <a:prstGeom prst="rect">
             <a:avLst/>
@@ -12517,7 +12695,7 @@
       </p:sp>
       <p:sp>
         <p:nvSpPr>
-          <p:cNvPr id="175" name="Shape 4"/>
+          <p:cNvPr id="177" name="Shape 4"/>
           <p:cNvSpPr/>
           <p:nvPr/>
         </p:nvSpPr>
@@ -12560,14 +12738,14 @@
       </p:sp>
       <p:sp>
         <p:nvSpPr>
-          <p:cNvPr id="176" name="Text 5"/>
+          <p:cNvPr id="178" name="Text 5"/>
           <p:cNvSpPr/>
           <p:nvPr/>
         </p:nvSpPr>
         <p:spPr>
           <a:xfrm>
             <a:off x="548640" y="3566160"/>
-            <a:ext cx="8228520" cy="364680"/>
+            <a:ext cx="8228160" cy="364320"/>
           </a:xfrm>
           <a:prstGeom prst="rect">
             <a:avLst/>
@@ -12621,14 +12799,14 @@
       </p:sp>
       <p:sp>
         <p:nvSpPr>
-          <p:cNvPr id="177" name="Text 6"/>
+          <p:cNvPr id="179" name="Text 6"/>
           <p:cNvSpPr/>
           <p:nvPr/>
         </p:nvSpPr>
         <p:spPr>
           <a:xfrm>
             <a:off x="548640" y="3977640"/>
-            <a:ext cx="8228520" cy="318960"/>
+            <a:ext cx="8228160" cy="318600"/>
           </a:xfrm>
           <a:prstGeom prst="rect">
             <a:avLst/>
